--- a/docs/pptx/auc3/jx-auc3-linsubhr-ratio-grade3.pptx
+++ b/docs/pptx/auc3/jx-auc3-linsubhr-ratio-grade3.pptx
@@ -2271,7 +2271,7 @@
           </p:nvSpPr>
           <p:spPr>
             <a:xfrm>
-              <a:off x="817517" y="5114368"/>
+              <a:off x="817517" y="5142518"/>
               <a:ext cx="7799693" cy="0"/>
             </a:xfrm>
             <a:custGeom>
@@ -2314,7 +2314,7 @@
           </p:nvSpPr>
           <p:spPr>
             <a:xfrm>
-              <a:off x="817517" y="4244691"/>
+              <a:off x="817517" y="4313054"/>
               <a:ext cx="7799693" cy="0"/>
             </a:xfrm>
             <a:custGeom>
@@ -2357,7 +2357,7 @@
           </p:nvSpPr>
           <p:spPr>
             <a:xfrm>
-              <a:off x="817517" y="3375014"/>
+              <a:off x="817517" y="3483591"/>
               <a:ext cx="7799693" cy="0"/>
             </a:xfrm>
             <a:custGeom>
@@ -2400,7 +2400,7 @@
           </p:nvSpPr>
           <p:spPr>
             <a:xfrm>
-              <a:off x="817517" y="2505337"/>
+              <a:off x="817517" y="2654127"/>
               <a:ext cx="7799693" cy="0"/>
             </a:xfrm>
             <a:custGeom>
@@ -2443,15 +2443,15 @@
           </p:nvSpPr>
           <p:spPr>
             <a:xfrm>
-              <a:off x="1615213" y="1896563"/>
-              <a:ext cx="0" cy="3826579"/>
+              <a:off x="1615213" y="2073503"/>
+              <a:ext cx="0" cy="3649639"/>
             </a:xfrm>
             <a:custGeom>
               <a:avLst/>
               <a:pathLst>
-                <a:path w="0" h="3826579">
+                <a:path w="0" h="3649639">
                   <a:moveTo>
-                    <a:pt x="0" y="3826579"/>
+                    <a:pt x="0" y="3649639"/>
                   </a:moveTo>
                   <a:lnTo>
                     <a:pt x="0" y="0"/>
@@ -2486,15 +2486,15 @@
           </p:nvSpPr>
           <p:spPr>
             <a:xfrm>
-              <a:off x="3387871" y="1896563"/>
-              <a:ext cx="0" cy="3826579"/>
+              <a:off x="3387871" y="2073503"/>
+              <a:ext cx="0" cy="3649639"/>
             </a:xfrm>
             <a:custGeom>
               <a:avLst/>
               <a:pathLst>
-                <a:path w="0" h="3826579">
+                <a:path w="0" h="3649639">
                   <a:moveTo>
-                    <a:pt x="0" y="3826579"/>
+                    <a:pt x="0" y="3649639"/>
                   </a:moveTo>
                   <a:lnTo>
                     <a:pt x="0" y="0"/>
@@ -2529,15 +2529,15 @@
           </p:nvSpPr>
           <p:spPr>
             <a:xfrm>
-              <a:off x="5160528" y="1896563"/>
-              <a:ext cx="0" cy="3826579"/>
+              <a:off x="5160528" y="2073503"/>
+              <a:ext cx="0" cy="3649639"/>
             </a:xfrm>
             <a:custGeom>
               <a:avLst/>
               <a:pathLst>
-                <a:path w="0" h="3826579">
+                <a:path w="0" h="3649639">
                   <a:moveTo>
-                    <a:pt x="0" y="3826579"/>
+                    <a:pt x="0" y="3649639"/>
                   </a:moveTo>
                   <a:lnTo>
                     <a:pt x="0" y="0"/>
@@ -2572,15 +2572,15 @@
           </p:nvSpPr>
           <p:spPr>
             <a:xfrm>
-              <a:off x="6933186" y="1896563"/>
-              <a:ext cx="0" cy="3826579"/>
+              <a:off x="6933186" y="2073503"/>
+              <a:ext cx="0" cy="3649639"/>
             </a:xfrm>
             <a:custGeom>
               <a:avLst/>
               <a:pathLst>
-                <a:path w="0" h="3826579">
+                <a:path w="0" h="3649639">
                   <a:moveTo>
-                    <a:pt x="0" y="3826579"/>
+                    <a:pt x="0" y="3649639"/>
                   </a:moveTo>
                   <a:lnTo>
                     <a:pt x="0" y="0"/>
@@ -2615,7 +2615,7 @@
           </p:nvSpPr>
           <p:spPr>
             <a:xfrm>
-              <a:off x="817517" y="5549207"/>
+              <a:off x="817517" y="5557249"/>
               <a:ext cx="7799693" cy="0"/>
             </a:xfrm>
             <a:custGeom>
@@ -2658,7 +2658,7 @@
           </p:nvSpPr>
           <p:spPr>
             <a:xfrm>
-              <a:off x="817517" y="4679530"/>
+              <a:off x="817517" y="4727786"/>
               <a:ext cx="7799693" cy="0"/>
             </a:xfrm>
             <a:custGeom>
@@ -2701,7 +2701,7 @@
           </p:nvSpPr>
           <p:spPr>
             <a:xfrm>
-              <a:off x="817517" y="3809853"/>
+              <a:off x="817517" y="3898322"/>
               <a:ext cx="7799693" cy="0"/>
             </a:xfrm>
             <a:custGeom>
@@ -2744,7 +2744,7 @@
           </p:nvSpPr>
           <p:spPr>
             <a:xfrm>
-              <a:off x="817517" y="2940175"/>
+              <a:off x="817517" y="3068859"/>
               <a:ext cx="7799693" cy="0"/>
             </a:xfrm>
             <a:custGeom>
@@ -2787,7 +2787,7 @@
           </p:nvSpPr>
           <p:spPr>
             <a:xfrm>
-              <a:off x="817517" y="2070498"/>
+              <a:off x="817517" y="2239395"/>
               <a:ext cx="7799693" cy="0"/>
             </a:xfrm>
             <a:custGeom>
@@ -2830,15 +2830,15 @@
           </p:nvSpPr>
           <p:spPr>
             <a:xfrm>
-              <a:off x="2501542" y="1896563"/>
-              <a:ext cx="0" cy="3826579"/>
+              <a:off x="2501542" y="2073503"/>
+              <a:ext cx="0" cy="3649639"/>
             </a:xfrm>
             <a:custGeom>
               <a:avLst/>
               <a:pathLst>
-                <a:path w="0" h="3826579">
+                <a:path w="0" h="3649639">
                   <a:moveTo>
-                    <a:pt x="0" y="3826579"/>
+                    <a:pt x="0" y="3649639"/>
                   </a:moveTo>
                   <a:lnTo>
                     <a:pt x="0" y="0"/>
@@ -2873,15 +2873,15 @@
           </p:nvSpPr>
           <p:spPr>
             <a:xfrm>
-              <a:off x="4274200" y="1896563"/>
-              <a:ext cx="0" cy="3826579"/>
+              <a:off x="4274200" y="2073503"/>
+              <a:ext cx="0" cy="3649639"/>
             </a:xfrm>
             <a:custGeom>
               <a:avLst/>
               <a:pathLst>
-                <a:path w="0" h="3826579">
+                <a:path w="0" h="3649639">
                   <a:moveTo>
-                    <a:pt x="0" y="3826579"/>
+                    <a:pt x="0" y="3649639"/>
                   </a:moveTo>
                   <a:lnTo>
                     <a:pt x="0" y="0"/>
@@ -2916,15 +2916,15 @@
           </p:nvSpPr>
           <p:spPr>
             <a:xfrm>
-              <a:off x="6046857" y="1896563"/>
-              <a:ext cx="0" cy="3826579"/>
+              <a:off x="6046857" y="2073503"/>
+              <a:ext cx="0" cy="3649639"/>
             </a:xfrm>
             <a:custGeom>
               <a:avLst/>
               <a:pathLst>
-                <a:path w="0" h="3826579">
+                <a:path w="0" h="3649639">
                   <a:moveTo>
-                    <a:pt x="0" y="3826579"/>
+                    <a:pt x="0" y="3649639"/>
                   </a:moveTo>
                   <a:lnTo>
                     <a:pt x="0" y="0"/>
@@ -2959,15 +2959,15 @@
           </p:nvSpPr>
           <p:spPr>
             <a:xfrm>
-              <a:off x="7819515" y="1896563"/>
-              <a:ext cx="0" cy="3826579"/>
+              <a:off x="7819515" y="2073503"/>
+              <a:ext cx="0" cy="3649639"/>
             </a:xfrm>
             <a:custGeom>
               <a:avLst/>
               <a:pathLst>
-                <a:path w="0" h="3826579">
+                <a:path w="0" h="3649639">
                   <a:moveTo>
-                    <a:pt x="0" y="3826579"/>
+                    <a:pt x="0" y="3649639"/>
                   </a:moveTo>
                   <a:lnTo>
                     <a:pt x="0" y="0"/>
@@ -3002,531 +3002,531 @@
           </p:nvSpPr>
           <p:spPr>
             <a:xfrm>
-              <a:off x="817517" y="1896563"/>
-              <a:ext cx="7392041" cy="3627719"/>
+              <a:off x="817517" y="2073503"/>
+              <a:ext cx="7392041" cy="3459975"/>
             </a:xfrm>
             <a:custGeom>
               <a:avLst/>
               <a:pathLst>
-                <a:path w="7392041" h="3627719">
+                <a:path w="7392041" h="3459975">
                   <a:moveTo>
                     <a:pt x="1647420" y="0"/>
                   </a:moveTo>
                   <a:lnTo>
-                    <a:pt x="1676016" y="91435"/>
-                  </a:lnTo>
-                  <a:lnTo>
-                    <a:pt x="1753260" y="322399"/>
-                  </a:lnTo>
-                  <a:lnTo>
-                    <a:pt x="1830504" y="538384"/>
-                  </a:lnTo>
-                  <a:lnTo>
-                    <a:pt x="1907747" y="740361"/>
-                  </a:lnTo>
-                  <a:lnTo>
-                    <a:pt x="1984991" y="929239"/>
-                  </a:lnTo>
-                  <a:lnTo>
-                    <a:pt x="2062234" y="1105867"/>
-                  </a:lnTo>
-                  <a:lnTo>
-                    <a:pt x="2139478" y="1271040"/>
-                  </a:lnTo>
-                  <a:lnTo>
-                    <a:pt x="2216721" y="1425500"/>
-                  </a:lnTo>
-                  <a:lnTo>
-                    <a:pt x="2293965" y="1569943"/>
-                  </a:lnTo>
-                  <a:lnTo>
-                    <a:pt x="2371209" y="1705017"/>
-                  </a:lnTo>
-                  <a:lnTo>
-                    <a:pt x="2448452" y="1831332"/>
-                  </a:lnTo>
-                  <a:lnTo>
-                    <a:pt x="2525696" y="1949454"/>
-                  </a:lnTo>
-                  <a:lnTo>
-                    <a:pt x="2602939" y="2059915"/>
-                  </a:lnTo>
-                  <a:lnTo>
-                    <a:pt x="2680183" y="2163213"/>
-                  </a:lnTo>
-                  <a:lnTo>
-                    <a:pt x="2757426" y="2259811"/>
-                  </a:lnTo>
-                  <a:lnTo>
-                    <a:pt x="2834670" y="2350144"/>
-                  </a:lnTo>
-                  <a:lnTo>
-                    <a:pt x="2911914" y="2434618"/>
-                  </a:lnTo>
-                  <a:lnTo>
-                    <a:pt x="2989157" y="2513614"/>
-                  </a:lnTo>
-                  <a:lnTo>
-                    <a:pt x="3066401" y="2587486"/>
-                  </a:lnTo>
-                  <a:lnTo>
-                    <a:pt x="3143644" y="2656568"/>
-                  </a:lnTo>
-                  <a:lnTo>
-                    <a:pt x="3220888" y="2721169"/>
-                  </a:lnTo>
-                  <a:lnTo>
-                    <a:pt x="3298131" y="2781580"/>
-                  </a:lnTo>
-                  <a:lnTo>
-                    <a:pt x="3375375" y="2805869"/>
-                  </a:lnTo>
-                  <a:lnTo>
-                    <a:pt x="3452619" y="2828703"/>
-                  </a:lnTo>
-                  <a:lnTo>
-                    <a:pt x="3529862" y="2850922"/>
-                  </a:lnTo>
-                  <a:lnTo>
-                    <a:pt x="3607106" y="2872541"/>
-                  </a:lnTo>
-                  <a:lnTo>
-                    <a:pt x="3684349" y="2893578"/>
-                  </a:lnTo>
-                  <a:lnTo>
-                    <a:pt x="3761593" y="2914047"/>
-                  </a:lnTo>
-                  <a:lnTo>
-                    <a:pt x="3838836" y="2933964"/>
-                  </a:lnTo>
-                  <a:lnTo>
-                    <a:pt x="3916080" y="2953344"/>
-                  </a:lnTo>
-                  <a:lnTo>
-                    <a:pt x="3993324" y="2972202"/>
-                  </a:lnTo>
-                  <a:lnTo>
-                    <a:pt x="4070567" y="2990551"/>
-                  </a:lnTo>
-                  <a:lnTo>
-                    <a:pt x="4147811" y="3008405"/>
-                  </a:lnTo>
-                  <a:lnTo>
-                    <a:pt x="4225054" y="3025778"/>
-                  </a:lnTo>
-                  <a:lnTo>
-                    <a:pt x="4302298" y="3042682"/>
-                  </a:lnTo>
-                  <a:lnTo>
-                    <a:pt x="4379541" y="3059130"/>
-                  </a:lnTo>
-                  <a:lnTo>
-                    <a:pt x="4456785" y="3075135"/>
-                  </a:lnTo>
-                  <a:lnTo>
-                    <a:pt x="4534029" y="3090708"/>
-                  </a:lnTo>
-                  <a:lnTo>
-                    <a:pt x="4611272" y="3105862"/>
-                  </a:lnTo>
-                  <a:lnTo>
-                    <a:pt x="4688516" y="3120606"/>
-                  </a:lnTo>
-                  <a:lnTo>
-                    <a:pt x="4765759" y="3134954"/>
-                  </a:lnTo>
-                  <a:lnTo>
-                    <a:pt x="4843003" y="3148914"/>
-                  </a:lnTo>
-                  <a:lnTo>
-                    <a:pt x="4920246" y="3162497"/>
-                  </a:lnTo>
-                  <a:lnTo>
-                    <a:pt x="4997490" y="3175715"/>
-                  </a:lnTo>
-                  <a:lnTo>
-                    <a:pt x="5074734" y="3188576"/>
-                  </a:lnTo>
-                  <a:lnTo>
-                    <a:pt x="5151977" y="3201090"/>
-                  </a:lnTo>
-                  <a:lnTo>
-                    <a:pt x="5229221" y="3213267"/>
-                  </a:lnTo>
-                  <a:lnTo>
-                    <a:pt x="5306464" y="3225115"/>
-                  </a:lnTo>
-                  <a:lnTo>
-                    <a:pt x="5383708" y="3236644"/>
-                  </a:lnTo>
-                  <a:lnTo>
-                    <a:pt x="5460951" y="3247862"/>
-                  </a:lnTo>
-                  <a:lnTo>
-                    <a:pt x="5538195" y="3258777"/>
-                  </a:lnTo>
-                  <a:lnTo>
-                    <a:pt x="5615439" y="3269399"/>
-                  </a:lnTo>
-                  <a:lnTo>
-                    <a:pt x="5692682" y="3279733"/>
-                  </a:lnTo>
-                  <a:lnTo>
-                    <a:pt x="5769926" y="3289789"/>
-                  </a:lnTo>
-                  <a:lnTo>
-                    <a:pt x="5847169" y="3299574"/>
-                  </a:lnTo>
-                  <a:lnTo>
-                    <a:pt x="5924413" y="3309095"/>
-                  </a:lnTo>
-                  <a:lnTo>
-                    <a:pt x="6001656" y="3318359"/>
-                  </a:lnTo>
-                  <a:lnTo>
-                    <a:pt x="6078900" y="3327374"/>
-                  </a:lnTo>
-                  <a:lnTo>
-                    <a:pt x="6156144" y="3336145"/>
-                  </a:lnTo>
-                  <a:lnTo>
-                    <a:pt x="6233387" y="3344680"/>
-                  </a:lnTo>
-                  <a:lnTo>
-                    <a:pt x="6310631" y="3352984"/>
-                  </a:lnTo>
-                  <a:lnTo>
-                    <a:pt x="6387874" y="3361065"/>
-                  </a:lnTo>
-                  <a:lnTo>
-                    <a:pt x="6465118" y="3368928"/>
-                  </a:lnTo>
-                  <a:lnTo>
-                    <a:pt x="6542361" y="3376579"/>
-                  </a:lnTo>
-                  <a:lnTo>
-                    <a:pt x="6619605" y="3384023"/>
-                  </a:lnTo>
-                  <a:lnTo>
-                    <a:pt x="6696849" y="3391267"/>
-                  </a:lnTo>
-                  <a:lnTo>
-                    <a:pt x="6774092" y="3398315"/>
-                  </a:lnTo>
-                  <a:lnTo>
-                    <a:pt x="6851336" y="3405174"/>
-                  </a:lnTo>
-                  <a:lnTo>
-                    <a:pt x="6928579" y="3411847"/>
-                  </a:lnTo>
-                  <a:lnTo>
-                    <a:pt x="7005823" y="3418340"/>
-                  </a:lnTo>
-                  <a:lnTo>
-                    <a:pt x="7083066" y="3424659"/>
-                  </a:lnTo>
-                  <a:lnTo>
-                    <a:pt x="7160310" y="3430806"/>
-                  </a:lnTo>
-                  <a:lnTo>
-                    <a:pt x="7237554" y="3436789"/>
-                  </a:lnTo>
-                  <a:lnTo>
-                    <a:pt x="7314797" y="3442609"/>
-                  </a:lnTo>
-                  <a:lnTo>
-                    <a:pt x="7392041" y="3448273"/>
-                  </a:lnTo>
-                  <a:lnTo>
-                    <a:pt x="7392041" y="3627719"/>
-                  </a:lnTo>
-                  <a:lnTo>
-                    <a:pt x="7314797" y="3625991"/>
-                  </a:lnTo>
-                  <a:lnTo>
-                    <a:pt x="7237554" y="3624142"/>
-                  </a:lnTo>
-                  <a:lnTo>
-                    <a:pt x="7160310" y="3622165"/>
-                  </a:lnTo>
-                  <a:lnTo>
-                    <a:pt x="7083066" y="3620052"/>
-                  </a:lnTo>
-                  <a:lnTo>
-                    <a:pt x="7005823" y="3617791"/>
-                  </a:lnTo>
-                  <a:lnTo>
-                    <a:pt x="6928579" y="3615374"/>
-                  </a:lnTo>
-                  <a:lnTo>
-                    <a:pt x="6851336" y="3612790"/>
-                  </a:lnTo>
-                  <a:lnTo>
-                    <a:pt x="6774092" y="3610026"/>
-                  </a:lnTo>
-                  <a:lnTo>
-                    <a:pt x="6696849" y="3607070"/>
-                  </a:lnTo>
-                  <a:lnTo>
-                    <a:pt x="6619605" y="3603909"/>
-                  </a:lnTo>
-                  <a:lnTo>
-                    <a:pt x="6542361" y="3600529"/>
-                  </a:lnTo>
-                  <a:lnTo>
-                    <a:pt x="6465118" y="3596915"/>
-                  </a:lnTo>
-                  <a:lnTo>
-                    <a:pt x="6387874" y="3593050"/>
-                  </a:lnTo>
-                  <a:lnTo>
-                    <a:pt x="6310631" y="3588917"/>
-                  </a:lnTo>
-                  <a:lnTo>
-                    <a:pt x="6233387" y="3584497"/>
-                  </a:lnTo>
-                  <a:lnTo>
-                    <a:pt x="6156144" y="3579771"/>
-                  </a:lnTo>
-                  <a:lnTo>
-                    <a:pt x="6078900" y="3574717"/>
-                  </a:lnTo>
-                  <a:lnTo>
-                    <a:pt x="6001656" y="3569313"/>
-                  </a:lnTo>
-                  <a:lnTo>
-                    <a:pt x="5924413" y="3563534"/>
-                  </a:lnTo>
-                  <a:lnTo>
-                    <a:pt x="5847169" y="3557354"/>
-                  </a:lnTo>
-                  <a:lnTo>
-                    <a:pt x="5769926" y="3550745"/>
-                  </a:lnTo>
-                  <a:lnTo>
-                    <a:pt x="5692682" y="3543678"/>
-                  </a:lnTo>
-                  <a:lnTo>
-                    <a:pt x="5615439" y="3536121"/>
-                  </a:lnTo>
-                  <a:lnTo>
-                    <a:pt x="5538195" y="3528039"/>
-                  </a:lnTo>
-                  <a:lnTo>
-                    <a:pt x="5460951" y="3519398"/>
-                  </a:lnTo>
-                  <a:lnTo>
-                    <a:pt x="5383708" y="3510157"/>
-                  </a:lnTo>
-                  <a:lnTo>
-                    <a:pt x="5306464" y="3500275"/>
-                  </a:lnTo>
-                  <a:lnTo>
-                    <a:pt x="5229221" y="3489707"/>
-                  </a:lnTo>
-                  <a:lnTo>
-                    <a:pt x="5151977" y="3478407"/>
-                  </a:lnTo>
-                  <a:lnTo>
-                    <a:pt x="5074734" y="3466323"/>
-                  </a:lnTo>
-                  <a:lnTo>
-                    <a:pt x="4997490" y="3453401"/>
-                  </a:lnTo>
-                  <a:lnTo>
-                    <a:pt x="4920246" y="3439583"/>
-                  </a:lnTo>
-                  <a:lnTo>
-                    <a:pt x="4843003" y="3424807"/>
-                  </a:lnTo>
-                  <a:lnTo>
-                    <a:pt x="4765759" y="3409005"/>
-                  </a:lnTo>
-                  <a:lnTo>
-                    <a:pt x="4688516" y="3392108"/>
-                  </a:lnTo>
-                  <a:lnTo>
-                    <a:pt x="4611272" y="3374039"/>
-                  </a:lnTo>
-                  <a:lnTo>
-                    <a:pt x="4534029" y="3354717"/>
-                  </a:lnTo>
-                  <a:lnTo>
-                    <a:pt x="4456785" y="3334055"/>
-                  </a:lnTo>
-                  <a:lnTo>
-                    <a:pt x="4379541" y="3311960"/>
-                  </a:lnTo>
-                  <a:lnTo>
-                    <a:pt x="4302298" y="3288332"/>
-                  </a:lnTo>
-                  <a:lnTo>
-                    <a:pt x="4225054" y="3263066"/>
-                  </a:lnTo>
-                  <a:lnTo>
-                    <a:pt x="4147811" y="3236047"/>
-                  </a:lnTo>
-                  <a:lnTo>
-                    <a:pt x="4070567" y="3207155"/>
-                  </a:lnTo>
-                  <a:lnTo>
-                    <a:pt x="3993324" y="3176259"/>
-                  </a:lnTo>
-                  <a:lnTo>
-                    <a:pt x="3916080" y="3143220"/>
-                  </a:lnTo>
-                  <a:lnTo>
-                    <a:pt x="3838836" y="3107889"/>
-                  </a:lnTo>
-                  <a:lnTo>
-                    <a:pt x="3761593" y="3070109"/>
-                  </a:lnTo>
-                  <a:lnTo>
-                    <a:pt x="3684349" y="3029708"/>
-                  </a:lnTo>
-                  <a:lnTo>
-                    <a:pt x="3607106" y="2986505"/>
-                  </a:lnTo>
-                  <a:lnTo>
-                    <a:pt x="3529862" y="2940306"/>
-                  </a:lnTo>
-                  <a:lnTo>
-                    <a:pt x="3452619" y="2890903"/>
-                  </a:lnTo>
-                  <a:lnTo>
-                    <a:pt x="3375375" y="2838073"/>
-                  </a:lnTo>
-                  <a:lnTo>
-                    <a:pt x="3298131" y="2782401"/>
-                  </a:lnTo>
-                  <a:lnTo>
-                    <a:pt x="3220888" y="2758284"/>
-                  </a:lnTo>
-                  <a:lnTo>
-                    <a:pt x="3143644" y="2733498"/>
-                  </a:lnTo>
-                  <a:lnTo>
-                    <a:pt x="3066401" y="2708025"/>
-                  </a:lnTo>
-                  <a:lnTo>
-                    <a:pt x="2989157" y="2681846"/>
-                  </a:lnTo>
-                  <a:lnTo>
-                    <a:pt x="2911914" y="2654942"/>
-                  </a:lnTo>
-                  <a:lnTo>
-                    <a:pt x="2834670" y="2627292"/>
-                  </a:lnTo>
-                  <a:lnTo>
-                    <a:pt x="2757426" y="2598876"/>
-                  </a:lnTo>
-                  <a:lnTo>
-                    <a:pt x="2680183" y="2569672"/>
-                  </a:lnTo>
-                  <a:lnTo>
-                    <a:pt x="2602939" y="2539659"/>
-                  </a:lnTo>
-                  <a:lnTo>
-                    <a:pt x="2525696" y="2508814"/>
-                  </a:lnTo>
-                  <a:lnTo>
-                    <a:pt x="2448452" y="2477114"/>
-                  </a:lnTo>
-                  <a:lnTo>
-                    <a:pt x="2371209" y="2444536"/>
-                  </a:lnTo>
-                  <a:lnTo>
-                    <a:pt x="2293965" y="2411055"/>
-                  </a:lnTo>
-                  <a:lnTo>
-                    <a:pt x="2216721" y="2376646"/>
-                  </a:lnTo>
-                  <a:lnTo>
-                    <a:pt x="2139478" y="2341283"/>
-                  </a:lnTo>
-                  <a:lnTo>
-                    <a:pt x="2062234" y="2304941"/>
-                  </a:lnTo>
-                  <a:lnTo>
-                    <a:pt x="1984991" y="2267591"/>
-                  </a:lnTo>
-                  <a:lnTo>
-                    <a:pt x="1907747" y="2229206"/>
-                  </a:lnTo>
-                  <a:lnTo>
-                    <a:pt x="1830504" y="2189757"/>
-                  </a:lnTo>
-                  <a:lnTo>
-                    <a:pt x="1753260" y="2149216"/>
-                  </a:lnTo>
-                  <a:lnTo>
-                    <a:pt x="1676016" y="2107550"/>
-                  </a:lnTo>
-                  <a:lnTo>
-                    <a:pt x="1598773" y="2064730"/>
-                  </a:lnTo>
-                  <a:lnTo>
-                    <a:pt x="1521529" y="2020723"/>
-                  </a:lnTo>
-                  <a:lnTo>
-                    <a:pt x="1444286" y="1975497"/>
-                  </a:lnTo>
-                  <a:lnTo>
-                    <a:pt x="1367042" y="1929017"/>
-                  </a:lnTo>
-                  <a:lnTo>
-                    <a:pt x="1289799" y="1881249"/>
-                  </a:lnTo>
-                  <a:lnTo>
-                    <a:pt x="1212555" y="1832157"/>
-                  </a:lnTo>
-                  <a:lnTo>
-                    <a:pt x="1135311" y="1781705"/>
-                  </a:lnTo>
-                  <a:lnTo>
-                    <a:pt x="1058068" y="1729854"/>
-                  </a:lnTo>
-                  <a:lnTo>
-                    <a:pt x="980824" y="1676566"/>
-                  </a:lnTo>
-                  <a:lnTo>
-                    <a:pt x="903581" y="1621802"/>
-                  </a:lnTo>
-                  <a:lnTo>
-                    <a:pt x="826337" y="1565520"/>
-                  </a:lnTo>
-                  <a:lnTo>
-                    <a:pt x="749094" y="1507678"/>
-                  </a:lnTo>
-                  <a:lnTo>
-                    <a:pt x="671850" y="1448233"/>
-                  </a:lnTo>
-                  <a:lnTo>
-                    <a:pt x="594606" y="1387141"/>
-                  </a:lnTo>
-                  <a:lnTo>
-                    <a:pt x="517363" y="1324356"/>
-                  </a:lnTo>
-                  <a:lnTo>
-                    <a:pt x="440119" y="1259831"/>
-                  </a:lnTo>
-                  <a:lnTo>
-                    <a:pt x="362876" y="1193517"/>
-                  </a:lnTo>
-                  <a:lnTo>
-                    <a:pt x="285632" y="1125366"/>
-                  </a:lnTo>
-                  <a:lnTo>
-                    <a:pt x="208389" y="1055325"/>
-                  </a:lnTo>
-                  <a:lnTo>
-                    <a:pt x="131145" y="983344"/>
-                  </a:lnTo>
-                  <a:lnTo>
-                    <a:pt x="53901" y="909368"/>
-                  </a:lnTo>
-                  <a:lnTo>
-                    <a:pt x="0" y="856316"/>
+                    <a:pt x="1676016" y="87207"/>
+                  </a:lnTo>
+                  <a:lnTo>
+                    <a:pt x="1753260" y="307491"/>
+                  </a:lnTo>
+                  <a:lnTo>
+                    <a:pt x="1830504" y="513489"/>
+                  </a:lnTo>
+                  <a:lnTo>
+                    <a:pt x="1907747" y="706127"/>
+                  </a:lnTo>
+                  <a:lnTo>
+                    <a:pt x="1984991" y="886271"/>
+                  </a:lnTo>
+                  <a:lnTo>
+                    <a:pt x="2062234" y="1054732"/>
+                  </a:lnTo>
+                  <a:lnTo>
+                    <a:pt x="2139478" y="1212267"/>
+                  </a:lnTo>
+                  <a:lnTo>
+                    <a:pt x="2216721" y="1359585"/>
+                  </a:lnTo>
+                  <a:lnTo>
+                    <a:pt x="2293965" y="1497349"/>
+                  </a:lnTo>
+                  <a:lnTo>
+                    <a:pt x="2371209" y="1626178"/>
+                  </a:lnTo>
+                  <a:lnTo>
+                    <a:pt x="2448452" y="1746652"/>
+                  </a:lnTo>
+                  <a:lnTo>
+                    <a:pt x="2525696" y="1859312"/>
+                  </a:lnTo>
+                  <a:lnTo>
+                    <a:pt x="2602939" y="1964666"/>
+                  </a:lnTo>
+                  <a:lnTo>
+                    <a:pt x="2680183" y="2063187"/>
+                  </a:lnTo>
+                  <a:lnTo>
+                    <a:pt x="2757426" y="2155318"/>
+                  </a:lnTo>
+                  <a:lnTo>
+                    <a:pt x="2834670" y="2241474"/>
+                  </a:lnTo>
+                  <a:lnTo>
+                    <a:pt x="2911914" y="2322042"/>
+                  </a:lnTo>
+                  <a:lnTo>
+                    <a:pt x="2989157" y="2397385"/>
+                  </a:lnTo>
+                  <a:lnTo>
+                    <a:pt x="3066401" y="2467842"/>
+                  </a:lnTo>
+                  <a:lnTo>
+                    <a:pt x="3143644" y="2533729"/>
+                  </a:lnTo>
+                  <a:lnTo>
+                    <a:pt x="3220888" y="2595343"/>
+                  </a:lnTo>
+                  <a:lnTo>
+                    <a:pt x="3298131" y="2652961"/>
+                  </a:lnTo>
+                  <a:lnTo>
+                    <a:pt x="3375375" y="2676126"/>
+                  </a:lnTo>
+                  <a:lnTo>
+                    <a:pt x="3452619" y="2697905"/>
+                  </a:lnTo>
+                  <a:lnTo>
+                    <a:pt x="3529862" y="2719096"/>
+                  </a:lnTo>
+                  <a:lnTo>
+                    <a:pt x="3607106" y="2739716"/>
+                  </a:lnTo>
+                  <a:lnTo>
+                    <a:pt x="3684349" y="2759780"/>
+                  </a:lnTo>
+                  <a:lnTo>
+                    <a:pt x="3761593" y="2779302"/>
+                  </a:lnTo>
+                  <a:lnTo>
+                    <a:pt x="3838836" y="2798299"/>
+                  </a:lnTo>
+                  <a:lnTo>
+                    <a:pt x="3916080" y="2816783"/>
+                  </a:lnTo>
+                  <a:lnTo>
+                    <a:pt x="3993324" y="2834768"/>
+                  </a:lnTo>
+                  <a:lnTo>
+                    <a:pt x="4070567" y="2852269"/>
+                  </a:lnTo>
+                  <a:lnTo>
+                    <a:pt x="4147811" y="2869297"/>
+                  </a:lnTo>
+                  <a:lnTo>
+                    <a:pt x="4225054" y="2885867"/>
+                  </a:lnTo>
+                  <a:lnTo>
+                    <a:pt x="4302298" y="2901989"/>
+                  </a:lnTo>
+                  <a:lnTo>
+                    <a:pt x="4379541" y="2917677"/>
+                  </a:lnTo>
+                  <a:lnTo>
+                    <a:pt x="4456785" y="2932942"/>
+                  </a:lnTo>
+                  <a:lnTo>
+                    <a:pt x="4534029" y="2947795"/>
+                  </a:lnTo>
+                  <a:lnTo>
+                    <a:pt x="4611272" y="2962248"/>
+                  </a:lnTo>
+                  <a:lnTo>
+                    <a:pt x="4688516" y="2976311"/>
+                  </a:lnTo>
+                  <a:lnTo>
+                    <a:pt x="4765759" y="2989994"/>
+                  </a:lnTo>
+                  <a:lnTo>
+                    <a:pt x="4843003" y="3003309"/>
+                  </a:lnTo>
+                  <a:lnTo>
+                    <a:pt x="4920246" y="3016265"/>
+                  </a:lnTo>
+                  <a:lnTo>
+                    <a:pt x="4997490" y="3028871"/>
+                  </a:lnTo>
+                  <a:lnTo>
+                    <a:pt x="5074734" y="3041137"/>
+                  </a:lnTo>
+                  <a:lnTo>
+                    <a:pt x="5151977" y="3053073"/>
+                  </a:lnTo>
+                  <a:lnTo>
+                    <a:pt x="5229221" y="3064686"/>
+                  </a:lnTo>
+                  <a:lnTo>
+                    <a:pt x="5306464" y="3075987"/>
+                  </a:lnTo>
+                  <a:lnTo>
+                    <a:pt x="5383708" y="3086983"/>
+                  </a:lnTo>
+                  <a:lnTo>
+                    <a:pt x="5460951" y="3097682"/>
+                  </a:lnTo>
+                  <a:lnTo>
+                    <a:pt x="5538195" y="3108093"/>
+                  </a:lnTo>
+                  <a:lnTo>
+                    <a:pt x="5615439" y="3118223"/>
+                  </a:lnTo>
+                  <a:lnTo>
+                    <a:pt x="5692682" y="3128080"/>
+                  </a:lnTo>
+                  <a:lnTo>
+                    <a:pt x="5769926" y="3137671"/>
+                  </a:lnTo>
+                  <a:lnTo>
+                    <a:pt x="5847169" y="3147003"/>
+                  </a:lnTo>
+                  <a:lnTo>
+                    <a:pt x="5924413" y="3156084"/>
+                  </a:lnTo>
+                  <a:lnTo>
+                    <a:pt x="6001656" y="3164920"/>
+                  </a:lnTo>
+                  <a:lnTo>
+                    <a:pt x="6078900" y="3173517"/>
+                  </a:lnTo>
+                  <a:lnTo>
+                    <a:pt x="6156144" y="3181883"/>
+                  </a:lnTo>
+                  <a:lnTo>
+                    <a:pt x="6233387" y="3190023"/>
+                  </a:lnTo>
+                  <a:lnTo>
+                    <a:pt x="6310631" y="3197944"/>
+                  </a:lnTo>
+                  <a:lnTo>
+                    <a:pt x="6387874" y="3205651"/>
+                  </a:lnTo>
+                  <a:lnTo>
+                    <a:pt x="6465118" y="3213150"/>
+                  </a:lnTo>
+                  <a:lnTo>
+                    <a:pt x="6542361" y="3220447"/>
+                  </a:lnTo>
+                  <a:lnTo>
+                    <a:pt x="6619605" y="3227547"/>
+                  </a:lnTo>
+                  <a:lnTo>
+                    <a:pt x="6696849" y="3234456"/>
+                  </a:lnTo>
+                  <a:lnTo>
+                    <a:pt x="6774092" y="3241178"/>
+                  </a:lnTo>
+                  <a:lnTo>
+                    <a:pt x="6851336" y="3247720"/>
+                  </a:lnTo>
+                  <a:lnTo>
+                    <a:pt x="6928579" y="3254084"/>
+                  </a:lnTo>
+                  <a:lnTo>
+                    <a:pt x="7005823" y="3260277"/>
+                  </a:lnTo>
+                  <a:lnTo>
+                    <a:pt x="7083066" y="3266304"/>
+                  </a:lnTo>
+                  <a:lnTo>
+                    <a:pt x="7160310" y="3272167"/>
+                  </a:lnTo>
+                  <a:lnTo>
+                    <a:pt x="7237554" y="3277873"/>
+                  </a:lnTo>
+                  <a:lnTo>
+                    <a:pt x="7314797" y="3283424"/>
+                  </a:lnTo>
+                  <a:lnTo>
+                    <a:pt x="7392041" y="3288826"/>
+                  </a:lnTo>
+                  <a:lnTo>
+                    <a:pt x="7392041" y="3459975"/>
+                  </a:lnTo>
+                  <a:lnTo>
+                    <a:pt x="7314797" y="3458326"/>
+                  </a:lnTo>
+                  <a:lnTo>
+                    <a:pt x="7237554" y="3456563"/>
+                  </a:lnTo>
+                  <a:lnTo>
+                    <a:pt x="7160310" y="3454678"/>
+                  </a:lnTo>
+                  <a:lnTo>
+                    <a:pt x="7083066" y="3452662"/>
+                  </a:lnTo>
+                  <a:lnTo>
+                    <a:pt x="7005823" y="3450506"/>
+                  </a:lnTo>
+                  <a:lnTo>
+                    <a:pt x="6928579" y="3448201"/>
+                  </a:lnTo>
+                  <a:lnTo>
+                    <a:pt x="6851336" y="3445735"/>
+                  </a:lnTo>
+                  <a:lnTo>
+                    <a:pt x="6774092" y="3443099"/>
+                  </a:lnTo>
+                  <a:lnTo>
+                    <a:pt x="6696849" y="3440280"/>
+                  </a:lnTo>
+                  <a:lnTo>
+                    <a:pt x="6619605" y="3437266"/>
+                  </a:lnTo>
+                  <a:lnTo>
+                    <a:pt x="6542361" y="3434042"/>
+                  </a:lnTo>
+                  <a:lnTo>
+                    <a:pt x="6465118" y="3430595"/>
+                  </a:lnTo>
+                  <a:lnTo>
+                    <a:pt x="6387874" y="3426909"/>
+                  </a:lnTo>
+                  <a:lnTo>
+                    <a:pt x="6310631" y="3422967"/>
+                  </a:lnTo>
+                  <a:lnTo>
+                    <a:pt x="6233387" y="3418752"/>
+                  </a:lnTo>
+                  <a:lnTo>
+                    <a:pt x="6156144" y="3414244"/>
+                  </a:lnTo>
+                  <a:lnTo>
+                    <a:pt x="6078900" y="3409424"/>
+                  </a:lnTo>
+                  <a:lnTo>
+                    <a:pt x="6001656" y="3404269"/>
+                  </a:lnTo>
+                  <a:lnTo>
+                    <a:pt x="5924413" y="3398757"/>
+                  </a:lnTo>
+                  <a:lnTo>
+                    <a:pt x="5847169" y="3392863"/>
+                  </a:lnTo>
+                  <a:lnTo>
+                    <a:pt x="5769926" y="3386560"/>
+                  </a:lnTo>
+                  <a:lnTo>
+                    <a:pt x="5692682" y="3379819"/>
+                  </a:lnTo>
+                  <a:lnTo>
+                    <a:pt x="5615439" y="3372612"/>
+                  </a:lnTo>
+                  <a:lnTo>
+                    <a:pt x="5538195" y="3364904"/>
+                  </a:lnTo>
+                  <a:lnTo>
+                    <a:pt x="5460951" y="3356662"/>
+                  </a:lnTo>
+                  <a:lnTo>
+                    <a:pt x="5383708" y="3347848"/>
+                  </a:lnTo>
+                  <a:lnTo>
+                    <a:pt x="5306464" y="3338423"/>
+                  </a:lnTo>
+                  <a:lnTo>
+                    <a:pt x="5229221" y="3328345"/>
+                  </a:lnTo>
+                  <a:lnTo>
+                    <a:pt x="5151977" y="3317567"/>
+                  </a:lnTo>
+                  <a:lnTo>
+                    <a:pt x="5074734" y="3306042"/>
+                  </a:lnTo>
+                  <a:lnTo>
+                    <a:pt x="4997490" y="3293717"/>
+                  </a:lnTo>
+                  <a:lnTo>
+                    <a:pt x="4920246" y="3280538"/>
+                  </a:lnTo>
+                  <a:lnTo>
+                    <a:pt x="4843003" y="3266445"/>
+                  </a:lnTo>
+                  <a:lnTo>
+                    <a:pt x="4765759" y="3251374"/>
+                  </a:lnTo>
+                  <a:lnTo>
+                    <a:pt x="4688516" y="3235258"/>
+                  </a:lnTo>
+                  <a:lnTo>
+                    <a:pt x="4611272" y="3218025"/>
+                  </a:lnTo>
+                  <a:lnTo>
+                    <a:pt x="4534029" y="3199596"/>
+                  </a:lnTo>
+                  <a:lnTo>
+                    <a:pt x="4456785" y="3179889"/>
+                  </a:lnTo>
+                  <a:lnTo>
+                    <a:pt x="4379541" y="3158816"/>
+                  </a:lnTo>
+                  <a:lnTo>
+                    <a:pt x="4302298" y="3136281"/>
+                  </a:lnTo>
+                  <a:lnTo>
+                    <a:pt x="4225054" y="3112183"/>
+                  </a:lnTo>
+                  <a:lnTo>
+                    <a:pt x="4147811" y="3086414"/>
+                  </a:lnTo>
+                  <a:lnTo>
+                    <a:pt x="4070567" y="3058857"/>
+                  </a:lnTo>
+                  <a:lnTo>
+                    <a:pt x="3993324" y="3029390"/>
+                  </a:lnTo>
+                  <a:lnTo>
+                    <a:pt x="3916080" y="2997878"/>
+                  </a:lnTo>
+                  <a:lnTo>
+                    <a:pt x="3838836" y="2964182"/>
+                  </a:lnTo>
+                  <a:lnTo>
+                    <a:pt x="3761593" y="2928148"/>
+                  </a:lnTo>
+                  <a:lnTo>
+                    <a:pt x="3684349" y="2889615"/>
+                  </a:lnTo>
+                  <a:lnTo>
+                    <a:pt x="3607106" y="2848410"/>
+                  </a:lnTo>
+                  <a:lnTo>
+                    <a:pt x="3529862" y="2804347"/>
+                  </a:lnTo>
+                  <a:lnTo>
+                    <a:pt x="3452619" y="2757228"/>
+                  </a:lnTo>
+                  <a:lnTo>
+                    <a:pt x="3375375" y="2706842"/>
+                  </a:lnTo>
+                  <a:lnTo>
+                    <a:pt x="3298131" y="2653744"/>
+                  </a:lnTo>
+                  <a:lnTo>
+                    <a:pt x="3220888" y="2630742"/>
+                  </a:lnTo>
+                  <a:lnTo>
+                    <a:pt x="3143644" y="2607102"/>
+                  </a:lnTo>
+                  <a:lnTo>
+                    <a:pt x="3066401" y="2582807"/>
+                  </a:lnTo>
+                  <a:lnTo>
+                    <a:pt x="2989157" y="2557838"/>
+                  </a:lnTo>
+                  <a:lnTo>
+                    <a:pt x="2911914" y="2532178"/>
+                  </a:lnTo>
+                  <a:lnTo>
+                    <a:pt x="2834670" y="2505807"/>
+                  </a:lnTo>
+                  <a:lnTo>
+                    <a:pt x="2757426" y="2478704"/>
+                  </a:lnTo>
+                  <a:lnTo>
+                    <a:pt x="2680183" y="2450851"/>
+                  </a:lnTo>
+                  <a:lnTo>
+                    <a:pt x="2602939" y="2422226"/>
+                  </a:lnTo>
+                  <a:lnTo>
+                    <a:pt x="2525696" y="2392807"/>
+                  </a:lnTo>
+                  <a:lnTo>
+                    <a:pt x="2448452" y="2362573"/>
+                  </a:lnTo>
+                  <a:lnTo>
+                    <a:pt x="2371209" y="2331501"/>
+                  </a:lnTo>
+                  <a:lnTo>
+                    <a:pt x="2293965" y="2299569"/>
+                  </a:lnTo>
+                  <a:lnTo>
+                    <a:pt x="2216721" y="2266751"/>
+                  </a:lnTo>
+                  <a:lnTo>
+                    <a:pt x="2139478" y="2233023"/>
+                  </a:lnTo>
+                  <a:lnTo>
+                    <a:pt x="2062234" y="2198361"/>
+                  </a:lnTo>
+                  <a:lnTo>
+                    <a:pt x="1984991" y="2162738"/>
+                  </a:lnTo>
+                  <a:lnTo>
+                    <a:pt x="1907747" y="2126128"/>
+                  </a:lnTo>
+                  <a:lnTo>
+                    <a:pt x="1830504" y="2088504"/>
+                  </a:lnTo>
+                  <a:lnTo>
+                    <a:pt x="1753260" y="2049837"/>
+                  </a:lnTo>
+                  <a:lnTo>
+                    <a:pt x="1676016" y="2010098"/>
+                  </a:lnTo>
+                  <a:lnTo>
+                    <a:pt x="1598773" y="1969258"/>
+                  </a:lnTo>
+                  <a:lnTo>
+                    <a:pt x="1521529" y="1927286"/>
+                  </a:lnTo>
+                  <a:lnTo>
+                    <a:pt x="1444286" y="1884150"/>
+                  </a:lnTo>
+                  <a:lnTo>
+                    <a:pt x="1367042" y="1839820"/>
+                  </a:lnTo>
+                  <a:lnTo>
+                    <a:pt x="1289799" y="1794260"/>
+                  </a:lnTo>
+                  <a:lnTo>
+                    <a:pt x="1212555" y="1747439"/>
+                  </a:lnTo>
+                  <a:lnTo>
+                    <a:pt x="1135311" y="1699319"/>
+                  </a:lnTo>
+                  <a:lnTo>
+                    <a:pt x="1058068" y="1649866"/>
+                  </a:lnTo>
+                  <a:lnTo>
+                    <a:pt x="980824" y="1599043"/>
+                  </a:lnTo>
+                  <a:lnTo>
+                    <a:pt x="903581" y="1546811"/>
+                  </a:lnTo>
+                  <a:lnTo>
+                    <a:pt x="826337" y="1493131"/>
+                  </a:lnTo>
+                  <a:lnTo>
+                    <a:pt x="749094" y="1437964"/>
+                  </a:lnTo>
+                  <a:lnTo>
+                    <a:pt x="671850" y="1381268"/>
+                  </a:lnTo>
+                  <a:lnTo>
+                    <a:pt x="594606" y="1323000"/>
+                  </a:lnTo>
+                  <a:lnTo>
+                    <a:pt x="517363" y="1263118"/>
+                  </a:lnTo>
+                  <a:lnTo>
+                    <a:pt x="440119" y="1201576"/>
+                  </a:lnTo>
+                  <a:lnTo>
+                    <a:pt x="362876" y="1138329"/>
+                  </a:lnTo>
+                  <a:lnTo>
+                    <a:pt x="285632" y="1073329"/>
+                  </a:lnTo>
+                  <a:lnTo>
+                    <a:pt x="208389" y="1006528"/>
+                  </a:lnTo>
+                  <a:lnTo>
+                    <a:pt x="131145" y="937875"/>
+                  </a:lnTo>
+                  <a:lnTo>
+                    <a:pt x="53901" y="867319"/>
+                  </a:lnTo>
+                  <a:lnTo>
+                    <a:pt x="0" y="816720"/>
                   </a:lnTo>
                   <a:close/>
                 </a:path>
@@ -3552,240 +3552,240 @@
           </p:nvSpPr>
           <p:spPr>
             <a:xfrm>
-              <a:off x="2464938" y="1896563"/>
-              <a:ext cx="5744620" cy="3448273"/>
+              <a:off x="2464938" y="2073503"/>
+              <a:ext cx="5744620" cy="3288826"/>
             </a:xfrm>
             <a:custGeom>
               <a:avLst/>
               <a:pathLst>
-                <a:path w="5744620" h="3448273">
+                <a:path w="5744620" h="3288826">
                   <a:moveTo>
                     <a:pt x="0" y="0"/>
                   </a:moveTo>
                   <a:lnTo>
-                    <a:pt x="28596" y="91435"/>
-                  </a:lnTo>
-                  <a:lnTo>
-                    <a:pt x="105839" y="322399"/>
-                  </a:lnTo>
-                  <a:lnTo>
-                    <a:pt x="183083" y="538384"/>
-                  </a:lnTo>
-                  <a:lnTo>
-                    <a:pt x="260326" y="740361"/>
-                  </a:lnTo>
-                  <a:lnTo>
-                    <a:pt x="337570" y="929239"/>
-                  </a:lnTo>
-                  <a:lnTo>
-                    <a:pt x="414814" y="1105867"/>
-                  </a:lnTo>
-                  <a:lnTo>
-                    <a:pt x="492057" y="1271040"/>
-                  </a:lnTo>
-                  <a:lnTo>
-                    <a:pt x="569301" y="1425500"/>
-                  </a:lnTo>
-                  <a:lnTo>
-                    <a:pt x="646544" y="1569943"/>
-                  </a:lnTo>
-                  <a:lnTo>
-                    <a:pt x="723788" y="1705017"/>
-                  </a:lnTo>
-                  <a:lnTo>
-                    <a:pt x="801031" y="1831332"/>
-                  </a:lnTo>
-                  <a:lnTo>
-                    <a:pt x="878275" y="1949454"/>
-                  </a:lnTo>
-                  <a:lnTo>
-                    <a:pt x="955519" y="2059915"/>
-                  </a:lnTo>
-                  <a:lnTo>
-                    <a:pt x="1032762" y="2163213"/>
-                  </a:lnTo>
-                  <a:lnTo>
-                    <a:pt x="1110006" y="2259811"/>
-                  </a:lnTo>
-                  <a:lnTo>
-                    <a:pt x="1187249" y="2350144"/>
-                  </a:lnTo>
-                  <a:lnTo>
-                    <a:pt x="1264493" y="2434618"/>
-                  </a:lnTo>
-                  <a:lnTo>
-                    <a:pt x="1341736" y="2513614"/>
-                  </a:lnTo>
-                  <a:lnTo>
-                    <a:pt x="1418980" y="2587486"/>
-                  </a:lnTo>
-                  <a:lnTo>
-                    <a:pt x="1496224" y="2656568"/>
-                  </a:lnTo>
-                  <a:lnTo>
-                    <a:pt x="1573467" y="2721169"/>
-                  </a:lnTo>
-                  <a:lnTo>
-                    <a:pt x="1650711" y="2781580"/>
-                  </a:lnTo>
-                  <a:lnTo>
-                    <a:pt x="1727954" y="2805869"/>
-                  </a:lnTo>
-                  <a:lnTo>
-                    <a:pt x="1805198" y="2828703"/>
-                  </a:lnTo>
-                  <a:lnTo>
-                    <a:pt x="1882441" y="2850922"/>
-                  </a:lnTo>
-                  <a:lnTo>
-                    <a:pt x="1959685" y="2872541"/>
-                  </a:lnTo>
-                  <a:lnTo>
-                    <a:pt x="2036929" y="2893578"/>
-                  </a:lnTo>
-                  <a:lnTo>
-                    <a:pt x="2114172" y="2914047"/>
-                  </a:lnTo>
-                  <a:lnTo>
-                    <a:pt x="2191416" y="2933964"/>
-                  </a:lnTo>
-                  <a:lnTo>
-                    <a:pt x="2268659" y="2953344"/>
-                  </a:lnTo>
-                  <a:lnTo>
-                    <a:pt x="2345903" y="2972202"/>
-                  </a:lnTo>
-                  <a:lnTo>
-                    <a:pt x="2423146" y="2990551"/>
-                  </a:lnTo>
-                  <a:lnTo>
-                    <a:pt x="2500390" y="3008405"/>
-                  </a:lnTo>
-                  <a:lnTo>
-                    <a:pt x="2577634" y="3025778"/>
-                  </a:lnTo>
-                  <a:lnTo>
-                    <a:pt x="2654877" y="3042682"/>
-                  </a:lnTo>
-                  <a:lnTo>
-                    <a:pt x="2732121" y="3059130"/>
-                  </a:lnTo>
-                  <a:lnTo>
-                    <a:pt x="2809364" y="3075135"/>
-                  </a:lnTo>
-                  <a:lnTo>
-                    <a:pt x="2886608" y="3090708"/>
-                  </a:lnTo>
-                  <a:lnTo>
-                    <a:pt x="2963852" y="3105862"/>
-                  </a:lnTo>
-                  <a:lnTo>
-                    <a:pt x="3041095" y="3120606"/>
-                  </a:lnTo>
-                  <a:lnTo>
-                    <a:pt x="3118339" y="3134954"/>
-                  </a:lnTo>
-                  <a:lnTo>
-                    <a:pt x="3195582" y="3148914"/>
-                  </a:lnTo>
-                  <a:lnTo>
-                    <a:pt x="3272826" y="3162497"/>
-                  </a:lnTo>
-                  <a:lnTo>
-                    <a:pt x="3350069" y="3175715"/>
-                  </a:lnTo>
-                  <a:lnTo>
-                    <a:pt x="3427313" y="3188576"/>
-                  </a:lnTo>
-                  <a:lnTo>
-                    <a:pt x="3504557" y="3201090"/>
-                  </a:lnTo>
-                  <a:lnTo>
-                    <a:pt x="3581800" y="3213267"/>
-                  </a:lnTo>
-                  <a:lnTo>
-                    <a:pt x="3659044" y="3225115"/>
-                  </a:lnTo>
-                  <a:lnTo>
-                    <a:pt x="3736287" y="3236644"/>
-                  </a:lnTo>
-                  <a:lnTo>
-                    <a:pt x="3813531" y="3247862"/>
-                  </a:lnTo>
-                  <a:lnTo>
-                    <a:pt x="3890774" y="3258777"/>
-                  </a:lnTo>
-                  <a:lnTo>
-                    <a:pt x="3968018" y="3269399"/>
-                  </a:lnTo>
-                  <a:lnTo>
-                    <a:pt x="4045262" y="3279733"/>
-                  </a:lnTo>
-                  <a:lnTo>
-                    <a:pt x="4122505" y="3289789"/>
-                  </a:lnTo>
-                  <a:lnTo>
-                    <a:pt x="4199749" y="3299574"/>
-                  </a:lnTo>
-                  <a:lnTo>
-                    <a:pt x="4276992" y="3309095"/>
-                  </a:lnTo>
-                  <a:lnTo>
-                    <a:pt x="4354236" y="3318359"/>
-                  </a:lnTo>
-                  <a:lnTo>
-                    <a:pt x="4431479" y="3327374"/>
-                  </a:lnTo>
-                  <a:lnTo>
-                    <a:pt x="4508723" y="3336145"/>
-                  </a:lnTo>
-                  <a:lnTo>
-                    <a:pt x="4585967" y="3344680"/>
-                  </a:lnTo>
-                  <a:lnTo>
-                    <a:pt x="4663210" y="3352984"/>
-                  </a:lnTo>
-                  <a:lnTo>
-                    <a:pt x="4740454" y="3361065"/>
-                  </a:lnTo>
-                  <a:lnTo>
-                    <a:pt x="4817697" y="3368928"/>
-                  </a:lnTo>
-                  <a:lnTo>
-                    <a:pt x="4894941" y="3376579"/>
-                  </a:lnTo>
-                  <a:lnTo>
-                    <a:pt x="4972184" y="3384023"/>
-                  </a:lnTo>
-                  <a:lnTo>
-                    <a:pt x="5049428" y="3391267"/>
-                  </a:lnTo>
-                  <a:lnTo>
-                    <a:pt x="5126672" y="3398315"/>
-                  </a:lnTo>
-                  <a:lnTo>
-                    <a:pt x="5203915" y="3405174"/>
-                  </a:lnTo>
-                  <a:lnTo>
-                    <a:pt x="5281159" y="3411847"/>
-                  </a:lnTo>
-                  <a:lnTo>
-                    <a:pt x="5358402" y="3418340"/>
-                  </a:lnTo>
-                  <a:lnTo>
-                    <a:pt x="5435646" y="3424659"/>
-                  </a:lnTo>
-                  <a:lnTo>
-                    <a:pt x="5512889" y="3430806"/>
-                  </a:lnTo>
-                  <a:lnTo>
-                    <a:pt x="5590133" y="3436789"/>
-                  </a:lnTo>
-                  <a:lnTo>
-                    <a:pt x="5667377" y="3442609"/>
-                  </a:lnTo>
-                  <a:lnTo>
-                    <a:pt x="5744620" y="3448273"/>
+                    <a:pt x="28596" y="87207"/>
+                  </a:lnTo>
+                  <a:lnTo>
+                    <a:pt x="105839" y="307491"/>
+                  </a:lnTo>
+                  <a:lnTo>
+                    <a:pt x="183083" y="513489"/>
+                  </a:lnTo>
+                  <a:lnTo>
+                    <a:pt x="260326" y="706127"/>
+                  </a:lnTo>
+                  <a:lnTo>
+                    <a:pt x="337570" y="886271"/>
+                  </a:lnTo>
+                  <a:lnTo>
+                    <a:pt x="414814" y="1054732"/>
+                  </a:lnTo>
+                  <a:lnTo>
+                    <a:pt x="492057" y="1212267"/>
+                  </a:lnTo>
+                  <a:lnTo>
+                    <a:pt x="569301" y="1359585"/>
+                  </a:lnTo>
+                  <a:lnTo>
+                    <a:pt x="646544" y="1497349"/>
+                  </a:lnTo>
+                  <a:lnTo>
+                    <a:pt x="723788" y="1626178"/>
+                  </a:lnTo>
+                  <a:lnTo>
+                    <a:pt x="801031" y="1746652"/>
+                  </a:lnTo>
+                  <a:lnTo>
+                    <a:pt x="878275" y="1859312"/>
+                  </a:lnTo>
+                  <a:lnTo>
+                    <a:pt x="955519" y="1964666"/>
+                  </a:lnTo>
+                  <a:lnTo>
+                    <a:pt x="1032762" y="2063187"/>
+                  </a:lnTo>
+                  <a:lnTo>
+                    <a:pt x="1110006" y="2155318"/>
+                  </a:lnTo>
+                  <a:lnTo>
+                    <a:pt x="1187249" y="2241474"/>
+                  </a:lnTo>
+                  <a:lnTo>
+                    <a:pt x="1264493" y="2322042"/>
+                  </a:lnTo>
+                  <a:lnTo>
+                    <a:pt x="1341736" y="2397385"/>
+                  </a:lnTo>
+                  <a:lnTo>
+                    <a:pt x="1418980" y="2467842"/>
+                  </a:lnTo>
+                  <a:lnTo>
+                    <a:pt x="1496224" y="2533729"/>
+                  </a:lnTo>
+                  <a:lnTo>
+                    <a:pt x="1573467" y="2595343"/>
+                  </a:lnTo>
+                  <a:lnTo>
+                    <a:pt x="1650711" y="2652961"/>
+                  </a:lnTo>
+                  <a:lnTo>
+                    <a:pt x="1727954" y="2676126"/>
+                  </a:lnTo>
+                  <a:lnTo>
+                    <a:pt x="1805198" y="2697905"/>
+                  </a:lnTo>
+                  <a:lnTo>
+                    <a:pt x="1882441" y="2719096"/>
+                  </a:lnTo>
+                  <a:lnTo>
+                    <a:pt x="1959685" y="2739716"/>
+                  </a:lnTo>
+                  <a:lnTo>
+                    <a:pt x="2036929" y="2759780"/>
+                  </a:lnTo>
+                  <a:lnTo>
+                    <a:pt x="2114172" y="2779302"/>
+                  </a:lnTo>
+                  <a:lnTo>
+                    <a:pt x="2191416" y="2798299"/>
+                  </a:lnTo>
+                  <a:lnTo>
+                    <a:pt x="2268659" y="2816783"/>
+                  </a:lnTo>
+                  <a:lnTo>
+                    <a:pt x="2345903" y="2834768"/>
+                  </a:lnTo>
+                  <a:lnTo>
+                    <a:pt x="2423146" y="2852269"/>
+                  </a:lnTo>
+                  <a:lnTo>
+                    <a:pt x="2500390" y="2869297"/>
+                  </a:lnTo>
+                  <a:lnTo>
+                    <a:pt x="2577634" y="2885867"/>
+                  </a:lnTo>
+                  <a:lnTo>
+                    <a:pt x="2654877" y="2901989"/>
+                  </a:lnTo>
+                  <a:lnTo>
+                    <a:pt x="2732121" y="2917677"/>
+                  </a:lnTo>
+                  <a:lnTo>
+                    <a:pt x="2809364" y="2932942"/>
+                  </a:lnTo>
+                  <a:lnTo>
+                    <a:pt x="2886608" y="2947795"/>
+                  </a:lnTo>
+                  <a:lnTo>
+                    <a:pt x="2963852" y="2962248"/>
+                  </a:lnTo>
+                  <a:lnTo>
+                    <a:pt x="3041095" y="2976311"/>
+                  </a:lnTo>
+                  <a:lnTo>
+                    <a:pt x="3118339" y="2989994"/>
+                  </a:lnTo>
+                  <a:lnTo>
+                    <a:pt x="3195582" y="3003309"/>
+                  </a:lnTo>
+                  <a:lnTo>
+                    <a:pt x="3272826" y="3016265"/>
+                  </a:lnTo>
+                  <a:lnTo>
+                    <a:pt x="3350069" y="3028871"/>
+                  </a:lnTo>
+                  <a:lnTo>
+                    <a:pt x="3427313" y="3041137"/>
+                  </a:lnTo>
+                  <a:lnTo>
+                    <a:pt x="3504557" y="3053073"/>
+                  </a:lnTo>
+                  <a:lnTo>
+                    <a:pt x="3581800" y="3064686"/>
+                  </a:lnTo>
+                  <a:lnTo>
+                    <a:pt x="3659044" y="3075987"/>
+                  </a:lnTo>
+                  <a:lnTo>
+                    <a:pt x="3736287" y="3086983"/>
+                  </a:lnTo>
+                  <a:lnTo>
+                    <a:pt x="3813531" y="3097682"/>
+                  </a:lnTo>
+                  <a:lnTo>
+                    <a:pt x="3890774" y="3108093"/>
+                  </a:lnTo>
+                  <a:lnTo>
+                    <a:pt x="3968018" y="3118223"/>
+                  </a:lnTo>
+                  <a:lnTo>
+                    <a:pt x="4045262" y="3128080"/>
+                  </a:lnTo>
+                  <a:lnTo>
+                    <a:pt x="4122505" y="3137671"/>
+                  </a:lnTo>
+                  <a:lnTo>
+                    <a:pt x="4199749" y="3147003"/>
+                  </a:lnTo>
+                  <a:lnTo>
+                    <a:pt x="4276992" y="3156084"/>
+                  </a:lnTo>
+                  <a:lnTo>
+                    <a:pt x="4354236" y="3164920"/>
+                  </a:lnTo>
+                  <a:lnTo>
+                    <a:pt x="4431479" y="3173517"/>
+                  </a:lnTo>
+                  <a:lnTo>
+                    <a:pt x="4508723" y="3181883"/>
+                  </a:lnTo>
+                  <a:lnTo>
+                    <a:pt x="4585967" y="3190023"/>
+                  </a:lnTo>
+                  <a:lnTo>
+                    <a:pt x="4663210" y="3197944"/>
+                  </a:lnTo>
+                  <a:lnTo>
+                    <a:pt x="4740454" y="3205651"/>
+                  </a:lnTo>
+                  <a:lnTo>
+                    <a:pt x="4817697" y="3213150"/>
+                  </a:lnTo>
+                  <a:lnTo>
+                    <a:pt x="4894941" y="3220447"/>
+                  </a:lnTo>
+                  <a:lnTo>
+                    <a:pt x="4972184" y="3227547"/>
+                  </a:lnTo>
+                  <a:lnTo>
+                    <a:pt x="5049428" y="3234456"/>
+                  </a:lnTo>
+                  <a:lnTo>
+                    <a:pt x="5126672" y="3241178"/>
+                  </a:lnTo>
+                  <a:lnTo>
+                    <a:pt x="5203915" y="3247720"/>
+                  </a:lnTo>
+                  <a:lnTo>
+                    <a:pt x="5281159" y="3254084"/>
+                  </a:lnTo>
+                  <a:lnTo>
+                    <a:pt x="5358402" y="3260277"/>
+                  </a:lnTo>
+                  <a:lnTo>
+                    <a:pt x="5435646" y="3266304"/>
+                  </a:lnTo>
+                  <a:lnTo>
+                    <a:pt x="5512889" y="3272167"/>
+                  </a:lnTo>
+                  <a:lnTo>
+                    <a:pt x="5590133" y="3277873"/>
+                  </a:lnTo>
+                  <a:lnTo>
+                    <a:pt x="5667377" y="3283424"/>
+                  </a:lnTo>
+                  <a:lnTo>
+                    <a:pt x="5744620" y="3288826"/>
                   </a:lnTo>
                 </a:path>
               </a:pathLst>
@@ -3805,300 +3805,300 @@
           </p:nvSpPr>
           <p:spPr>
             <a:xfrm>
-              <a:off x="817517" y="2752879"/>
-              <a:ext cx="7392041" cy="2771403"/>
+              <a:off x="817517" y="2890223"/>
+              <a:ext cx="7392041" cy="2643254"/>
             </a:xfrm>
             <a:custGeom>
               <a:avLst/>
               <a:pathLst>
-                <a:path w="7392041" h="2771403">
+                <a:path w="7392041" h="2643254">
                   <a:moveTo>
-                    <a:pt x="7392041" y="2771403"/>
+                    <a:pt x="7392041" y="2643254"/>
                   </a:moveTo>
                   <a:lnTo>
-                    <a:pt x="7314797" y="2769674"/>
-                  </a:lnTo>
-                  <a:lnTo>
-                    <a:pt x="7237554" y="2767826"/>
-                  </a:lnTo>
-                  <a:lnTo>
-                    <a:pt x="7160310" y="2765849"/>
-                  </a:lnTo>
-                  <a:lnTo>
-                    <a:pt x="7083066" y="2763735"/>
-                  </a:lnTo>
-                  <a:lnTo>
-                    <a:pt x="7005823" y="2761475"/>
-                  </a:lnTo>
-                  <a:lnTo>
-                    <a:pt x="6928579" y="2759058"/>
-                  </a:lnTo>
-                  <a:lnTo>
-                    <a:pt x="6851336" y="2756473"/>
-                  </a:lnTo>
-                  <a:lnTo>
-                    <a:pt x="6774092" y="2753709"/>
-                  </a:lnTo>
-                  <a:lnTo>
-                    <a:pt x="6696849" y="2750754"/>
-                  </a:lnTo>
-                  <a:lnTo>
-                    <a:pt x="6619605" y="2747593"/>
-                  </a:lnTo>
-                  <a:lnTo>
-                    <a:pt x="6542361" y="2744213"/>
-                  </a:lnTo>
-                  <a:lnTo>
-                    <a:pt x="6465118" y="2740599"/>
-                  </a:lnTo>
-                  <a:lnTo>
-                    <a:pt x="6387874" y="2736734"/>
-                  </a:lnTo>
-                  <a:lnTo>
-                    <a:pt x="6310631" y="2732601"/>
-                  </a:lnTo>
-                  <a:lnTo>
-                    <a:pt x="6233387" y="2728181"/>
-                  </a:lnTo>
-                  <a:lnTo>
-                    <a:pt x="6156144" y="2723455"/>
-                  </a:lnTo>
-                  <a:lnTo>
-                    <a:pt x="6078900" y="2718401"/>
-                  </a:lnTo>
-                  <a:lnTo>
-                    <a:pt x="6001656" y="2712997"/>
-                  </a:lnTo>
-                  <a:lnTo>
-                    <a:pt x="5924413" y="2707217"/>
-                  </a:lnTo>
-                  <a:lnTo>
-                    <a:pt x="5847169" y="2701037"/>
-                  </a:lnTo>
-                  <a:lnTo>
-                    <a:pt x="5769926" y="2694429"/>
-                  </a:lnTo>
-                  <a:lnTo>
-                    <a:pt x="5692682" y="2687362"/>
-                  </a:lnTo>
-                  <a:lnTo>
-                    <a:pt x="5615439" y="2679804"/>
-                  </a:lnTo>
-                  <a:lnTo>
-                    <a:pt x="5538195" y="2671723"/>
-                  </a:lnTo>
-                  <a:lnTo>
-                    <a:pt x="5460951" y="2663081"/>
-                  </a:lnTo>
-                  <a:lnTo>
-                    <a:pt x="5383708" y="2653840"/>
-                  </a:lnTo>
-                  <a:lnTo>
-                    <a:pt x="5306464" y="2643958"/>
-                  </a:lnTo>
-                  <a:lnTo>
-                    <a:pt x="5229221" y="2633391"/>
-                  </a:lnTo>
-                  <a:lnTo>
-                    <a:pt x="5151977" y="2622091"/>
-                  </a:lnTo>
-                  <a:lnTo>
-                    <a:pt x="5074734" y="2610007"/>
-                  </a:lnTo>
-                  <a:lnTo>
-                    <a:pt x="4997490" y="2597085"/>
-                  </a:lnTo>
-                  <a:lnTo>
-                    <a:pt x="4920246" y="2583267"/>
-                  </a:lnTo>
-                  <a:lnTo>
-                    <a:pt x="4843003" y="2568490"/>
-                  </a:lnTo>
-                  <a:lnTo>
-                    <a:pt x="4765759" y="2552689"/>
-                  </a:lnTo>
-                  <a:lnTo>
-                    <a:pt x="4688516" y="2535792"/>
-                  </a:lnTo>
-                  <a:lnTo>
-                    <a:pt x="4611272" y="2517723"/>
-                  </a:lnTo>
-                  <a:lnTo>
-                    <a:pt x="4534029" y="2498401"/>
-                  </a:lnTo>
-                  <a:lnTo>
-                    <a:pt x="4456785" y="2477739"/>
-                  </a:lnTo>
-                  <a:lnTo>
-                    <a:pt x="4379541" y="2455643"/>
-                  </a:lnTo>
-                  <a:lnTo>
-                    <a:pt x="4302298" y="2432016"/>
-                  </a:lnTo>
-                  <a:lnTo>
-                    <a:pt x="4225054" y="2406749"/>
-                  </a:lnTo>
-                  <a:lnTo>
-                    <a:pt x="4147811" y="2379731"/>
-                  </a:lnTo>
-                  <a:lnTo>
-                    <a:pt x="4070567" y="2350838"/>
-                  </a:lnTo>
-                  <a:lnTo>
-                    <a:pt x="3993324" y="2319942"/>
-                  </a:lnTo>
-                  <a:lnTo>
-                    <a:pt x="3916080" y="2286903"/>
-                  </a:lnTo>
-                  <a:lnTo>
-                    <a:pt x="3838836" y="2251573"/>
-                  </a:lnTo>
-                  <a:lnTo>
-                    <a:pt x="3761593" y="2213792"/>
-                  </a:lnTo>
-                  <a:lnTo>
-                    <a:pt x="3684349" y="2173391"/>
-                  </a:lnTo>
-                  <a:lnTo>
-                    <a:pt x="3607106" y="2130189"/>
-                  </a:lnTo>
-                  <a:lnTo>
-                    <a:pt x="3529862" y="2083990"/>
-                  </a:lnTo>
-                  <a:lnTo>
-                    <a:pt x="3452619" y="2034586"/>
-                  </a:lnTo>
-                  <a:lnTo>
-                    <a:pt x="3375375" y="1981757"/>
-                  </a:lnTo>
-                  <a:lnTo>
-                    <a:pt x="3298131" y="1926085"/>
-                  </a:lnTo>
-                  <a:lnTo>
-                    <a:pt x="3220888" y="1901967"/>
-                  </a:lnTo>
-                  <a:lnTo>
-                    <a:pt x="3143644" y="1877181"/>
-                  </a:lnTo>
-                  <a:lnTo>
-                    <a:pt x="3066401" y="1851709"/>
-                  </a:lnTo>
-                  <a:lnTo>
-                    <a:pt x="2989157" y="1825530"/>
-                  </a:lnTo>
-                  <a:lnTo>
-                    <a:pt x="2911914" y="1798625"/>
-                  </a:lnTo>
-                  <a:lnTo>
-                    <a:pt x="2834670" y="1770975"/>
-                  </a:lnTo>
-                  <a:lnTo>
-                    <a:pt x="2757426" y="1742559"/>
-                  </a:lnTo>
-                  <a:lnTo>
-                    <a:pt x="2680183" y="1713355"/>
-                  </a:lnTo>
-                  <a:lnTo>
-                    <a:pt x="2602939" y="1683342"/>
-                  </a:lnTo>
-                  <a:lnTo>
-                    <a:pt x="2525696" y="1652497"/>
-                  </a:lnTo>
-                  <a:lnTo>
-                    <a:pt x="2448452" y="1620798"/>
-                  </a:lnTo>
-                  <a:lnTo>
-                    <a:pt x="2371209" y="1588220"/>
-                  </a:lnTo>
-                  <a:lnTo>
-                    <a:pt x="2293965" y="1554739"/>
-                  </a:lnTo>
-                  <a:lnTo>
-                    <a:pt x="2216721" y="1520330"/>
-                  </a:lnTo>
-                  <a:lnTo>
-                    <a:pt x="2139478" y="1484967"/>
-                  </a:lnTo>
-                  <a:lnTo>
-                    <a:pt x="2062234" y="1448624"/>
-                  </a:lnTo>
-                  <a:lnTo>
-                    <a:pt x="1984991" y="1411275"/>
-                  </a:lnTo>
-                  <a:lnTo>
-                    <a:pt x="1907747" y="1372890"/>
-                  </a:lnTo>
-                  <a:lnTo>
-                    <a:pt x="1830504" y="1333441"/>
-                  </a:lnTo>
-                  <a:lnTo>
-                    <a:pt x="1753260" y="1292899"/>
-                  </a:lnTo>
-                  <a:lnTo>
-                    <a:pt x="1676016" y="1251234"/>
-                  </a:lnTo>
-                  <a:lnTo>
-                    <a:pt x="1598773" y="1208414"/>
-                  </a:lnTo>
-                  <a:lnTo>
-                    <a:pt x="1521529" y="1164407"/>
-                  </a:lnTo>
-                  <a:lnTo>
-                    <a:pt x="1444286" y="1119180"/>
-                  </a:lnTo>
-                  <a:lnTo>
-                    <a:pt x="1367042" y="1072700"/>
-                  </a:lnTo>
-                  <a:lnTo>
-                    <a:pt x="1289799" y="1024932"/>
-                  </a:lnTo>
-                  <a:lnTo>
-                    <a:pt x="1212555" y="975841"/>
-                  </a:lnTo>
-                  <a:lnTo>
-                    <a:pt x="1135311" y="925388"/>
-                  </a:lnTo>
-                  <a:lnTo>
-                    <a:pt x="1058068" y="873538"/>
-                  </a:lnTo>
-                  <a:lnTo>
-                    <a:pt x="980824" y="820250"/>
-                  </a:lnTo>
-                  <a:lnTo>
-                    <a:pt x="903581" y="765486"/>
-                  </a:lnTo>
-                  <a:lnTo>
-                    <a:pt x="826337" y="709204"/>
-                  </a:lnTo>
-                  <a:lnTo>
-                    <a:pt x="749094" y="651362"/>
-                  </a:lnTo>
-                  <a:lnTo>
-                    <a:pt x="671850" y="591917"/>
-                  </a:lnTo>
-                  <a:lnTo>
-                    <a:pt x="594606" y="530825"/>
-                  </a:lnTo>
-                  <a:lnTo>
-                    <a:pt x="517363" y="468040"/>
-                  </a:lnTo>
-                  <a:lnTo>
-                    <a:pt x="440119" y="403514"/>
-                  </a:lnTo>
-                  <a:lnTo>
-                    <a:pt x="362876" y="337201"/>
-                  </a:lnTo>
-                  <a:lnTo>
-                    <a:pt x="285632" y="269049"/>
-                  </a:lnTo>
-                  <a:lnTo>
-                    <a:pt x="208389" y="199009"/>
-                  </a:lnTo>
-                  <a:lnTo>
-                    <a:pt x="131145" y="127028"/>
-                  </a:lnTo>
-                  <a:lnTo>
-                    <a:pt x="53901" y="53052"/>
+                    <a:pt x="7314797" y="2641606"/>
+                  </a:lnTo>
+                  <a:lnTo>
+                    <a:pt x="7237554" y="2639843"/>
+                  </a:lnTo>
+                  <a:lnTo>
+                    <a:pt x="7160310" y="2637957"/>
+                  </a:lnTo>
+                  <a:lnTo>
+                    <a:pt x="7083066" y="2635941"/>
+                  </a:lnTo>
+                  <a:lnTo>
+                    <a:pt x="7005823" y="2633785"/>
+                  </a:lnTo>
+                  <a:lnTo>
+                    <a:pt x="6928579" y="2631480"/>
+                  </a:lnTo>
+                  <a:lnTo>
+                    <a:pt x="6851336" y="2629015"/>
+                  </a:lnTo>
+                  <a:lnTo>
+                    <a:pt x="6774092" y="2626379"/>
+                  </a:lnTo>
+                  <a:lnTo>
+                    <a:pt x="6696849" y="2623560"/>
+                  </a:lnTo>
+                  <a:lnTo>
+                    <a:pt x="6619605" y="2620545"/>
+                  </a:lnTo>
+                  <a:lnTo>
+                    <a:pt x="6542361" y="2617322"/>
+                  </a:lnTo>
+                  <a:lnTo>
+                    <a:pt x="6465118" y="2613874"/>
+                  </a:lnTo>
+                  <a:lnTo>
+                    <a:pt x="6387874" y="2610188"/>
+                  </a:lnTo>
+                  <a:lnTo>
+                    <a:pt x="6310631" y="2606246"/>
+                  </a:lnTo>
+                  <a:lnTo>
+                    <a:pt x="6233387" y="2602031"/>
+                  </a:lnTo>
+                  <a:lnTo>
+                    <a:pt x="6156144" y="2597523"/>
+                  </a:lnTo>
+                  <a:lnTo>
+                    <a:pt x="6078900" y="2592703"/>
+                  </a:lnTo>
+                  <a:lnTo>
+                    <a:pt x="6001656" y="2587549"/>
+                  </a:lnTo>
+                  <a:lnTo>
+                    <a:pt x="5924413" y="2582037"/>
+                  </a:lnTo>
+                  <a:lnTo>
+                    <a:pt x="5847169" y="2576142"/>
+                  </a:lnTo>
+                  <a:lnTo>
+                    <a:pt x="5769926" y="2569839"/>
+                  </a:lnTo>
+                  <a:lnTo>
+                    <a:pt x="5692682" y="2563099"/>
+                  </a:lnTo>
+                  <a:lnTo>
+                    <a:pt x="5615439" y="2555891"/>
+                  </a:lnTo>
+                  <a:lnTo>
+                    <a:pt x="5538195" y="2548184"/>
+                  </a:lnTo>
+                  <a:lnTo>
+                    <a:pt x="5460951" y="2539941"/>
+                  </a:lnTo>
+                  <a:lnTo>
+                    <a:pt x="5383708" y="2531128"/>
+                  </a:lnTo>
+                  <a:lnTo>
+                    <a:pt x="5306464" y="2521703"/>
+                  </a:lnTo>
+                  <a:lnTo>
+                    <a:pt x="5229221" y="2511624"/>
+                  </a:lnTo>
+                  <a:lnTo>
+                    <a:pt x="5151977" y="2500846"/>
+                  </a:lnTo>
+                  <a:lnTo>
+                    <a:pt x="5074734" y="2489321"/>
+                  </a:lnTo>
+                  <a:lnTo>
+                    <a:pt x="4997490" y="2476997"/>
+                  </a:lnTo>
+                  <a:lnTo>
+                    <a:pt x="4920246" y="2463818"/>
+                  </a:lnTo>
+                  <a:lnTo>
+                    <a:pt x="4843003" y="2449724"/>
+                  </a:lnTo>
+                  <a:lnTo>
+                    <a:pt x="4765759" y="2434654"/>
+                  </a:lnTo>
+                  <a:lnTo>
+                    <a:pt x="4688516" y="2418538"/>
+                  </a:lnTo>
+                  <a:lnTo>
+                    <a:pt x="4611272" y="2401304"/>
+                  </a:lnTo>
+                  <a:lnTo>
+                    <a:pt x="4534029" y="2382876"/>
+                  </a:lnTo>
+                  <a:lnTo>
+                    <a:pt x="4456785" y="2363169"/>
+                  </a:lnTo>
+                  <a:lnTo>
+                    <a:pt x="4379541" y="2342095"/>
+                  </a:lnTo>
+                  <a:lnTo>
+                    <a:pt x="4302298" y="2319560"/>
+                  </a:lnTo>
+                  <a:lnTo>
+                    <a:pt x="4225054" y="2295462"/>
+                  </a:lnTo>
+                  <a:lnTo>
+                    <a:pt x="4147811" y="2269693"/>
+                  </a:lnTo>
+                  <a:lnTo>
+                    <a:pt x="4070567" y="2242137"/>
+                  </a:lnTo>
+                  <a:lnTo>
+                    <a:pt x="3993324" y="2212669"/>
+                  </a:lnTo>
+                  <a:lnTo>
+                    <a:pt x="3916080" y="2181158"/>
+                  </a:lnTo>
+                  <a:lnTo>
+                    <a:pt x="3838836" y="2147461"/>
+                  </a:lnTo>
+                  <a:lnTo>
+                    <a:pt x="3761593" y="2111427"/>
+                  </a:lnTo>
+                  <a:lnTo>
+                    <a:pt x="3684349" y="2072895"/>
+                  </a:lnTo>
+                  <a:lnTo>
+                    <a:pt x="3607106" y="2031689"/>
+                  </a:lnTo>
+                  <a:lnTo>
+                    <a:pt x="3529862" y="1987627"/>
+                  </a:lnTo>
+                  <a:lnTo>
+                    <a:pt x="3452619" y="1940508"/>
+                  </a:lnTo>
+                  <a:lnTo>
+                    <a:pt x="3375375" y="1890121"/>
+                  </a:lnTo>
+                  <a:lnTo>
+                    <a:pt x="3298131" y="1837024"/>
+                  </a:lnTo>
+                  <a:lnTo>
+                    <a:pt x="3220888" y="1814021"/>
+                  </a:lnTo>
+                  <a:lnTo>
+                    <a:pt x="3143644" y="1790381"/>
+                  </a:lnTo>
+                  <a:lnTo>
+                    <a:pt x="3066401" y="1766086"/>
+                  </a:lnTo>
+                  <a:lnTo>
+                    <a:pt x="2989157" y="1741118"/>
+                  </a:lnTo>
+                  <a:lnTo>
+                    <a:pt x="2911914" y="1715458"/>
+                  </a:lnTo>
+                  <a:lnTo>
+                    <a:pt x="2834670" y="1689086"/>
+                  </a:lnTo>
+                  <a:lnTo>
+                    <a:pt x="2757426" y="1661984"/>
+                  </a:lnTo>
+                  <a:lnTo>
+                    <a:pt x="2680183" y="1634131"/>
+                  </a:lnTo>
+                  <a:lnTo>
+                    <a:pt x="2602939" y="1605505"/>
+                  </a:lnTo>
+                  <a:lnTo>
+                    <a:pt x="2525696" y="1576087"/>
+                  </a:lnTo>
+                  <a:lnTo>
+                    <a:pt x="2448452" y="1545853"/>
+                  </a:lnTo>
+                  <a:lnTo>
+                    <a:pt x="2371209" y="1514781"/>
+                  </a:lnTo>
+                  <a:lnTo>
+                    <a:pt x="2293965" y="1482848"/>
+                  </a:lnTo>
+                  <a:lnTo>
+                    <a:pt x="2216721" y="1450030"/>
+                  </a:lnTo>
+                  <a:lnTo>
+                    <a:pt x="2139478" y="1416303"/>
+                  </a:lnTo>
+                  <a:lnTo>
+                    <a:pt x="2062234" y="1381641"/>
+                  </a:lnTo>
+                  <a:lnTo>
+                    <a:pt x="1984991" y="1346018"/>
+                  </a:lnTo>
+                  <a:lnTo>
+                    <a:pt x="1907747" y="1309408"/>
+                  </a:lnTo>
+                  <a:lnTo>
+                    <a:pt x="1830504" y="1271783"/>
+                  </a:lnTo>
+                  <a:lnTo>
+                    <a:pt x="1753260" y="1233116"/>
+                  </a:lnTo>
+                  <a:lnTo>
+                    <a:pt x="1676016" y="1193377"/>
+                  </a:lnTo>
+                  <a:lnTo>
+                    <a:pt x="1598773" y="1152537"/>
+                  </a:lnTo>
+                  <a:lnTo>
+                    <a:pt x="1521529" y="1110565"/>
+                  </a:lnTo>
+                  <a:lnTo>
+                    <a:pt x="1444286" y="1067430"/>
+                  </a:lnTo>
+                  <a:lnTo>
+                    <a:pt x="1367042" y="1023099"/>
+                  </a:lnTo>
+                  <a:lnTo>
+                    <a:pt x="1289799" y="977540"/>
+                  </a:lnTo>
+                  <a:lnTo>
+                    <a:pt x="1212555" y="930718"/>
+                  </a:lnTo>
+                  <a:lnTo>
+                    <a:pt x="1135311" y="882599"/>
+                  </a:lnTo>
+                  <a:lnTo>
+                    <a:pt x="1058068" y="833146"/>
+                  </a:lnTo>
+                  <a:lnTo>
+                    <a:pt x="980824" y="782322"/>
+                  </a:lnTo>
+                  <a:lnTo>
+                    <a:pt x="903581" y="730090"/>
+                  </a:lnTo>
+                  <a:lnTo>
+                    <a:pt x="826337" y="676410"/>
+                  </a:lnTo>
+                  <a:lnTo>
+                    <a:pt x="749094" y="621243"/>
+                  </a:lnTo>
+                  <a:lnTo>
+                    <a:pt x="671850" y="564547"/>
+                  </a:lnTo>
+                  <a:lnTo>
+                    <a:pt x="594606" y="506280"/>
+                  </a:lnTo>
+                  <a:lnTo>
+                    <a:pt x="517363" y="446398"/>
+                  </a:lnTo>
+                  <a:lnTo>
+                    <a:pt x="440119" y="384856"/>
+                  </a:lnTo>
+                  <a:lnTo>
+                    <a:pt x="362876" y="321609"/>
+                  </a:lnTo>
+                  <a:lnTo>
+                    <a:pt x="285632" y="256608"/>
+                  </a:lnTo>
+                  <a:lnTo>
+                    <a:pt x="208389" y="189807"/>
+                  </a:lnTo>
+                  <a:lnTo>
+                    <a:pt x="131145" y="121154"/>
+                  </a:lnTo>
+                  <a:lnTo>
+                    <a:pt x="53901" y="50599"/>
                   </a:lnTo>
                   <a:lnTo>
                     <a:pt x="0" y="0"/>
@@ -4121,267 +4121,267 @@
           </p:nvSpPr>
           <p:spPr>
             <a:xfrm>
-              <a:off x="1769148" y="1896563"/>
-              <a:ext cx="6440410" cy="3581273"/>
+              <a:off x="1769148" y="2073503"/>
+              <a:ext cx="6440410" cy="3415676"/>
             </a:xfrm>
             <a:custGeom>
               <a:avLst/>
               <a:pathLst>
-                <a:path w="6440410" h="3581273">
+                <a:path w="6440410" h="3415676">
                   <a:moveTo>
                     <a:pt x="0" y="0"/>
                   </a:moveTo>
                   <a:lnTo>
-                    <a:pt x="29193" y="65518"/>
-                  </a:lnTo>
-                  <a:lnTo>
-                    <a:pt x="106437" y="230881"/>
-                  </a:lnTo>
-                  <a:lnTo>
-                    <a:pt x="183680" y="388621"/>
-                  </a:lnTo>
-                  <a:lnTo>
-                    <a:pt x="260924" y="539089"/>
-                  </a:lnTo>
-                  <a:lnTo>
-                    <a:pt x="338168" y="682621"/>
-                  </a:lnTo>
-                  <a:lnTo>
-                    <a:pt x="415411" y="819537"/>
-                  </a:lnTo>
-                  <a:lnTo>
-                    <a:pt x="492655" y="950140"/>
-                  </a:lnTo>
-                  <a:lnTo>
-                    <a:pt x="569898" y="1074723"/>
-                  </a:lnTo>
-                  <a:lnTo>
-                    <a:pt x="647142" y="1193563"/>
-                  </a:lnTo>
-                  <a:lnTo>
-                    <a:pt x="724385" y="1306924"/>
-                  </a:lnTo>
-                  <a:lnTo>
-                    <a:pt x="801629" y="1415059"/>
-                  </a:lnTo>
-                  <a:lnTo>
-                    <a:pt x="878873" y="1518210"/>
-                  </a:lnTo>
-                  <a:lnTo>
-                    <a:pt x="956116" y="1616605"/>
-                  </a:lnTo>
-                  <a:lnTo>
-                    <a:pt x="1033360" y="1710465"/>
-                  </a:lnTo>
-                  <a:lnTo>
-                    <a:pt x="1110603" y="1799997"/>
-                  </a:lnTo>
-                  <a:lnTo>
-                    <a:pt x="1187847" y="1885403"/>
-                  </a:lnTo>
-                  <a:lnTo>
-                    <a:pt x="1265090" y="1966871"/>
-                  </a:lnTo>
-                  <a:lnTo>
-                    <a:pt x="1342334" y="2044583"/>
-                  </a:lnTo>
-                  <a:lnTo>
-                    <a:pt x="1419578" y="2118713"/>
-                  </a:lnTo>
-                  <a:lnTo>
-                    <a:pt x="1496821" y="2189426"/>
-                  </a:lnTo>
-                  <a:lnTo>
-                    <a:pt x="1574065" y="2256879"/>
-                  </a:lnTo>
-                  <a:lnTo>
-                    <a:pt x="1651308" y="2321222"/>
-                  </a:lnTo>
-                  <a:lnTo>
-                    <a:pt x="1728552" y="2382600"/>
-                  </a:lnTo>
-                  <a:lnTo>
-                    <a:pt x="1805795" y="2441147"/>
-                  </a:lnTo>
-                  <a:lnTo>
-                    <a:pt x="1883039" y="2496996"/>
-                  </a:lnTo>
-                  <a:lnTo>
-                    <a:pt x="1960283" y="2550271"/>
-                  </a:lnTo>
-                  <a:lnTo>
-                    <a:pt x="2037526" y="2601089"/>
-                  </a:lnTo>
-                  <a:lnTo>
-                    <a:pt x="2114770" y="2649565"/>
-                  </a:lnTo>
-                  <a:lnTo>
-                    <a:pt x="2192013" y="2695806"/>
-                  </a:lnTo>
-                  <a:lnTo>
-                    <a:pt x="2269257" y="2739915"/>
-                  </a:lnTo>
-                  <a:lnTo>
-                    <a:pt x="2346500" y="2781991"/>
-                  </a:lnTo>
-                  <a:lnTo>
-                    <a:pt x="2423744" y="2822127"/>
-                  </a:lnTo>
-                  <a:lnTo>
-                    <a:pt x="2500988" y="2860413"/>
-                  </a:lnTo>
-                  <a:lnTo>
-                    <a:pt x="2578231" y="2896934"/>
-                  </a:lnTo>
-                  <a:lnTo>
-                    <a:pt x="2655475" y="2931772"/>
-                  </a:lnTo>
-                  <a:lnTo>
-                    <a:pt x="2732718" y="2965003"/>
-                  </a:lnTo>
-                  <a:lnTo>
-                    <a:pt x="2809962" y="2996703"/>
-                  </a:lnTo>
-                  <a:lnTo>
-                    <a:pt x="2887205" y="3026941"/>
-                  </a:lnTo>
-                  <a:lnTo>
-                    <a:pt x="2964449" y="3055785"/>
-                  </a:lnTo>
-                  <a:lnTo>
-                    <a:pt x="3041693" y="3083300"/>
-                  </a:lnTo>
-                  <a:lnTo>
-                    <a:pt x="3118936" y="3109546"/>
-                  </a:lnTo>
-                  <a:lnTo>
-                    <a:pt x="3196180" y="3134582"/>
-                  </a:lnTo>
-                  <a:lnTo>
-                    <a:pt x="3273423" y="3158464"/>
-                  </a:lnTo>
-                  <a:lnTo>
-                    <a:pt x="3350667" y="3181246"/>
-                  </a:lnTo>
-                  <a:lnTo>
-                    <a:pt x="3427910" y="3202977"/>
-                  </a:lnTo>
-                  <a:lnTo>
-                    <a:pt x="3505154" y="3223706"/>
-                  </a:lnTo>
-                  <a:lnTo>
-                    <a:pt x="3582398" y="3243479"/>
-                  </a:lnTo>
-                  <a:lnTo>
-                    <a:pt x="3659641" y="3262341"/>
-                  </a:lnTo>
-                  <a:lnTo>
-                    <a:pt x="3736885" y="3280334"/>
-                  </a:lnTo>
-                  <a:lnTo>
-                    <a:pt x="3814128" y="3297497"/>
-                  </a:lnTo>
-                  <a:lnTo>
-                    <a:pt x="3891372" y="3313869"/>
-                  </a:lnTo>
-                  <a:lnTo>
-                    <a:pt x="3968615" y="3329486"/>
-                  </a:lnTo>
-                  <a:lnTo>
-                    <a:pt x="4045859" y="3344383"/>
-                  </a:lnTo>
-                  <a:lnTo>
-                    <a:pt x="4123103" y="3358594"/>
-                  </a:lnTo>
-                  <a:lnTo>
-                    <a:pt x="4200346" y="3372149"/>
-                  </a:lnTo>
-                  <a:lnTo>
-                    <a:pt x="4277590" y="3385080"/>
-                  </a:lnTo>
-                  <a:lnTo>
-                    <a:pt x="4354833" y="3397414"/>
-                  </a:lnTo>
-                  <a:lnTo>
-                    <a:pt x="4432077" y="3409180"/>
-                  </a:lnTo>
-                  <a:lnTo>
-                    <a:pt x="4509320" y="3420404"/>
-                  </a:lnTo>
-                  <a:lnTo>
-                    <a:pt x="4586564" y="3431110"/>
-                  </a:lnTo>
-                  <a:lnTo>
-                    <a:pt x="4663808" y="3441322"/>
-                  </a:lnTo>
-                  <a:lnTo>
-                    <a:pt x="4741051" y="3451064"/>
-                  </a:lnTo>
-                  <a:lnTo>
-                    <a:pt x="4818295" y="3460356"/>
-                  </a:lnTo>
-                  <a:lnTo>
-                    <a:pt x="4895538" y="3469221"/>
-                  </a:lnTo>
-                  <a:lnTo>
-                    <a:pt x="4972782" y="3477676"/>
-                  </a:lnTo>
-                  <a:lnTo>
-                    <a:pt x="5050025" y="3485742"/>
-                  </a:lnTo>
-                  <a:lnTo>
-                    <a:pt x="5127269" y="3493436"/>
-                  </a:lnTo>
-                  <a:lnTo>
-                    <a:pt x="5204513" y="3500775"/>
-                  </a:lnTo>
-                  <a:lnTo>
-                    <a:pt x="5281756" y="3507776"/>
-                  </a:lnTo>
-                  <a:lnTo>
-                    <a:pt x="5359000" y="3514455"/>
-                  </a:lnTo>
-                  <a:lnTo>
-                    <a:pt x="5436243" y="3520825"/>
-                  </a:lnTo>
-                  <a:lnTo>
-                    <a:pt x="5513487" y="3526902"/>
-                  </a:lnTo>
-                  <a:lnTo>
-                    <a:pt x="5590730" y="3532698"/>
-                  </a:lnTo>
-                  <a:lnTo>
-                    <a:pt x="5667974" y="3538228"/>
-                  </a:lnTo>
-                  <a:lnTo>
-                    <a:pt x="5745218" y="3543502"/>
-                  </a:lnTo>
-                  <a:lnTo>
-                    <a:pt x="5822461" y="3548533"/>
-                  </a:lnTo>
-                  <a:lnTo>
-                    <a:pt x="5899705" y="3553333"/>
-                  </a:lnTo>
-                  <a:lnTo>
-                    <a:pt x="5976948" y="3557911"/>
-                  </a:lnTo>
-                  <a:lnTo>
-                    <a:pt x="6054192" y="3562278"/>
-                  </a:lnTo>
-                  <a:lnTo>
-                    <a:pt x="6131435" y="3566444"/>
-                  </a:lnTo>
-                  <a:lnTo>
-                    <a:pt x="6208679" y="3570417"/>
-                  </a:lnTo>
-                  <a:lnTo>
-                    <a:pt x="6285923" y="3574208"/>
-                  </a:lnTo>
-                  <a:lnTo>
-                    <a:pt x="6363166" y="3577824"/>
-                  </a:lnTo>
-                  <a:lnTo>
-                    <a:pt x="6440410" y="3581273"/>
+                    <a:pt x="29193" y="62488"/>
+                  </a:lnTo>
+                  <a:lnTo>
+                    <a:pt x="106437" y="220205"/>
+                  </a:lnTo>
+                  <a:lnTo>
+                    <a:pt x="183680" y="370651"/>
+                  </a:lnTo>
+                  <a:lnTo>
+                    <a:pt x="260924" y="514162"/>
+                  </a:lnTo>
+                  <a:lnTo>
+                    <a:pt x="338168" y="651057"/>
+                  </a:lnTo>
+                  <a:lnTo>
+                    <a:pt x="415411" y="781641"/>
+                  </a:lnTo>
+                  <a:lnTo>
+                    <a:pt x="492655" y="906206"/>
+                  </a:lnTo>
+                  <a:lnTo>
+                    <a:pt x="569898" y="1025028"/>
+                  </a:lnTo>
+                  <a:lnTo>
+                    <a:pt x="647142" y="1138373"/>
+                  </a:lnTo>
+                  <a:lnTo>
+                    <a:pt x="724385" y="1246492"/>
+                  </a:lnTo>
+                  <a:lnTo>
+                    <a:pt x="801629" y="1349628"/>
+                  </a:lnTo>
+                  <a:lnTo>
+                    <a:pt x="878873" y="1448008"/>
+                  </a:lnTo>
+                  <a:lnTo>
+                    <a:pt x="956116" y="1541854"/>
+                  </a:lnTo>
+                  <a:lnTo>
+                    <a:pt x="1033360" y="1631373"/>
+                  </a:lnTo>
+                  <a:lnTo>
+                    <a:pt x="1110603" y="1716766"/>
+                  </a:lnTo>
+                  <a:lnTo>
+                    <a:pt x="1187847" y="1798222"/>
+                  </a:lnTo>
+                  <a:lnTo>
+                    <a:pt x="1265090" y="1875923"/>
+                  </a:lnTo>
+                  <a:lnTo>
+                    <a:pt x="1342334" y="1950042"/>
+                  </a:lnTo>
+                  <a:lnTo>
+                    <a:pt x="1419578" y="2020745"/>
+                  </a:lnTo>
+                  <a:lnTo>
+                    <a:pt x="1496821" y="2088188"/>
+                  </a:lnTo>
+                  <a:lnTo>
+                    <a:pt x="1574065" y="2152522"/>
+                  </a:lnTo>
+                  <a:lnTo>
+                    <a:pt x="1651308" y="2213890"/>
+                  </a:lnTo>
+                  <a:lnTo>
+                    <a:pt x="1728552" y="2272429"/>
+                  </a:lnTo>
+                  <a:lnTo>
+                    <a:pt x="1805795" y="2328270"/>
+                  </a:lnTo>
+                  <a:lnTo>
+                    <a:pt x="1883039" y="2381536"/>
+                  </a:lnTo>
+                  <a:lnTo>
+                    <a:pt x="1960283" y="2432347"/>
+                  </a:lnTo>
+                  <a:lnTo>
+                    <a:pt x="2037526" y="2480815"/>
+                  </a:lnTo>
+                  <a:lnTo>
+                    <a:pt x="2114770" y="2527050"/>
+                  </a:lnTo>
+                  <a:lnTo>
+                    <a:pt x="2192013" y="2571152"/>
+                  </a:lnTo>
+                  <a:lnTo>
+                    <a:pt x="2269257" y="2613222"/>
+                  </a:lnTo>
+                  <a:lnTo>
+                    <a:pt x="2346500" y="2653353"/>
+                  </a:lnTo>
+                  <a:lnTo>
+                    <a:pt x="2423744" y="2691633"/>
+                  </a:lnTo>
+                  <a:lnTo>
+                    <a:pt x="2500988" y="2728149"/>
+                  </a:lnTo>
+                  <a:lnTo>
+                    <a:pt x="2578231" y="2762981"/>
+                  </a:lnTo>
+                  <a:lnTo>
+                    <a:pt x="2655475" y="2796208"/>
+                  </a:lnTo>
+                  <a:lnTo>
+                    <a:pt x="2732718" y="2827902"/>
+                  </a:lnTo>
+                  <a:lnTo>
+                    <a:pt x="2809962" y="2858136"/>
+                  </a:lnTo>
+                  <a:lnTo>
+                    <a:pt x="2887205" y="2886976"/>
+                  </a:lnTo>
+                  <a:lnTo>
+                    <a:pt x="2964449" y="2914487"/>
+                  </a:lnTo>
+                  <a:lnTo>
+                    <a:pt x="3041693" y="2940729"/>
+                  </a:lnTo>
+                  <a:lnTo>
+                    <a:pt x="3118936" y="2965762"/>
+                  </a:lnTo>
+                  <a:lnTo>
+                    <a:pt x="3196180" y="2989640"/>
+                  </a:lnTo>
+                  <a:lnTo>
+                    <a:pt x="3273423" y="3012418"/>
+                  </a:lnTo>
+                  <a:lnTo>
+                    <a:pt x="3350667" y="3034146"/>
+                  </a:lnTo>
+                  <a:lnTo>
+                    <a:pt x="3427910" y="3054872"/>
+                  </a:lnTo>
+                  <a:lnTo>
+                    <a:pt x="3505154" y="3074643"/>
+                  </a:lnTo>
+                  <a:lnTo>
+                    <a:pt x="3582398" y="3093502"/>
+                  </a:lnTo>
+                  <a:lnTo>
+                    <a:pt x="3659641" y="3111492"/>
+                  </a:lnTo>
+                  <a:lnTo>
+                    <a:pt x="3736885" y="3128653"/>
+                  </a:lnTo>
+                  <a:lnTo>
+                    <a:pt x="3814128" y="3145022"/>
+                  </a:lnTo>
+                  <a:lnTo>
+                    <a:pt x="3891372" y="3160637"/>
+                  </a:lnTo>
+                  <a:lnTo>
+                    <a:pt x="3968615" y="3175532"/>
+                  </a:lnTo>
+                  <a:lnTo>
+                    <a:pt x="4045859" y="3189740"/>
+                  </a:lnTo>
+                  <a:lnTo>
+                    <a:pt x="4123103" y="3203294"/>
+                  </a:lnTo>
+                  <a:lnTo>
+                    <a:pt x="4200346" y="3216222"/>
+                  </a:lnTo>
+                  <a:lnTo>
+                    <a:pt x="4277590" y="3228555"/>
+                  </a:lnTo>
+                  <a:lnTo>
+                    <a:pt x="4354833" y="3240319"/>
+                  </a:lnTo>
+                  <a:lnTo>
+                    <a:pt x="4432077" y="3251541"/>
+                  </a:lnTo>
+                  <a:lnTo>
+                    <a:pt x="4509320" y="3262245"/>
+                  </a:lnTo>
+                  <a:lnTo>
+                    <a:pt x="4586564" y="3272456"/>
+                  </a:lnTo>
+                  <a:lnTo>
+                    <a:pt x="4663808" y="3282197"/>
+                  </a:lnTo>
+                  <a:lnTo>
+                    <a:pt x="4741051" y="3291488"/>
+                  </a:lnTo>
+                  <a:lnTo>
+                    <a:pt x="4818295" y="3300351"/>
+                  </a:lnTo>
+                  <a:lnTo>
+                    <a:pt x="4895538" y="3308805"/>
+                  </a:lnTo>
+                  <a:lnTo>
+                    <a:pt x="4972782" y="3316870"/>
+                  </a:lnTo>
+                  <a:lnTo>
+                    <a:pt x="5050025" y="3324563"/>
+                  </a:lnTo>
+                  <a:lnTo>
+                    <a:pt x="5127269" y="3331901"/>
+                  </a:lnTo>
+                  <a:lnTo>
+                    <a:pt x="5204513" y="3338901"/>
+                  </a:lnTo>
+                  <a:lnTo>
+                    <a:pt x="5281756" y="3345578"/>
+                  </a:lnTo>
+                  <a:lnTo>
+                    <a:pt x="5359000" y="3351947"/>
+                  </a:lnTo>
+                  <a:lnTo>
+                    <a:pt x="5436243" y="3358023"/>
+                  </a:lnTo>
+                  <a:lnTo>
+                    <a:pt x="5513487" y="3363819"/>
+                  </a:lnTo>
+                  <a:lnTo>
+                    <a:pt x="5590730" y="3369348"/>
+                  </a:lnTo>
+                  <a:lnTo>
+                    <a:pt x="5667974" y="3374621"/>
+                  </a:lnTo>
+                  <a:lnTo>
+                    <a:pt x="5745218" y="3379652"/>
+                  </a:lnTo>
+                  <a:lnTo>
+                    <a:pt x="5822461" y="3384450"/>
+                  </a:lnTo>
+                  <a:lnTo>
+                    <a:pt x="5899705" y="3389028"/>
+                  </a:lnTo>
+                  <a:lnTo>
+                    <a:pt x="5976948" y="3393394"/>
+                  </a:lnTo>
+                  <a:lnTo>
+                    <a:pt x="6054192" y="3397559"/>
+                  </a:lnTo>
+                  <a:lnTo>
+                    <a:pt x="6131435" y="3401533"/>
+                  </a:lnTo>
+                  <a:lnTo>
+                    <a:pt x="6208679" y="3405323"/>
+                  </a:lnTo>
+                  <a:lnTo>
+                    <a:pt x="6285923" y="3408938"/>
+                  </a:lnTo>
+                  <a:lnTo>
+                    <a:pt x="6363166" y="3412386"/>
+                  </a:lnTo>
+                  <a:lnTo>
+                    <a:pt x="6440410" y="3415676"/>
                   </a:lnTo>
                 </a:path>
               </a:pathLst>
@@ -4410,7 +4410,7 @@
           </p:nvSpPr>
           <p:spPr>
             <a:xfrm>
-              <a:off x="817517" y="4679530"/>
+              <a:off x="817517" y="4727786"/>
               <a:ext cx="7799693" cy="0"/>
             </a:xfrm>
             <a:custGeom>
@@ -4453,15 +4453,15 @@
           </p:nvSpPr>
           <p:spPr>
             <a:xfrm>
-              <a:off x="4117484" y="1896563"/>
-              <a:ext cx="0" cy="3826579"/>
+              <a:off x="4117484" y="2073503"/>
+              <a:ext cx="0" cy="3649639"/>
             </a:xfrm>
             <a:custGeom>
               <a:avLst/>
               <a:pathLst>
-                <a:path w="0" h="3826579">
+                <a:path w="0" h="3649639">
                   <a:moveTo>
-                    <a:pt x="0" y="3826579"/>
+                    <a:pt x="0" y="3649639"/>
                   </a:moveTo>
                   <a:lnTo>
                     <a:pt x="0" y="0"/>
@@ -4496,7 +4496,7 @@
           </p:nvSpPr>
           <p:spPr>
             <a:xfrm>
-              <a:off x="692708" y="5509156"/>
+              <a:off x="692708" y="5517199"/>
               <a:ext cx="62179" cy="80101"/>
             </a:xfrm>
             <a:prstGeom prst="rect">
@@ -4542,7 +4542,7 @@
           </p:nvSpPr>
           <p:spPr>
             <a:xfrm>
-              <a:off x="692708" y="4639479"/>
+              <a:off x="692708" y="4687735"/>
               <a:ext cx="62179" cy="80101"/>
             </a:xfrm>
             <a:prstGeom prst="rect">
@@ -4588,7 +4588,7 @@
           </p:nvSpPr>
           <p:spPr>
             <a:xfrm>
-              <a:off x="692708" y="3769802"/>
+              <a:off x="692708" y="3858272"/>
               <a:ext cx="62179" cy="80101"/>
             </a:xfrm>
             <a:prstGeom prst="rect">
@@ -4634,7 +4634,7 @@
           </p:nvSpPr>
           <p:spPr>
             <a:xfrm>
-              <a:off x="692708" y="2900125"/>
+              <a:off x="692708" y="3028808"/>
               <a:ext cx="62179" cy="80101"/>
             </a:xfrm>
             <a:prstGeom prst="rect">
@@ -4680,7 +4680,7 @@
           </p:nvSpPr>
           <p:spPr>
             <a:xfrm>
-              <a:off x="692708" y="2030448"/>
+              <a:off x="692708" y="2199345"/>
               <a:ext cx="62179" cy="80101"/>
             </a:xfrm>
             <a:prstGeom prst="rect">
@@ -4956,7 +4956,7 @@
           </p:nvSpPr>
           <p:spPr>
             <a:xfrm rot="-5400000">
-              <a:off x="68446" y="3759743"/>
+              <a:off x="68446" y="3848213"/>
               <a:ext cx="1016904" cy="100218"/>
             </a:xfrm>
             <a:prstGeom prst="rect">
@@ -4997,6 +4997,52 @@
         <p:sp>
           <p:nvSpPr>
             <p:cNvPr id="38" name="tx38"/>
+            <p:cNvSpPr/>
+            <p:nvPr/>
+          </p:nvSpPr>
+          <p:spPr>
+            <a:xfrm>
+              <a:off x="817517" y="1896563"/>
+              <a:ext cx="5626211" cy="82021"/>
+            </a:xfrm>
+            <a:prstGeom prst="rect">
+              <a:avLst/>
+            </a:prstGeom>
+            <a:noFill/>
+          </p:spPr>
+          <p:txBody>
+            <a:bodyPr lIns="0" rIns="0" tIns="0" bIns="0" anchorCtr="1" anchor="ctr" wrap="none"/>
+            <a:lstStyle/>
+            <a:p>
+              <a:pPr algn="l" marL="0" marR="0" indent="0">
+                <a:lnSpc>
+                  <a:spcPts val="900"/>
+                </a:lnSpc>
+                <a:spcBef>
+                  <a:spcPts val="0"/>
+                </a:spcBef>
+                <a:spcAft>
+                  <a:spcPts val="0"/>
+                </a:spcAft>
+              </a:pPr>
+              <a:r>
+                <a:rPr sz="900">
+                  <a:solidFill>
+                    <a:srgbClr val="404040">
+                      <a:alpha val="100000"/>
+                    </a:srgbClr>
+                  </a:solidFill>
+                  <a:latin typeface="Helvetica"/>
+                  <a:cs typeface="Helvetica"/>
+                </a:rPr>
+                <a:t>subHR per 0.1 ratio decline: 1.72 (1.37-2.16)  |  per IQR decline (Δ = 0.30): 4.95 (2.53-9.70)  |  IQR: [0.84, 1.14]</a:t>
+              </a:r>
+            </a:p>
+          </p:txBody>
+        </p:sp>
+        <p:sp>
+          <p:nvSpPr>
+            <p:cNvPr id="39" name="tx39"/>
             <p:cNvSpPr/>
             <p:nvPr/>
           </p:nvSpPr>

--- a/docs/pptx/auc3/jx-auc3-linsubhr-ratio-grade3.pptx
+++ b/docs/pptx/auc3/jx-auc3-linsubhr-ratio-grade3.pptx
@@ -5003,7 +5003,7 @@
           <p:spPr>
             <a:xfrm>
               <a:off x="817517" y="1896563"/>
-              <a:ext cx="5626211" cy="82021"/>
+              <a:ext cx="6236116" cy="82021"/>
             </a:xfrm>
             <a:prstGeom prst="rect">
               <a:avLst/>
@@ -5035,7 +5035,7 @@
                   <a:latin typeface="Helvetica"/>
                   <a:cs typeface="Helvetica"/>
                 </a:rPr>
-                <a:t>subHR per 0.1 ratio decline: 1.72 (1.37-2.16)  |  per IQR decline (Δ = 0.30): 4.95 (2.53-9.70)  |  IQR: [0.84, 1.14]</a:t>
+                <a:t>subHR per 0.1 ratio decline: 1.72 (1.37-2.16), p = &lt;0.001  |  per IQR decline (Δ = 0.30): 4.95 (2.53-9.70)  |  IQR: [0.84, 1.14]</a:t>
               </a:r>
             </a:p>
           </p:txBody>

--- a/docs/pptx/auc3/jx-auc3-linsubhr-ratio-grade3.pptx
+++ b/docs/pptx/auc3/jx-auc3-linsubhr-ratio-grade3.pptx
@@ -5003,7 +5003,7 @@
           <p:spPr>
             <a:xfrm>
               <a:off x="817517" y="1896563"/>
-              <a:ext cx="6236116" cy="82021"/>
+              <a:ext cx="6899879" cy="82021"/>
             </a:xfrm>
             <a:prstGeom prst="rect">
               <a:avLst/>
@@ -5035,7 +5035,7 @@
                   <a:latin typeface="Helvetica"/>
                   <a:cs typeface="Helvetica"/>
                 </a:rPr>
-                <a:t>subHR per 0.1 ratio decline: 1.72 (1.37-2.16), p = &lt;0.001  |  per IQR decline (Δ = 0.30): 4.95 (2.53-9.70)  |  IQR: [0.84, 1.14]</a:t>
+                <a:t>subHR per 0.1 ratio decline: 1.72 (1.37-2.16), p_Bonf = &lt;0.001 (n = 6)  |  per IQR decline (Δ = 0.30): 4.95 (2.53-9.70)  |  IQR: [0.84, 1.14]</a:t>
               </a:r>
             </a:p>
           </p:txBody>

--- a/docs/pptx/auc3/jx-auc3-linsubhr-ratio-grade3.pptx
+++ b/docs/pptx/auc3/jx-auc3-linsubhr-ratio-grade3.pptx
@@ -2443,7 +2443,7 @@
           </p:nvSpPr>
           <p:spPr>
             <a:xfrm>
-              <a:off x="1615213" y="2073503"/>
+              <a:off x="1531834" y="2073503"/>
               <a:ext cx="0" cy="3649639"/>
             </a:xfrm>
             <a:custGeom>
@@ -2486,7 +2486,7 @@
           </p:nvSpPr>
           <p:spPr>
             <a:xfrm>
-              <a:off x="3387871" y="2073503"/>
+              <a:off x="3586410" y="2073503"/>
               <a:ext cx="0" cy="3649639"/>
             </a:xfrm>
             <a:custGeom>
@@ -2529,7 +2529,7 @@
           </p:nvSpPr>
           <p:spPr>
             <a:xfrm>
-              <a:off x="5160528" y="2073503"/>
+              <a:off x="5640985" y="2073503"/>
               <a:ext cx="0" cy="3649639"/>
             </a:xfrm>
             <a:custGeom>
@@ -2572,7 +2572,7 @@
           </p:nvSpPr>
           <p:spPr>
             <a:xfrm>
-              <a:off x="6933186" y="2073503"/>
+              <a:off x="7695561" y="2073503"/>
               <a:ext cx="0" cy="3649639"/>
             </a:xfrm>
             <a:custGeom>
@@ -2830,7 +2830,7 @@
           </p:nvSpPr>
           <p:spPr>
             <a:xfrm>
-              <a:off x="2501542" y="2073503"/>
+              <a:off x="2559122" y="2073503"/>
               <a:ext cx="0" cy="3649639"/>
             </a:xfrm>
             <a:custGeom>
@@ -2873,7 +2873,7 @@
           </p:nvSpPr>
           <p:spPr>
             <a:xfrm>
-              <a:off x="4274200" y="2073503"/>
+              <a:off x="4613698" y="2073503"/>
               <a:ext cx="0" cy="3649639"/>
             </a:xfrm>
             <a:custGeom>
@@ -2916,7 +2916,7 @@
           </p:nvSpPr>
           <p:spPr>
             <a:xfrm>
-              <a:off x="6046857" y="2073503"/>
+              <a:off x="6668273" y="2073503"/>
               <a:ext cx="0" cy="3649639"/>
             </a:xfrm>
             <a:custGeom>
@@ -2953,580 +2953,546 @@
         </p:sp>
         <p:sp>
           <p:nvSpPr>
-            <p:cNvPr id="20" name="pl20"/>
+            <p:cNvPr id="20" name="pg20"/>
             <p:cNvSpPr/>
             <p:nvPr/>
           </p:nvSpPr>
           <p:spPr>
             <a:xfrm>
-              <a:off x="7819515" y="2073503"/>
-              <a:ext cx="0" cy="3649639"/>
+              <a:off x="1172049" y="2073503"/>
+              <a:ext cx="7090630" cy="3459975"/>
             </a:xfrm>
             <a:custGeom>
               <a:avLst/>
               <a:pathLst>
-                <a:path w="0" h="3649639">
+                <a:path w="7090630" h="3459975">
                   <a:moveTo>
-                    <a:pt x="0" y="3649639"/>
+                    <a:pt x="1764047" y="0"/>
                   </a:moveTo>
                   <a:lnTo>
-                    <a:pt x="0" y="0"/>
-                  </a:lnTo>
-                  <a:lnTo>
-                    <a:pt x="0" y="0"/>
-                  </a:lnTo>
-                </a:path>
-              </a:pathLst>
-            </a:custGeom>
-            <a:ln w="13550" cap="flat">
-              <a:solidFill>
-                <a:srgbClr val="EBEBEB">
-                  <a:alpha val="100000"/>
-                </a:srgbClr>
-              </a:solidFill>
-              <a:prstDash val="solid"/>
-              <a:round/>
-            </a:ln>
-          </p:spPr>
-          <p:txBody>
-            <a:bodyPr/>
-            <a:lstStyle/>
-            <a:p/>
-          </p:txBody>
-        </p:sp>
-        <p:sp>
-          <p:nvSpPr>
-            <p:cNvPr id="21" name="pg21"/>
-            <p:cNvSpPr/>
-            <p:nvPr/>
-          </p:nvSpPr>
-          <p:spPr>
-            <a:xfrm>
-              <a:off x="817517" y="2073503"/>
-              <a:ext cx="7392041" cy="3459975"/>
-            </a:xfrm>
-            <a:custGeom>
-              <a:avLst/>
-              <a:pathLst>
-                <a:path w="7392041" h="3459975">
-                  <a:moveTo>
-                    <a:pt x="1647420" y="0"/>
-                  </a:moveTo>
-                  <a:lnTo>
-                    <a:pt x="1676016" y="87207"/>
-                  </a:lnTo>
-                  <a:lnTo>
-                    <a:pt x="1753260" y="307491"/>
-                  </a:lnTo>
-                  <a:lnTo>
-                    <a:pt x="1830504" y="513489"/>
-                  </a:lnTo>
-                  <a:lnTo>
-                    <a:pt x="1907747" y="706127"/>
-                  </a:lnTo>
-                  <a:lnTo>
-                    <a:pt x="1984991" y="886271"/>
-                  </a:lnTo>
-                  <a:lnTo>
-                    <a:pt x="2062234" y="1054732"/>
-                  </a:lnTo>
-                  <a:lnTo>
-                    <a:pt x="2139478" y="1212267"/>
-                  </a:lnTo>
-                  <a:lnTo>
-                    <a:pt x="2216721" y="1359585"/>
-                  </a:lnTo>
-                  <a:lnTo>
-                    <a:pt x="2293965" y="1497349"/>
-                  </a:lnTo>
-                  <a:lnTo>
-                    <a:pt x="2371209" y="1626178"/>
-                  </a:lnTo>
-                  <a:lnTo>
-                    <a:pt x="2448452" y="1746652"/>
-                  </a:lnTo>
-                  <a:lnTo>
-                    <a:pt x="2525696" y="1859312"/>
-                  </a:lnTo>
-                  <a:lnTo>
-                    <a:pt x="2602939" y="1964666"/>
-                  </a:lnTo>
-                  <a:lnTo>
-                    <a:pt x="2680183" y="2063187"/>
-                  </a:lnTo>
-                  <a:lnTo>
-                    <a:pt x="2757426" y="2155318"/>
-                  </a:lnTo>
-                  <a:lnTo>
-                    <a:pt x="2834670" y="2241474"/>
-                  </a:lnTo>
-                  <a:lnTo>
-                    <a:pt x="2911914" y="2322042"/>
-                  </a:lnTo>
-                  <a:lnTo>
-                    <a:pt x="2989157" y="2397385"/>
-                  </a:lnTo>
-                  <a:lnTo>
-                    <a:pt x="3066401" y="2467842"/>
-                  </a:lnTo>
-                  <a:lnTo>
-                    <a:pt x="3143644" y="2533729"/>
-                  </a:lnTo>
-                  <a:lnTo>
-                    <a:pt x="3220888" y="2595343"/>
-                  </a:lnTo>
-                  <a:lnTo>
-                    <a:pt x="3298131" y="2652961"/>
-                  </a:lnTo>
-                  <a:lnTo>
-                    <a:pt x="3375375" y="2676126"/>
-                  </a:lnTo>
-                  <a:lnTo>
-                    <a:pt x="3452619" y="2697905"/>
-                  </a:lnTo>
-                  <a:lnTo>
-                    <a:pt x="3529862" y="2719096"/>
-                  </a:lnTo>
-                  <a:lnTo>
-                    <a:pt x="3607106" y="2739716"/>
-                  </a:lnTo>
-                  <a:lnTo>
-                    <a:pt x="3684349" y="2759780"/>
-                  </a:lnTo>
-                  <a:lnTo>
-                    <a:pt x="3761593" y="2779302"/>
-                  </a:lnTo>
-                  <a:lnTo>
-                    <a:pt x="3838836" y="2798299"/>
-                  </a:lnTo>
-                  <a:lnTo>
-                    <a:pt x="3916080" y="2816783"/>
-                  </a:lnTo>
-                  <a:lnTo>
-                    <a:pt x="3993324" y="2834768"/>
-                  </a:lnTo>
-                  <a:lnTo>
-                    <a:pt x="4070567" y="2852269"/>
-                  </a:lnTo>
-                  <a:lnTo>
-                    <a:pt x="4147811" y="2869297"/>
-                  </a:lnTo>
-                  <a:lnTo>
-                    <a:pt x="4225054" y="2885867"/>
-                  </a:lnTo>
-                  <a:lnTo>
-                    <a:pt x="4302298" y="2901989"/>
-                  </a:lnTo>
-                  <a:lnTo>
-                    <a:pt x="4379541" y="2917677"/>
-                  </a:lnTo>
-                  <a:lnTo>
-                    <a:pt x="4456785" y="2932942"/>
-                  </a:lnTo>
-                  <a:lnTo>
-                    <a:pt x="4534029" y="2947795"/>
-                  </a:lnTo>
-                  <a:lnTo>
-                    <a:pt x="4611272" y="2962248"/>
-                  </a:lnTo>
-                  <a:lnTo>
-                    <a:pt x="4688516" y="2976311"/>
-                  </a:lnTo>
-                  <a:lnTo>
-                    <a:pt x="4765759" y="2989994"/>
-                  </a:lnTo>
-                  <a:lnTo>
-                    <a:pt x="4843003" y="3003309"/>
-                  </a:lnTo>
-                  <a:lnTo>
-                    <a:pt x="4920246" y="3016265"/>
-                  </a:lnTo>
-                  <a:lnTo>
-                    <a:pt x="4997490" y="3028871"/>
-                  </a:lnTo>
-                  <a:lnTo>
-                    <a:pt x="5074734" y="3041137"/>
-                  </a:lnTo>
-                  <a:lnTo>
-                    <a:pt x="5151977" y="3053073"/>
-                  </a:lnTo>
-                  <a:lnTo>
-                    <a:pt x="5229221" y="3064686"/>
-                  </a:lnTo>
-                  <a:lnTo>
-                    <a:pt x="5306464" y="3075987"/>
-                  </a:lnTo>
-                  <a:lnTo>
-                    <a:pt x="5383708" y="3086983"/>
-                  </a:lnTo>
-                  <a:lnTo>
-                    <a:pt x="5460951" y="3097682"/>
-                  </a:lnTo>
-                  <a:lnTo>
-                    <a:pt x="5538195" y="3108093"/>
-                  </a:lnTo>
-                  <a:lnTo>
-                    <a:pt x="5615439" y="3118223"/>
-                  </a:lnTo>
-                  <a:lnTo>
-                    <a:pt x="5692682" y="3128080"/>
-                  </a:lnTo>
-                  <a:lnTo>
-                    <a:pt x="5769926" y="3137671"/>
-                  </a:lnTo>
-                  <a:lnTo>
-                    <a:pt x="5847169" y="3147003"/>
-                  </a:lnTo>
-                  <a:lnTo>
-                    <a:pt x="5924413" y="3156084"/>
-                  </a:lnTo>
-                  <a:lnTo>
-                    <a:pt x="6001656" y="3164920"/>
-                  </a:lnTo>
-                  <a:lnTo>
-                    <a:pt x="6078900" y="3173517"/>
-                  </a:lnTo>
-                  <a:lnTo>
-                    <a:pt x="6156144" y="3181883"/>
-                  </a:lnTo>
-                  <a:lnTo>
-                    <a:pt x="6233387" y="3190023"/>
-                  </a:lnTo>
-                  <a:lnTo>
-                    <a:pt x="6310631" y="3197944"/>
-                  </a:lnTo>
-                  <a:lnTo>
-                    <a:pt x="6387874" y="3205651"/>
-                  </a:lnTo>
-                  <a:lnTo>
-                    <a:pt x="6465118" y="3213150"/>
-                  </a:lnTo>
-                  <a:lnTo>
-                    <a:pt x="6542361" y="3220447"/>
-                  </a:lnTo>
-                  <a:lnTo>
-                    <a:pt x="6619605" y="3227547"/>
-                  </a:lnTo>
-                  <a:lnTo>
-                    <a:pt x="6696849" y="3234456"/>
-                  </a:lnTo>
-                  <a:lnTo>
-                    <a:pt x="6774092" y="3241178"/>
-                  </a:lnTo>
-                  <a:lnTo>
-                    <a:pt x="6851336" y="3247720"/>
-                  </a:lnTo>
-                  <a:lnTo>
-                    <a:pt x="6928579" y="3254084"/>
-                  </a:lnTo>
-                  <a:lnTo>
-                    <a:pt x="7005823" y="3260277"/>
-                  </a:lnTo>
-                  <a:lnTo>
-                    <a:pt x="7083066" y="3266304"/>
-                  </a:lnTo>
-                  <a:lnTo>
-                    <a:pt x="7160310" y="3272167"/>
-                  </a:lnTo>
-                  <a:lnTo>
-                    <a:pt x="7237554" y="3277873"/>
-                  </a:lnTo>
-                  <a:lnTo>
-                    <a:pt x="7314797" y="3283424"/>
-                  </a:lnTo>
-                  <a:lnTo>
-                    <a:pt x="7392041" y="3288826"/>
-                  </a:lnTo>
-                  <a:lnTo>
-                    <a:pt x="7392041" y="3459975"/>
-                  </a:lnTo>
-                  <a:lnTo>
-                    <a:pt x="7314797" y="3458326"/>
-                  </a:lnTo>
-                  <a:lnTo>
-                    <a:pt x="7237554" y="3456563"/>
-                  </a:lnTo>
-                  <a:lnTo>
-                    <a:pt x="7160310" y="3454678"/>
-                  </a:lnTo>
-                  <a:lnTo>
-                    <a:pt x="7083066" y="3452662"/>
-                  </a:lnTo>
-                  <a:lnTo>
-                    <a:pt x="7005823" y="3450506"/>
-                  </a:lnTo>
-                  <a:lnTo>
-                    <a:pt x="6928579" y="3448201"/>
-                  </a:lnTo>
-                  <a:lnTo>
-                    <a:pt x="6851336" y="3445735"/>
-                  </a:lnTo>
-                  <a:lnTo>
-                    <a:pt x="6774092" y="3443099"/>
-                  </a:lnTo>
-                  <a:lnTo>
-                    <a:pt x="6696849" y="3440280"/>
-                  </a:lnTo>
-                  <a:lnTo>
-                    <a:pt x="6619605" y="3437266"/>
-                  </a:lnTo>
-                  <a:lnTo>
-                    <a:pt x="6542361" y="3434042"/>
-                  </a:lnTo>
-                  <a:lnTo>
-                    <a:pt x="6465118" y="3430595"/>
-                  </a:lnTo>
-                  <a:lnTo>
-                    <a:pt x="6387874" y="3426909"/>
-                  </a:lnTo>
-                  <a:lnTo>
-                    <a:pt x="6310631" y="3422967"/>
-                  </a:lnTo>
-                  <a:lnTo>
-                    <a:pt x="6233387" y="3418752"/>
-                  </a:lnTo>
-                  <a:lnTo>
-                    <a:pt x="6156144" y="3414244"/>
-                  </a:lnTo>
-                  <a:lnTo>
-                    <a:pt x="6078900" y="3409424"/>
-                  </a:lnTo>
-                  <a:lnTo>
-                    <a:pt x="6001656" y="3404269"/>
-                  </a:lnTo>
-                  <a:lnTo>
-                    <a:pt x="5924413" y="3398757"/>
-                  </a:lnTo>
-                  <a:lnTo>
-                    <a:pt x="5847169" y="3392863"/>
-                  </a:lnTo>
-                  <a:lnTo>
-                    <a:pt x="5769926" y="3386560"/>
-                  </a:lnTo>
-                  <a:lnTo>
-                    <a:pt x="5692682" y="3379819"/>
-                  </a:lnTo>
-                  <a:lnTo>
-                    <a:pt x="5615439" y="3372612"/>
-                  </a:lnTo>
-                  <a:lnTo>
-                    <a:pt x="5538195" y="3364904"/>
-                  </a:lnTo>
-                  <a:lnTo>
-                    <a:pt x="5460951" y="3356662"/>
-                  </a:lnTo>
-                  <a:lnTo>
-                    <a:pt x="5383708" y="3347848"/>
-                  </a:lnTo>
-                  <a:lnTo>
-                    <a:pt x="5306464" y="3338423"/>
-                  </a:lnTo>
-                  <a:lnTo>
-                    <a:pt x="5229221" y="3328345"/>
-                  </a:lnTo>
-                  <a:lnTo>
-                    <a:pt x="5151977" y="3317567"/>
-                  </a:lnTo>
-                  <a:lnTo>
-                    <a:pt x="5074734" y="3306042"/>
-                  </a:lnTo>
-                  <a:lnTo>
-                    <a:pt x="4997490" y="3293717"/>
-                  </a:lnTo>
-                  <a:lnTo>
-                    <a:pt x="4920246" y="3280538"/>
-                  </a:lnTo>
-                  <a:lnTo>
-                    <a:pt x="4843003" y="3266445"/>
-                  </a:lnTo>
-                  <a:lnTo>
-                    <a:pt x="4765759" y="3251374"/>
-                  </a:lnTo>
-                  <a:lnTo>
-                    <a:pt x="4688516" y="3235258"/>
-                  </a:lnTo>
-                  <a:lnTo>
-                    <a:pt x="4611272" y="3218025"/>
-                  </a:lnTo>
-                  <a:lnTo>
-                    <a:pt x="4534029" y="3199596"/>
-                  </a:lnTo>
-                  <a:lnTo>
-                    <a:pt x="4456785" y="3179889"/>
-                  </a:lnTo>
-                  <a:lnTo>
-                    <a:pt x="4379541" y="3158816"/>
-                  </a:lnTo>
-                  <a:lnTo>
-                    <a:pt x="4302298" y="3136281"/>
-                  </a:lnTo>
-                  <a:lnTo>
-                    <a:pt x="4225054" y="3112183"/>
-                  </a:lnTo>
-                  <a:lnTo>
-                    <a:pt x="4147811" y="3086414"/>
-                  </a:lnTo>
-                  <a:lnTo>
-                    <a:pt x="4070567" y="3058857"/>
-                  </a:lnTo>
-                  <a:lnTo>
-                    <a:pt x="3993324" y="3029390"/>
-                  </a:lnTo>
-                  <a:lnTo>
-                    <a:pt x="3916080" y="2997878"/>
-                  </a:lnTo>
-                  <a:lnTo>
-                    <a:pt x="3838836" y="2964182"/>
-                  </a:lnTo>
-                  <a:lnTo>
-                    <a:pt x="3761593" y="2928148"/>
-                  </a:lnTo>
-                  <a:lnTo>
-                    <a:pt x="3684349" y="2889615"/>
-                  </a:lnTo>
-                  <a:lnTo>
-                    <a:pt x="3607106" y="2848410"/>
-                  </a:lnTo>
-                  <a:lnTo>
-                    <a:pt x="3529862" y="2804347"/>
-                  </a:lnTo>
-                  <a:lnTo>
-                    <a:pt x="3452619" y="2757228"/>
-                  </a:lnTo>
-                  <a:lnTo>
-                    <a:pt x="3375375" y="2706842"/>
-                  </a:lnTo>
-                  <a:lnTo>
-                    <a:pt x="3298131" y="2653744"/>
-                  </a:lnTo>
-                  <a:lnTo>
-                    <a:pt x="3220888" y="2630742"/>
-                  </a:lnTo>
-                  <a:lnTo>
-                    <a:pt x="3143644" y="2607102"/>
-                  </a:lnTo>
-                  <a:lnTo>
-                    <a:pt x="3066401" y="2582807"/>
-                  </a:lnTo>
-                  <a:lnTo>
-                    <a:pt x="2989157" y="2557838"/>
-                  </a:lnTo>
-                  <a:lnTo>
-                    <a:pt x="2911914" y="2532178"/>
-                  </a:lnTo>
-                  <a:lnTo>
-                    <a:pt x="2834670" y="2505807"/>
-                  </a:lnTo>
-                  <a:lnTo>
-                    <a:pt x="2757426" y="2478704"/>
-                  </a:lnTo>
-                  <a:lnTo>
-                    <a:pt x="2680183" y="2450851"/>
-                  </a:lnTo>
-                  <a:lnTo>
-                    <a:pt x="2602939" y="2422226"/>
-                  </a:lnTo>
-                  <a:lnTo>
-                    <a:pt x="2525696" y="2392807"/>
-                  </a:lnTo>
-                  <a:lnTo>
-                    <a:pt x="2448452" y="2362573"/>
-                  </a:lnTo>
-                  <a:lnTo>
-                    <a:pt x="2371209" y="2331501"/>
-                  </a:lnTo>
-                  <a:lnTo>
-                    <a:pt x="2293965" y="2299569"/>
-                  </a:lnTo>
-                  <a:lnTo>
-                    <a:pt x="2216721" y="2266751"/>
-                  </a:lnTo>
-                  <a:lnTo>
-                    <a:pt x="2139478" y="2233023"/>
-                  </a:lnTo>
-                  <a:lnTo>
-                    <a:pt x="2062234" y="2198361"/>
-                  </a:lnTo>
-                  <a:lnTo>
-                    <a:pt x="1984991" y="2162738"/>
-                  </a:lnTo>
-                  <a:lnTo>
-                    <a:pt x="1907747" y="2126128"/>
-                  </a:lnTo>
-                  <a:lnTo>
-                    <a:pt x="1830504" y="2088504"/>
-                  </a:lnTo>
-                  <a:lnTo>
-                    <a:pt x="1753260" y="2049837"/>
-                  </a:lnTo>
-                  <a:lnTo>
-                    <a:pt x="1676016" y="2010098"/>
-                  </a:lnTo>
-                  <a:lnTo>
-                    <a:pt x="1598773" y="1969258"/>
-                  </a:lnTo>
-                  <a:lnTo>
-                    <a:pt x="1521529" y="1927286"/>
-                  </a:lnTo>
-                  <a:lnTo>
-                    <a:pt x="1444286" y="1884150"/>
-                  </a:lnTo>
-                  <a:lnTo>
-                    <a:pt x="1367042" y="1839820"/>
-                  </a:lnTo>
-                  <a:lnTo>
-                    <a:pt x="1289799" y="1794260"/>
-                  </a:lnTo>
-                  <a:lnTo>
-                    <a:pt x="1212555" y="1747439"/>
-                  </a:lnTo>
-                  <a:lnTo>
-                    <a:pt x="1135311" y="1699319"/>
-                  </a:lnTo>
-                  <a:lnTo>
-                    <a:pt x="1058068" y="1649866"/>
-                  </a:lnTo>
-                  <a:lnTo>
-                    <a:pt x="980824" y="1599043"/>
-                  </a:lnTo>
-                  <a:lnTo>
-                    <a:pt x="903581" y="1546811"/>
-                  </a:lnTo>
-                  <a:lnTo>
-                    <a:pt x="826337" y="1493131"/>
-                  </a:lnTo>
-                  <a:lnTo>
-                    <a:pt x="749094" y="1437964"/>
-                  </a:lnTo>
-                  <a:lnTo>
-                    <a:pt x="671850" y="1381268"/>
-                  </a:lnTo>
-                  <a:lnTo>
-                    <a:pt x="594606" y="1323000"/>
-                  </a:lnTo>
-                  <a:lnTo>
-                    <a:pt x="517363" y="1263118"/>
-                  </a:lnTo>
-                  <a:lnTo>
-                    <a:pt x="440119" y="1201576"/>
-                  </a:lnTo>
-                  <a:lnTo>
-                    <a:pt x="362876" y="1138329"/>
-                  </a:lnTo>
-                  <a:lnTo>
-                    <a:pt x="285632" y="1073329"/>
-                  </a:lnTo>
-                  <a:lnTo>
-                    <a:pt x="208389" y="1006528"/>
-                  </a:lnTo>
-                  <a:lnTo>
-                    <a:pt x="131145" y="937875"/>
-                  </a:lnTo>
-                  <a:lnTo>
-                    <a:pt x="53901" y="867319"/>
-                  </a:lnTo>
-                  <a:lnTo>
-                    <a:pt x="0" y="816720"/>
+                    <a:pt x="1790563" y="87207"/>
+                  </a:lnTo>
+                  <a:lnTo>
+                    <a:pt x="1862185" y="307491"/>
+                  </a:lnTo>
+                  <a:lnTo>
+                    <a:pt x="1933808" y="513489"/>
+                  </a:lnTo>
+                  <a:lnTo>
+                    <a:pt x="2005430" y="706127"/>
+                  </a:lnTo>
+                  <a:lnTo>
+                    <a:pt x="2077053" y="886271"/>
+                  </a:lnTo>
+                  <a:lnTo>
+                    <a:pt x="2148675" y="1054732"/>
+                  </a:lnTo>
+                  <a:lnTo>
+                    <a:pt x="2220298" y="1212267"/>
+                  </a:lnTo>
+                  <a:lnTo>
+                    <a:pt x="2291920" y="1359585"/>
+                  </a:lnTo>
+                  <a:lnTo>
+                    <a:pt x="2363543" y="1497349"/>
+                  </a:lnTo>
+                  <a:lnTo>
+                    <a:pt x="2435165" y="1626178"/>
+                  </a:lnTo>
+                  <a:lnTo>
+                    <a:pt x="2506788" y="1746652"/>
+                  </a:lnTo>
+                  <a:lnTo>
+                    <a:pt x="2578410" y="1859312"/>
+                  </a:lnTo>
+                  <a:lnTo>
+                    <a:pt x="2650033" y="1964666"/>
+                  </a:lnTo>
+                  <a:lnTo>
+                    <a:pt x="2721655" y="2063187"/>
+                  </a:lnTo>
+                  <a:lnTo>
+                    <a:pt x="2793278" y="2155318"/>
+                  </a:lnTo>
+                  <a:lnTo>
+                    <a:pt x="2864901" y="2241474"/>
+                  </a:lnTo>
+                  <a:lnTo>
+                    <a:pt x="2936523" y="2322042"/>
+                  </a:lnTo>
+                  <a:lnTo>
+                    <a:pt x="3008146" y="2397385"/>
+                  </a:lnTo>
+                  <a:lnTo>
+                    <a:pt x="3079768" y="2467842"/>
+                  </a:lnTo>
+                  <a:lnTo>
+                    <a:pt x="3151391" y="2533729"/>
+                  </a:lnTo>
+                  <a:lnTo>
+                    <a:pt x="3223013" y="2595343"/>
+                  </a:lnTo>
+                  <a:lnTo>
+                    <a:pt x="3294636" y="2652961"/>
+                  </a:lnTo>
+                  <a:lnTo>
+                    <a:pt x="3366258" y="2676126"/>
+                  </a:lnTo>
+                  <a:lnTo>
+                    <a:pt x="3437881" y="2697905"/>
+                  </a:lnTo>
+                  <a:lnTo>
+                    <a:pt x="3509503" y="2719096"/>
+                  </a:lnTo>
+                  <a:lnTo>
+                    <a:pt x="3581126" y="2739716"/>
+                  </a:lnTo>
+                  <a:lnTo>
+                    <a:pt x="3652748" y="2759780"/>
+                  </a:lnTo>
+                  <a:lnTo>
+                    <a:pt x="3724371" y="2779302"/>
+                  </a:lnTo>
+                  <a:lnTo>
+                    <a:pt x="3795993" y="2798299"/>
+                  </a:lnTo>
+                  <a:lnTo>
+                    <a:pt x="3867616" y="2816783"/>
+                  </a:lnTo>
+                  <a:lnTo>
+                    <a:pt x="3939238" y="2834768"/>
+                  </a:lnTo>
+                  <a:lnTo>
+                    <a:pt x="4010861" y="2852269"/>
+                  </a:lnTo>
+                  <a:lnTo>
+                    <a:pt x="4082483" y="2869297"/>
+                  </a:lnTo>
+                  <a:lnTo>
+                    <a:pt x="4154106" y="2885867"/>
+                  </a:lnTo>
+                  <a:lnTo>
+                    <a:pt x="4225729" y="2901989"/>
+                  </a:lnTo>
+                  <a:lnTo>
+                    <a:pt x="4297351" y="2917677"/>
+                  </a:lnTo>
+                  <a:lnTo>
+                    <a:pt x="4368974" y="2932942"/>
+                  </a:lnTo>
+                  <a:lnTo>
+                    <a:pt x="4440596" y="2947795"/>
+                  </a:lnTo>
+                  <a:lnTo>
+                    <a:pt x="4512219" y="2962248"/>
+                  </a:lnTo>
+                  <a:lnTo>
+                    <a:pt x="4583841" y="2976311"/>
+                  </a:lnTo>
+                  <a:lnTo>
+                    <a:pt x="4655464" y="2989994"/>
+                  </a:lnTo>
+                  <a:lnTo>
+                    <a:pt x="4727086" y="3003309"/>
+                  </a:lnTo>
+                  <a:lnTo>
+                    <a:pt x="4798709" y="3016265"/>
+                  </a:lnTo>
+                  <a:lnTo>
+                    <a:pt x="4870331" y="3028871"/>
+                  </a:lnTo>
+                  <a:lnTo>
+                    <a:pt x="4941954" y="3041137"/>
+                  </a:lnTo>
+                  <a:lnTo>
+                    <a:pt x="5013576" y="3053073"/>
+                  </a:lnTo>
+                  <a:lnTo>
+                    <a:pt x="5085199" y="3064686"/>
+                  </a:lnTo>
+                  <a:lnTo>
+                    <a:pt x="5156821" y="3075987"/>
+                  </a:lnTo>
+                  <a:lnTo>
+                    <a:pt x="5228444" y="3086983"/>
+                  </a:lnTo>
+                  <a:lnTo>
+                    <a:pt x="5300066" y="3097682"/>
+                  </a:lnTo>
+                  <a:lnTo>
+                    <a:pt x="5371689" y="3108093"/>
+                  </a:lnTo>
+                  <a:lnTo>
+                    <a:pt x="5443311" y="3118223"/>
+                  </a:lnTo>
+                  <a:lnTo>
+                    <a:pt x="5514934" y="3128080"/>
+                  </a:lnTo>
+                  <a:lnTo>
+                    <a:pt x="5586557" y="3137671"/>
+                  </a:lnTo>
+                  <a:lnTo>
+                    <a:pt x="5658179" y="3147003"/>
+                  </a:lnTo>
+                  <a:lnTo>
+                    <a:pt x="5729802" y="3156084"/>
+                  </a:lnTo>
+                  <a:lnTo>
+                    <a:pt x="5801424" y="3164920"/>
+                  </a:lnTo>
+                  <a:lnTo>
+                    <a:pt x="5873047" y="3173517"/>
+                  </a:lnTo>
+                  <a:lnTo>
+                    <a:pt x="5944669" y="3181883"/>
+                  </a:lnTo>
+                  <a:lnTo>
+                    <a:pt x="6016292" y="3190023"/>
+                  </a:lnTo>
+                  <a:lnTo>
+                    <a:pt x="6087914" y="3197944"/>
+                  </a:lnTo>
+                  <a:lnTo>
+                    <a:pt x="6159537" y="3205651"/>
+                  </a:lnTo>
+                  <a:lnTo>
+                    <a:pt x="6231159" y="3213150"/>
+                  </a:lnTo>
+                  <a:lnTo>
+                    <a:pt x="6302782" y="3220447"/>
+                  </a:lnTo>
+                  <a:lnTo>
+                    <a:pt x="6374404" y="3227547"/>
+                  </a:lnTo>
+                  <a:lnTo>
+                    <a:pt x="6446027" y="3234456"/>
+                  </a:lnTo>
+                  <a:lnTo>
+                    <a:pt x="6517649" y="3241178"/>
+                  </a:lnTo>
+                  <a:lnTo>
+                    <a:pt x="6589272" y="3247720"/>
+                  </a:lnTo>
+                  <a:lnTo>
+                    <a:pt x="6660894" y="3254084"/>
+                  </a:lnTo>
+                  <a:lnTo>
+                    <a:pt x="6732517" y="3260277"/>
+                  </a:lnTo>
+                  <a:lnTo>
+                    <a:pt x="6804139" y="3266304"/>
+                  </a:lnTo>
+                  <a:lnTo>
+                    <a:pt x="6875762" y="3272167"/>
+                  </a:lnTo>
+                  <a:lnTo>
+                    <a:pt x="6947385" y="3277873"/>
+                  </a:lnTo>
+                  <a:lnTo>
+                    <a:pt x="7019007" y="3283424"/>
+                  </a:lnTo>
+                  <a:lnTo>
+                    <a:pt x="7090630" y="3288826"/>
+                  </a:lnTo>
+                  <a:lnTo>
+                    <a:pt x="7090630" y="3459975"/>
+                  </a:lnTo>
+                  <a:lnTo>
+                    <a:pt x="7019007" y="3458326"/>
+                  </a:lnTo>
+                  <a:lnTo>
+                    <a:pt x="6947385" y="3456563"/>
+                  </a:lnTo>
+                  <a:lnTo>
+                    <a:pt x="6875762" y="3454678"/>
+                  </a:lnTo>
+                  <a:lnTo>
+                    <a:pt x="6804139" y="3452662"/>
+                  </a:lnTo>
+                  <a:lnTo>
+                    <a:pt x="6732517" y="3450506"/>
+                  </a:lnTo>
+                  <a:lnTo>
+                    <a:pt x="6660894" y="3448201"/>
+                  </a:lnTo>
+                  <a:lnTo>
+                    <a:pt x="6589272" y="3445735"/>
+                  </a:lnTo>
+                  <a:lnTo>
+                    <a:pt x="6517649" y="3443099"/>
+                  </a:lnTo>
+                  <a:lnTo>
+                    <a:pt x="6446027" y="3440280"/>
+                  </a:lnTo>
+                  <a:lnTo>
+                    <a:pt x="6374404" y="3437266"/>
+                  </a:lnTo>
+                  <a:lnTo>
+                    <a:pt x="6302782" y="3434042"/>
+                  </a:lnTo>
+                  <a:lnTo>
+                    <a:pt x="6231159" y="3430595"/>
+                  </a:lnTo>
+                  <a:lnTo>
+                    <a:pt x="6159537" y="3426909"/>
+                  </a:lnTo>
+                  <a:lnTo>
+                    <a:pt x="6087914" y="3422967"/>
+                  </a:lnTo>
+                  <a:lnTo>
+                    <a:pt x="6016292" y="3418752"/>
+                  </a:lnTo>
+                  <a:lnTo>
+                    <a:pt x="5944669" y="3414244"/>
+                  </a:lnTo>
+                  <a:lnTo>
+                    <a:pt x="5873047" y="3409424"/>
+                  </a:lnTo>
+                  <a:lnTo>
+                    <a:pt x="5801424" y="3404269"/>
+                  </a:lnTo>
+                  <a:lnTo>
+                    <a:pt x="5729802" y="3398757"/>
+                  </a:lnTo>
+                  <a:lnTo>
+                    <a:pt x="5658179" y="3392863"/>
+                  </a:lnTo>
+                  <a:lnTo>
+                    <a:pt x="5586557" y="3386560"/>
+                  </a:lnTo>
+                  <a:lnTo>
+                    <a:pt x="5514934" y="3379819"/>
+                  </a:lnTo>
+                  <a:lnTo>
+                    <a:pt x="5443311" y="3372612"/>
+                  </a:lnTo>
+                  <a:lnTo>
+                    <a:pt x="5371689" y="3364904"/>
+                  </a:lnTo>
+                  <a:lnTo>
+                    <a:pt x="5300066" y="3356662"/>
+                  </a:lnTo>
+                  <a:lnTo>
+                    <a:pt x="5228444" y="3347848"/>
+                  </a:lnTo>
+                  <a:lnTo>
+                    <a:pt x="5156821" y="3338423"/>
+                  </a:lnTo>
+                  <a:lnTo>
+                    <a:pt x="5085199" y="3328345"/>
+                  </a:lnTo>
+                  <a:lnTo>
+                    <a:pt x="5013576" y="3317567"/>
+                  </a:lnTo>
+                  <a:lnTo>
+                    <a:pt x="4941954" y="3306042"/>
+                  </a:lnTo>
+                  <a:lnTo>
+                    <a:pt x="4870331" y="3293717"/>
+                  </a:lnTo>
+                  <a:lnTo>
+                    <a:pt x="4798709" y="3280538"/>
+                  </a:lnTo>
+                  <a:lnTo>
+                    <a:pt x="4727086" y="3266445"/>
+                  </a:lnTo>
+                  <a:lnTo>
+                    <a:pt x="4655464" y="3251374"/>
+                  </a:lnTo>
+                  <a:lnTo>
+                    <a:pt x="4583841" y="3235258"/>
+                  </a:lnTo>
+                  <a:lnTo>
+                    <a:pt x="4512219" y="3218025"/>
+                  </a:lnTo>
+                  <a:lnTo>
+                    <a:pt x="4440596" y="3199596"/>
+                  </a:lnTo>
+                  <a:lnTo>
+                    <a:pt x="4368974" y="3179889"/>
+                  </a:lnTo>
+                  <a:lnTo>
+                    <a:pt x="4297351" y="3158816"/>
+                  </a:lnTo>
+                  <a:lnTo>
+                    <a:pt x="4225729" y="3136281"/>
+                  </a:lnTo>
+                  <a:lnTo>
+                    <a:pt x="4154106" y="3112183"/>
+                  </a:lnTo>
+                  <a:lnTo>
+                    <a:pt x="4082483" y="3086414"/>
+                  </a:lnTo>
+                  <a:lnTo>
+                    <a:pt x="4010861" y="3058857"/>
+                  </a:lnTo>
+                  <a:lnTo>
+                    <a:pt x="3939238" y="3029390"/>
+                  </a:lnTo>
+                  <a:lnTo>
+                    <a:pt x="3867616" y="2997878"/>
+                  </a:lnTo>
+                  <a:lnTo>
+                    <a:pt x="3795993" y="2964182"/>
+                  </a:lnTo>
+                  <a:lnTo>
+                    <a:pt x="3724371" y="2928148"/>
+                  </a:lnTo>
+                  <a:lnTo>
+                    <a:pt x="3652748" y="2889615"/>
+                  </a:lnTo>
+                  <a:lnTo>
+                    <a:pt x="3581126" y="2848410"/>
+                  </a:lnTo>
+                  <a:lnTo>
+                    <a:pt x="3509503" y="2804347"/>
+                  </a:lnTo>
+                  <a:lnTo>
+                    <a:pt x="3437881" y="2757228"/>
+                  </a:lnTo>
+                  <a:lnTo>
+                    <a:pt x="3366258" y="2706842"/>
+                  </a:lnTo>
+                  <a:lnTo>
+                    <a:pt x="3294636" y="2653744"/>
+                  </a:lnTo>
+                  <a:lnTo>
+                    <a:pt x="3223013" y="2630742"/>
+                  </a:lnTo>
+                  <a:lnTo>
+                    <a:pt x="3151391" y="2607102"/>
+                  </a:lnTo>
+                  <a:lnTo>
+                    <a:pt x="3079768" y="2582807"/>
+                  </a:lnTo>
+                  <a:lnTo>
+                    <a:pt x="3008146" y="2557838"/>
+                  </a:lnTo>
+                  <a:lnTo>
+                    <a:pt x="2936523" y="2532178"/>
+                  </a:lnTo>
+                  <a:lnTo>
+                    <a:pt x="2864901" y="2505807"/>
+                  </a:lnTo>
+                  <a:lnTo>
+                    <a:pt x="2793278" y="2478704"/>
+                  </a:lnTo>
+                  <a:lnTo>
+                    <a:pt x="2721655" y="2450851"/>
+                  </a:lnTo>
+                  <a:lnTo>
+                    <a:pt x="2650033" y="2422226"/>
+                  </a:lnTo>
+                  <a:lnTo>
+                    <a:pt x="2578410" y="2392807"/>
+                  </a:lnTo>
+                  <a:lnTo>
+                    <a:pt x="2506788" y="2362573"/>
+                  </a:lnTo>
+                  <a:lnTo>
+                    <a:pt x="2435165" y="2331501"/>
+                  </a:lnTo>
+                  <a:lnTo>
+                    <a:pt x="2363543" y="2299569"/>
+                  </a:lnTo>
+                  <a:lnTo>
+                    <a:pt x="2291920" y="2266751"/>
+                  </a:lnTo>
+                  <a:lnTo>
+                    <a:pt x="2220298" y="2233023"/>
+                  </a:lnTo>
+                  <a:lnTo>
+                    <a:pt x="2148675" y="2198361"/>
+                  </a:lnTo>
+                  <a:lnTo>
+                    <a:pt x="2077053" y="2162738"/>
+                  </a:lnTo>
+                  <a:lnTo>
+                    <a:pt x="2005430" y="2126128"/>
+                  </a:lnTo>
+                  <a:lnTo>
+                    <a:pt x="1933808" y="2088504"/>
+                  </a:lnTo>
+                  <a:lnTo>
+                    <a:pt x="1862185" y="2049837"/>
+                  </a:lnTo>
+                  <a:lnTo>
+                    <a:pt x="1790563" y="2010098"/>
+                  </a:lnTo>
+                  <a:lnTo>
+                    <a:pt x="1718940" y="1969258"/>
+                  </a:lnTo>
+                  <a:lnTo>
+                    <a:pt x="1647318" y="1927286"/>
+                  </a:lnTo>
+                  <a:lnTo>
+                    <a:pt x="1575695" y="1884150"/>
+                  </a:lnTo>
+                  <a:lnTo>
+                    <a:pt x="1504073" y="1839820"/>
+                  </a:lnTo>
+                  <a:lnTo>
+                    <a:pt x="1432450" y="1794260"/>
+                  </a:lnTo>
+                  <a:lnTo>
+                    <a:pt x="1360827" y="1747439"/>
+                  </a:lnTo>
+                  <a:lnTo>
+                    <a:pt x="1289205" y="1699319"/>
+                  </a:lnTo>
+                  <a:lnTo>
+                    <a:pt x="1217582" y="1649866"/>
+                  </a:lnTo>
+                  <a:lnTo>
+                    <a:pt x="1145960" y="1599043"/>
+                  </a:lnTo>
+                  <a:lnTo>
+                    <a:pt x="1074337" y="1546811"/>
+                  </a:lnTo>
+                  <a:lnTo>
+                    <a:pt x="1002715" y="1493131"/>
+                  </a:lnTo>
+                  <a:lnTo>
+                    <a:pt x="931092" y="1437964"/>
+                  </a:lnTo>
+                  <a:lnTo>
+                    <a:pt x="859470" y="1381268"/>
+                  </a:lnTo>
+                  <a:lnTo>
+                    <a:pt x="787847" y="1323000"/>
+                  </a:lnTo>
+                  <a:lnTo>
+                    <a:pt x="716225" y="1263118"/>
+                  </a:lnTo>
+                  <a:lnTo>
+                    <a:pt x="644602" y="1201576"/>
+                  </a:lnTo>
+                  <a:lnTo>
+                    <a:pt x="572980" y="1138329"/>
+                  </a:lnTo>
+                  <a:lnTo>
+                    <a:pt x="501357" y="1073329"/>
+                  </a:lnTo>
+                  <a:lnTo>
+                    <a:pt x="429735" y="1006528"/>
+                  </a:lnTo>
+                  <a:lnTo>
+                    <a:pt x="358112" y="937875"/>
+                  </a:lnTo>
+                  <a:lnTo>
+                    <a:pt x="286490" y="867319"/>
+                  </a:lnTo>
+                  <a:lnTo>
+                    <a:pt x="214867" y="794809"/>
+                  </a:lnTo>
+                  <a:lnTo>
+                    <a:pt x="143245" y="720288"/>
+                  </a:lnTo>
+                  <a:lnTo>
+                    <a:pt x="71622" y="643703"/>
+                  </a:lnTo>
+                  <a:lnTo>
+                    <a:pt x="0" y="564995"/>
                   </a:lnTo>
                   <a:close/>
                 </a:path>
@@ -3546,246 +3512,571 @@
         </p:sp>
         <p:sp>
           <p:nvSpPr>
+            <p:cNvPr id="21" name="pl21"/>
+            <p:cNvSpPr/>
+            <p:nvPr/>
+          </p:nvSpPr>
+          <p:spPr>
+            <a:xfrm>
+              <a:off x="2936097" y="2073503"/>
+              <a:ext cx="5326582" cy="3288826"/>
+            </a:xfrm>
+            <a:custGeom>
+              <a:avLst/>
+              <a:pathLst>
+                <a:path w="5326582" h="3288826">
+                  <a:moveTo>
+                    <a:pt x="0" y="0"/>
+                  </a:moveTo>
+                  <a:lnTo>
+                    <a:pt x="26515" y="87207"/>
+                  </a:lnTo>
+                  <a:lnTo>
+                    <a:pt x="98137" y="307491"/>
+                  </a:lnTo>
+                  <a:lnTo>
+                    <a:pt x="169760" y="513489"/>
+                  </a:lnTo>
+                  <a:lnTo>
+                    <a:pt x="241382" y="706127"/>
+                  </a:lnTo>
+                  <a:lnTo>
+                    <a:pt x="313005" y="886271"/>
+                  </a:lnTo>
+                  <a:lnTo>
+                    <a:pt x="384627" y="1054732"/>
+                  </a:lnTo>
+                  <a:lnTo>
+                    <a:pt x="456250" y="1212267"/>
+                  </a:lnTo>
+                  <a:lnTo>
+                    <a:pt x="527872" y="1359585"/>
+                  </a:lnTo>
+                  <a:lnTo>
+                    <a:pt x="599495" y="1497349"/>
+                  </a:lnTo>
+                  <a:lnTo>
+                    <a:pt x="671118" y="1626178"/>
+                  </a:lnTo>
+                  <a:lnTo>
+                    <a:pt x="742740" y="1746652"/>
+                  </a:lnTo>
+                  <a:lnTo>
+                    <a:pt x="814363" y="1859312"/>
+                  </a:lnTo>
+                  <a:lnTo>
+                    <a:pt x="885985" y="1964666"/>
+                  </a:lnTo>
+                  <a:lnTo>
+                    <a:pt x="957608" y="2063187"/>
+                  </a:lnTo>
+                  <a:lnTo>
+                    <a:pt x="1029230" y="2155318"/>
+                  </a:lnTo>
+                  <a:lnTo>
+                    <a:pt x="1100853" y="2241474"/>
+                  </a:lnTo>
+                  <a:lnTo>
+                    <a:pt x="1172475" y="2322042"/>
+                  </a:lnTo>
+                  <a:lnTo>
+                    <a:pt x="1244098" y="2397385"/>
+                  </a:lnTo>
+                  <a:lnTo>
+                    <a:pt x="1315720" y="2467842"/>
+                  </a:lnTo>
+                  <a:lnTo>
+                    <a:pt x="1387343" y="2533729"/>
+                  </a:lnTo>
+                  <a:lnTo>
+                    <a:pt x="1458965" y="2595343"/>
+                  </a:lnTo>
+                  <a:lnTo>
+                    <a:pt x="1530588" y="2652961"/>
+                  </a:lnTo>
+                  <a:lnTo>
+                    <a:pt x="1602210" y="2676126"/>
+                  </a:lnTo>
+                  <a:lnTo>
+                    <a:pt x="1673833" y="2697905"/>
+                  </a:lnTo>
+                  <a:lnTo>
+                    <a:pt x="1745455" y="2719096"/>
+                  </a:lnTo>
+                  <a:lnTo>
+                    <a:pt x="1817078" y="2739716"/>
+                  </a:lnTo>
+                  <a:lnTo>
+                    <a:pt x="1888700" y="2759780"/>
+                  </a:lnTo>
+                  <a:lnTo>
+                    <a:pt x="1960323" y="2779302"/>
+                  </a:lnTo>
+                  <a:lnTo>
+                    <a:pt x="2031946" y="2798299"/>
+                  </a:lnTo>
+                  <a:lnTo>
+                    <a:pt x="2103568" y="2816783"/>
+                  </a:lnTo>
+                  <a:lnTo>
+                    <a:pt x="2175191" y="2834768"/>
+                  </a:lnTo>
+                  <a:lnTo>
+                    <a:pt x="2246813" y="2852269"/>
+                  </a:lnTo>
+                  <a:lnTo>
+                    <a:pt x="2318436" y="2869297"/>
+                  </a:lnTo>
+                  <a:lnTo>
+                    <a:pt x="2390058" y="2885867"/>
+                  </a:lnTo>
+                  <a:lnTo>
+                    <a:pt x="2461681" y="2901989"/>
+                  </a:lnTo>
+                  <a:lnTo>
+                    <a:pt x="2533303" y="2917677"/>
+                  </a:lnTo>
+                  <a:lnTo>
+                    <a:pt x="2604926" y="2932942"/>
+                  </a:lnTo>
+                  <a:lnTo>
+                    <a:pt x="2676548" y="2947795"/>
+                  </a:lnTo>
+                  <a:lnTo>
+                    <a:pt x="2748171" y="2962248"/>
+                  </a:lnTo>
+                  <a:lnTo>
+                    <a:pt x="2819793" y="2976311"/>
+                  </a:lnTo>
+                  <a:lnTo>
+                    <a:pt x="2891416" y="2989994"/>
+                  </a:lnTo>
+                  <a:lnTo>
+                    <a:pt x="2963038" y="3003309"/>
+                  </a:lnTo>
+                  <a:lnTo>
+                    <a:pt x="3034661" y="3016265"/>
+                  </a:lnTo>
+                  <a:lnTo>
+                    <a:pt x="3106283" y="3028871"/>
+                  </a:lnTo>
+                  <a:lnTo>
+                    <a:pt x="3177906" y="3041137"/>
+                  </a:lnTo>
+                  <a:lnTo>
+                    <a:pt x="3249528" y="3053073"/>
+                  </a:lnTo>
+                  <a:lnTo>
+                    <a:pt x="3321151" y="3064686"/>
+                  </a:lnTo>
+                  <a:lnTo>
+                    <a:pt x="3392774" y="3075987"/>
+                  </a:lnTo>
+                  <a:lnTo>
+                    <a:pt x="3464396" y="3086983"/>
+                  </a:lnTo>
+                  <a:lnTo>
+                    <a:pt x="3536019" y="3097682"/>
+                  </a:lnTo>
+                  <a:lnTo>
+                    <a:pt x="3607641" y="3108093"/>
+                  </a:lnTo>
+                  <a:lnTo>
+                    <a:pt x="3679264" y="3118223"/>
+                  </a:lnTo>
+                  <a:lnTo>
+                    <a:pt x="3750886" y="3128080"/>
+                  </a:lnTo>
+                  <a:lnTo>
+                    <a:pt x="3822509" y="3137671"/>
+                  </a:lnTo>
+                  <a:lnTo>
+                    <a:pt x="3894131" y="3147003"/>
+                  </a:lnTo>
+                  <a:lnTo>
+                    <a:pt x="3965754" y="3156084"/>
+                  </a:lnTo>
+                  <a:lnTo>
+                    <a:pt x="4037376" y="3164920"/>
+                  </a:lnTo>
+                  <a:lnTo>
+                    <a:pt x="4108999" y="3173517"/>
+                  </a:lnTo>
+                  <a:lnTo>
+                    <a:pt x="4180621" y="3181883"/>
+                  </a:lnTo>
+                  <a:lnTo>
+                    <a:pt x="4252244" y="3190023"/>
+                  </a:lnTo>
+                  <a:lnTo>
+                    <a:pt x="4323866" y="3197944"/>
+                  </a:lnTo>
+                  <a:lnTo>
+                    <a:pt x="4395489" y="3205651"/>
+                  </a:lnTo>
+                  <a:lnTo>
+                    <a:pt x="4467111" y="3213150"/>
+                  </a:lnTo>
+                  <a:lnTo>
+                    <a:pt x="4538734" y="3220447"/>
+                  </a:lnTo>
+                  <a:lnTo>
+                    <a:pt x="4610356" y="3227547"/>
+                  </a:lnTo>
+                  <a:lnTo>
+                    <a:pt x="4681979" y="3234456"/>
+                  </a:lnTo>
+                  <a:lnTo>
+                    <a:pt x="4753602" y="3241178"/>
+                  </a:lnTo>
+                  <a:lnTo>
+                    <a:pt x="4825224" y="3247720"/>
+                  </a:lnTo>
+                  <a:lnTo>
+                    <a:pt x="4896847" y="3254084"/>
+                  </a:lnTo>
+                  <a:lnTo>
+                    <a:pt x="4968469" y="3260277"/>
+                  </a:lnTo>
+                  <a:lnTo>
+                    <a:pt x="5040092" y="3266304"/>
+                  </a:lnTo>
+                  <a:lnTo>
+                    <a:pt x="5111714" y="3272167"/>
+                  </a:lnTo>
+                  <a:lnTo>
+                    <a:pt x="5183337" y="3277873"/>
+                  </a:lnTo>
+                  <a:lnTo>
+                    <a:pt x="5254959" y="3283424"/>
+                  </a:lnTo>
+                  <a:lnTo>
+                    <a:pt x="5326582" y="3288826"/>
+                  </a:lnTo>
+                </a:path>
+              </a:pathLst>
+            </a:custGeom>
+          </p:spPr>
+          <p:txBody>
+            <a:bodyPr/>
+            <a:lstStyle/>
+            <a:p/>
+          </p:txBody>
+        </p:sp>
+        <p:sp>
+          <p:nvSpPr>
             <p:cNvPr id="22" name="pl22"/>
             <p:cNvSpPr/>
             <p:nvPr/>
           </p:nvSpPr>
           <p:spPr>
             <a:xfrm>
-              <a:off x="2464938" y="2073503"/>
-              <a:ext cx="5744620" cy="3288826"/>
+              <a:off x="1172049" y="2638498"/>
+              <a:ext cx="7090630" cy="2894979"/>
             </a:xfrm>
             <a:custGeom>
               <a:avLst/>
               <a:pathLst>
-                <a:path w="5744620" h="3288826">
+                <a:path w="7090630" h="2894979">
                   <a:moveTo>
+                    <a:pt x="7090630" y="2894979"/>
+                  </a:moveTo>
+                  <a:lnTo>
+                    <a:pt x="7019007" y="2893331"/>
+                  </a:lnTo>
+                  <a:lnTo>
+                    <a:pt x="6947385" y="2891568"/>
+                  </a:lnTo>
+                  <a:lnTo>
+                    <a:pt x="6875762" y="2889683"/>
+                  </a:lnTo>
+                  <a:lnTo>
+                    <a:pt x="6804139" y="2887667"/>
+                  </a:lnTo>
+                  <a:lnTo>
+                    <a:pt x="6732517" y="2885511"/>
+                  </a:lnTo>
+                  <a:lnTo>
+                    <a:pt x="6660894" y="2883205"/>
+                  </a:lnTo>
+                  <a:lnTo>
+                    <a:pt x="6589272" y="2880740"/>
+                  </a:lnTo>
+                  <a:lnTo>
+                    <a:pt x="6517649" y="2878104"/>
+                  </a:lnTo>
+                  <a:lnTo>
+                    <a:pt x="6446027" y="2875285"/>
+                  </a:lnTo>
+                  <a:lnTo>
+                    <a:pt x="6374404" y="2872270"/>
+                  </a:lnTo>
+                  <a:lnTo>
+                    <a:pt x="6302782" y="2869047"/>
+                  </a:lnTo>
+                  <a:lnTo>
+                    <a:pt x="6231159" y="2865600"/>
+                  </a:lnTo>
+                  <a:lnTo>
+                    <a:pt x="6159537" y="2861913"/>
+                  </a:lnTo>
+                  <a:lnTo>
+                    <a:pt x="6087914" y="2857972"/>
+                  </a:lnTo>
+                  <a:lnTo>
+                    <a:pt x="6016292" y="2853756"/>
+                  </a:lnTo>
+                  <a:lnTo>
+                    <a:pt x="5944669" y="2849249"/>
+                  </a:lnTo>
+                  <a:lnTo>
+                    <a:pt x="5873047" y="2844428"/>
+                  </a:lnTo>
+                  <a:lnTo>
+                    <a:pt x="5801424" y="2839274"/>
+                  </a:lnTo>
+                  <a:lnTo>
+                    <a:pt x="5729802" y="2833762"/>
+                  </a:lnTo>
+                  <a:lnTo>
+                    <a:pt x="5658179" y="2827868"/>
+                  </a:lnTo>
+                  <a:lnTo>
+                    <a:pt x="5586557" y="2821564"/>
+                  </a:lnTo>
+                  <a:lnTo>
+                    <a:pt x="5514934" y="2814824"/>
+                  </a:lnTo>
+                  <a:lnTo>
+                    <a:pt x="5443311" y="2807616"/>
+                  </a:lnTo>
+                  <a:lnTo>
+                    <a:pt x="5371689" y="2799909"/>
+                  </a:lnTo>
+                  <a:lnTo>
+                    <a:pt x="5300066" y="2791667"/>
+                  </a:lnTo>
+                  <a:lnTo>
+                    <a:pt x="5228444" y="2782853"/>
+                  </a:lnTo>
+                  <a:lnTo>
+                    <a:pt x="5156821" y="2773428"/>
+                  </a:lnTo>
+                  <a:lnTo>
+                    <a:pt x="5085199" y="2763349"/>
+                  </a:lnTo>
+                  <a:lnTo>
+                    <a:pt x="5013576" y="2752572"/>
+                  </a:lnTo>
+                  <a:lnTo>
+                    <a:pt x="4941954" y="2741047"/>
+                  </a:lnTo>
+                  <a:lnTo>
+                    <a:pt x="4870331" y="2728722"/>
+                  </a:lnTo>
+                  <a:lnTo>
+                    <a:pt x="4798709" y="2715543"/>
+                  </a:lnTo>
+                  <a:lnTo>
+                    <a:pt x="4727086" y="2701450"/>
+                  </a:lnTo>
+                  <a:lnTo>
+                    <a:pt x="4655464" y="2686379"/>
+                  </a:lnTo>
+                  <a:lnTo>
+                    <a:pt x="4583841" y="2670263"/>
+                  </a:lnTo>
+                  <a:lnTo>
+                    <a:pt x="4512219" y="2653030"/>
+                  </a:lnTo>
+                  <a:lnTo>
+                    <a:pt x="4440596" y="2634601"/>
+                  </a:lnTo>
+                  <a:lnTo>
+                    <a:pt x="4368974" y="2614894"/>
+                  </a:lnTo>
+                  <a:lnTo>
+                    <a:pt x="4297351" y="2593821"/>
+                  </a:lnTo>
+                  <a:lnTo>
+                    <a:pt x="4225729" y="2571285"/>
+                  </a:lnTo>
+                  <a:lnTo>
+                    <a:pt x="4154106" y="2547188"/>
+                  </a:lnTo>
+                  <a:lnTo>
+                    <a:pt x="4082483" y="2521418"/>
+                  </a:lnTo>
+                  <a:lnTo>
+                    <a:pt x="4010861" y="2493862"/>
+                  </a:lnTo>
+                  <a:lnTo>
+                    <a:pt x="3939238" y="2464394"/>
+                  </a:lnTo>
+                  <a:lnTo>
+                    <a:pt x="3867616" y="2432883"/>
+                  </a:lnTo>
+                  <a:lnTo>
+                    <a:pt x="3795993" y="2399186"/>
+                  </a:lnTo>
+                  <a:lnTo>
+                    <a:pt x="3724371" y="2363153"/>
+                  </a:lnTo>
+                  <a:lnTo>
+                    <a:pt x="3652748" y="2324620"/>
+                  </a:lnTo>
+                  <a:lnTo>
+                    <a:pt x="3581126" y="2283415"/>
+                  </a:lnTo>
+                  <a:lnTo>
+                    <a:pt x="3509503" y="2239352"/>
+                  </a:lnTo>
+                  <a:lnTo>
+                    <a:pt x="3437881" y="2192233"/>
+                  </a:lnTo>
+                  <a:lnTo>
+                    <a:pt x="3366258" y="2141847"/>
+                  </a:lnTo>
+                  <a:lnTo>
+                    <a:pt x="3294636" y="2088749"/>
+                  </a:lnTo>
+                  <a:lnTo>
+                    <a:pt x="3223013" y="2065746"/>
+                  </a:lnTo>
+                  <a:lnTo>
+                    <a:pt x="3151391" y="2042107"/>
+                  </a:lnTo>
+                  <a:lnTo>
+                    <a:pt x="3079768" y="2017812"/>
+                  </a:lnTo>
+                  <a:lnTo>
+                    <a:pt x="3008146" y="1992843"/>
+                  </a:lnTo>
+                  <a:lnTo>
+                    <a:pt x="2936523" y="1967183"/>
+                  </a:lnTo>
+                  <a:lnTo>
+                    <a:pt x="2864901" y="1940811"/>
+                  </a:lnTo>
+                  <a:lnTo>
+                    <a:pt x="2793278" y="1913709"/>
+                  </a:lnTo>
+                  <a:lnTo>
+                    <a:pt x="2721655" y="1885856"/>
+                  </a:lnTo>
+                  <a:lnTo>
+                    <a:pt x="2650033" y="1857230"/>
+                  </a:lnTo>
+                  <a:lnTo>
+                    <a:pt x="2578410" y="1827812"/>
+                  </a:lnTo>
+                  <a:lnTo>
+                    <a:pt x="2506788" y="1797578"/>
+                  </a:lnTo>
+                  <a:lnTo>
+                    <a:pt x="2435165" y="1766506"/>
+                  </a:lnTo>
+                  <a:lnTo>
+                    <a:pt x="2363543" y="1734573"/>
+                  </a:lnTo>
+                  <a:lnTo>
+                    <a:pt x="2291920" y="1701755"/>
+                  </a:lnTo>
+                  <a:lnTo>
+                    <a:pt x="2220298" y="1668028"/>
+                  </a:lnTo>
+                  <a:lnTo>
+                    <a:pt x="2148675" y="1633366"/>
+                  </a:lnTo>
+                  <a:lnTo>
+                    <a:pt x="2077053" y="1597743"/>
+                  </a:lnTo>
+                  <a:lnTo>
+                    <a:pt x="2005430" y="1561133"/>
+                  </a:lnTo>
+                  <a:lnTo>
+                    <a:pt x="1933808" y="1523509"/>
+                  </a:lnTo>
+                  <a:lnTo>
+                    <a:pt x="1862185" y="1484841"/>
+                  </a:lnTo>
+                  <a:lnTo>
+                    <a:pt x="1790563" y="1445102"/>
+                  </a:lnTo>
+                  <a:lnTo>
+                    <a:pt x="1718940" y="1404262"/>
+                  </a:lnTo>
+                  <a:lnTo>
+                    <a:pt x="1647318" y="1362290"/>
+                  </a:lnTo>
+                  <a:lnTo>
+                    <a:pt x="1575695" y="1319155"/>
+                  </a:lnTo>
+                  <a:lnTo>
+                    <a:pt x="1504073" y="1274824"/>
+                  </a:lnTo>
+                  <a:lnTo>
+                    <a:pt x="1432450" y="1229265"/>
+                  </a:lnTo>
+                  <a:lnTo>
+                    <a:pt x="1360827" y="1182443"/>
+                  </a:lnTo>
+                  <a:lnTo>
+                    <a:pt x="1289205" y="1134324"/>
+                  </a:lnTo>
+                  <a:lnTo>
+                    <a:pt x="1217582" y="1084871"/>
+                  </a:lnTo>
+                  <a:lnTo>
+                    <a:pt x="1145960" y="1034047"/>
+                  </a:lnTo>
+                  <a:lnTo>
+                    <a:pt x="1074337" y="981815"/>
+                  </a:lnTo>
+                  <a:lnTo>
+                    <a:pt x="1002715" y="928136"/>
+                  </a:lnTo>
+                  <a:lnTo>
+                    <a:pt x="931092" y="872968"/>
+                  </a:lnTo>
+                  <a:lnTo>
+                    <a:pt x="859470" y="816272"/>
+                  </a:lnTo>
+                  <a:lnTo>
+                    <a:pt x="787847" y="758005"/>
+                  </a:lnTo>
+                  <a:lnTo>
+                    <a:pt x="716225" y="698123"/>
+                  </a:lnTo>
+                  <a:lnTo>
+                    <a:pt x="644602" y="636581"/>
+                  </a:lnTo>
+                  <a:lnTo>
+                    <a:pt x="572980" y="573334"/>
+                  </a:lnTo>
+                  <a:lnTo>
+                    <a:pt x="501357" y="508334"/>
+                  </a:lnTo>
+                  <a:lnTo>
+                    <a:pt x="429735" y="441532"/>
+                  </a:lnTo>
+                  <a:lnTo>
+                    <a:pt x="358112" y="372879"/>
+                  </a:lnTo>
+                  <a:lnTo>
+                    <a:pt x="286490" y="302324"/>
+                  </a:lnTo>
+                  <a:lnTo>
+                    <a:pt x="214867" y="229813"/>
+                  </a:lnTo>
+                  <a:lnTo>
+                    <a:pt x="143245" y="155293"/>
+                  </a:lnTo>
+                  <a:lnTo>
+                    <a:pt x="71622" y="78707"/>
+                  </a:lnTo>
+                  <a:lnTo>
                     <a:pt x="0" y="0"/>
-                  </a:moveTo>
-                  <a:lnTo>
-                    <a:pt x="28596" y="87207"/>
-                  </a:lnTo>
-                  <a:lnTo>
-                    <a:pt x="105839" y="307491"/>
-                  </a:lnTo>
-                  <a:lnTo>
-                    <a:pt x="183083" y="513489"/>
-                  </a:lnTo>
-                  <a:lnTo>
-                    <a:pt x="260326" y="706127"/>
-                  </a:lnTo>
-                  <a:lnTo>
-                    <a:pt x="337570" y="886271"/>
-                  </a:lnTo>
-                  <a:lnTo>
-                    <a:pt x="414814" y="1054732"/>
-                  </a:lnTo>
-                  <a:lnTo>
-                    <a:pt x="492057" y="1212267"/>
-                  </a:lnTo>
-                  <a:lnTo>
-                    <a:pt x="569301" y="1359585"/>
-                  </a:lnTo>
-                  <a:lnTo>
-                    <a:pt x="646544" y="1497349"/>
-                  </a:lnTo>
-                  <a:lnTo>
-                    <a:pt x="723788" y="1626178"/>
-                  </a:lnTo>
-                  <a:lnTo>
-                    <a:pt x="801031" y="1746652"/>
-                  </a:lnTo>
-                  <a:lnTo>
-                    <a:pt x="878275" y="1859312"/>
-                  </a:lnTo>
-                  <a:lnTo>
-                    <a:pt x="955519" y="1964666"/>
-                  </a:lnTo>
-                  <a:lnTo>
-                    <a:pt x="1032762" y="2063187"/>
-                  </a:lnTo>
-                  <a:lnTo>
-                    <a:pt x="1110006" y="2155318"/>
-                  </a:lnTo>
-                  <a:lnTo>
-                    <a:pt x="1187249" y="2241474"/>
-                  </a:lnTo>
-                  <a:lnTo>
-                    <a:pt x="1264493" y="2322042"/>
-                  </a:lnTo>
-                  <a:lnTo>
-                    <a:pt x="1341736" y="2397385"/>
-                  </a:lnTo>
-                  <a:lnTo>
-                    <a:pt x="1418980" y="2467842"/>
-                  </a:lnTo>
-                  <a:lnTo>
-                    <a:pt x="1496224" y="2533729"/>
-                  </a:lnTo>
-                  <a:lnTo>
-                    <a:pt x="1573467" y="2595343"/>
-                  </a:lnTo>
-                  <a:lnTo>
-                    <a:pt x="1650711" y="2652961"/>
-                  </a:lnTo>
-                  <a:lnTo>
-                    <a:pt x="1727954" y="2676126"/>
-                  </a:lnTo>
-                  <a:lnTo>
-                    <a:pt x="1805198" y="2697905"/>
-                  </a:lnTo>
-                  <a:lnTo>
-                    <a:pt x="1882441" y="2719096"/>
-                  </a:lnTo>
-                  <a:lnTo>
-                    <a:pt x="1959685" y="2739716"/>
-                  </a:lnTo>
-                  <a:lnTo>
-                    <a:pt x="2036929" y="2759780"/>
-                  </a:lnTo>
-                  <a:lnTo>
-                    <a:pt x="2114172" y="2779302"/>
-                  </a:lnTo>
-                  <a:lnTo>
-                    <a:pt x="2191416" y="2798299"/>
-                  </a:lnTo>
-                  <a:lnTo>
-                    <a:pt x="2268659" y="2816783"/>
-                  </a:lnTo>
-                  <a:lnTo>
-                    <a:pt x="2345903" y="2834768"/>
-                  </a:lnTo>
-                  <a:lnTo>
-                    <a:pt x="2423146" y="2852269"/>
-                  </a:lnTo>
-                  <a:lnTo>
-                    <a:pt x="2500390" y="2869297"/>
-                  </a:lnTo>
-                  <a:lnTo>
-                    <a:pt x="2577634" y="2885867"/>
-                  </a:lnTo>
-                  <a:lnTo>
-                    <a:pt x="2654877" y="2901989"/>
-                  </a:lnTo>
-                  <a:lnTo>
-                    <a:pt x="2732121" y="2917677"/>
-                  </a:lnTo>
-                  <a:lnTo>
-                    <a:pt x="2809364" y="2932942"/>
-                  </a:lnTo>
-                  <a:lnTo>
-                    <a:pt x="2886608" y="2947795"/>
-                  </a:lnTo>
-                  <a:lnTo>
-                    <a:pt x="2963852" y="2962248"/>
-                  </a:lnTo>
-                  <a:lnTo>
-                    <a:pt x="3041095" y="2976311"/>
-                  </a:lnTo>
-                  <a:lnTo>
-                    <a:pt x="3118339" y="2989994"/>
-                  </a:lnTo>
-                  <a:lnTo>
-                    <a:pt x="3195582" y="3003309"/>
-                  </a:lnTo>
-                  <a:lnTo>
-                    <a:pt x="3272826" y="3016265"/>
-                  </a:lnTo>
-                  <a:lnTo>
-                    <a:pt x="3350069" y="3028871"/>
-                  </a:lnTo>
-                  <a:lnTo>
-                    <a:pt x="3427313" y="3041137"/>
-                  </a:lnTo>
-                  <a:lnTo>
-                    <a:pt x="3504557" y="3053073"/>
-                  </a:lnTo>
-                  <a:lnTo>
-                    <a:pt x="3581800" y="3064686"/>
-                  </a:lnTo>
-                  <a:lnTo>
-                    <a:pt x="3659044" y="3075987"/>
-                  </a:lnTo>
-                  <a:lnTo>
-                    <a:pt x="3736287" y="3086983"/>
-                  </a:lnTo>
-                  <a:lnTo>
-                    <a:pt x="3813531" y="3097682"/>
-                  </a:lnTo>
-                  <a:lnTo>
-                    <a:pt x="3890774" y="3108093"/>
-                  </a:lnTo>
-                  <a:lnTo>
-                    <a:pt x="3968018" y="3118223"/>
-                  </a:lnTo>
-                  <a:lnTo>
-                    <a:pt x="4045262" y="3128080"/>
-                  </a:lnTo>
-                  <a:lnTo>
-                    <a:pt x="4122505" y="3137671"/>
-                  </a:lnTo>
-                  <a:lnTo>
-                    <a:pt x="4199749" y="3147003"/>
-                  </a:lnTo>
-                  <a:lnTo>
-                    <a:pt x="4276992" y="3156084"/>
-                  </a:lnTo>
-                  <a:lnTo>
-                    <a:pt x="4354236" y="3164920"/>
-                  </a:lnTo>
-                  <a:lnTo>
-                    <a:pt x="4431479" y="3173517"/>
-                  </a:lnTo>
-                  <a:lnTo>
-                    <a:pt x="4508723" y="3181883"/>
-                  </a:lnTo>
-                  <a:lnTo>
-                    <a:pt x="4585967" y="3190023"/>
-                  </a:lnTo>
-                  <a:lnTo>
-                    <a:pt x="4663210" y="3197944"/>
-                  </a:lnTo>
-                  <a:lnTo>
-                    <a:pt x="4740454" y="3205651"/>
-                  </a:lnTo>
-                  <a:lnTo>
-                    <a:pt x="4817697" y="3213150"/>
-                  </a:lnTo>
-                  <a:lnTo>
-                    <a:pt x="4894941" y="3220447"/>
-                  </a:lnTo>
-                  <a:lnTo>
-                    <a:pt x="4972184" y="3227547"/>
-                  </a:lnTo>
-                  <a:lnTo>
-                    <a:pt x="5049428" y="3234456"/>
-                  </a:lnTo>
-                  <a:lnTo>
-                    <a:pt x="5126672" y="3241178"/>
-                  </a:lnTo>
-                  <a:lnTo>
-                    <a:pt x="5203915" y="3247720"/>
-                  </a:lnTo>
-                  <a:lnTo>
-                    <a:pt x="5281159" y="3254084"/>
-                  </a:lnTo>
-                  <a:lnTo>
-                    <a:pt x="5358402" y="3260277"/>
-                  </a:lnTo>
-                  <a:lnTo>
-                    <a:pt x="5435646" y="3266304"/>
-                  </a:lnTo>
-                  <a:lnTo>
-                    <a:pt x="5512889" y="3272167"/>
-                  </a:lnTo>
-                  <a:lnTo>
-                    <a:pt x="5590133" y="3277873"/>
-                  </a:lnTo>
-                  <a:lnTo>
-                    <a:pt x="5667377" y="3283424"/>
-                  </a:lnTo>
-                  <a:lnTo>
-                    <a:pt x="5744620" y="3288826"/>
                   </a:lnTo>
                 </a:path>
               </a:pathLst>
@@ -3805,583 +4096,267 @@
           </p:nvSpPr>
           <p:spPr>
             <a:xfrm>
-              <a:off x="817517" y="2890223"/>
-              <a:ext cx="7392041" cy="2643254"/>
+              <a:off x="2290940" y="2073503"/>
+              <a:ext cx="5971739" cy="3415676"/>
             </a:xfrm>
             <a:custGeom>
               <a:avLst/>
               <a:pathLst>
-                <a:path w="7392041" h="2643254">
-                  <a:moveTo>
-                    <a:pt x="7392041" y="2643254"/>
-                  </a:moveTo>
-                  <a:lnTo>
-                    <a:pt x="7314797" y="2641606"/>
-                  </a:lnTo>
-                  <a:lnTo>
-                    <a:pt x="7237554" y="2639843"/>
-                  </a:lnTo>
-                  <a:lnTo>
-                    <a:pt x="7160310" y="2637957"/>
-                  </a:lnTo>
-                  <a:lnTo>
-                    <a:pt x="7083066" y="2635941"/>
-                  </a:lnTo>
-                  <a:lnTo>
-                    <a:pt x="7005823" y="2633785"/>
-                  </a:lnTo>
-                  <a:lnTo>
-                    <a:pt x="6928579" y="2631480"/>
-                  </a:lnTo>
-                  <a:lnTo>
-                    <a:pt x="6851336" y="2629015"/>
-                  </a:lnTo>
-                  <a:lnTo>
-                    <a:pt x="6774092" y="2626379"/>
-                  </a:lnTo>
-                  <a:lnTo>
-                    <a:pt x="6696849" y="2623560"/>
-                  </a:lnTo>
-                  <a:lnTo>
-                    <a:pt x="6619605" y="2620545"/>
-                  </a:lnTo>
-                  <a:lnTo>
-                    <a:pt x="6542361" y="2617322"/>
-                  </a:lnTo>
-                  <a:lnTo>
-                    <a:pt x="6465118" y="2613874"/>
-                  </a:lnTo>
-                  <a:lnTo>
-                    <a:pt x="6387874" y="2610188"/>
-                  </a:lnTo>
-                  <a:lnTo>
-                    <a:pt x="6310631" y="2606246"/>
-                  </a:lnTo>
-                  <a:lnTo>
-                    <a:pt x="6233387" y="2602031"/>
-                  </a:lnTo>
-                  <a:lnTo>
-                    <a:pt x="6156144" y="2597523"/>
-                  </a:lnTo>
-                  <a:lnTo>
-                    <a:pt x="6078900" y="2592703"/>
-                  </a:lnTo>
-                  <a:lnTo>
-                    <a:pt x="6001656" y="2587549"/>
-                  </a:lnTo>
-                  <a:lnTo>
-                    <a:pt x="5924413" y="2582037"/>
-                  </a:lnTo>
-                  <a:lnTo>
-                    <a:pt x="5847169" y="2576142"/>
-                  </a:lnTo>
-                  <a:lnTo>
-                    <a:pt x="5769926" y="2569839"/>
-                  </a:lnTo>
-                  <a:lnTo>
-                    <a:pt x="5692682" y="2563099"/>
-                  </a:lnTo>
-                  <a:lnTo>
-                    <a:pt x="5615439" y="2555891"/>
-                  </a:lnTo>
-                  <a:lnTo>
-                    <a:pt x="5538195" y="2548184"/>
-                  </a:lnTo>
-                  <a:lnTo>
-                    <a:pt x="5460951" y="2539941"/>
-                  </a:lnTo>
-                  <a:lnTo>
-                    <a:pt x="5383708" y="2531128"/>
-                  </a:lnTo>
-                  <a:lnTo>
-                    <a:pt x="5306464" y="2521703"/>
-                  </a:lnTo>
-                  <a:lnTo>
-                    <a:pt x="5229221" y="2511624"/>
-                  </a:lnTo>
-                  <a:lnTo>
-                    <a:pt x="5151977" y="2500846"/>
-                  </a:lnTo>
-                  <a:lnTo>
-                    <a:pt x="5074734" y="2489321"/>
-                  </a:lnTo>
-                  <a:lnTo>
-                    <a:pt x="4997490" y="2476997"/>
-                  </a:lnTo>
-                  <a:lnTo>
-                    <a:pt x="4920246" y="2463818"/>
-                  </a:lnTo>
-                  <a:lnTo>
-                    <a:pt x="4843003" y="2449724"/>
-                  </a:lnTo>
-                  <a:lnTo>
-                    <a:pt x="4765759" y="2434654"/>
-                  </a:lnTo>
-                  <a:lnTo>
-                    <a:pt x="4688516" y="2418538"/>
-                  </a:lnTo>
-                  <a:lnTo>
-                    <a:pt x="4611272" y="2401304"/>
-                  </a:lnTo>
-                  <a:lnTo>
-                    <a:pt x="4534029" y="2382876"/>
-                  </a:lnTo>
-                  <a:lnTo>
-                    <a:pt x="4456785" y="2363169"/>
-                  </a:lnTo>
-                  <a:lnTo>
-                    <a:pt x="4379541" y="2342095"/>
-                  </a:lnTo>
-                  <a:lnTo>
-                    <a:pt x="4302298" y="2319560"/>
-                  </a:lnTo>
-                  <a:lnTo>
-                    <a:pt x="4225054" y="2295462"/>
-                  </a:lnTo>
-                  <a:lnTo>
-                    <a:pt x="4147811" y="2269693"/>
-                  </a:lnTo>
-                  <a:lnTo>
-                    <a:pt x="4070567" y="2242137"/>
-                  </a:lnTo>
-                  <a:lnTo>
-                    <a:pt x="3993324" y="2212669"/>
-                  </a:lnTo>
-                  <a:lnTo>
-                    <a:pt x="3916080" y="2181158"/>
-                  </a:lnTo>
-                  <a:lnTo>
-                    <a:pt x="3838836" y="2147461"/>
-                  </a:lnTo>
-                  <a:lnTo>
-                    <a:pt x="3761593" y="2111427"/>
-                  </a:lnTo>
-                  <a:lnTo>
-                    <a:pt x="3684349" y="2072895"/>
-                  </a:lnTo>
-                  <a:lnTo>
-                    <a:pt x="3607106" y="2031689"/>
-                  </a:lnTo>
-                  <a:lnTo>
-                    <a:pt x="3529862" y="1987627"/>
-                  </a:lnTo>
-                  <a:lnTo>
-                    <a:pt x="3452619" y="1940508"/>
-                  </a:lnTo>
-                  <a:lnTo>
-                    <a:pt x="3375375" y="1890121"/>
-                  </a:lnTo>
-                  <a:lnTo>
-                    <a:pt x="3298131" y="1837024"/>
-                  </a:lnTo>
-                  <a:lnTo>
-                    <a:pt x="3220888" y="1814021"/>
-                  </a:lnTo>
-                  <a:lnTo>
-                    <a:pt x="3143644" y="1790381"/>
-                  </a:lnTo>
-                  <a:lnTo>
-                    <a:pt x="3066401" y="1766086"/>
-                  </a:lnTo>
-                  <a:lnTo>
-                    <a:pt x="2989157" y="1741118"/>
-                  </a:lnTo>
-                  <a:lnTo>
-                    <a:pt x="2911914" y="1715458"/>
-                  </a:lnTo>
-                  <a:lnTo>
-                    <a:pt x="2834670" y="1689086"/>
-                  </a:lnTo>
-                  <a:lnTo>
-                    <a:pt x="2757426" y="1661984"/>
-                  </a:lnTo>
-                  <a:lnTo>
-                    <a:pt x="2680183" y="1634131"/>
-                  </a:lnTo>
-                  <a:lnTo>
-                    <a:pt x="2602939" y="1605505"/>
-                  </a:lnTo>
-                  <a:lnTo>
-                    <a:pt x="2525696" y="1576087"/>
-                  </a:lnTo>
-                  <a:lnTo>
-                    <a:pt x="2448452" y="1545853"/>
-                  </a:lnTo>
-                  <a:lnTo>
-                    <a:pt x="2371209" y="1514781"/>
-                  </a:lnTo>
-                  <a:lnTo>
-                    <a:pt x="2293965" y="1482848"/>
-                  </a:lnTo>
-                  <a:lnTo>
-                    <a:pt x="2216721" y="1450030"/>
-                  </a:lnTo>
-                  <a:lnTo>
-                    <a:pt x="2139478" y="1416303"/>
-                  </a:lnTo>
-                  <a:lnTo>
-                    <a:pt x="2062234" y="1381641"/>
-                  </a:lnTo>
-                  <a:lnTo>
-                    <a:pt x="1984991" y="1346018"/>
-                  </a:lnTo>
-                  <a:lnTo>
-                    <a:pt x="1907747" y="1309408"/>
-                  </a:lnTo>
-                  <a:lnTo>
-                    <a:pt x="1830504" y="1271783"/>
-                  </a:lnTo>
-                  <a:lnTo>
-                    <a:pt x="1753260" y="1233116"/>
-                  </a:lnTo>
-                  <a:lnTo>
-                    <a:pt x="1676016" y="1193377"/>
-                  </a:lnTo>
-                  <a:lnTo>
-                    <a:pt x="1598773" y="1152537"/>
-                  </a:lnTo>
-                  <a:lnTo>
-                    <a:pt x="1521529" y="1110565"/>
-                  </a:lnTo>
-                  <a:lnTo>
-                    <a:pt x="1444286" y="1067430"/>
-                  </a:lnTo>
-                  <a:lnTo>
-                    <a:pt x="1367042" y="1023099"/>
-                  </a:lnTo>
-                  <a:lnTo>
-                    <a:pt x="1289799" y="977540"/>
-                  </a:lnTo>
-                  <a:lnTo>
-                    <a:pt x="1212555" y="930718"/>
-                  </a:lnTo>
-                  <a:lnTo>
-                    <a:pt x="1135311" y="882599"/>
-                  </a:lnTo>
-                  <a:lnTo>
-                    <a:pt x="1058068" y="833146"/>
-                  </a:lnTo>
-                  <a:lnTo>
-                    <a:pt x="980824" y="782322"/>
-                  </a:lnTo>
-                  <a:lnTo>
-                    <a:pt x="903581" y="730090"/>
-                  </a:lnTo>
-                  <a:lnTo>
-                    <a:pt x="826337" y="676410"/>
-                  </a:lnTo>
-                  <a:lnTo>
-                    <a:pt x="749094" y="621243"/>
-                  </a:lnTo>
-                  <a:lnTo>
-                    <a:pt x="671850" y="564547"/>
-                  </a:lnTo>
-                  <a:lnTo>
-                    <a:pt x="594606" y="506280"/>
-                  </a:lnTo>
-                  <a:lnTo>
-                    <a:pt x="517363" y="446398"/>
-                  </a:lnTo>
-                  <a:lnTo>
-                    <a:pt x="440119" y="384856"/>
-                  </a:lnTo>
-                  <a:lnTo>
-                    <a:pt x="362876" y="321609"/>
-                  </a:lnTo>
-                  <a:lnTo>
-                    <a:pt x="285632" y="256608"/>
-                  </a:lnTo>
-                  <a:lnTo>
-                    <a:pt x="208389" y="189807"/>
-                  </a:lnTo>
-                  <a:lnTo>
-                    <a:pt x="131145" y="121154"/>
-                  </a:lnTo>
-                  <a:lnTo>
-                    <a:pt x="53901" y="50599"/>
-                  </a:lnTo>
-                  <a:lnTo>
-                    <a:pt x="0" y="0"/>
-                  </a:lnTo>
-                </a:path>
-              </a:pathLst>
-            </a:custGeom>
-          </p:spPr>
-          <p:txBody>
-            <a:bodyPr/>
-            <a:lstStyle/>
-            <a:p/>
-          </p:txBody>
-        </p:sp>
-        <p:sp>
-          <p:nvSpPr>
-            <p:cNvPr id="24" name="pl24"/>
-            <p:cNvSpPr/>
-            <p:nvPr/>
-          </p:nvSpPr>
-          <p:spPr>
-            <a:xfrm>
-              <a:off x="1769148" y="2073503"/>
-              <a:ext cx="6440410" cy="3415676"/>
-            </a:xfrm>
-            <a:custGeom>
-              <a:avLst/>
-              <a:pathLst>
-                <a:path w="6440410" h="3415676">
+                <a:path w="5971739" h="3415676">
                   <a:moveTo>
                     <a:pt x="0" y="0"/>
                   </a:moveTo>
                   <a:lnTo>
-                    <a:pt x="29193" y="62488"/>
-                  </a:lnTo>
-                  <a:lnTo>
-                    <a:pt x="106437" y="220205"/>
-                  </a:lnTo>
-                  <a:lnTo>
-                    <a:pt x="183680" y="370651"/>
-                  </a:lnTo>
-                  <a:lnTo>
-                    <a:pt x="260924" y="514162"/>
-                  </a:lnTo>
-                  <a:lnTo>
-                    <a:pt x="338168" y="651057"/>
-                  </a:lnTo>
-                  <a:lnTo>
-                    <a:pt x="415411" y="781641"/>
-                  </a:lnTo>
-                  <a:lnTo>
-                    <a:pt x="492655" y="906206"/>
-                  </a:lnTo>
-                  <a:lnTo>
-                    <a:pt x="569898" y="1025028"/>
-                  </a:lnTo>
-                  <a:lnTo>
-                    <a:pt x="647142" y="1138373"/>
-                  </a:lnTo>
-                  <a:lnTo>
-                    <a:pt x="724385" y="1246492"/>
-                  </a:lnTo>
-                  <a:lnTo>
-                    <a:pt x="801629" y="1349628"/>
-                  </a:lnTo>
-                  <a:lnTo>
-                    <a:pt x="878873" y="1448008"/>
-                  </a:lnTo>
-                  <a:lnTo>
-                    <a:pt x="956116" y="1541854"/>
-                  </a:lnTo>
-                  <a:lnTo>
-                    <a:pt x="1033360" y="1631373"/>
-                  </a:lnTo>
-                  <a:lnTo>
-                    <a:pt x="1110603" y="1716766"/>
-                  </a:lnTo>
-                  <a:lnTo>
-                    <a:pt x="1187847" y="1798222"/>
-                  </a:lnTo>
-                  <a:lnTo>
-                    <a:pt x="1265090" y="1875923"/>
-                  </a:lnTo>
-                  <a:lnTo>
-                    <a:pt x="1342334" y="1950042"/>
-                  </a:lnTo>
-                  <a:lnTo>
-                    <a:pt x="1419578" y="2020745"/>
-                  </a:lnTo>
-                  <a:lnTo>
-                    <a:pt x="1496821" y="2088188"/>
-                  </a:lnTo>
-                  <a:lnTo>
-                    <a:pt x="1574065" y="2152522"/>
-                  </a:lnTo>
-                  <a:lnTo>
-                    <a:pt x="1651308" y="2213890"/>
-                  </a:lnTo>
-                  <a:lnTo>
-                    <a:pt x="1728552" y="2272429"/>
-                  </a:lnTo>
-                  <a:lnTo>
-                    <a:pt x="1805795" y="2328270"/>
-                  </a:lnTo>
-                  <a:lnTo>
-                    <a:pt x="1883039" y="2381536"/>
-                  </a:lnTo>
-                  <a:lnTo>
-                    <a:pt x="1960283" y="2432347"/>
-                  </a:lnTo>
-                  <a:lnTo>
-                    <a:pt x="2037526" y="2480815"/>
-                  </a:lnTo>
-                  <a:lnTo>
-                    <a:pt x="2114770" y="2527050"/>
-                  </a:lnTo>
-                  <a:lnTo>
-                    <a:pt x="2192013" y="2571152"/>
-                  </a:lnTo>
-                  <a:lnTo>
-                    <a:pt x="2269257" y="2613222"/>
-                  </a:lnTo>
-                  <a:lnTo>
-                    <a:pt x="2346500" y="2653353"/>
-                  </a:lnTo>
-                  <a:lnTo>
-                    <a:pt x="2423744" y="2691633"/>
-                  </a:lnTo>
-                  <a:lnTo>
-                    <a:pt x="2500988" y="2728149"/>
-                  </a:lnTo>
-                  <a:lnTo>
-                    <a:pt x="2578231" y="2762981"/>
-                  </a:lnTo>
-                  <a:lnTo>
-                    <a:pt x="2655475" y="2796208"/>
-                  </a:lnTo>
-                  <a:lnTo>
-                    <a:pt x="2732718" y="2827902"/>
-                  </a:lnTo>
-                  <a:lnTo>
-                    <a:pt x="2809962" y="2858136"/>
-                  </a:lnTo>
-                  <a:lnTo>
-                    <a:pt x="2887205" y="2886976"/>
-                  </a:lnTo>
-                  <a:lnTo>
-                    <a:pt x="2964449" y="2914487"/>
-                  </a:lnTo>
-                  <a:lnTo>
-                    <a:pt x="3041693" y="2940729"/>
-                  </a:lnTo>
-                  <a:lnTo>
-                    <a:pt x="3118936" y="2965762"/>
-                  </a:lnTo>
-                  <a:lnTo>
-                    <a:pt x="3196180" y="2989640"/>
-                  </a:lnTo>
-                  <a:lnTo>
-                    <a:pt x="3273423" y="3012418"/>
-                  </a:lnTo>
-                  <a:lnTo>
-                    <a:pt x="3350667" y="3034146"/>
-                  </a:lnTo>
-                  <a:lnTo>
-                    <a:pt x="3427910" y="3054872"/>
-                  </a:lnTo>
-                  <a:lnTo>
-                    <a:pt x="3505154" y="3074643"/>
-                  </a:lnTo>
-                  <a:lnTo>
-                    <a:pt x="3582398" y="3093502"/>
-                  </a:lnTo>
-                  <a:lnTo>
-                    <a:pt x="3659641" y="3111492"/>
-                  </a:lnTo>
-                  <a:lnTo>
-                    <a:pt x="3736885" y="3128653"/>
-                  </a:lnTo>
-                  <a:lnTo>
-                    <a:pt x="3814128" y="3145022"/>
-                  </a:lnTo>
-                  <a:lnTo>
-                    <a:pt x="3891372" y="3160637"/>
-                  </a:lnTo>
-                  <a:lnTo>
-                    <a:pt x="3968615" y="3175532"/>
-                  </a:lnTo>
-                  <a:lnTo>
-                    <a:pt x="4045859" y="3189740"/>
-                  </a:lnTo>
-                  <a:lnTo>
-                    <a:pt x="4123103" y="3203294"/>
-                  </a:lnTo>
-                  <a:lnTo>
-                    <a:pt x="4200346" y="3216222"/>
-                  </a:lnTo>
-                  <a:lnTo>
-                    <a:pt x="4277590" y="3228555"/>
-                  </a:lnTo>
-                  <a:lnTo>
-                    <a:pt x="4354833" y="3240319"/>
-                  </a:lnTo>
-                  <a:lnTo>
-                    <a:pt x="4432077" y="3251541"/>
-                  </a:lnTo>
-                  <a:lnTo>
-                    <a:pt x="4509320" y="3262245"/>
-                  </a:lnTo>
-                  <a:lnTo>
-                    <a:pt x="4586564" y="3272456"/>
-                  </a:lnTo>
-                  <a:lnTo>
-                    <a:pt x="4663808" y="3282197"/>
-                  </a:lnTo>
-                  <a:lnTo>
-                    <a:pt x="4741051" y="3291488"/>
-                  </a:lnTo>
-                  <a:lnTo>
-                    <a:pt x="4818295" y="3300351"/>
-                  </a:lnTo>
-                  <a:lnTo>
-                    <a:pt x="4895538" y="3308805"/>
-                  </a:lnTo>
-                  <a:lnTo>
-                    <a:pt x="4972782" y="3316870"/>
-                  </a:lnTo>
-                  <a:lnTo>
-                    <a:pt x="5050025" y="3324563"/>
-                  </a:lnTo>
-                  <a:lnTo>
-                    <a:pt x="5127269" y="3331901"/>
-                  </a:lnTo>
-                  <a:lnTo>
-                    <a:pt x="5204513" y="3338901"/>
-                  </a:lnTo>
-                  <a:lnTo>
-                    <a:pt x="5281756" y="3345578"/>
-                  </a:lnTo>
-                  <a:lnTo>
-                    <a:pt x="5359000" y="3351947"/>
-                  </a:lnTo>
-                  <a:lnTo>
-                    <a:pt x="5436243" y="3358023"/>
-                  </a:lnTo>
-                  <a:lnTo>
-                    <a:pt x="5513487" y="3363819"/>
-                  </a:lnTo>
-                  <a:lnTo>
-                    <a:pt x="5590730" y="3369348"/>
-                  </a:lnTo>
-                  <a:lnTo>
-                    <a:pt x="5667974" y="3374621"/>
-                  </a:lnTo>
-                  <a:lnTo>
-                    <a:pt x="5745218" y="3379652"/>
-                  </a:lnTo>
-                  <a:lnTo>
-                    <a:pt x="5822461" y="3384450"/>
-                  </a:lnTo>
-                  <a:lnTo>
-                    <a:pt x="5899705" y="3389028"/>
-                  </a:lnTo>
-                  <a:lnTo>
-                    <a:pt x="5976948" y="3393394"/>
-                  </a:lnTo>
-                  <a:lnTo>
-                    <a:pt x="6054192" y="3397559"/>
-                  </a:lnTo>
-                  <a:lnTo>
-                    <a:pt x="6131435" y="3401533"/>
-                  </a:lnTo>
-                  <a:lnTo>
-                    <a:pt x="6208679" y="3405323"/>
-                  </a:lnTo>
-                  <a:lnTo>
-                    <a:pt x="6285923" y="3408938"/>
-                  </a:lnTo>
-                  <a:lnTo>
-                    <a:pt x="6363166" y="3412386"/>
-                  </a:lnTo>
-                  <a:lnTo>
-                    <a:pt x="6440410" y="3415676"/>
+                    <a:pt x="27069" y="62488"/>
+                  </a:lnTo>
+                  <a:lnTo>
+                    <a:pt x="98691" y="220205"/>
+                  </a:lnTo>
+                  <a:lnTo>
+                    <a:pt x="170314" y="370651"/>
+                  </a:lnTo>
+                  <a:lnTo>
+                    <a:pt x="241936" y="514162"/>
+                  </a:lnTo>
+                  <a:lnTo>
+                    <a:pt x="313559" y="651057"/>
+                  </a:lnTo>
+                  <a:lnTo>
+                    <a:pt x="385181" y="781641"/>
+                  </a:lnTo>
+                  <a:lnTo>
+                    <a:pt x="456804" y="906206"/>
+                  </a:lnTo>
+                  <a:lnTo>
+                    <a:pt x="528427" y="1025028"/>
+                  </a:lnTo>
+                  <a:lnTo>
+                    <a:pt x="600049" y="1138373"/>
+                  </a:lnTo>
+                  <a:lnTo>
+                    <a:pt x="671672" y="1246492"/>
+                  </a:lnTo>
+                  <a:lnTo>
+                    <a:pt x="743294" y="1349628"/>
+                  </a:lnTo>
+                  <a:lnTo>
+                    <a:pt x="814917" y="1448008"/>
+                  </a:lnTo>
+                  <a:lnTo>
+                    <a:pt x="886539" y="1541854"/>
+                  </a:lnTo>
+                  <a:lnTo>
+                    <a:pt x="958162" y="1631373"/>
+                  </a:lnTo>
+                  <a:lnTo>
+                    <a:pt x="1029784" y="1716766"/>
+                  </a:lnTo>
+                  <a:lnTo>
+                    <a:pt x="1101407" y="1798222"/>
+                  </a:lnTo>
+                  <a:lnTo>
+                    <a:pt x="1173029" y="1875923"/>
+                  </a:lnTo>
+                  <a:lnTo>
+                    <a:pt x="1244652" y="1950042"/>
+                  </a:lnTo>
+                  <a:lnTo>
+                    <a:pt x="1316274" y="2020745"/>
+                  </a:lnTo>
+                  <a:lnTo>
+                    <a:pt x="1387897" y="2088188"/>
+                  </a:lnTo>
+                  <a:lnTo>
+                    <a:pt x="1459519" y="2152522"/>
+                  </a:lnTo>
+                  <a:lnTo>
+                    <a:pt x="1531142" y="2213890"/>
+                  </a:lnTo>
+                  <a:lnTo>
+                    <a:pt x="1602764" y="2272429"/>
+                  </a:lnTo>
+                  <a:lnTo>
+                    <a:pt x="1674387" y="2328270"/>
+                  </a:lnTo>
+                  <a:lnTo>
+                    <a:pt x="1746009" y="2381536"/>
+                  </a:lnTo>
+                  <a:lnTo>
+                    <a:pt x="1817632" y="2432347"/>
+                  </a:lnTo>
+                  <a:lnTo>
+                    <a:pt x="1889255" y="2480815"/>
+                  </a:lnTo>
+                  <a:lnTo>
+                    <a:pt x="1960877" y="2527050"/>
+                  </a:lnTo>
+                  <a:lnTo>
+                    <a:pt x="2032500" y="2571152"/>
+                  </a:lnTo>
+                  <a:lnTo>
+                    <a:pt x="2104122" y="2613222"/>
+                  </a:lnTo>
+                  <a:lnTo>
+                    <a:pt x="2175745" y="2653353"/>
+                  </a:lnTo>
+                  <a:lnTo>
+                    <a:pt x="2247367" y="2691633"/>
+                  </a:lnTo>
+                  <a:lnTo>
+                    <a:pt x="2318990" y="2728149"/>
+                  </a:lnTo>
+                  <a:lnTo>
+                    <a:pt x="2390612" y="2762981"/>
+                  </a:lnTo>
+                  <a:lnTo>
+                    <a:pt x="2462235" y="2796208"/>
+                  </a:lnTo>
+                  <a:lnTo>
+                    <a:pt x="2533857" y="2827902"/>
+                  </a:lnTo>
+                  <a:lnTo>
+                    <a:pt x="2605480" y="2858136"/>
+                  </a:lnTo>
+                  <a:lnTo>
+                    <a:pt x="2677102" y="2886976"/>
+                  </a:lnTo>
+                  <a:lnTo>
+                    <a:pt x="2748725" y="2914487"/>
+                  </a:lnTo>
+                  <a:lnTo>
+                    <a:pt x="2820347" y="2940729"/>
+                  </a:lnTo>
+                  <a:lnTo>
+                    <a:pt x="2891970" y="2965762"/>
+                  </a:lnTo>
+                  <a:lnTo>
+                    <a:pt x="2963592" y="2989640"/>
+                  </a:lnTo>
+                  <a:lnTo>
+                    <a:pt x="3035215" y="3012418"/>
+                  </a:lnTo>
+                  <a:lnTo>
+                    <a:pt x="3106837" y="3034146"/>
+                  </a:lnTo>
+                  <a:lnTo>
+                    <a:pt x="3178460" y="3054872"/>
+                  </a:lnTo>
+                  <a:lnTo>
+                    <a:pt x="3250083" y="3074643"/>
+                  </a:lnTo>
+                  <a:lnTo>
+                    <a:pt x="3321705" y="3093502"/>
+                  </a:lnTo>
+                  <a:lnTo>
+                    <a:pt x="3393328" y="3111492"/>
+                  </a:lnTo>
+                  <a:lnTo>
+                    <a:pt x="3464950" y="3128653"/>
+                  </a:lnTo>
+                  <a:lnTo>
+                    <a:pt x="3536573" y="3145022"/>
+                  </a:lnTo>
+                  <a:lnTo>
+                    <a:pt x="3608195" y="3160637"/>
+                  </a:lnTo>
+                  <a:lnTo>
+                    <a:pt x="3679818" y="3175532"/>
+                  </a:lnTo>
+                  <a:lnTo>
+                    <a:pt x="3751440" y="3189740"/>
+                  </a:lnTo>
+                  <a:lnTo>
+                    <a:pt x="3823063" y="3203294"/>
+                  </a:lnTo>
+                  <a:lnTo>
+                    <a:pt x="3894685" y="3216222"/>
+                  </a:lnTo>
+                  <a:lnTo>
+                    <a:pt x="3966308" y="3228555"/>
+                  </a:lnTo>
+                  <a:lnTo>
+                    <a:pt x="4037930" y="3240319"/>
+                  </a:lnTo>
+                  <a:lnTo>
+                    <a:pt x="4109553" y="3251541"/>
+                  </a:lnTo>
+                  <a:lnTo>
+                    <a:pt x="4181175" y="3262245"/>
+                  </a:lnTo>
+                  <a:lnTo>
+                    <a:pt x="4252798" y="3272456"/>
+                  </a:lnTo>
+                  <a:lnTo>
+                    <a:pt x="4324420" y="3282197"/>
+                  </a:lnTo>
+                  <a:lnTo>
+                    <a:pt x="4396043" y="3291488"/>
+                  </a:lnTo>
+                  <a:lnTo>
+                    <a:pt x="4467665" y="3300351"/>
+                  </a:lnTo>
+                  <a:lnTo>
+                    <a:pt x="4539288" y="3308805"/>
+                  </a:lnTo>
+                  <a:lnTo>
+                    <a:pt x="4610911" y="3316870"/>
+                  </a:lnTo>
+                  <a:lnTo>
+                    <a:pt x="4682533" y="3324563"/>
+                  </a:lnTo>
+                  <a:lnTo>
+                    <a:pt x="4754156" y="3331901"/>
+                  </a:lnTo>
+                  <a:lnTo>
+                    <a:pt x="4825778" y="3338901"/>
+                  </a:lnTo>
+                  <a:lnTo>
+                    <a:pt x="4897401" y="3345578"/>
+                  </a:lnTo>
+                  <a:lnTo>
+                    <a:pt x="4969023" y="3351947"/>
+                  </a:lnTo>
+                  <a:lnTo>
+                    <a:pt x="5040646" y="3358023"/>
+                  </a:lnTo>
+                  <a:lnTo>
+                    <a:pt x="5112268" y="3363819"/>
+                  </a:lnTo>
+                  <a:lnTo>
+                    <a:pt x="5183891" y="3369348"/>
+                  </a:lnTo>
+                  <a:lnTo>
+                    <a:pt x="5255513" y="3374621"/>
+                  </a:lnTo>
+                  <a:lnTo>
+                    <a:pt x="5327136" y="3379652"/>
+                  </a:lnTo>
+                  <a:lnTo>
+                    <a:pt x="5398758" y="3384450"/>
+                  </a:lnTo>
+                  <a:lnTo>
+                    <a:pt x="5470381" y="3389028"/>
+                  </a:lnTo>
+                  <a:lnTo>
+                    <a:pt x="5542003" y="3393394"/>
+                  </a:lnTo>
+                  <a:lnTo>
+                    <a:pt x="5613626" y="3397559"/>
+                  </a:lnTo>
+                  <a:lnTo>
+                    <a:pt x="5685248" y="3401533"/>
+                  </a:lnTo>
+                  <a:lnTo>
+                    <a:pt x="5756871" y="3405323"/>
+                  </a:lnTo>
+                  <a:lnTo>
+                    <a:pt x="5828493" y="3408938"/>
+                  </a:lnTo>
+                  <a:lnTo>
+                    <a:pt x="5900116" y="3412386"/>
+                  </a:lnTo>
+                  <a:lnTo>
+                    <a:pt x="5971739" y="3415676"/>
                   </a:lnTo>
                 </a:path>
               </a:pathLst>
@@ -4404,7 +4379,7 @@
         </p:sp>
         <p:sp>
           <p:nvSpPr>
-            <p:cNvPr id="25" name="pl25"/>
+            <p:cNvPr id="24" name="pl24"/>
             <p:cNvSpPr/>
             <p:nvPr/>
           </p:nvSpPr>
@@ -4447,13 +4422,13 @@
         </p:sp>
         <p:sp>
           <p:nvSpPr>
-            <p:cNvPr id="26" name="pl26"/>
+            <p:cNvPr id="25" name="pl25"/>
             <p:cNvSpPr/>
             <p:nvPr/>
           </p:nvSpPr>
           <p:spPr>
             <a:xfrm>
-              <a:off x="4117484" y="2073503"/>
+              <a:off x="4468386" y="2073503"/>
               <a:ext cx="0" cy="3649639"/>
             </a:xfrm>
             <a:custGeom>
@@ -4490,7 +4465,7 @@
         </p:sp>
         <p:sp>
           <p:nvSpPr>
-            <p:cNvPr id="27" name="tx27"/>
+            <p:cNvPr id="26" name="tx26"/>
             <p:cNvSpPr/>
             <p:nvPr/>
           </p:nvSpPr>
@@ -4536,7 +4511,7 @@
         </p:sp>
         <p:sp>
           <p:nvSpPr>
-            <p:cNvPr id="28" name="tx28"/>
+            <p:cNvPr id="27" name="tx27"/>
             <p:cNvSpPr/>
             <p:nvPr/>
           </p:nvSpPr>
@@ -4582,7 +4557,7 @@
         </p:sp>
         <p:sp>
           <p:nvSpPr>
-            <p:cNvPr id="29" name="tx29"/>
+            <p:cNvPr id="28" name="tx28"/>
             <p:cNvSpPr/>
             <p:nvPr/>
           </p:nvSpPr>
@@ -4628,7 +4603,7 @@
         </p:sp>
         <p:sp>
           <p:nvSpPr>
-            <p:cNvPr id="30" name="tx30"/>
+            <p:cNvPr id="29" name="tx29"/>
             <p:cNvSpPr/>
             <p:nvPr/>
           </p:nvSpPr>
@@ -4674,7 +4649,7 @@
         </p:sp>
         <p:sp>
           <p:nvSpPr>
-            <p:cNvPr id="31" name="tx31"/>
+            <p:cNvPr id="30" name="tx30"/>
             <p:cNvSpPr/>
             <p:nvPr/>
           </p:nvSpPr>
@@ -4720,14 +4695,14 @@
         </p:sp>
         <p:sp>
           <p:nvSpPr>
-            <p:cNvPr id="32" name="tx32"/>
+            <p:cNvPr id="31" name="tx31"/>
             <p:cNvSpPr/>
             <p:nvPr/>
           </p:nvSpPr>
           <p:spPr>
             <a:xfrm>
-              <a:off x="2423864" y="5785772"/>
-              <a:ext cx="155356" cy="80101"/>
+              <a:off x="2478335" y="5785772"/>
+              <a:ext cx="161574" cy="80101"/>
             </a:xfrm>
             <a:prstGeom prst="rect">
               <a:avLst/>
@@ -4759,21 +4734,21 @@
                   <a:latin typeface="Helvetica"/>
                   <a:cs typeface="Helvetica"/>
                 </a:rPr>
-                <a:t>0.8</a:t>
+                <a:t>-25</a:t>
               </a:r>
             </a:p>
           </p:txBody>
         </p:sp>
         <p:sp>
           <p:nvSpPr>
-            <p:cNvPr id="33" name="tx33"/>
+            <p:cNvPr id="32" name="tx32"/>
             <p:cNvSpPr/>
             <p:nvPr/>
           </p:nvSpPr>
           <p:spPr>
             <a:xfrm>
-              <a:off x="4196521" y="5785772"/>
-              <a:ext cx="155356" cy="80101"/>
+              <a:off x="4582608" y="5785772"/>
+              <a:ext cx="62179" cy="80101"/>
             </a:xfrm>
             <a:prstGeom prst="rect">
               <a:avLst/>
@@ -4805,21 +4780,21 @@
                   <a:latin typeface="Helvetica"/>
                   <a:cs typeface="Helvetica"/>
                 </a:rPr>
-                <a:t>1.0</a:t>
+                <a:t>0</a:t>
               </a:r>
             </a:p>
           </p:txBody>
         </p:sp>
         <p:sp>
           <p:nvSpPr>
-            <p:cNvPr id="34" name="tx34"/>
+            <p:cNvPr id="33" name="tx33"/>
             <p:cNvSpPr/>
             <p:nvPr/>
           </p:nvSpPr>
           <p:spPr>
             <a:xfrm>
-              <a:off x="5969179" y="5785772"/>
-              <a:ext cx="155356" cy="80101"/>
+              <a:off x="6606094" y="5785772"/>
+              <a:ext cx="124358" cy="80101"/>
             </a:xfrm>
             <a:prstGeom prst="rect">
               <a:avLst/>
@@ -4851,67 +4826,21 @@
                   <a:latin typeface="Helvetica"/>
                   <a:cs typeface="Helvetica"/>
                 </a:rPr>
-                <a:t>1.2</a:t>
+                <a:t>25</a:t>
               </a:r>
             </a:p>
           </p:txBody>
         </p:sp>
         <p:sp>
           <p:nvSpPr>
-            <p:cNvPr id="35" name="tx35"/>
+            <p:cNvPr id="34" name="tx34"/>
             <p:cNvSpPr/>
             <p:nvPr/>
           </p:nvSpPr>
           <p:spPr>
             <a:xfrm>
-              <a:off x="7741836" y="5785772"/>
-              <a:ext cx="155356" cy="80101"/>
-            </a:xfrm>
-            <a:prstGeom prst="rect">
-              <a:avLst/>
-            </a:prstGeom>
-            <a:noFill/>
-          </p:spPr>
-          <p:txBody>
-            <a:bodyPr lIns="0" rIns="0" tIns="0" bIns="0" anchorCtr="1" anchor="ctr" wrap="none"/>
-            <a:lstStyle/>
-            <a:p>
-              <a:pPr algn="l" marL="0" marR="0" indent="0">
-                <a:lnSpc>
-                  <a:spcPts val="880"/>
-                </a:lnSpc>
-                <a:spcBef>
-                  <a:spcPts val="0"/>
-                </a:spcBef>
-                <a:spcAft>
-                  <a:spcPts val="0"/>
-                </a:spcAft>
-              </a:pPr>
-              <a:r>
-                <a:rPr sz="880">
-                  <a:solidFill>
-                    <a:srgbClr val="4D4D4D">
-                      <a:alpha val="100000"/>
-                    </a:srgbClr>
-                  </a:solidFill>
-                  <a:latin typeface="Helvetica"/>
-                  <a:cs typeface="Helvetica"/>
-                </a:rPr>
-                <a:t>1.4</a:t>
-              </a:r>
-            </a:p>
-          </p:txBody>
-        </p:sp>
-        <p:sp>
-          <p:nvSpPr>
-            <p:cNvPr id="36" name="tx36"/>
-            <p:cNvSpPr/>
-            <p:nvPr/>
-          </p:nvSpPr>
-          <p:spPr>
-            <a:xfrm>
-              <a:off x="3879271" y="5925448"/>
-              <a:ext cx="1676186" cy="100218"/>
+              <a:off x="2928340" y="5925448"/>
+              <a:ext cx="3578047" cy="100218"/>
             </a:xfrm>
             <a:prstGeom prst="rect">
               <a:avLst/>
@@ -4943,14 +4872,14 @@
                   <a:latin typeface="Helvetica"/>
                   <a:cs typeface="Helvetica"/>
                 </a:rPr>
-                <a:t>CKD-EPI Cr-Cys / CG ratio</a:t>
+                <a:t>eGFR difference (%): 100 × (CKD-EPI Cr-Cys − CG) / CG</a:t>
               </a:r>
             </a:p>
           </p:txBody>
         </p:sp>
         <p:sp>
           <p:nvSpPr>
-            <p:cNvPr id="37" name="tx37"/>
+            <p:cNvPr id="35" name="tx35"/>
             <p:cNvSpPr/>
             <p:nvPr/>
           </p:nvSpPr>
@@ -4996,14 +4925,14 @@
         </p:sp>
         <p:sp>
           <p:nvSpPr>
-            <p:cNvPr id="38" name="tx38"/>
+            <p:cNvPr id="36" name="tx36"/>
             <p:cNvSpPr/>
             <p:nvPr/>
           </p:nvSpPr>
           <p:spPr>
             <a:xfrm>
               <a:off x="817517" y="1896563"/>
-              <a:ext cx="6899879" cy="82021"/>
+              <a:ext cx="7052127" cy="82021"/>
             </a:xfrm>
             <a:prstGeom prst="rect">
               <a:avLst/>
@@ -5035,14 +4964,14 @@
                   <a:latin typeface="Helvetica"/>
                   <a:cs typeface="Helvetica"/>
                 </a:rPr>
-                <a:t>subHR per 0.1 ratio decline: 1.72 (1.37-2.16), p_Bonf = &lt;0.001 (n = 6)  |  per IQR decline (Δ = 0.30): 4.95 (2.53-9.70)  |  IQR: [0.84, 1.14]</a:t>
+                <a:t>subHR per 10 % decline: 1.72 (1.37-2.16), p_Bonf = &lt;0.001 (n = 6)  |  per IQR decline (Δ = 29.5 %): 4.95 (2.53-9.70)  |  IQR: [-15.6, 13.9] %</a:t>
               </a:r>
             </a:p>
           </p:txBody>
         </p:sp>
         <p:sp>
           <p:nvSpPr>
-            <p:cNvPr id="39" name="tx39"/>
+            <p:cNvPr id="37" name="tx37"/>
             <p:cNvSpPr/>
             <p:nvPr/>
           </p:nvSpPr>

--- a/docs/pptx/auc3/jx-auc3-linsubhr-ratio-grade3.pptx
+++ b/docs/pptx/auc3/jx-auc3-linsubhr-ratio-grade3.pptx
@@ -2265,34 +2265,26 @@
         </p:sp>
         <p:sp>
           <p:nvSpPr>
-            <p:cNvPr id="4" name="pl4"/>
+            <p:cNvPr id="4" name="rc4"/>
             <p:cNvSpPr/>
             <p:nvPr/>
           </p:nvSpPr>
           <p:spPr>
             <a:xfrm>
-              <a:off x="817517" y="5142518"/>
-              <a:ext cx="7799693" cy="0"/>
+              <a:off x="457200" y="1600200"/>
+              <a:ext cx="8229600" cy="4525962"/>
             </a:xfrm>
-            <a:custGeom>
+            <a:prstGeom prst="rect">
               <a:avLst/>
-              <a:pathLst>
-                <a:path w="7799693" h="0">
-                  <a:moveTo>
-                    <a:pt x="0" y="0"/>
-                  </a:moveTo>
-                  <a:lnTo>
-                    <a:pt x="7799693" y="0"/>
-                  </a:lnTo>
-                  <a:lnTo>
-                    <a:pt x="7799693" y="0"/>
-                  </a:lnTo>
-                </a:path>
-              </a:pathLst>
-            </a:custGeom>
-            <a:ln w="6775" cap="flat">
+            </a:prstGeom>
+            <a:solidFill>
+              <a:srgbClr val="FFFFFF">
+                <a:alpha val="100000"/>
+              </a:srgbClr>
+            </a:solidFill>
+            <a:ln w="13550" cap="rnd">
               <a:solidFill>
-                <a:srgbClr val="EBEBEB">
+                <a:srgbClr val="FFFFFF">
                   <a:alpha val="100000"/>
                 </a:srgbClr>
               </a:solidFill>
@@ -2314,21 +2306,21 @@
           </p:nvSpPr>
           <p:spPr>
             <a:xfrm>
-              <a:off x="817517" y="4313054"/>
-              <a:ext cx="7799693" cy="0"/>
+              <a:off x="887106" y="3250627"/>
+              <a:ext cx="7660515" cy="0"/>
             </a:xfrm>
             <a:custGeom>
               <a:avLst/>
               <a:pathLst>
-                <a:path w="7799693" h="0">
+                <a:path w="7660515" h="0">
                   <a:moveTo>
                     <a:pt x="0" y="0"/>
                   </a:moveTo>
                   <a:lnTo>
-                    <a:pt x="7799693" y="0"/>
-                  </a:lnTo>
-                  <a:lnTo>
-                    <a:pt x="7799693" y="0"/>
+                    <a:pt x="7660515" y="0"/>
+                  </a:lnTo>
+                  <a:lnTo>
+                    <a:pt x="7660515" y="0"/>
                   </a:lnTo>
                 </a:path>
               </a:pathLst>
@@ -2357,21 +2349,21 @@
           </p:nvSpPr>
           <p:spPr>
             <a:xfrm>
-              <a:off x="817517" y="3483591"/>
-              <a:ext cx="7799693" cy="0"/>
+              <a:off x="887106" y="2951293"/>
+              <a:ext cx="7660515" cy="0"/>
             </a:xfrm>
             <a:custGeom>
               <a:avLst/>
               <a:pathLst>
-                <a:path w="7799693" h="0">
+                <a:path w="7660515" h="0">
                   <a:moveTo>
                     <a:pt x="0" y="0"/>
                   </a:moveTo>
                   <a:lnTo>
-                    <a:pt x="7799693" y="0"/>
-                  </a:lnTo>
-                  <a:lnTo>
-                    <a:pt x="7799693" y="0"/>
+                    <a:pt x="7660515" y="0"/>
+                  </a:lnTo>
+                  <a:lnTo>
+                    <a:pt x="7660515" y="0"/>
                   </a:lnTo>
                 </a:path>
               </a:pathLst>
@@ -2400,21 +2392,21 @@
           </p:nvSpPr>
           <p:spPr>
             <a:xfrm>
-              <a:off x="817517" y="2654127"/>
-              <a:ext cx="7799693" cy="0"/>
+              <a:off x="887106" y="2651959"/>
+              <a:ext cx="7660515" cy="0"/>
             </a:xfrm>
             <a:custGeom>
               <a:avLst/>
               <a:pathLst>
-                <a:path w="7799693" h="0">
+                <a:path w="7660515" h="0">
                   <a:moveTo>
                     <a:pt x="0" y="0"/>
                   </a:moveTo>
                   <a:lnTo>
-                    <a:pt x="7799693" y="0"/>
-                  </a:lnTo>
-                  <a:lnTo>
-                    <a:pt x="7799693" y="0"/>
+                    <a:pt x="7660515" y="0"/>
+                  </a:lnTo>
+                  <a:lnTo>
+                    <a:pt x="7660515" y="0"/>
                   </a:lnTo>
                 </a:path>
               </a:pathLst>
@@ -2443,21 +2435,21 @@
           </p:nvSpPr>
           <p:spPr>
             <a:xfrm>
-              <a:off x="1531834" y="2073503"/>
-              <a:ext cx="0" cy="3649639"/>
+              <a:off x="887106" y="2352625"/>
+              <a:ext cx="7660515" cy="0"/>
             </a:xfrm>
             <a:custGeom>
               <a:avLst/>
               <a:pathLst>
-                <a:path w="0" h="3649639">
+                <a:path w="7660515" h="0">
                   <a:moveTo>
-                    <a:pt x="0" y="3649639"/>
+                    <a:pt x="0" y="0"/>
                   </a:moveTo>
                   <a:lnTo>
-                    <a:pt x="0" y="0"/>
-                  </a:lnTo>
-                  <a:lnTo>
-                    <a:pt x="0" y="0"/>
+                    <a:pt x="7660515" y="0"/>
+                  </a:lnTo>
+                  <a:lnTo>
+                    <a:pt x="7660515" y="0"/>
                   </a:lnTo>
                 </a:path>
               </a:pathLst>
@@ -2486,15 +2478,15 @@
           </p:nvSpPr>
           <p:spPr>
             <a:xfrm>
-              <a:off x="3586410" y="2073503"/>
-              <a:ext cx="0" cy="3649639"/>
+              <a:off x="1588677" y="2143092"/>
+              <a:ext cx="0" cy="1317069"/>
             </a:xfrm>
             <a:custGeom>
               <a:avLst/>
               <a:pathLst>
-                <a:path w="0" h="3649639">
+                <a:path w="0" h="1317069">
                   <a:moveTo>
-                    <a:pt x="0" y="3649639"/>
+                    <a:pt x="0" y="1317069"/>
                   </a:moveTo>
                   <a:lnTo>
                     <a:pt x="0" y="0"/>
@@ -2529,15 +2521,15 @@
           </p:nvSpPr>
           <p:spPr>
             <a:xfrm>
-              <a:off x="5640985" y="2073503"/>
-              <a:ext cx="0" cy="3649639"/>
+              <a:off x="3606590" y="2143092"/>
+              <a:ext cx="0" cy="1317069"/>
             </a:xfrm>
             <a:custGeom>
               <a:avLst/>
               <a:pathLst>
-                <a:path w="0" h="3649639">
+                <a:path w="0" h="1317069">
                   <a:moveTo>
-                    <a:pt x="0" y="3649639"/>
+                    <a:pt x="0" y="1317069"/>
                   </a:moveTo>
                   <a:lnTo>
                     <a:pt x="0" y="0"/>
@@ -2572,15 +2564,15 @@
           </p:nvSpPr>
           <p:spPr>
             <a:xfrm>
-              <a:off x="7695561" y="2073503"/>
-              <a:ext cx="0" cy="3649639"/>
+              <a:off x="5624504" y="2143092"/>
+              <a:ext cx="0" cy="1317069"/>
             </a:xfrm>
             <a:custGeom>
               <a:avLst/>
               <a:pathLst>
-                <a:path w="0" h="3649639">
+                <a:path w="0" h="1317069">
                   <a:moveTo>
-                    <a:pt x="0" y="3649639"/>
+                    <a:pt x="0" y="1317069"/>
                   </a:moveTo>
                   <a:lnTo>
                     <a:pt x="0" y="0"/>
@@ -2615,26 +2607,26 @@
           </p:nvSpPr>
           <p:spPr>
             <a:xfrm>
-              <a:off x="817517" y="5557249"/>
-              <a:ext cx="7799693" cy="0"/>
+              <a:off x="7642418" y="2143092"/>
+              <a:ext cx="0" cy="1317069"/>
             </a:xfrm>
             <a:custGeom>
               <a:avLst/>
               <a:pathLst>
-                <a:path w="7799693" h="0">
+                <a:path w="0" h="1317069">
                   <a:moveTo>
+                    <a:pt x="0" y="1317069"/>
+                  </a:moveTo>
+                  <a:lnTo>
                     <a:pt x="0" y="0"/>
-                  </a:moveTo>
-                  <a:lnTo>
-                    <a:pt x="7799693" y="0"/>
-                  </a:lnTo>
-                  <a:lnTo>
-                    <a:pt x="7799693" y="0"/>
+                  </a:lnTo>
+                  <a:lnTo>
+                    <a:pt x="0" y="0"/>
                   </a:lnTo>
                 </a:path>
               </a:pathLst>
             </a:custGeom>
-            <a:ln w="13550" cap="flat">
+            <a:ln w="6775" cap="flat">
               <a:solidFill>
                 <a:srgbClr val="EBEBEB">
                   <a:alpha val="100000"/>
@@ -2658,21 +2650,21 @@
           </p:nvSpPr>
           <p:spPr>
             <a:xfrm>
-              <a:off x="817517" y="4727786"/>
-              <a:ext cx="7799693" cy="0"/>
+              <a:off x="887106" y="3400294"/>
+              <a:ext cx="7660515" cy="0"/>
             </a:xfrm>
             <a:custGeom>
               <a:avLst/>
               <a:pathLst>
-                <a:path w="7799693" h="0">
+                <a:path w="7660515" h="0">
                   <a:moveTo>
                     <a:pt x="0" y="0"/>
                   </a:moveTo>
                   <a:lnTo>
-                    <a:pt x="7799693" y="0"/>
-                  </a:lnTo>
-                  <a:lnTo>
-                    <a:pt x="7799693" y="0"/>
+                    <a:pt x="7660515" y="0"/>
+                  </a:lnTo>
+                  <a:lnTo>
+                    <a:pt x="7660515" y="0"/>
                   </a:lnTo>
                 </a:path>
               </a:pathLst>
@@ -2701,21 +2693,21 @@
           </p:nvSpPr>
           <p:spPr>
             <a:xfrm>
-              <a:off x="817517" y="3898322"/>
-              <a:ext cx="7799693" cy="0"/>
+              <a:off x="887106" y="3100960"/>
+              <a:ext cx="7660515" cy="0"/>
             </a:xfrm>
             <a:custGeom>
               <a:avLst/>
               <a:pathLst>
-                <a:path w="7799693" h="0">
+                <a:path w="7660515" h="0">
                   <a:moveTo>
                     <a:pt x="0" y="0"/>
                   </a:moveTo>
                   <a:lnTo>
-                    <a:pt x="7799693" y="0"/>
-                  </a:lnTo>
-                  <a:lnTo>
-                    <a:pt x="7799693" y="0"/>
+                    <a:pt x="7660515" y="0"/>
+                  </a:lnTo>
+                  <a:lnTo>
+                    <a:pt x="7660515" y="0"/>
                   </a:lnTo>
                 </a:path>
               </a:pathLst>
@@ -2744,21 +2736,21 @@
           </p:nvSpPr>
           <p:spPr>
             <a:xfrm>
-              <a:off x="817517" y="3068859"/>
-              <a:ext cx="7799693" cy="0"/>
+              <a:off x="887106" y="2801626"/>
+              <a:ext cx="7660515" cy="0"/>
             </a:xfrm>
             <a:custGeom>
               <a:avLst/>
               <a:pathLst>
-                <a:path w="7799693" h="0">
+                <a:path w="7660515" h="0">
                   <a:moveTo>
                     <a:pt x="0" y="0"/>
                   </a:moveTo>
                   <a:lnTo>
-                    <a:pt x="7799693" y="0"/>
-                  </a:lnTo>
-                  <a:lnTo>
-                    <a:pt x="7799693" y="0"/>
+                    <a:pt x="7660515" y="0"/>
+                  </a:lnTo>
+                  <a:lnTo>
+                    <a:pt x="7660515" y="0"/>
                   </a:lnTo>
                 </a:path>
               </a:pathLst>
@@ -2787,21 +2779,21 @@
           </p:nvSpPr>
           <p:spPr>
             <a:xfrm>
-              <a:off x="817517" y="2239395"/>
-              <a:ext cx="7799693" cy="0"/>
+              <a:off x="887106" y="2502292"/>
+              <a:ext cx="7660515" cy="0"/>
             </a:xfrm>
             <a:custGeom>
               <a:avLst/>
               <a:pathLst>
-                <a:path w="7799693" h="0">
+                <a:path w="7660515" h="0">
                   <a:moveTo>
                     <a:pt x="0" y="0"/>
                   </a:moveTo>
                   <a:lnTo>
-                    <a:pt x="7799693" y="0"/>
-                  </a:lnTo>
-                  <a:lnTo>
-                    <a:pt x="7799693" y="0"/>
+                    <a:pt x="7660515" y="0"/>
+                  </a:lnTo>
+                  <a:lnTo>
+                    <a:pt x="7660515" y="0"/>
                   </a:lnTo>
                 </a:path>
               </a:pathLst>
@@ -2830,21 +2822,21 @@
           </p:nvSpPr>
           <p:spPr>
             <a:xfrm>
-              <a:off x="2559122" y="2073503"/>
-              <a:ext cx="0" cy="3649639"/>
+              <a:off x="887106" y="2202958"/>
+              <a:ext cx="7660515" cy="0"/>
             </a:xfrm>
             <a:custGeom>
               <a:avLst/>
               <a:pathLst>
-                <a:path w="0" h="3649639">
+                <a:path w="7660515" h="0">
                   <a:moveTo>
-                    <a:pt x="0" y="3649639"/>
+                    <a:pt x="0" y="0"/>
                   </a:moveTo>
                   <a:lnTo>
-                    <a:pt x="0" y="0"/>
-                  </a:lnTo>
-                  <a:lnTo>
-                    <a:pt x="0" y="0"/>
+                    <a:pt x="7660515" y="0"/>
+                  </a:lnTo>
+                  <a:lnTo>
+                    <a:pt x="7660515" y="0"/>
                   </a:lnTo>
                 </a:path>
               </a:pathLst>
@@ -2873,15 +2865,15 @@
           </p:nvSpPr>
           <p:spPr>
             <a:xfrm>
-              <a:off x="4613698" y="2073503"/>
-              <a:ext cx="0" cy="3649639"/>
+              <a:off x="2597634" y="2143092"/>
+              <a:ext cx="0" cy="1317069"/>
             </a:xfrm>
             <a:custGeom>
               <a:avLst/>
               <a:pathLst>
-                <a:path w="0" h="3649639">
+                <a:path w="0" h="1317069">
                   <a:moveTo>
-                    <a:pt x="0" y="3649639"/>
+                    <a:pt x="0" y="1317069"/>
                   </a:moveTo>
                   <a:lnTo>
                     <a:pt x="0" y="0"/>
@@ -2916,15 +2908,15 @@
           </p:nvSpPr>
           <p:spPr>
             <a:xfrm>
-              <a:off x="6668273" y="2073503"/>
-              <a:ext cx="0" cy="3649639"/>
+              <a:off x="4615547" y="2143092"/>
+              <a:ext cx="0" cy="1317069"/>
             </a:xfrm>
             <a:custGeom>
               <a:avLst/>
               <a:pathLst>
-                <a:path w="0" h="3649639">
+                <a:path w="0" h="1317069">
                   <a:moveTo>
-                    <a:pt x="0" y="3649639"/>
+                    <a:pt x="0" y="1317069"/>
                   </a:moveTo>
                   <a:lnTo>
                     <a:pt x="0" y="0"/>
@@ -2953,546 +2945,589 @@
         </p:sp>
         <p:sp>
           <p:nvSpPr>
-            <p:cNvPr id="20" name="pg20"/>
+            <p:cNvPr id="20" name="pl20"/>
             <p:cNvSpPr/>
             <p:nvPr/>
           </p:nvSpPr>
           <p:spPr>
             <a:xfrm>
-              <a:off x="1172049" y="2073503"/>
-              <a:ext cx="7090630" cy="3459975"/>
+              <a:off x="6633461" y="2143092"/>
+              <a:ext cx="0" cy="1317069"/>
             </a:xfrm>
             <a:custGeom>
               <a:avLst/>
               <a:pathLst>
-                <a:path w="7090630" h="3459975">
+                <a:path w="0" h="1317069">
                   <a:moveTo>
-                    <a:pt x="1764047" y="0"/>
+                    <a:pt x="0" y="1317069"/>
                   </a:moveTo>
                   <a:lnTo>
-                    <a:pt x="1790563" y="87207"/>
-                  </a:lnTo>
-                  <a:lnTo>
-                    <a:pt x="1862185" y="307491"/>
-                  </a:lnTo>
-                  <a:lnTo>
-                    <a:pt x="1933808" y="513489"/>
-                  </a:lnTo>
-                  <a:lnTo>
-                    <a:pt x="2005430" y="706127"/>
-                  </a:lnTo>
-                  <a:lnTo>
-                    <a:pt x="2077053" y="886271"/>
-                  </a:lnTo>
-                  <a:lnTo>
-                    <a:pt x="2148675" y="1054732"/>
-                  </a:lnTo>
-                  <a:lnTo>
-                    <a:pt x="2220298" y="1212267"/>
-                  </a:lnTo>
-                  <a:lnTo>
-                    <a:pt x="2291920" y="1359585"/>
-                  </a:lnTo>
-                  <a:lnTo>
-                    <a:pt x="2363543" y="1497349"/>
-                  </a:lnTo>
-                  <a:lnTo>
-                    <a:pt x="2435165" y="1626178"/>
-                  </a:lnTo>
-                  <a:lnTo>
-                    <a:pt x="2506788" y="1746652"/>
-                  </a:lnTo>
-                  <a:lnTo>
-                    <a:pt x="2578410" y="1859312"/>
-                  </a:lnTo>
-                  <a:lnTo>
-                    <a:pt x="2650033" y="1964666"/>
-                  </a:lnTo>
-                  <a:lnTo>
-                    <a:pt x="2721655" y="2063187"/>
-                  </a:lnTo>
-                  <a:lnTo>
-                    <a:pt x="2793278" y="2155318"/>
-                  </a:lnTo>
-                  <a:lnTo>
-                    <a:pt x="2864901" y="2241474"/>
-                  </a:lnTo>
-                  <a:lnTo>
-                    <a:pt x="2936523" y="2322042"/>
-                  </a:lnTo>
-                  <a:lnTo>
-                    <a:pt x="3008146" y="2397385"/>
-                  </a:lnTo>
-                  <a:lnTo>
-                    <a:pt x="3079768" y="2467842"/>
-                  </a:lnTo>
-                  <a:lnTo>
-                    <a:pt x="3151391" y="2533729"/>
-                  </a:lnTo>
-                  <a:lnTo>
-                    <a:pt x="3223013" y="2595343"/>
-                  </a:lnTo>
-                  <a:lnTo>
-                    <a:pt x="3294636" y="2652961"/>
-                  </a:lnTo>
-                  <a:lnTo>
-                    <a:pt x="3366258" y="2676126"/>
-                  </a:lnTo>
-                  <a:lnTo>
-                    <a:pt x="3437881" y="2697905"/>
-                  </a:lnTo>
-                  <a:lnTo>
-                    <a:pt x="3509503" y="2719096"/>
-                  </a:lnTo>
-                  <a:lnTo>
-                    <a:pt x="3581126" y="2739716"/>
-                  </a:lnTo>
-                  <a:lnTo>
-                    <a:pt x="3652748" y="2759780"/>
-                  </a:lnTo>
-                  <a:lnTo>
-                    <a:pt x="3724371" y="2779302"/>
-                  </a:lnTo>
-                  <a:lnTo>
-                    <a:pt x="3795993" y="2798299"/>
-                  </a:lnTo>
-                  <a:lnTo>
-                    <a:pt x="3867616" y="2816783"/>
-                  </a:lnTo>
-                  <a:lnTo>
-                    <a:pt x="3939238" y="2834768"/>
-                  </a:lnTo>
-                  <a:lnTo>
-                    <a:pt x="4010861" y="2852269"/>
-                  </a:lnTo>
-                  <a:lnTo>
-                    <a:pt x="4082483" y="2869297"/>
-                  </a:lnTo>
-                  <a:lnTo>
-                    <a:pt x="4154106" y="2885867"/>
-                  </a:lnTo>
-                  <a:lnTo>
-                    <a:pt x="4225729" y="2901989"/>
-                  </a:lnTo>
-                  <a:lnTo>
-                    <a:pt x="4297351" y="2917677"/>
-                  </a:lnTo>
-                  <a:lnTo>
-                    <a:pt x="4368974" y="2932942"/>
-                  </a:lnTo>
-                  <a:lnTo>
-                    <a:pt x="4440596" y="2947795"/>
-                  </a:lnTo>
-                  <a:lnTo>
-                    <a:pt x="4512219" y="2962248"/>
-                  </a:lnTo>
-                  <a:lnTo>
-                    <a:pt x="4583841" y="2976311"/>
-                  </a:lnTo>
-                  <a:lnTo>
-                    <a:pt x="4655464" y="2989994"/>
-                  </a:lnTo>
-                  <a:lnTo>
-                    <a:pt x="4727086" y="3003309"/>
-                  </a:lnTo>
-                  <a:lnTo>
-                    <a:pt x="4798709" y="3016265"/>
-                  </a:lnTo>
-                  <a:lnTo>
-                    <a:pt x="4870331" y="3028871"/>
-                  </a:lnTo>
-                  <a:lnTo>
-                    <a:pt x="4941954" y="3041137"/>
-                  </a:lnTo>
-                  <a:lnTo>
-                    <a:pt x="5013576" y="3053073"/>
-                  </a:lnTo>
-                  <a:lnTo>
-                    <a:pt x="5085199" y="3064686"/>
-                  </a:lnTo>
-                  <a:lnTo>
-                    <a:pt x="5156821" y="3075987"/>
-                  </a:lnTo>
-                  <a:lnTo>
-                    <a:pt x="5228444" y="3086983"/>
-                  </a:lnTo>
-                  <a:lnTo>
-                    <a:pt x="5300066" y="3097682"/>
-                  </a:lnTo>
-                  <a:lnTo>
-                    <a:pt x="5371689" y="3108093"/>
-                  </a:lnTo>
-                  <a:lnTo>
-                    <a:pt x="5443311" y="3118223"/>
-                  </a:lnTo>
-                  <a:lnTo>
-                    <a:pt x="5514934" y="3128080"/>
-                  </a:lnTo>
-                  <a:lnTo>
-                    <a:pt x="5586557" y="3137671"/>
-                  </a:lnTo>
-                  <a:lnTo>
-                    <a:pt x="5658179" y="3147003"/>
-                  </a:lnTo>
-                  <a:lnTo>
-                    <a:pt x="5729802" y="3156084"/>
-                  </a:lnTo>
-                  <a:lnTo>
-                    <a:pt x="5801424" y="3164920"/>
-                  </a:lnTo>
-                  <a:lnTo>
-                    <a:pt x="5873047" y="3173517"/>
-                  </a:lnTo>
-                  <a:lnTo>
-                    <a:pt x="5944669" y="3181883"/>
-                  </a:lnTo>
-                  <a:lnTo>
-                    <a:pt x="6016292" y="3190023"/>
-                  </a:lnTo>
-                  <a:lnTo>
-                    <a:pt x="6087914" y="3197944"/>
-                  </a:lnTo>
-                  <a:lnTo>
-                    <a:pt x="6159537" y="3205651"/>
-                  </a:lnTo>
-                  <a:lnTo>
-                    <a:pt x="6231159" y="3213150"/>
-                  </a:lnTo>
-                  <a:lnTo>
-                    <a:pt x="6302782" y="3220447"/>
-                  </a:lnTo>
-                  <a:lnTo>
-                    <a:pt x="6374404" y="3227547"/>
-                  </a:lnTo>
-                  <a:lnTo>
-                    <a:pt x="6446027" y="3234456"/>
-                  </a:lnTo>
-                  <a:lnTo>
-                    <a:pt x="6517649" y="3241178"/>
-                  </a:lnTo>
-                  <a:lnTo>
-                    <a:pt x="6589272" y="3247720"/>
-                  </a:lnTo>
-                  <a:lnTo>
-                    <a:pt x="6660894" y="3254084"/>
-                  </a:lnTo>
-                  <a:lnTo>
-                    <a:pt x="6732517" y="3260277"/>
-                  </a:lnTo>
-                  <a:lnTo>
-                    <a:pt x="6804139" y="3266304"/>
-                  </a:lnTo>
-                  <a:lnTo>
-                    <a:pt x="6875762" y="3272167"/>
-                  </a:lnTo>
-                  <a:lnTo>
-                    <a:pt x="6947385" y="3277873"/>
-                  </a:lnTo>
-                  <a:lnTo>
-                    <a:pt x="7019007" y="3283424"/>
-                  </a:lnTo>
-                  <a:lnTo>
-                    <a:pt x="7090630" y="3288826"/>
-                  </a:lnTo>
-                  <a:lnTo>
-                    <a:pt x="7090630" y="3459975"/>
-                  </a:lnTo>
-                  <a:lnTo>
-                    <a:pt x="7019007" y="3458326"/>
-                  </a:lnTo>
-                  <a:lnTo>
-                    <a:pt x="6947385" y="3456563"/>
-                  </a:lnTo>
-                  <a:lnTo>
-                    <a:pt x="6875762" y="3454678"/>
-                  </a:lnTo>
-                  <a:lnTo>
-                    <a:pt x="6804139" y="3452662"/>
-                  </a:lnTo>
-                  <a:lnTo>
-                    <a:pt x="6732517" y="3450506"/>
-                  </a:lnTo>
-                  <a:lnTo>
-                    <a:pt x="6660894" y="3448201"/>
-                  </a:lnTo>
-                  <a:lnTo>
-                    <a:pt x="6589272" y="3445735"/>
-                  </a:lnTo>
-                  <a:lnTo>
-                    <a:pt x="6517649" y="3443099"/>
-                  </a:lnTo>
-                  <a:lnTo>
-                    <a:pt x="6446027" y="3440280"/>
-                  </a:lnTo>
-                  <a:lnTo>
-                    <a:pt x="6374404" y="3437266"/>
-                  </a:lnTo>
-                  <a:lnTo>
-                    <a:pt x="6302782" y="3434042"/>
-                  </a:lnTo>
-                  <a:lnTo>
-                    <a:pt x="6231159" y="3430595"/>
-                  </a:lnTo>
-                  <a:lnTo>
-                    <a:pt x="6159537" y="3426909"/>
-                  </a:lnTo>
-                  <a:lnTo>
-                    <a:pt x="6087914" y="3422967"/>
-                  </a:lnTo>
-                  <a:lnTo>
-                    <a:pt x="6016292" y="3418752"/>
-                  </a:lnTo>
-                  <a:lnTo>
-                    <a:pt x="5944669" y="3414244"/>
-                  </a:lnTo>
-                  <a:lnTo>
-                    <a:pt x="5873047" y="3409424"/>
-                  </a:lnTo>
-                  <a:lnTo>
-                    <a:pt x="5801424" y="3404269"/>
-                  </a:lnTo>
-                  <a:lnTo>
-                    <a:pt x="5729802" y="3398757"/>
-                  </a:lnTo>
-                  <a:lnTo>
-                    <a:pt x="5658179" y="3392863"/>
-                  </a:lnTo>
-                  <a:lnTo>
-                    <a:pt x="5586557" y="3386560"/>
-                  </a:lnTo>
-                  <a:lnTo>
-                    <a:pt x="5514934" y="3379819"/>
-                  </a:lnTo>
-                  <a:lnTo>
-                    <a:pt x="5443311" y="3372612"/>
-                  </a:lnTo>
-                  <a:lnTo>
-                    <a:pt x="5371689" y="3364904"/>
-                  </a:lnTo>
-                  <a:lnTo>
-                    <a:pt x="5300066" y="3356662"/>
-                  </a:lnTo>
-                  <a:lnTo>
-                    <a:pt x="5228444" y="3347848"/>
-                  </a:lnTo>
-                  <a:lnTo>
-                    <a:pt x="5156821" y="3338423"/>
-                  </a:lnTo>
-                  <a:lnTo>
-                    <a:pt x="5085199" y="3328345"/>
-                  </a:lnTo>
-                  <a:lnTo>
-                    <a:pt x="5013576" y="3317567"/>
-                  </a:lnTo>
-                  <a:lnTo>
-                    <a:pt x="4941954" y="3306042"/>
-                  </a:lnTo>
-                  <a:lnTo>
-                    <a:pt x="4870331" y="3293717"/>
-                  </a:lnTo>
-                  <a:lnTo>
-                    <a:pt x="4798709" y="3280538"/>
-                  </a:lnTo>
-                  <a:lnTo>
-                    <a:pt x="4727086" y="3266445"/>
-                  </a:lnTo>
-                  <a:lnTo>
-                    <a:pt x="4655464" y="3251374"/>
-                  </a:lnTo>
-                  <a:lnTo>
-                    <a:pt x="4583841" y="3235258"/>
-                  </a:lnTo>
-                  <a:lnTo>
-                    <a:pt x="4512219" y="3218025"/>
-                  </a:lnTo>
-                  <a:lnTo>
-                    <a:pt x="4440596" y="3199596"/>
-                  </a:lnTo>
-                  <a:lnTo>
-                    <a:pt x="4368974" y="3179889"/>
-                  </a:lnTo>
-                  <a:lnTo>
-                    <a:pt x="4297351" y="3158816"/>
-                  </a:lnTo>
-                  <a:lnTo>
-                    <a:pt x="4225729" y="3136281"/>
-                  </a:lnTo>
-                  <a:lnTo>
-                    <a:pt x="4154106" y="3112183"/>
-                  </a:lnTo>
-                  <a:lnTo>
-                    <a:pt x="4082483" y="3086414"/>
-                  </a:lnTo>
-                  <a:lnTo>
-                    <a:pt x="4010861" y="3058857"/>
-                  </a:lnTo>
-                  <a:lnTo>
-                    <a:pt x="3939238" y="3029390"/>
-                  </a:lnTo>
-                  <a:lnTo>
-                    <a:pt x="3867616" y="2997878"/>
-                  </a:lnTo>
-                  <a:lnTo>
-                    <a:pt x="3795993" y="2964182"/>
-                  </a:lnTo>
-                  <a:lnTo>
-                    <a:pt x="3724371" y="2928148"/>
-                  </a:lnTo>
-                  <a:lnTo>
-                    <a:pt x="3652748" y="2889615"/>
-                  </a:lnTo>
-                  <a:lnTo>
-                    <a:pt x="3581126" y="2848410"/>
-                  </a:lnTo>
-                  <a:lnTo>
-                    <a:pt x="3509503" y="2804347"/>
-                  </a:lnTo>
-                  <a:lnTo>
-                    <a:pt x="3437881" y="2757228"/>
-                  </a:lnTo>
-                  <a:lnTo>
-                    <a:pt x="3366258" y="2706842"/>
-                  </a:lnTo>
-                  <a:lnTo>
-                    <a:pt x="3294636" y="2653744"/>
-                  </a:lnTo>
-                  <a:lnTo>
-                    <a:pt x="3223013" y="2630742"/>
-                  </a:lnTo>
-                  <a:lnTo>
-                    <a:pt x="3151391" y="2607102"/>
-                  </a:lnTo>
-                  <a:lnTo>
-                    <a:pt x="3079768" y="2582807"/>
-                  </a:lnTo>
-                  <a:lnTo>
-                    <a:pt x="3008146" y="2557838"/>
-                  </a:lnTo>
-                  <a:lnTo>
-                    <a:pt x="2936523" y="2532178"/>
-                  </a:lnTo>
-                  <a:lnTo>
-                    <a:pt x="2864901" y="2505807"/>
-                  </a:lnTo>
-                  <a:lnTo>
-                    <a:pt x="2793278" y="2478704"/>
-                  </a:lnTo>
-                  <a:lnTo>
-                    <a:pt x="2721655" y="2450851"/>
-                  </a:lnTo>
-                  <a:lnTo>
-                    <a:pt x="2650033" y="2422226"/>
-                  </a:lnTo>
-                  <a:lnTo>
-                    <a:pt x="2578410" y="2392807"/>
-                  </a:lnTo>
-                  <a:lnTo>
-                    <a:pt x="2506788" y="2362573"/>
-                  </a:lnTo>
-                  <a:lnTo>
-                    <a:pt x="2435165" y="2331501"/>
-                  </a:lnTo>
-                  <a:lnTo>
-                    <a:pt x="2363543" y="2299569"/>
-                  </a:lnTo>
-                  <a:lnTo>
-                    <a:pt x="2291920" y="2266751"/>
-                  </a:lnTo>
-                  <a:lnTo>
-                    <a:pt x="2220298" y="2233023"/>
-                  </a:lnTo>
-                  <a:lnTo>
-                    <a:pt x="2148675" y="2198361"/>
-                  </a:lnTo>
-                  <a:lnTo>
-                    <a:pt x="2077053" y="2162738"/>
-                  </a:lnTo>
-                  <a:lnTo>
-                    <a:pt x="2005430" y="2126128"/>
-                  </a:lnTo>
-                  <a:lnTo>
-                    <a:pt x="1933808" y="2088504"/>
-                  </a:lnTo>
-                  <a:lnTo>
-                    <a:pt x="1862185" y="2049837"/>
-                  </a:lnTo>
-                  <a:lnTo>
-                    <a:pt x="1790563" y="2010098"/>
-                  </a:lnTo>
-                  <a:lnTo>
-                    <a:pt x="1718940" y="1969258"/>
-                  </a:lnTo>
-                  <a:lnTo>
-                    <a:pt x="1647318" y="1927286"/>
-                  </a:lnTo>
-                  <a:lnTo>
-                    <a:pt x="1575695" y="1884150"/>
-                  </a:lnTo>
-                  <a:lnTo>
-                    <a:pt x="1504073" y="1839820"/>
-                  </a:lnTo>
-                  <a:lnTo>
-                    <a:pt x="1432450" y="1794260"/>
-                  </a:lnTo>
-                  <a:lnTo>
-                    <a:pt x="1360827" y="1747439"/>
-                  </a:lnTo>
-                  <a:lnTo>
-                    <a:pt x="1289205" y="1699319"/>
-                  </a:lnTo>
-                  <a:lnTo>
-                    <a:pt x="1217582" y="1649866"/>
-                  </a:lnTo>
-                  <a:lnTo>
-                    <a:pt x="1145960" y="1599043"/>
-                  </a:lnTo>
-                  <a:lnTo>
-                    <a:pt x="1074337" y="1546811"/>
-                  </a:lnTo>
-                  <a:lnTo>
-                    <a:pt x="1002715" y="1493131"/>
-                  </a:lnTo>
-                  <a:lnTo>
-                    <a:pt x="931092" y="1437964"/>
-                  </a:lnTo>
-                  <a:lnTo>
-                    <a:pt x="859470" y="1381268"/>
-                  </a:lnTo>
-                  <a:lnTo>
-                    <a:pt x="787847" y="1323000"/>
-                  </a:lnTo>
-                  <a:lnTo>
-                    <a:pt x="716225" y="1263118"/>
-                  </a:lnTo>
-                  <a:lnTo>
-                    <a:pt x="644602" y="1201576"/>
-                  </a:lnTo>
-                  <a:lnTo>
-                    <a:pt x="572980" y="1138329"/>
-                  </a:lnTo>
-                  <a:lnTo>
-                    <a:pt x="501357" y="1073329"/>
-                  </a:lnTo>
-                  <a:lnTo>
-                    <a:pt x="429735" y="1006528"/>
-                  </a:lnTo>
-                  <a:lnTo>
-                    <a:pt x="358112" y="937875"/>
-                  </a:lnTo>
-                  <a:lnTo>
-                    <a:pt x="286490" y="867319"/>
-                  </a:lnTo>
-                  <a:lnTo>
-                    <a:pt x="214867" y="794809"/>
-                  </a:lnTo>
-                  <a:lnTo>
-                    <a:pt x="143245" y="720288"/>
-                  </a:lnTo>
-                  <a:lnTo>
-                    <a:pt x="71622" y="643703"/>
-                  </a:lnTo>
-                  <a:lnTo>
-                    <a:pt x="0" y="564995"/>
+                    <a:pt x="0" y="0"/>
+                  </a:lnTo>
+                  <a:lnTo>
+                    <a:pt x="0" y="0"/>
+                  </a:lnTo>
+                </a:path>
+              </a:pathLst>
+            </a:custGeom>
+            <a:ln w="13550" cap="flat">
+              <a:solidFill>
+                <a:srgbClr val="EBEBEB">
+                  <a:alpha val="100000"/>
+                </a:srgbClr>
+              </a:solidFill>
+              <a:prstDash val="solid"/>
+              <a:round/>
+            </a:ln>
+          </p:spPr>
+          <p:txBody>
+            <a:bodyPr/>
+            <a:lstStyle/>
+            <a:p/>
+          </p:txBody>
+        </p:sp>
+        <p:sp>
+          <p:nvSpPr>
+            <p:cNvPr id="21" name="pg21"/>
+            <p:cNvSpPr/>
+            <p:nvPr/>
+          </p:nvSpPr>
+          <p:spPr>
+            <a:xfrm>
+              <a:off x="1235312" y="2143092"/>
+              <a:ext cx="6964104" cy="1248623"/>
+            </a:xfrm>
+            <a:custGeom>
+              <a:avLst/>
+              <a:pathLst>
+                <a:path w="6964104" h="1248623">
+                  <a:moveTo>
+                    <a:pt x="1732570" y="0"/>
+                  </a:moveTo>
+                  <a:lnTo>
+                    <a:pt x="1758612" y="31471"/>
+                  </a:lnTo>
+                  <a:lnTo>
+                    <a:pt x="1828956" y="110966"/>
+                  </a:lnTo>
+                  <a:lnTo>
+                    <a:pt x="1899301" y="185306"/>
+                  </a:lnTo>
+                  <a:lnTo>
+                    <a:pt x="1969645" y="254824"/>
+                  </a:lnTo>
+                  <a:lnTo>
+                    <a:pt x="2039990" y="319834"/>
+                  </a:lnTo>
+                  <a:lnTo>
+                    <a:pt x="2110334" y="380628"/>
+                  </a:lnTo>
+                  <a:lnTo>
+                    <a:pt x="2180679" y="437478"/>
+                  </a:lnTo>
+                  <a:lnTo>
+                    <a:pt x="2251023" y="490642"/>
+                  </a:lnTo>
+                  <a:lnTo>
+                    <a:pt x="2321368" y="540358"/>
+                  </a:lnTo>
+                  <a:lnTo>
+                    <a:pt x="2391712" y="586849"/>
+                  </a:lnTo>
+                  <a:lnTo>
+                    <a:pt x="2462057" y="630325"/>
+                  </a:lnTo>
+                  <a:lnTo>
+                    <a:pt x="2532401" y="670982"/>
+                  </a:lnTo>
+                  <a:lnTo>
+                    <a:pt x="2602746" y="709001"/>
+                  </a:lnTo>
+                  <a:lnTo>
+                    <a:pt x="2673090" y="744555"/>
+                  </a:lnTo>
+                  <a:lnTo>
+                    <a:pt x="2743435" y="777803"/>
+                  </a:lnTo>
+                  <a:lnTo>
+                    <a:pt x="2813779" y="808895"/>
+                  </a:lnTo>
+                  <a:lnTo>
+                    <a:pt x="2884124" y="837970"/>
+                  </a:lnTo>
+                  <a:lnTo>
+                    <a:pt x="2954468" y="865160"/>
+                  </a:lnTo>
+                  <a:lnTo>
+                    <a:pt x="3024813" y="890586"/>
+                  </a:lnTo>
+                  <a:lnTo>
+                    <a:pt x="3095157" y="914363"/>
+                  </a:lnTo>
+                  <a:lnTo>
+                    <a:pt x="3165502" y="936598"/>
+                  </a:lnTo>
+                  <a:lnTo>
+                    <a:pt x="3235846" y="957391"/>
+                  </a:lnTo>
+                  <a:lnTo>
+                    <a:pt x="3306191" y="965751"/>
+                  </a:lnTo>
+                  <a:lnTo>
+                    <a:pt x="3376535" y="973610"/>
+                  </a:lnTo>
+                  <a:lnTo>
+                    <a:pt x="3446880" y="981257"/>
+                  </a:lnTo>
+                  <a:lnTo>
+                    <a:pt x="3517224" y="988699"/>
+                  </a:lnTo>
+                  <a:lnTo>
+                    <a:pt x="3587569" y="995939"/>
+                  </a:lnTo>
+                  <a:lnTo>
+                    <a:pt x="3657913" y="1002984"/>
+                  </a:lnTo>
+                  <a:lnTo>
+                    <a:pt x="3728257" y="1009840"/>
+                  </a:lnTo>
+                  <a:lnTo>
+                    <a:pt x="3798602" y="1016510"/>
+                  </a:lnTo>
+                  <a:lnTo>
+                    <a:pt x="3868946" y="1023001"/>
+                  </a:lnTo>
+                  <a:lnTo>
+                    <a:pt x="3939291" y="1029316"/>
+                  </a:lnTo>
+                  <a:lnTo>
+                    <a:pt x="4009635" y="1035462"/>
+                  </a:lnTo>
+                  <a:lnTo>
+                    <a:pt x="4079980" y="1041441"/>
+                  </a:lnTo>
+                  <a:lnTo>
+                    <a:pt x="4150324" y="1047259"/>
+                  </a:lnTo>
+                  <a:lnTo>
+                    <a:pt x="4220669" y="1052921"/>
+                  </a:lnTo>
+                  <a:lnTo>
+                    <a:pt x="4291013" y="1058429"/>
+                  </a:lnTo>
+                  <a:lnTo>
+                    <a:pt x="4361358" y="1063790"/>
+                  </a:lnTo>
+                  <a:lnTo>
+                    <a:pt x="4431702" y="1069005"/>
+                  </a:lnTo>
+                  <a:lnTo>
+                    <a:pt x="4502047" y="1074080"/>
+                  </a:lnTo>
+                  <a:lnTo>
+                    <a:pt x="4572391" y="1079018"/>
+                  </a:lnTo>
+                  <a:lnTo>
+                    <a:pt x="4642736" y="1083823"/>
+                  </a:lnTo>
+                  <a:lnTo>
+                    <a:pt x="4713080" y="1088499"/>
+                  </a:lnTo>
+                  <a:lnTo>
+                    <a:pt x="4783425" y="1093048"/>
+                  </a:lnTo>
+                  <a:lnTo>
+                    <a:pt x="4853769" y="1097475"/>
+                  </a:lnTo>
+                  <a:lnTo>
+                    <a:pt x="4924114" y="1101782"/>
+                  </a:lnTo>
+                  <a:lnTo>
+                    <a:pt x="4994458" y="1105973"/>
+                  </a:lnTo>
+                  <a:lnTo>
+                    <a:pt x="5064803" y="1110051"/>
+                  </a:lnTo>
+                  <a:lnTo>
+                    <a:pt x="5135147" y="1114019"/>
+                  </a:lnTo>
+                  <a:lnTo>
+                    <a:pt x="5205492" y="1117880"/>
+                  </a:lnTo>
+                  <a:lnTo>
+                    <a:pt x="5275836" y="1121637"/>
+                  </a:lnTo>
+                  <a:lnTo>
+                    <a:pt x="5346181" y="1125293"/>
+                  </a:lnTo>
+                  <a:lnTo>
+                    <a:pt x="5416525" y="1128850"/>
+                  </a:lnTo>
+                  <a:lnTo>
+                    <a:pt x="5486870" y="1132311"/>
+                  </a:lnTo>
+                  <a:lnTo>
+                    <a:pt x="5557214" y="1135679"/>
+                  </a:lnTo>
+                  <a:lnTo>
+                    <a:pt x="5627559" y="1138956"/>
+                  </a:lnTo>
+                  <a:lnTo>
+                    <a:pt x="5697903" y="1142145"/>
+                  </a:lnTo>
+                  <a:lnTo>
+                    <a:pt x="5768248" y="1145247"/>
+                  </a:lnTo>
+                  <a:lnTo>
+                    <a:pt x="5838592" y="1148266"/>
+                  </a:lnTo>
+                  <a:lnTo>
+                    <a:pt x="5908937" y="1151204"/>
+                  </a:lnTo>
+                  <a:lnTo>
+                    <a:pt x="5979281" y="1154062"/>
+                  </a:lnTo>
+                  <a:lnTo>
+                    <a:pt x="6049626" y="1156844"/>
+                  </a:lnTo>
+                  <a:lnTo>
+                    <a:pt x="6119970" y="1159550"/>
+                  </a:lnTo>
+                  <a:lnTo>
+                    <a:pt x="6190315" y="1162183"/>
+                  </a:lnTo>
+                  <a:lnTo>
+                    <a:pt x="6260659" y="1164746"/>
+                  </a:lnTo>
+                  <a:lnTo>
+                    <a:pt x="6331004" y="1167239"/>
+                  </a:lnTo>
+                  <a:lnTo>
+                    <a:pt x="6401348" y="1169665"/>
+                  </a:lnTo>
+                  <a:lnTo>
+                    <a:pt x="6471693" y="1172025"/>
+                  </a:lnTo>
+                  <a:lnTo>
+                    <a:pt x="6542037" y="1174322"/>
+                  </a:lnTo>
+                  <a:lnTo>
+                    <a:pt x="6612382" y="1176557"/>
+                  </a:lnTo>
+                  <a:lnTo>
+                    <a:pt x="6682726" y="1178732"/>
+                  </a:lnTo>
+                  <a:lnTo>
+                    <a:pt x="6753071" y="1180848"/>
+                  </a:lnTo>
+                  <a:lnTo>
+                    <a:pt x="6823415" y="1182907"/>
+                  </a:lnTo>
+                  <a:lnTo>
+                    <a:pt x="6893760" y="1184910"/>
+                  </a:lnTo>
+                  <a:lnTo>
+                    <a:pt x="6964104" y="1186860"/>
+                  </a:lnTo>
+                  <a:lnTo>
+                    <a:pt x="6964104" y="1248623"/>
+                  </a:lnTo>
+                  <a:lnTo>
+                    <a:pt x="6893760" y="1248028"/>
+                  </a:lnTo>
+                  <a:lnTo>
+                    <a:pt x="6823415" y="1247392"/>
+                  </a:lnTo>
+                  <a:lnTo>
+                    <a:pt x="6753071" y="1246712"/>
+                  </a:lnTo>
+                  <a:lnTo>
+                    <a:pt x="6682726" y="1245984"/>
+                  </a:lnTo>
+                  <a:lnTo>
+                    <a:pt x="6612382" y="1245206"/>
+                  </a:lnTo>
+                  <a:lnTo>
+                    <a:pt x="6542037" y="1244374"/>
+                  </a:lnTo>
+                  <a:lnTo>
+                    <a:pt x="6471693" y="1243485"/>
+                  </a:lnTo>
+                  <a:lnTo>
+                    <a:pt x="6401348" y="1242533"/>
+                  </a:lnTo>
+                  <a:lnTo>
+                    <a:pt x="6331004" y="1241516"/>
+                  </a:lnTo>
+                  <a:lnTo>
+                    <a:pt x="6260659" y="1240428"/>
+                  </a:lnTo>
+                  <a:lnTo>
+                    <a:pt x="6190315" y="1239265"/>
+                  </a:lnTo>
+                  <a:lnTo>
+                    <a:pt x="6119970" y="1238021"/>
+                  </a:lnTo>
+                  <a:lnTo>
+                    <a:pt x="6049626" y="1236690"/>
+                  </a:lnTo>
+                  <a:lnTo>
+                    <a:pt x="5979281" y="1235268"/>
+                  </a:lnTo>
+                  <a:lnTo>
+                    <a:pt x="5908937" y="1233747"/>
+                  </a:lnTo>
+                  <a:lnTo>
+                    <a:pt x="5838592" y="1232120"/>
+                  </a:lnTo>
+                  <a:lnTo>
+                    <a:pt x="5768248" y="1230380"/>
+                  </a:lnTo>
+                  <a:lnTo>
+                    <a:pt x="5697903" y="1228520"/>
+                  </a:lnTo>
+                  <a:lnTo>
+                    <a:pt x="5627559" y="1226531"/>
+                  </a:lnTo>
+                  <a:lnTo>
+                    <a:pt x="5557214" y="1224404"/>
+                  </a:lnTo>
+                  <a:lnTo>
+                    <a:pt x="5486870" y="1222129"/>
+                  </a:lnTo>
+                  <a:lnTo>
+                    <a:pt x="5416525" y="1219697"/>
+                  </a:lnTo>
+                  <a:lnTo>
+                    <a:pt x="5346181" y="1217096"/>
+                  </a:lnTo>
+                  <a:lnTo>
+                    <a:pt x="5275836" y="1214314"/>
+                  </a:lnTo>
+                  <a:lnTo>
+                    <a:pt x="5205492" y="1211340"/>
+                  </a:lnTo>
+                  <a:lnTo>
+                    <a:pt x="5135147" y="1208159"/>
+                  </a:lnTo>
+                  <a:lnTo>
+                    <a:pt x="5064803" y="1204758"/>
+                  </a:lnTo>
+                  <a:lnTo>
+                    <a:pt x="4994458" y="1201121"/>
+                  </a:lnTo>
+                  <a:lnTo>
+                    <a:pt x="4924114" y="1197232"/>
+                  </a:lnTo>
+                  <a:lnTo>
+                    <a:pt x="4853769" y="1193072"/>
+                  </a:lnTo>
+                  <a:lnTo>
+                    <a:pt x="4783425" y="1188625"/>
+                  </a:lnTo>
+                  <a:lnTo>
+                    <a:pt x="4713080" y="1183869"/>
+                  </a:lnTo>
+                  <a:lnTo>
+                    <a:pt x="4642736" y="1178783"/>
+                  </a:lnTo>
+                  <a:lnTo>
+                    <a:pt x="4572391" y="1173344"/>
+                  </a:lnTo>
+                  <a:lnTo>
+                    <a:pt x="4502047" y="1167528"/>
+                  </a:lnTo>
+                  <a:lnTo>
+                    <a:pt x="4431702" y="1161309"/>
+                  </a:lnTo>
+                  <a:lnTo>
+                    <a:pt x="4361358" y="1154659"/>
+                  </a:lnTo>
+                  <a:lnTo>
+                    <a:pt x="4291013" y="1147547"/>
+                  </a:lnTo>
+                  <a:lnTo>
+                    <a:pt x="4220669" y="1139942"/>
+                  </a:lnTo>
+                  <a:lnTo>
+                    <a:pt x="4150324" y="1131810"/>
+                  </a:lnTo>
+                  <a:lnTo>
+                    <a:pt x="4079980" y="1123113"/>
+                  </a:lnTo>
+                  <a:lnTo>
+                    <a:pt x="4009635" y="1113814"/>
+                  </a:lnTo>
+                  <a:lnTo>
+                    <a:pt x="3939291" y="1103869"/>
+                  </a:lnTo>
+                  <a:lnTo>
+                    <a:pt x="3868946" y="1093235"/>
+                  </a:lnTo>
+                  <a:lnTo>
+                    <a:pt x="3798602" y="1081863"/>
+                  </a:lnTo>
+                  <a:lnTo>
+                    <a:pt x="3728257" y="1069703"/>
+                  </a:lnTo>
+                  <a:lnTo>
+                    <a:pt x="3657913" y="1056699"/>
+                  </a:lnTo>
+                  <a:lnTo>
+                    <a:pt x="3587569" y="1042794"/>
+                  </a:lnTo>
+                  <a:lnTo>
+                    <a:pt x="3517224" y="1027924"/>
+                  </a:lnTo>
+                  <a:lnTo>
+                    <a:pt x="3446880" y="1012023"/>
+                  </a:lnTo>
+                  <a:lnTo>
+                    <a:pt x="3376535" y="995019"/>
+                  </a:lnTo>
+                  <a:lnTo>
+                    <a:pt x="3306191" y="976835"/>
+                  </a:lnTo>
+                  <a:lnTo>
+                    <a:pt x="3235846" y="957673"/>
+                  </a:lnTo>
+                  <a:lnTo>
+                    <a:pt x="3165502" y="949372"/>
+                  </a:lnTo>
+                  <a:lnTo>
+                    <a:pt x="3095157" y="940841"/>
+                  </a:lnTo>
+                  <a:lnTo>
+                    <a:pt x="3024813" y="932074"/>
+                  </a:lnTo>
+                  <a:lnTo>
+                    <a:pt x="2954468" y="923063"/>
+                  </a:lnTo>
+                  <a:lnTo>
+                    <a:pt x="2884124" y="913803"/>
+                  </a:lnTo>
+                  <a:lnTo>
+                    <a:pt x="2813779" y="904286"/>
+                  </a:lnTo>
+                  <a:lnTo>
+                    <a:pt x="2743435" y="894506"/>
+                  </a:lnTo>
+                  <a:lnTo>
+                    <a:pt x="2673090" y="884454"/>
+                  </a:lnTo>
+                  <a:lnTo>
+                    <a:pt x="2602746" y="874124"/>
+                  </a:lnTo>
+                  <a:lnTo>
+                    <a:pt x="2532401" y="863507"/>
+                  </a:lnTo>
+                  <a:lnTo>
+                    <a:pt x="2462057" y="852597"/>
+                  </a:lnTo>
+                  <a:lnTo>
+                    <a:pt x="2391712" y="841384"/>
+                  </a:lnTo>
+                  <a:lnTo>
+                    <a:pt x="2321368" y="829860"/>
+                  </a:lnTo>
+                  <a:lnTo>
+                    <a:pt x="2251023" y="818017"/>
+                  </a:lnTo>
+                  <a:lnTo>
+                    <a:pt x="2180679" y="805845"/>
+                  </a:lnTo>
+                  <a:lnTo>
+                    <a:pt x="2110334" y="793336"/>
+                  </a:lnTo>
+                  <a:lnTo>
+                    <a:pt x="2039990" y="780481"/>
+                  </a:lnTo>
+                  <a:lnTo>
+                    <a:pt x="1969645" y="767269"/>
+                  </a:lnTo>
+                  <a:lnTo>
+                    <a:pt x="1899301" y="753692"/>
+                  </a:lnTo>
+                  <a:lnTo>
+                    <a:pt x="1828956" y="739737"/>
+                  </a:lnTo>
+                  <a:lnTo>
+                    <a:pt x="1758612" y="725397"/>
+                  </a:lnTo>
+                  <a:lnTo>
+                    <a:pt x="1688267" y="710658"/>
+                  </a:lnTo>
+                  <a:lnTo>
+                    <a:pt x="1617923" y="695512"/>
+                  </a:lnTo>
+                  <a:lnTo>
+                    <a:pt x="1547578" y="679945"/>
+                  </a:lnTo>
+                  <a:lnTo>
+                    <a:pt x="1477234" y="663947"/>
+                  </a:lnTo>
+                  <a:lnTo>
+                    <a:pt x="1406889" y="647506"/>
+                  </a:lnTo>
+                  <a:lnTo>
+                    <a:pt x="1336545" y="630609"/>
+                  </a:lnTo>
+                  <a:lnTo>
+                    <a:pt x="1266200" y="613244"/>
+                  </a:lnTo>
+                  <a:lnTo>
+                    <a:pt x="1195856" y="595398"/>
+                  </a:lnTo>
+                  <a:lnTo>
+                    <a:pt x="1125511" y="577057"/>
+                  </a:lnTo>
+                  <a:lnTo>
+                    <a:pt x="1055167" y="558207"/>
+                  </a:lnTo>
+                  <a:lnTo>
+                    <a:pt x="984822" y="538836"/>
+                  </a:lnTo>
+                  <a:lnTo>
+                    <a:pt x="914478" y="518927"/>
+                  </a:lnTo>
+                  <a:lnTo>
+                    <a:pt x="844133" y="498467"/>
+                  </a:lnTo>
+                  <a:lnTo>
+                    <a:pt x="773789" y="477439"/>
+                  </a:lnTo>
+                  <a:lnTo>
+                    <a:pt x="703444" y="455829"/>
+                  </a:lnTo>
+                  <a:lnTo>
+                    <a:pt x="633100" y="433620"/>
+                  </a:lnTo>
+                  <a:lnTo>
+                    <a:pt x="562755" y="410796"/>
+                  </a:lnTo>
+                  <a:lnTo>
+                    <a:pt x="492411" y="387339"/>
+                  </a:lnTo>
+                  <a:lnTo>
+                    <a:pt x="422066" y="363232"/>
+                  </a:lnTo>
+                  <a:lnTo>
+                    <a:pt x="351722" y="338457"/>
+                  </a:lnTo>
+                  <a:lnTo>
+                    <a:pt x="281377" y="312995"/>
+                  </a:lnTo>
+                  <a:lnTo>
+                    <a:pt x="211033" y="286827"/>
+                  </a:lnTo>
+                  <a:lnTo>
+                    <a:pt x="140688" y="259935"/>
+                  </a:lnTo>
+                  <a:lnTo>
+                    <a:pt x="70344" y="232297"/>
+                  </a:lnTo>
+                  <a:lnTo>
+                    <a:pt x="0" y="203893"/>
                   </a:lnTo>
                   <a:close/>
                 </a:path>
@@ -3512,571 +3547,246 @@
         </p:sp>
         <p:sp>
           <p:nvSpPr>
-            <p:cNvPr id="21" name="pl21"/>
-            <p:cNvSpPr/>
-            <p:nvPr/>
-          </p:nvSpPr>
-          <p:spPr>
-            <a:xfrm>
-              <a:off x="2936097" y="2073503"/>
-              <a:ext cx="5326582" cy="3288826"/>
-            </a:xfrm>
-            <a:custGeom>
-              <a:avLst/>
-              <a:pathLst>
-                <a:path w="5326582" h="3288826">
-                  <a:moveTo>
-                    <a:pt x="0" y="0"/>
-                  </a:moveTo>
-                  <a:lnTo>
-                    <a:pt x="26515" y="87207"/>
-                  </a:lnTo>
-                  <a:lnTo>
-                    <a:pt x="98137" y="307491"/>
-                  </a:lnTo>
-                  <a:lnTo>
-                    <a:pt x="169760" y="513489"/>
-                  </a:lnTo>
-                  <a:lnTo>
-                    <a:pt x="241382" y="706127"/>
-                  </a:lnTo>
-                  <a:lnTo>
-                    <a:pt x="313005" y="886271"/>
-                  </a:lnTo>
-                  <a:lnTo>
-                    <a:pt x="384627" y="1054732"/>
-                  </a:lnTo>
-                  <a:lnTo>
-                    <a:pt x="456250" y="1212267"/>
-                  </a:lnTo>
-                  <a:lnTo>
-                    <a:pt x="527872" y="1359585"/>
-                  </a:lnTo>
-                  <a:lnTo>
-                    <a:pt x="599495" y="1497349"/>
-                  </a:lnTo>
-                  <a:lnTo>
-                    <a:pt x="671118" y="1626178"/>
-                  </a:lnTo>
-                  <a:lnTo>
-                    <a:pt x="742740" y="1746652"/>
-                  </a:lnTo>
-                  <a:lnTo>
-                    <a:pt x="814363" y="1859312"/>
-                  </a:lnTo>
-                  <a:lnTo>
-                    <a:pt x="885985" y="1964666"/>
-                  </a:lnTo>
-                  <a:lnTo>
-                    <a:pt x="957608" y="2063187"/>
-                  </a:lnTo>
-                  <a:lnTo>
-                    <a:pt x="1029230" y="2155318"/>
-                  </a:lnTo>
-                  <a:lnTo>
-                    <a:pt x="1100853" y="2241474"/>
-                  </a:lnTo>
-                  <a:lnTo>
-                    <a:pt x="1172475" y="2322042"/>
-                  </a:lnTo>
-                  <a:lnTo>
-                    <a:pt x="1244098" y="2397385"/>
-                  </a:lnTo>
-                  <a:lnTo>
-                    <a:pt x="1315720" y="2467842"/>
-                  </a:lnTo>
-                  <a:lnTo>
-                    <a:pt x="1387343" y="2533729"/>
-                  </a:lnTo>
-                  <a:lnTo>
-                    <a:pt x="1458965" y="2595343"/>
-                  </a:lnTo>
-                  <a:lnTo>
-                    <a:pt x="1530588" y="2652961"/>
-                  </a:lnTo>
-                  <a:lnTo>
-                    <a:pt x="1602210" y="2676126"/>
-                  </a:lnTo>
-                  <a:lnTo>
-                    <a:pt x="1673833" y="2697905"/>
-                  </a:lnTo>
-                  <a:lnTo>
-                    <a:pt x="1745455" y="2719096"/>
-                  </a:lnTo>
-                  <a:lnTo>
-                    <a:pt x="1817078" y="2739716"/>
-                  </a:lnTo>
-                  <a:lnTo>
-                    <a:pt x="1888700" y="2759780"/>
-                  </a:lnTo>
-                  <a:lnTo>
-                    <a:pt x="1960323" y="2779302"/>
-                  </a:lnTo>
-                  <a:lnTo>
-                    <a:pt x="2031946" y="2798299"/>
-                  </a:lnTo>
-                  <a:lnTo>
-                    <a:pt x="2103568" y="2816783"/>
-                  </a:lnTo>
-                  <a:lnTo>
-                    <a:pt x="2175191" y="2834768"/>
-                  </a:lnTo>
-                  <a:lnTo>
-                    <a:pt x="2246813" y="2852269"/>
-                  </a:lnTo>
-                  <a:lnTo>
-                    <a:pt x="2318436" y="2869297"/>
-                  </a:lnTo>
-                  <a:lnTo>
-                    <a:pt x="2390058" y="2885867"/>
-                  </a:lnTo>
-                  <a:lnTo>
-                    <a:pt x="2461681" y="2901989"/>
-                  </a:lnTo>
-                  <a:lnTo>
-                    <a:pt x="2533303" y="2917677"/>
-                  </a:lnTo>
-                  <a:lnTo>
-                    <a:pt x="2604926" y="2932942"/>
-                  </a:lnTo>
-                  <a:lnTo>
-                    <a:pt x="2676548" y="2947795"/>
-                  </a:lnTo>
-                  <a:lnTo>
-                    <a:pt x="2748171" y="2962248"/>
-                  </a:lnTo>
-                  <a:lnTo>
-                    <a:pt x="2819793" y="2976311"/>
-                  </a:lnTo>
-                  <a:lnTo>
-                    <a:pt x="2891416" y="2989994"/>
-                  </a:lnTo>
-                  <a:lnTo>
-                    <a:pt x="2963038" y="3003309"/>
-                  </a:lnTo>
-                  <a:lnTo>
-                    <a:pt x="3034661" y="3016265"/>
-                  </a:lnTo>
-                  <a:lnTo>
-                    <a:pt x="3106283" y="3028871"/>
-                  </a:lnTo>
-                  <a:lnTo>
-                    <a:pt x="3177906" y="3041137"/>
-                  </a:lnTo>
-                  <a:lnTo>
-                    <a:pt x="3249528" y="3053073"/>
-                  </a:lnTo>
-                  <a:lnTo>
-                    <a:pt x="3321151" y="3064686"/>
-                  </a:lnTo>
-                  <a:lnTo>
-                    <a:pt x="3392774" y="3075987"/>
-                  </a:lnTo>
-                  <a:lnTo>
-                    <a:pt x="3464396" y="3086983"/>
-                  </a:lnTo>
-                  <a:lnTo>
-                    <a:pt x="3536019" y="3097682"/>
-                  </a:lnTo>
-                  <a:lnTo>
-                    <a:pt x="3607641" y="3108093"/>
-                  </a:lnTo>
-                  <a:lnTo>
-                    <a:pt x="3679264" y="3118223"/>
-                  </a:lnTo>
-                  <a:lnTo>
-                    <a:pt x="3750886" y="3128080"/>
-                  </a:lnTo>
-                  <a:lnTo>
-                    <a:pt x="3822509" y="3137671"/>
-                  </a:lnTo>
-                  <a:lnTo>
-                    <a:pt x="3894131" y="3147003"/>
-                  </a:lnTo>
-                  <a:lnTo>
-                    <a:pt x="3965754" y="3156084"/>
-                  </a:lnTo>
-                  <a:lnTo>
-                    <a:pt x="4037376" y="3164920"/>
-                  </a:lnTo>
-                  <a:lnTo>
-                    <a:pt x="4108999" y="3173517"/>
-                  </a:lnTo>
-                  <a:lnTo>
-                    <a:pt x="4180621" y="3181883"/>
-                  </a:lnTo>
-                  <a:lnTo>
-                    <a:pt x="4252244" y="3190023"/>
-                  </a:lnTo>
-                  <a:lnTo>
-                    <a:pt x="4323866" y="3197944"/>
-                  </a:lnTo>
-                  <a:lnTo>
-                    <a:pt x="4395489" y="3205651"/>
-                  </a:lnTo>
-                  <a:lnTo>
-                    <a:pt x="4467111" y="3213150"/>
-                  </a:lnTo>
-                  <a:lnTo>
-                    <a:pt x="4538734" y="3220447"/>
-                  </a:lnTo>
-                  <a:lnTo>
-                    <a:pt x="4610356" y="3227547"/>
-                  </a:lnTo>
-                  <a:lnTo>
-                    <a:pt x="4681979" y="3234456"/>
-                  </a:lnTo>
-                  <a:lnTo>
-                    <a:pt x="4753602" y="3241178"/>
-                  </a:lnTo>
-                  <a:lnTo>
-                    <a:pt x="4825224" y="3247720"/>
-                  </a:lnTo>
-                  <a:lnTo>
-                    <a:pt x="4896847" y="3254084"/>
-                  </a:lnTo>
-                  <a:lnTo>
-                    <a:pt x="4968469" y="3260277"/>
-                  </a:lnTo>
-                  <a:lnTo>
-                    <a:pt x="5040092" y="3266304"/>
-                  </a:lnTo>
-                  <a:lnTo>
-                    <a:pt x="5111714" y="3272167"/>
-                  </a:lnTo>
-                  <a:lnTo>
-                    <a:pt x="5183337" y="3277873"/>
-                  </a:lnTo>
-                  <a:lnTo>
-                    <a:pt x="5254959" y="3283424"/>
-                  </a:lnTo>
-                  <a:lnTo>
-                    <a:pt x="5326582" y="3288826"/>
-                  </a:lnTo>
-                </a:path>
-              </a:pathLst>
-            </a:custGeom>
-          </p:spPr>
-          <p:txBody>
-            <a:bodyPr/>
-            <a:lstStyle/>
-            <a:p/>
-          </p:txBody>
-        </p:sp>
-        <p:sp>
-          <p:nvSpPr>
             <p:cNvPr id="22" name="pl22"/>
             <p:cNvSpPr/>
             <p:nvPr/>
           </p:nvSpPr>
           <p:spPr>
             <a:xfrm>
-              <a:off x="1172049" y="2638498"/>
-              <a:ext cx="7090630" cy="2894979"/>
+              <a:off x="2967882" y="2143092"/>
+              <a:ext cx="5231534" cy="1186860"/>
             </a:xfrm>
             <a:custGeom>
               <a:avLst/>
               <a:pathLst>
-                <a:path w="7090630" h="2894979">
+                <a:path w="5231534" h="1186860">
                   <a:moveTo>
-                    <a:pt x="7090630" y="2894979"/>
+                    <a:pt x="0" y="0"/>
                   </a:moveTo>
                   <a:lnTo>
-                    <a:pt x="7019007" y="2893331"/>
-                  </a:lnTo>
-                  <a:lnTo>
-                    <a:pt x="6947385" y="2891568"/>
-                  </a:lnTo>
-                  <a:lnTo>
-                    <a:pt x="6875762" y="2889683"/>
-                  </a:lnTo>
-                  <a:lnTo>
-                    <a:pt x="6804139" y="2887667"/>
-                  </a:lnTo>
-                  <a:lnTo>
-                    <a:pt x="6732517" y="2885511"/>
-                  </a:lnTo>
-                  <a:lnTo>
-                    <a:pt x="6660894" y="2883205"/>
-                  </a:lnTo>
-                  <a:lnTo>
-                    <a:pt x="6589272" y="2880740"/>
-                  </a:lnTo>
-                  <a:lnTo>
-                    <a:pt x="6517649" y="2878104"/>
-                  </a:lnTo>
-                  <a:lnTo>
-                    <a:pt x="6446027" y="2875285"/>
-                  </a:lnTo>
-                  <a:lnTo>
-                    <a:pt x="6374404" y="2872270"/>
-                  </a:lnTo>
-                  <a:lnTo>
-                    <a:pt x="6302782" y="2869047"/>
-                  </a:lnTo>
-                  <a:lnTo>
-                    <a:pt x="6231159" y="2865600"/>
-                  </a:lnTo>
-                  <a:lnTo>
-                    <a:pt x="6159537" y="2861913"/>
-                  </a:lnTo>
-                  <a:lnTo>
-                    <a:pt x="6087914" y="2857972"/>
-                  </a:lnTo>
-                  <a:lnTo>
-                    <a:pt x="6016292" y="2853756"/>
-                  </a:lnTo>
-                  <a:lnTo>
-                    <a:pt x="5944669" y="2849249"/>
-                  </a:lnTo>
-                  <a:lnTo>
-                    <a:pt x="5873047" y="2844428"/>
-                  </a:lnTo>
-                  <a:lnTo>
-                    <a:pt x="5801424" y="2839274"/>
-                  </a:lnTo>
-                  <a:lnTo>
-                    <a:pt x="5729802" y="2833762"/>
-                  </a:lnTo>
-                  <a:lnTo>
-                    <a:pt x="5658179" y="2827868"/>
-                  </a:lnTo>
-                  <a:lnTo>
-                    <a:pt x="5586557" y="2821564"/>
-                  </a:lnTo>
-                  <a:lnTo>
-                    <a:pt x="5514934" y="2814824"/>
-                  </a:lnTo>
-                  <a:lnTo>
-                    <a:pt x="5443311" y="2807616"/>
-                  </a:lnTo>
-                  <a:lnTo>
-                    <a:pt x="5371689" y="2799909"/>
-                  </a:lnTo>
-                  <a:lnTo>
-                    <a:pt x="5300066" y="2791667"/>
-                  </a:lnTo>
-                  <a:lnTo>
-                    <a:pt x="5228444" y="2782853"/>
-                  </a:lnTo>
-                  <a:lnTo>
-                    <a:pt x="5156821" y="2773428"/>
-                  </a:lnTo>
-                  <a:lnTo>
-                    <a:pt x="5085199" y="2763349"/>
-                  </a:lnTo>
-                  <a:lnTo>
-                    <a:pt x="5013576" y="2752572"/>
-                  </a:lnTo>
-                  <a:lnTo>
-                    <a:pt x="4941954" y="2741047"/>
-                  </a:lnTo>
-                  <a:lnTo>
-                    <a:pt x="4870331" y="2728722"/>
-                  </a:lnTo>
-                  <a:lnTo>
-                    <a:pt x="4798709" y="2715543"/>
-                  </a:lnTo>
-                  <a:lnTo>
-                    <a:pt x="4727086" y="2701450"/>
-                  </a:lnTo>
-                  <a:lnTo>
-                    <a:pt x="4655464" y="2686379"/>
-                  </a:lnTo>
-                  <a:lnTo>
-                    <a:pt x="4583841" y="2670263"/>
-                  </a:lnTo>
-                  <a:lnTo>
-                    <a:pt x="4512219" y="2653030"/>
-                  </a:lnTo>
-                  <a:lnTo>
-                    <a:pt x="4440596" y="2634601"/>
-                  </a:lnTo>
-                  <a:lnTo>
-                    <a:pt x="4368974" y="2614894"/>
-                  </a:lnTo>
-                  <a:lnTo>
-                    <a:pt x="4297351" y="2593821"/>
-                  </a:lnTo>
-                  <a:lnTo>
-                    <a:pt x="4225729" y="2571285"/>
-                  </a:lnTo>
-                  <a:lnTo>
-                    <a:pt x="4154106" y="2547188"/>
-                  </a:lnTo>
-                  <a:lnTo>
-                    <a:pt x="4082483" y="2521418"/>
-                  </a:lnTo>
-                  <a:lnTo>
-                    <a:pt x="4010861" y="2493862"/>
-                  </a:lnTo>
-                  <a:lnTo>
-                    <a:pt x="3939238" y="2464394"/>
-                  </a:lnTo>
-                  <a:lnTo>
-                    <a:pt x="3867616" y="2432883"/>
-                  </a:lnTo>
-                  <a:lnTo>
-                    <a:pt x="3795993" y="2399186"/>
-                  </a:lnTo>
-                  <a:lnTo>
-                    <a:pt x="3724371" y="2363153"/>
-                  </a:lnTo>
-                  <a:lnTo>
-                    <a:pt x="3652748" y="2324620"/>
-                  </a:lnTo>
-                  <a:lnTo>
-                    <a:pt x="3581126" y="2283415"/>
-                  </a:lnTo>
-                  <a:lnTo>
-                    <a:pt x="3509503" y="2239352"/>
-                  </a:lnTo>
-                  <a:lnTo>
-                    <a:pt x="3437881" y="2192233"/>
-                  </a:lnTo>
-                  <a:lnTo>
-                    <a:pt x="3366258" y="2141847"/>
-                  </a:lnTo>
-                  <a:lnTo>
-                    <a:pt x="3294636" y="2088749"/>
-                  </a:lnTo>
-                  <a:lnTo>
-                    <a:pt x="3223013" y="2065746"/>
-                  </a:lnTo>
-                  <a:lnTo>
-                    <a:pt x="3151391" y="2042107"/>
-                  </a:lnTo>
-                  <a:lnTo>
-                    <a:pt x="3079768" y="2017812"/>
-                  </a:lnTo>
-                  <a:lnTo>
-                    <a:pt x="3008146" y="1992843"/>
-                  </a:lnTo>
-                  <a:lnTo>
-                    <a:pt x="2936523" y="1967183"/>
-                  </a:lnTo>
-                  <a:lnTo>
-                    <a:pt x="2864901" y="1940811"/>
-                  </a:lnTo>
-                  <a:lnTo>
-                    <a:pt x="2793278" y="1913709"/>
-                  </a:lnTo>
-                  <a:lnTo>
-                    <a:pt x="2721655" y="1885856"/>
-                  </a:lnTo>
-                  <a:lnTo>
-                    <a:pt x="2650033" y="1857230"/>
-                  </a:lnTo>
-                  <a:lnTo>
-                    <a:pt x="2578410" y="1827812"/>
-                  </a:lnTo>
-                  <a:lnTo>
-                    <a:pt x="2506788" y="1797578"/>
-                  </a:lnTo>
-                  <a:lnTo>
-                    <a:pt x="2435165" y="1766506"/>
-                  </a:lnTo>
-                  <a:lnTo>
-                    <a:pt x="2363543" y="1734573"/>
-                  </a:lnTo>
-                  <a:lnTo>
-                    <a:pt x="2291920" y="1701755"/>
-                  </a:lnTo>
-                  <a:lnTo>
-                    <a:pt x="2220298" y="1668028"/>
-                  </a:lnTo>
-                  <a:lnTo>
-                    <a:pt x="2148675" y="1633366"/>
-                  </a:lnTo>
-                  <a:lnTo>
-                    <a:pt x="2077053" y="1597743"/>
-                  </a:lnTo>
-                  <a:lnTo>
-                    <a:pt x="2005430" y="1561133"/>
-                  </a:lnTo>
-                  <a:lnTo>
-                    <a:pt x="1933808" y="1523509"/>
-                  </a:lnTo>
-                  <a:lnTo>
-                    <a:pt x="1862185" y="1484841"/>
-                  </a:lnTo>
-                  <a:lnTo>
-                    <a:pt x="1790563" y="1445102"/>
-                  </a:lnTo>
-                  <a:lnTo>
-                    <a:pt x="1718940" y="1404262"/>
-                  </a:lnTo>
-                  <a:lnTo>
-                    <a:pt x="1647318" y="1362290"/>
-                  </a:lnTo>
-                  <a:lnTo>
-                    <a:pt x="1575695" y="1319155"/>
-                  </a:lnTo>
-                  <a:lnTo>
-                    <a:pt x="1504073" y="1274824"/>
-                  </a:lnTo>
-                  <a:lnTo>
-                    <a:pt x="1432450" y="1229265"/>
-                  </a:lnTo>
-                  <a:lnTo>
-                    <a:pt x="1360827" y="1182443"/>
-                  </a:lnTo>
-                  <a:lnTo>
-                    <a:pt x="1289205" y="1134324"/>
-                  </a:lnTo>
-                  <a:lnTo>
-                    <a:pt x="1217582" y="1084871"/>
-                  </a:lnTo>
-                  <a:lnTo>
-                    <a:pt x="1145960" y="1034047"/>
-                  </a:lnTo>
-                  <a:lnTo>
-                    <a:pt x="1074337" y="981815"/>
-                  </a:lnTo>
-                  <a:lnTo>
-                    <a:pt x="1002715" y="928136"/>
-                  </a:lnTo>
-                  <a:lnTo>
-                    <a:pt x="931092" y="872968"/>
-                  </a:lnTo>
-                  <a:lnTo>
-                    <a:pt x="859470" y="816272"/>
-                  </a:lnTo>
-                  <a:lnTo>
-                    <a:pt x="787847" y="758005"/>
-                  </a:lnTo>
-                  <a:lnTo>
-                    <a:pt x="716225" y="698123"/>
-                  </a:lnTo>
-                  <a:lnTo>
-                    <a:pt x="644602" y="636581"/>
-                  </a:lnTo>
-                  <a:lnTo>
-                    <a:pt x="572980" y="573334"/>
-                  </a:lnTo>
-                  <a:lnTo>
-                    <a:pt x="501357" y="508334"/>
-                  </a:lnTo>
-                  <a:lnTo>
-                    <a:pt x="429735" y="441532"/>
-                  </a:lnTo>
-                  <a:lnTo>
-                    <a:pt x="358112" y="372879"/>
-                  </a:lnTo>
-                  <a:lnTo>
-                    <a:pt x="286490" y="302324"/>
-                  </a:lnTo>
-                  <a:lnTo>
-                    <a:pt x="214867" y="229813"/>
-                  </a:lnTo>
-                  <a:lnTo>
-                    <a:pt x="143245" y="155293"/>
-                  </a:lnTo>
-                  <a:lnTo>
-                    <a:pt x="71622" y="78707"/>
-                  </a:lnTo>
-                  <a:lnTo>
-                    <a:pt x="0" y="0"/>
+                    <a:pt x="26042" y="31471"/>
+                  </a:lnTo>
+                  <a:lnTo>
+                    <a:pt x="96386" y="110966"/>
+                  </a:lnTo>
+                  <a:lnTo>
+                    <a:pt x="166731" y="185306"/>
+                  </a:lnTo>
+                  <a:lnTo>
+                    <a:pt x="237075" y="254824"/>
+                  </a:lnTo>
+                  <a:lnTo>
+                    <a:pt x="307420" y="319834"/>
+                  </a:lnTo>
+                  <a:lnTo>
+                    <a:pt x="377764" y="380628"/>
+                  </a:lnTo>
+                  <a:lnTo>
+                    <a:pt x="448109" y="437478"/>
+                  </a:lnTo>
+                  <a:lnTo>
+                    <a:pt x="518453" y="490642"/>
+                  </a:lnTo>
+                  <a:lnTo>
+                    <a:pt x="588798" y="540358"/>
+                  </a:lnTo>
+                  <a:lnTo>
+                    <a:pt x="659142" y="586849"/>
+                  </a:lnTo>
+                  <a:lnTo>
+                    <a:pt x="729487" y="630325"/>
+                  </a:lnTo>
+                  <a:lnTo>
+                    <a:pt x="799831" y="670982"/>
+                  </a:lnTo>
+                  <a:lnTo>
+                    <a:pt x="870176" y="709001"/>
+                  </a:lnTo>
+                  <a:lnTo>
+                    <a:pt x="940520" y="744555"/>
+                  </a:lnTo>
+                  <a:lnTo>
+                    <a:pt x="1010865" y="777803"/>
+                  </a:lnTo>
+                  <a:lnTo>
+                    <a:pt x="1081209" y="808895"/>
+                  </a:lnTo>
+                  <a:lnTo>
+                    <a:pt x="1151554" y="837970"/>
+                  </a:lnTo>
+                  <a:lnTo>
+                    <a:pt x="1221898" y="865160"/>
+                  </a:lnTo>
+                  <a:lnTo>
+                    <a:pt x="1292242" y="890586"/>
+                  </a:lnTo>
+                  <a:lnTo>
+                    <a:pt x="1362587" y="914363"/>
+                  </a:lnTo>
+                  <a:lnTo>
+                    <a:pt x="1432931" y="936598"/>
+                  </a:lnTo>
+                  <a:lnTo>
+                    <a:pt x="1503276" y="957391"/>
+                  </a:lnTo>
+                  <a:lnTo>
+                    <a:pt x="1573620" y="965751"/>
+                  </a:lnTo>
+                  <a:lnTo>
+                    <a:pt x="1643965" y="973610"/>
+                  </a:lnTo>
+                  <a:lnTo>
+                    <a:pt x="1714309" y="981257"/>
+                  </a:lnTo>
+                  <a:lnTo>
+                    <a:pt x="1784654" y="988699"/>
+                  </a:lnTo>
+                  <a:lnTo>
+                    <a:pt x="1854998" y="995939"/>
+                  </a:lnTo>
+                  <a:lnTo>
+                    <a:pt x="1925343" y="1002984"/>
+                  </a:lnTo>
+                  <a:lnTo>
+                    <a:pt x="1995687" y="1009840"/>
+                  </a:lnTo>
+                  <a:lnTo>
+                    <a:pt x="2066032" y="1016510"/>
+                  </a:lnTo>
+                  <a:lnTo>
+                    <a:pt x="2136376" y="1023001"/>
+                  </a:lnTo>
+                  <a:lnTo>
+                    <a:pt x="2206721" y="1029316"/>
+                  </a:lnTo>
+                  <a:lnTo>
+                    <a:pt x="2277065" y="1035462"/>
+                  </a:lnTo>
+                  <a:lnTo>
+                    <a:pt x="2347410" y="1041441"/>
+                  </a:lnTo>
+                  <a:lnTo>
+                    <a:pt x="2417754" y="1047259"/>
+                  </a:lnTo>
+                  <a:lnTo>
+                    <a:pt x="2488099" y="1052921"/>
+                  </a:lnTo>
+                  <a:lnTo>
+                    <a:pt x="2558443" y="1058429"/>
+                  </a:lnTo>
+                  <a:lnTo>
+                    <a:pt x="2628788" y="1063790"/>
+                  </a:lnTo>
+                  <a:lnTo>
+                    <a:pt x="2699132" y="1069005"/>
+                  </a:lnTo>
+                  <a:lnTo>
+                    <a:pt x="2769477" y="1074080"/>
+                  </a:lnTo>
+                  <a:lnTo>
+                    <a:pt x="2839821" y="1079018"/>
+                  </a:lnTo>
+                  <a:lnTo>
+                    <a:pt x="2910166" y="1083823"/>
+                  </a:lnTo>
+                  <a:lnTo>
+                    <a:pt x="2980510" y="1088499"/>
+                  </a:lnTo>
+                  <a:lnTo>
+                    <a:pt x="3050855" y="1093048"/>
+                  </a:lnTo>
+                  <a:lnTo>
+                    <a:pt x="3121199" y="1097475"/>
+                  </a:lnTo>
+                  <a:lnTo>
+                    <a:pt x="3191544" y="1101782"/>
+                  </a:lnTo>
+                  <a:lnTo>
+                    <a:pt x="3261888" y="1105973"/>
+                  </a:lnTo>
+                  <a:lnTo>
+                    <a:pt x="3332233" y="1110051"/>
+                  </a:lnTo>
+                  <a:lnTo>
+                    <a:pt x="3402577" y="1114019"/>
+                  </a:lnTo>
+                  <a:lnTo>
+                    <a:pt x="3472922" y="1117880"/>
+                  </a:lnTo>
+                  <a:lnTo>
+                    <a:pt x="3543266" y="1121637"/>
+                  </a:lnTo>
+                  <a:lnTo>
+                    <a:pt x="3613611" y="1125293"/>
+                  </a:lnTo>
+                  <a:lnTo>
+                    <a:pt x="3683955" y="1128850"/>
+                  </a:lnTo>
+                  <a:lnTo>
+                    <a:pt x="3754300" y="1132311"/>
+                  </a:lnTo>
+                  <a:lnTo>
+                    <a:pt x="3824644" y="1135679"/>
+                  </a:lnTo>
+                  <a:lnTo>
+                    <a:pt x="3894989" y="1138956"/>
+                  </a:lnTo>
+                  <a:lnTo>
+                    <a:pt x="3965333" y="1142145"/>
+                  </a:lnTo>
+                  <a:lnTo>
+                    <a:pt x="4035678" y="1145247"/>
+                  </a:lnTo>
+                  <a:lnTo>
+                    <a:pt x="4106022" y="1148266"/>
+                  </a:lnTo>
+                  <a:lnTo>
+                    <a:pt x="4176367" y="1151204"/>
+                  </a:lnTo>
+                  <a:lnTo>
+                    <a:pt x="4246711" y="1154062"/>
+                  </a:lnTo>
+                  <a:lnTo>
+                    <a:pt x="4317056" y="1156844"/>
+                  </a:lnTo>
+                  <a:lnTo>
+                    <a:pt x="4387400" y="1159550"/>
+                  </a:lnTo>
+                  <a:lnTo>
+                    <a:pt x="4457745" y="1162183"/>
+                  </a:lnTo>
+                  <a:lnTo>
+                    <a:pt x="4528089" y="1164746"/>
+                  </a:lnTo>
+                  <a:lnTo>
+                    <a:pt x="4598434" y="1167239"/>
+                  </a:lnTo>
+                  <a:lnTo>
+                    <a:pt x="4668778" y="1169665"/>
+                  </a:lnTo>
+                  <a:lnTo>
+                    <a:pt x="4739123" y="1172025"/>
+                  </a:lnTo>
+                  <a:lnTo>
+                    <a:pt x="4809467" y="1174322"/>
+                  </a:lnTo>
+                  <a:lnTo>
+                    <a:pt x="4879812" y="1176557"/>
+                  </a:lnTo>
+                  <a:lnTo>
+                    <a:pt x="4950156" y="1178732"/>
+                  </a:lnTo>
+                  <a:lnTo>
+                    <a:pt x="5020500" y="1180848"/>
+                  </a:lnTo>
+                  <a:lnTo>
+                    <a:pt x="5090845" y="1182907"/>
+                  </a:lnTo>
+                  <a:lnTo>
+                    <a:pt x="5161189" y="1184910"/>
+                  </a:lnTo>
+                  <a:lnTo>
+                    <a:pt x="5231534" y="1186860"/>
                   </a:lnTo>
                 </a:path>
               </a:pathLst>
@@ -4096,267 +3806,592 @@
           </p:nvSpPr>
           <p:spPr>
             <a:xfrm>
-              <a:off x="2290940" y="2073503"/>
-              <a:ext cx="5971739" cy="3415676"/>
+              <a:off x="1235312" y="2346985"/>
+              <a:ext cx="6964104" cy="1044730"/>
             </a:xfrm>
             <a:custGeom>
               <a:avLst/>
               <a:pathLst>
-                <a:path w="5971739" h="3415676">
+                <a:path w="6964104" h="1044730">
+                  <a:moveTo>
+                    <a:pt x="6964104" y="1044730"/>
+                  </a:moveTo>
+                  <a:lnTo>
+                    <a:pt x="6893760" y="1044135"/>
+                  </a:lnTo>
+                  <a:lnTo>
+                    <a:pt x="6823415" y="1043498"/>
+                  </a:lnTo>
+                  <a:lnTo>
+                    <a:pt x="6753071" y="1042818"/>
+                  </a:lnTo>
+                  <a:lnTo>
+                    <a:pt x="6682726" y="1042091"/>
+                  </a:lnTo>
+                  <a:lnTo>
+                    <a:pt x="6612382" y="1041313"/>
+                  </a:lnTo>
+                  <a:lnTo>
+                    <a:pt x="6542037" y="1040481"/>
+                  </a:lnTo>
+                  <a:lnTo>
+                    <a:pt x="6471693" y="1039591"/>
+                  </a:lnTo>
+                  <a:lnTo>
+                    <a:pt x="6401348" y="1038640"/>
+                  </a:lnTo>
+                  <a:lnTo>
+                    <a:pt x="6331004" y="1037622"/>
+                  </a:lnTo>
+                  <a:lnTo>
+                    <a:pt x="6260659" y="1036535"/>
+                  </a:lnTo>
+                  <a:lnTo>
+                    <a:pt x="6190315" y="1035371"/>
+                  </a:lnTo>
+                  <a:lnTo>
+                    <a:pt x="6119970" y="1034127"/>
+                  </a:lnTo>
+                  <a:lnTo>
+                    <a:pt x="6049626" y="1032797"/>
+                  </a:lnTo>
+                  <a:lnTo>
+                    <a:pt x="5979281" y="1031374"/>
+                  </a:lnTo>
+                  <a:lnTo>
+                    <a:pt x="5908937" y="1029853"/>
+                  </a:lnTo>
+                  <a:lnTo>
+                    <a:pt x="5838592" y="1028226"/>
+                  </a:lnTo>
+                  <a:lnTo>
+                    <a:pt x="5768248" y="1026487"/>
+                  </a:lnTo>
+                  <a:lnTo>
+                    <a:pt x="5697903" y="1024627"/>
+                  </a:lnTo>
+                  <a:lnTo>
+                    <a:pt x="5627559" y="1022638"/>
+                  </a:lnTo>
+                  <a:lnTo>
+                    <a:pt x="5557214" y="1020511"/>
+                  </a:lnTo>
+                  <a:lnTo>
+                    <a:pt x="5486870" y="1018236"/>
+                  </a:lnTo>
+                  <a:lnTo>
+                    <a:pt x="5416525" y="1015804"/>
+                  </a:lnTo>
+                  <a:lnTo>
+                    <a:pt x="5346181" y="1013202"/>
+                  </a:lnTo>
+                  <a:lnTo>
+                    <a:pt x="5275836" y="1010421"/>
+                  </a:lnTo>
+                  <a:lnTo>
+                    <a:pt x="5205492" y="1007447"/>
+                  </a:lnTo>
+                  <a:lnTo>
+                    <a:pt x="5135147" y="1004266"/>
+                  </a:lnTo>
+                  <a:lnTo>
+                    <a:pt x="5064803" y="1000865"/>
+                  </a:lnTo>
+                  <a:lnTo>
+                    <a:pt x="4994458" y="997227"/>
+                  </a:lnTo>
+                  <a:lnTo>
+                    <a:pt x="4924114" y="993338"/>
+                  </a:lnTo>
+                  <a:lnTo>
+                    <a:pt x="4853769" y="989179"/>
+                  </a:lnTo>
+                  <a:lnTo>
+                    <a:pt x="4783425" y="984731"/>
+                  </a:lnTo>
+                  <a:lnTo>
+                    <a:pt x="4713080" y="979975"/>
+                  </a:lnTo>
+                  <a:lnTo>
+                    <a:pt x="4642736" y="974889"/>
+                  </a:lnTo>
+                  <a:lnTo>
+                    <a:pt x="4572391" y="969451"/>
+                  </a:lnTo>
+                  <a:lnTo>
+                    <a:pt x="4502047" y="963635"/>
+                  </a:lnTo>
+                  <a:lnTo>
+                    <a:pt x="4431702" y="957416"/>
+                  </a:lnTo>
+                  <a:lnTo>
+                    <a:pt x="4361358" y="950765"/>
+                  </a:lnTo>
+                  <a:lnTo>
+                    <a:pt x="4291013" y="943653"/>
+                  </a:lnTo>
+                  <a:lnTo>
+                    <a:pt x="4220669" y="936049"/>
+                  </a:lnTo>
+                  <a:lnTo>
+                    <a:pt x="4150324" y="927916"/>
+                  </a:lnTo>
+                  <a:lnTo>
+                    <a:pt x="4079980" y="919220"/>
+                  </a:lnTo>
+                  <a:lnTo>
+                    <a:pt x="4009635" y="909920"/>
+                  </a:lnTo>
+                  <a:lnTo>
+                    <a:pt x="3939291" y="899976"/>
+                  </a:lnTo>
+                  <a:lnTo>
+                    <a:pt x="3868946" y="889342"/>
+                  </a:lnTo>
+                  <a:lnTo>
+                    <a:pt x="3798602" y="877970"/>
+                  </a:lnTo>
+                  <a:lnTo>
+                    <a:pt x="3728257" y="865810"/>
+                  </a:lnTo>
+                  <a:lnTo>
+                    <a:pt x="3657913" y="852806"/>
+                  </a:lnTo>
+                  <a:lnTo>
+                    <a:pt x="3587569" y="838900"/>
+                  </a:lnTo>
+                  <a:lnTo>
+                    <a:pt x="3517224" y="824030"/>
+                  </a:lnTo>
+                  <a:lnTo>
+                    <a:pt x="3446880" y="808129"/>
+                  </a:lnTo>
+                  <a:lnTo>
+                    <a:pt x="3376535" y="791125"/>
+                  </a:lnTo>
+                  <a:lnTo>
+                    <a:pt x="3306191" y="772942"/>
+                  </a:lnTo>
+                  <a:lnTo>
+                    <a:pt x="3235846" y="753780"/>
+                  </a:lnTo>
+                  <a:lnTo>
+                    <a:pt x="3165502" y="745479"/>
+                  </a:lnTo>
+                  <a:lnTo>
+                    <a:pt x="3095157" y="736948"/>
+                  </a:lnTo>
+                  <a:lnTo>
+                    <a:pt x="3024813" y="728180"/>
+                  </a:lnTo>
+                  <a:lnTo>
+                    <a:pt x="2954468" y="719170"/>
+                  </a:lnTo>
+                  <a:lnTo>
+                    <a:pt x="2884124" y="709910"/>
+                  </a:lnTo>
+                  <a:lnTo>
+                    <a:pt x="2813779" y="700393"/>
+                  </a:lnTo>
+                  <a:lnTo>
+                    <a:pt x="2743435" y="690612"/>
+                  </a:lnTo>
+                  <a:lnTo>
+                    <a:pt x="2673090" y="680561"/>
+                  </a:lnTo>
+                  <a:lnTo>
+                    <a:pt x="2602746" y="670230"/>
+                  </a:lnTo>
+                  <a:lnTo>
+                    <a:pt x="2532401" y="659614"/>
+                  </a:lnTo>
+                  <a:lnTo>
+                    <a:pt x="2462057" y="648703"/>
+                  </a:lnTo>
+                  <a:lnTo>
+                    <a:pt x="2391712" y="637490"/>
+                  </a:lnTo>
+                  <a:lnTo>
+                    <a:pt x="2321368" y="625966"/>
+                  </a:lnTo>
+                  <a:lnTo>
+                    <a:pt x="2251023" y="614123"/>
+                  </a:lnTo>
+                  <a:lnTo>
+                    <a:pt x="2180679" y="601952"/>
+                  </a:lnTo>
+                  <a:lnTo>
+                    <a:pt x="2110334" y="589443"/>
+                  </a:lnTo>
+                  <a:lnTo>
+                    <a:pt x="2039990" y="576588"/>
+                  </a:lnTo>
+                  <a:lnTo>
+                    <a:pt x="1969645" y="563376"/>
+                  </a:lnTo>
+                  <a:lnTo>
+                    <a:pt x="1899301" y="549798"/>
+                  </a:lnTo>
+                  <a:lnTo>
+                    <a:pt x="1828956" y="535844"/>
+                  </a:lnTo>
+                  <a:lnTo>
+                    <a:pt x="1758612" y="521503"/>
+                  </a:lnTo>
+                  <a:lnTo>
+                    <a:pt x="1688267" y="506765"/>
+                  </a:lnTo>
+                  <a:lnTo>
+                    <a:pt x="1617923" y="491618"/>
+                  </a:lnTo>
+                  <a:lnTo>
+                    <a:pt x="1547578" y="476052"/>
+                  </a:lnTo>
+                  <a:lnTo>
+                    <a:pt x="1477234" y="460054"/>
+                  </a:lnTo>
+                  <a:lnTo>
+                    <a:pt x="1406889" y="443613"/>
+                  </a:lnTo>
+                  <a:lnTo>
+                    <a:pt x="1336545" y="426716"/>
+                  </a:lnTo>
+                  <a:lnTo>
+                    <a:pt x="1266200" y="409350"/>
+                  </a:lnTo>
+                  <a:lnTo>
+                    <a:pt x="1195856" y="391504"/>
+                  </a:lnTo>
+                  <a:lnTo>
+                    <a:pt x="1125511" y="373163"/>
+                  </a:lnTo>
+                  <a:lnTo>
+                    <a:pt x="1055167" y="354314"/>
+                  </a:lnTo>
+                  <a:lnTo>
+                    <a:pt x="984822" y="334942"/>
+                  </a:lnTo>
+                  <a:lnTo>
+                    <a:pt x="914478" y="315033"/>
+                  </a:lnTo>
+                  <a:lnTo>
+                    <a:pt x="844133" y="294573"/>
+                  </a:lnTo>
+                  <a:lnTo>
+                    <a:pt x="773789" y="273546"/>
+                  </a:lnTo>
+                  <a:lnTo>
+                    <a:pt x="703444" y="251936"/>
+                  </a:lnTo>
+                  <a:lnTo>
+                    <a:pt x="633100" y="229727"/>
+                  </a:lnTo>
+                  <a:lnTo>
+                    <a:pt x="562755" y="206902"/>
+                  </a:lnTo>
+                  <a:lnTo>
+                    <a:pt x="492411" y="183445"/>
+                  </a:lnTo>
+                  <a:lnTo>
+                    <a:pt x="422066" y="159338"/>
+                  </a:lnTo>
+                  <a:lnTo>
+                    <a:pt x="351722" y="134563"/>
+                  </a:lnTo>
+                  <a:lnTo>
+                    <a:pt x="281377" y="109101"/>
+                  </a:lnTo>
+                  <a:lnTo>
+                    <a:pt x="211033" y="82934"/>
+                  </a:lnTo>
+                  <a:lnTo>
+                    <a:pt x="140688" y="56041"/>
+                  </a:lnTo>
+                  <a:lnTo>
+                    <a:pt x="70344" y="28403"/>
+                  </a:lnTo>
+                  <a:lnTo>
+                    <a:pt x="0" y="0"/>
+                  </a:lnTo>
+                </a:path>
+              </a:pathLst>
+            </a:custGeom>
+          </p:spPr>
+          <p:txBody>
+            <a:bodyPr/>
+            <a:lstStyle/>
+            <a:p/>
+          </p:txBody>
+        </p:sp>
+        <p:sp>
+          <p:nvSpPr>
+            <p:cNvPr id="24" name="pl24"/>
+            <p:cNvSpPr/>
+            <p:nvPr/>
+          </p:nvSpPr>
+          <p:spPr>
+            <a:xfrm>
+              <a:off x="2334237" y="2143092"/>
+              <a:ext cx="5865179" cy="1232637"/>
+            </a:xfrm>
+            <a:custGeom>
+              <a:avLst/>
+              <a:pathLst>
+                <a:path w="5865179" h="1232637">
                   <a:moveTo>
                     <a:pt x="0" y="0"/>
                   </a:moveTo>
                   <a:lnTo>
-                    <a:pt x="27069" y="62488"/>
-                  </a:lnTo>
-                  <a:lnTo>
-                    <a:pt x="98691" y="220205"/>
-                  </a:lnTo>
-                  <a:lnTo>
-                    <a:pt x="170314" y="370651"/>
-                  </a:lnTo>
-                  <a:lnTo>
-                    <a:pt x="241936" y="514162"/>
-                  </a:lnTo>
-                  <a:lnTo>
-                    <a:pt x="313559" y="651057"/>
-                  </a:lnTo>
-                  <a:lnTo>
-                    <a:pt x="385181" y="781641"/>
-                  </a:lnTo>
-                  <a:lnTo>
-                    <a:pt x="456804" y="906206"/>
-                  </a:lnTo>
-                  <a:lnTo>
-                    <a:pt x="528427" y="1025028"/>
-                  </a:lnTo>
-                  <a:lnTo>
-                    <a:pt x="600049" y="1138373"/>
-                  </a:lnTo>
-                  <a:lnTo>
-                    <a:pt x="671672" y="1246492"/>
-                  </a:lnTo>
-                  <a:lnTo>
-                    <a:pt x="743294" y="1349628"/>
-                  </a:lnTo>
-                  <a:lnTo>
-                    <a:pt x="814917" y="1448008"/>
-                  </a:lnTo>
-                  <a:lnTo>
-                    <a:pt x="886539" y="1541854"/>
-                  </a:lnTo>
-                  <a:lnTo>
-                    <a:pt x="958162" y="1631373"/>
-                  </a:lnTo>
-                  <a:lnTo>
-                    <a:pt x="1029784" y="1716766"/>
-                  </a:lnTo>
-                  <a:lnTo>
-                    <a:pt x="1101407" y="1798222"/>
-                  </a:lnTo>
-                  <a:lnTo>
-                    <a:pt x="1173029" y="1875923"/>
-                  </a:lnTo>
-                  <a:lnTo>
-                    <a:pt x="1244652" y="1950042"/>
-                  </a:lnTo>
-                  <a:lnTo>
-                    <a:pt x="1316274" y="2020745"/>
-                  </a:lnTo>
-                  <a:lnTo>
-                    <a:pt x="1387897" y="2088188"/>
-                  </a:lnTo>
-                  <a:lnTo>
-                    <a:pt x="1459519" y="2152522"/>
-                  </a:lnTo>
-                  <a:lnTo>
-                    <a:pt x="1531142" y="2213890"/>
-                  </a:lnTo>
-                  <a:lnTo>
-                    <a:pt x="1602764" y="2272429"/>
-                  </a:lnTo>
-                  <a:lnTo>
-                    <a:pt x="1674387" y="2328270"/>
-                  </a:lnTo>
-                  <a:lnTo>
-                    <a:pt x="1746009" y="2381536"/>
-                  </a:lnTo>
-                  <a:lnTo>
-                    <a:pt x="1817632" y="2432347"/>
-                  </a:lnTo>
-                  <a:lnTo>
-                    <a:pt x="1889255" y="2480815"/>
-                  </a:lnTo>
-                  <a:lnTo>
-                    <a:pt x="1960877" y="2527050"/>
-                  </a:lnTo>
-                  <a:lnTo>
-                    <a:pt x="2032500" y="2571152"/>
-                  </a:lnTo>
-                  <a:lnTo>
-                    <a:pt x="2104122" y="2613222"/>
-                  </a:lnTo>
-                  <a:lnTo>
-                    <a:pt x="2175745" y="2653353"/>
-                  </a:lnTo>
-                  <a:lnTo>
-                    <a:pt x="2247367" y="2691633"/>
-                  </a:lnTo>
-                  <a:lnTo>
-                    <a:pt x="2318990" y="2728149"/>
-                  </a:lnTo>
-                  <a:lnTo>
-                    <a:pt x="2390612" y="2762981"/>
-                  </a:lnTo>
-                  <a:lnTo>
-                    <a:pt x="2462235" y="2796208"/>
-                  </a:lnTo>
-                  <a:lnTo>
-                    <a:pt x="2533857" y="2827902"/>
-                  </a:lnTo>
-                  <a:lnTo>
-                    <a:pt x="2605480" y="2858136"/>
-                  </a:lnTo>
-                  <a:lnTo>
-                    <a:pt x="2677102" y="2886976"/>
-                  </a:lnTo>
-                  <a:lnTo>
-                    <a:pt x="2748725" y="2914487"/>
-                  </a:lnTo>
-                  <a:lnTo>
-                    <a:pt x="2820347" y="2940729"/>
-                  </a:lnTo>
-                  <a:lnTo>
-                    <a:pt x="2891970" y="2965762"/>
-                  </a:lnTo>
-                  <a:lnTo>
-                    <a:pt x="2963592" y="2989640"/>
-                  </a:lnTo>
-                  <a:lnTo>
-                    <a:pt x="3035215" y="3012418"/>
-                  </a:lnTo>
-                  <a:lnTo>
-                    <a:pt x="3106837" y="3034146"/>
-                  </a:lnTo>
-                  <a:lnTo>
-                    <a:pt x="3178460" y="3054872"/>
-                  </a:lnTo>
-                  <a:lnTo>
-                    <a:pt x="3250083" y="3074643"/>
-                  </a:lnTo>
-                  <a:lnTo>
-                    <a:pt x="3321705" y="3093502"/>
-                  </a:lnTo>
-                  <a:lnTo>
-                    <a:pt x="3393328" y="3111492"/>
-                  </a:lnTo>
-                  <a:lnTo>
-                    <a:pt x="3464950" y="3128653"/>
-                  </a:lnTo>
-                  <a:lnTo>
-                    <a:pt x="3536573" y="3145022"/>
-                  </a:lnTo>
-                  <a:lnTo>
-                    <a:pt x="3608195" y="3160637"/>
-                  </a:lnTo>
-                  <a:lnTo>
-                    <a:pt x="3679818" y="3175532"/>
-                  </a:lnTo>
-                  <a:lnTo>
-                    <a:pt x="3751440" y="3189740"/>
-                  </a:lnTo>
-                  <a:lnTo>
-                    <a:pt x="3823063" y="3203294"/>
-                  </a:lnTo>
-                  <a:lnTo>
-                    <a:pt x="3894685" y="3216222"/>
-                  </a:lnTo>
-                  <a:lnTo>
-                    <a:pt x="3966308" y="3228555"/>
-                  </a:lnTo>
-                  <a:lnTo>
-                    <a:pt x="4037930" y="3240319"/>
-                  </a:lnTo>
-                  <a:lnTo>
-                    <a:pt x="4109553" y="3251541"/>
-                  </a:lnTo>
-                  <a:lnTo>
-                    <a:pt x="4181175" y="3262245"/>
-                  </a:lnTo>
-                  <a:lnTo>
-                    <a:pt x="4252798" y="3272456"/>
-                  </a:lnTo>
-                  <a:lnTo>
-                    <a:pt x="4324420" y="3282197"/>
-                  </a:lnTo>
-                  <a:lnTo>
-                    <a:pt x="4396043" y="3291488"/>
-                  </a:lnTo>
-                  <a:lnTo>
-                    <a:pt x="4467665" y="3300351"/>
-                  </a:lnTo>
-                  <a:lnTo>
-                    <a:pt x="4539288" y="3308805"/>
-                  </a:lnTo>
-                  <a:lnTo>
-                    <a:pt x="4610911" y="3316870"/>
-                  </a:lnTo>
-                  <a:lnTo>
-                    <a:pt x="4682533" y="3324563"/>
-                  </a:lnTo>
-                  <a:lnTo>
-                    <a:pt x="4754156" y="3331901"/>
-                  </a:lnTo>
-                  <a:lnTo>
-                    <a:pt x="4825778" y="3338901"/>
-                  </a:lnTo>
-                  <a:lnTo>
-                    <a:pt x="4897401" y="3345578"/>
-                  </a:lnTo>
-                  <a:lnTo>
-                    <a:pt x="4969023" y="3351947"/>
-                  </a:lnTo>
-                  <a:lnTo>
-                    <a:pt x="5040646" y="3358023"/>
-                  </a:lnTo>
-                  <a:lnTo>
-                    <a:pt x="5112268" y="3363819"/>
-                  </a:lnTo>
-                  <a:lnTo>
-                    <a:pt x="5183891" y="3369348"/>
-                  </a:lnTo>
-                  <a:lnTo>
-                    <a:pt x="5255513" y="3374621"/>
-                  </a:lnTo>
-                  <a:lnTo>
-                    <a:pt x="5327136" y="3379652"/>
-                  </a:lnTo>
-                  <a:lnTo>
-                    <a:pt x="5398758" y="3384450"/>
-                  </a:lnTo>
-                  <a:lnTo>
-                    <a:pt x="5470381" y="3389028"/>
-                  </a:lnTo>
-                  <a:lnTo>
-                    <a:pt x="5542003" y="3393394"/>
-                  </a:lnTo>
-                  <a:lnTo>
-                    <a:pt x="5613626" y="3397559"/>
-                  </a:lnTo>
-                  <a:lnTo>
-                    <a:pt x="5685248" y="3401533"/>
-                  </a:lnTo>
-                  <a:lnTo>
-                    <a:pt x="5756871" y="3405323"/>
-                  </a:lnTo>
-                  <a:lnTo>
-                    <a:pt x="5828493" y="3408938"/>
-                  </a:lnTo>
-                  <a:lnTo>
-                    <a:pt x="5900116" y="3412386"/>
-                  </a:lnTo>
-                  <a:lnTo>
-                    <a:pt x="5971739" y="3415676"/>
+                    <a:pt x="26586" y="22550"/>
+                  </a:lnTo>
+                  <a:lnTo>
+                    <a:pt x="96930" y="79467"/>
+                  </a:lnTo>
+                  <a:lnTo>
+                    <a:pt x="167275" y="133759"/>
+                  </a:lnTo>
+                  <a:lnTo>
+                    <a:pt x="237619" y="185549"/>
+                  </a:lnTo>
+                  <a:lnTo>
+                    <a:pt x="307964" y="234951"/>
+                  </a:lnTo>
+                  <a:lnTo>
+                    <a:pt x="378308" y="282076"/>
+                  </a:lnTo>
+                  <a:lnTo>
+                    <a:pt x="448653" y="327028"/>
+                  </a:lnTo>
+                  <a:lnTo>
+                    <a:pt x="518997" y="369908"/>
+                  </a:lnTo>
+                  <a:lnTo>
+                    <a:pt x="589342" y="410812"/>
+                  </a:lnTo>
+                  <a:lnTo>
+                    <a:pt x="659686" y="449829"/>
+                  </a:lnTo>
+                  <a:lnTo>
+                    <a:pt x="730031" y="487049"/>
+                  </a:lnTo>
+                  <a:lnTo>
+                    <a:pt x="800375" y="522552"/>
+                  </a:lnTo>
+                  <a:lnTo>
+                    <a:pt x="870720" y="556419"/>
+                  </a:lnTo>
+                  <a:lnTo>
+                    <a:pt x="941064" y="588724"/>
+                  </a:lnTo>
+                  <a:lnTo>
+                    <a:pt x="1011409" y="619540"/>
+                  </a:lnTo>
+                  <a:lnTo>
+                    <a:pt x="1081753" y="648936"/>
+                  </a:lnTo>
+                  <a:lnTo>
+                    <a:pt x="1152098" y="676976"/>
+                  </a:lnTo>
+                  <a:lnTo>
+                    <a:pt x="1222442" y="703724"/>
+                  </a:lnTo>
+                  <a:lnTo>
+                    <a:pt x="1292787" y="729239"/>
+                  </a:lnTo>
+                  <a:lnTo>
+                    <a:pt x="1363131" y="753578"/>
+                  </a:lnTo>
+                  <a:lnTo>
+                    <a:pt x="1433476" y="776794"/>
+                  </a:lnTo>
+                  <a:lnTo>
+                    <a:pt x="1503820" y="798940"/>
+                  </a:lnTo>
+                  <a:lnTo>
+                    <a:pt x="1574165" y="820066"/>
+                  </a:lnTo>
+                  <a:lnTo>
+                    <a:pt x="1644509" y="840217"/>
+                  </a:lnTo>
+                  <a:lnTo>
+                    <a:pt x="1714854" y="859440"/>
+                  </a:lnTo>
+                  <a:lnTo>
+                    <a:pt x="1785198" y="877776"/>
+                  </a:lnTo>
+                  <a:lnTo>
+                    <a:pt x="1855543" y="895268"/>
+                  </a:lnTo>
+                  <a:lnTo>
+                    <a:pt x="1925887" y="911952"/>
+                  </a:lnTo>
+                  <a:lnTo>
+                    <a:pt x="1996232" y="927868"/>
+                  </a:lnTo>
+                  <a:lnTo>
+                    <a:pt x="2066576" y="943050"/>
+                  </a:lnTo>
+                  <a:lnTo>
+                    <a:pt x="2136921" y="957532"/>
+                  </a:lnTo>
+                  <a:lnTo>
+                    <a:pt x="2207265" y="971347"/>
+                  </a:lnTo>
+                  <a:lnTo>
+                    <a:pt x="2277609" y="984524"/>
+                  </a:lnTo>
+                  <a:lnTo>
+                    <a:pt x="2347954" y="997094"/>
+                  </a:lnTo>
+                  <a:lnTo>
+                    <a:pt x="2418298" y="1009085"/>
+                  </a:lnTo>
+                  <a:lnTo>
+                    <a:pt x="2488643" y="1020523"/>
+                  </a:lnTo>
+                  <a:lnTo>
+                    <a:pt x="2558987" y="1031434"/>
+                  </a:lnTo>
+                  <a:lnTo>
+                    <a:pt x="2629332" y="1041841"/>
+                  </a:lnTo>
+                  <a:lnTo>
+                    <a:pt x="2699676" y="1051769"/>
+                  </a:lnTo>
+                  <a:lnTo>
+                    <a:pt x="2770021" y="1061240"/>
+                  </a:lnTo>
+                  <a:lnTo>
+                    <a:pt x="2840365" y="1070273"/>
+                  </a:lnTo>
+                  <a:lnTo>
+                    <a:pt x="2910710" y="1078891"/>
+                  </a:lnTo>
+                  <a:lnTo>
+                    <a:pt x="2981054" y="1087111"/>
+                  </a:lnTo>
+                  <a:lnTo>
+                    <a:pt x="3051399" y="1094952"/>
+                  </a:lnTo>
+                  <a:lnTo>
+                    <a:pt x="3121743" y="1102431"/>
+                  </a:lnTo>
+                  <a:lnTo>
+                    <a:pt x="3192088" y="1109566"/>
+                  </a:lnTo>
+                  <a:lnTo>
+                    <a:pt x="3262432" y="1116372"/>
+                  </a:lnTo>
+                  <a:lnTo>
+                    <a:pt x="3332777" y="1122864"/>
+                  </a:lnTo>
+                  <a:lnTo>
+                    <a:pt x="3403121" y="1129057"/>
+                  </a:lnTo>
+                  <a:lnTo>
+                    <a:pt x="3473466" y="1134964"/>
+                  </a:lnTo>
+                  <a:lnTo>
+                    <a:pt x="3543810" y="1140599"/>
+                  </a:lnTo>
+                  <a:lnTo>
+                    <a:pt x="3614155" y="1145974"/>
+                  </a:lnTo>
+                  <a:lnTo>
+                    <a:pt x="3684499" y="1151102"/>
+                  </a:lnTo>
+                  <a:lnTo>
+                    <a:pt x="3754844" y="1155993"/>
+                  </a:lnTo>
+                  <a:lnTo>
+                    <a:pt x="3825188" y="1160659"/>
+                  </a:lnTo>
+                  <a:lnTo>
+                    <a:pt x="3895533" y="1165109"/>
+                  </a:lnTo>
+                  <a:lnTo>
+                    <a:pt x="3965877" y="1169355"/>
+                  </a:lnTo>
+                  <a:lnTo>
+                    <a:pt x="4036222" y="1173404"/>
+                  </a:lnTo>
+                  <a:lnTo>
+                    <a:pt x="4106566" y="1177267"/>
+                  </a:lnTo>
+                  <a:lnTo>
+                    <a:pt x="4176911" y="1180952"/>
+                  </a:lnTo>
+                  <a:lnTo>
+                    <a:pt x="4247255" y="1184467"/>
+                  </a:lnTo>
+                  <a:lnTo>
+                    <a:pt x="4317600" y="1187820"/>
+                  </a:lnTo>
+                  <a:lnTo>
+                    <a:pt x="4387944" y="1191019"/>
+                  </a:lnTo>
+                  <a:lnTo>
+                    <a:pt x="4458289" y="1194070"/>
+                  </a:lnTo>
+                  <a:lnTo>
+                    <a:pt x="4528633" y="1196980"/>
+                  </a:lnTo>
+                  <a:lnTo>
+                    <a:pt x="4598978" y="1199756"/>
+                  </a:lnTo>
+                  <a:lnTo>
+                    <a:pt x="4669322" y="1202404"/>
+                  </a:lnTo>
+                  <a:lnTo>
+                    <a:pt x="4739667" y="1204930"/>
+                  </a:lnTo>
+                  <a:lnTo>
+                    <a:pt x="4810011" y="1207340"/>
+                  </a:lnTo>
+                  <a:lnTo>
+                    <a:pt x="4880356" y="1209639"/>
+                  </a:lnTo>
+                  <a:lnTo>
+                    <a:pt x="4950700" y="1211831"/>
+                  </a:lnTo>
+                  <a:lnTo>
+                    <a:pt x="5021045" y="1213923"/>
+                  </a:lnTo>
+                  <a:lnTo>
+                    <a:pt x="5091389" y="1215918"/>
+                  </a:lnTo>
+                  <a:lnTo>
+                    <a:pt x="5161734" y="1217821"/>
+                  </a:lnTo>
+                  <a:lnTo>
+                    <a:pt x="5232078" y="1219636"/>
+                  </a:lnTo>
+                  <a:lnTo>
+                    <a:pt x="5302423" y="1221368"/>
+                  </a:lnTo>
+                  <a:lnTo>
+                    <a:pt x="5372767" y="1223020"/>
+                  </a:lnTo>
+                  <a:lnTo>
+                    <a:pt x="5443112" y="1224596"/>
+                  </a:lnTo>
+                  <a:lnTo>
+                    <a:pt x="5513456" y="1226099"/>
+                  </a:lnTo>
+                  <a:lnTo>
+                    <a:pt x="5583801" y="1227533"/>
+                  </a:lnTo>
+                  <a:lnTo>
+                    <a:pt x="5654145" y="1228900"/>
+                  </a:lnTo>
+                  <a:lnTo>
+                    <a:pt x="5724490" y="1230205"/>
+                  </a:lnTo>
+                  <a:lnTo>
+                    <a:pt x="5794834" y="1231450"/>
+                  </a:lnTo>
+                  <a:lnTo>
+                    <a:pt x="5865179" y="1232637"/>
                   </a:lnTo>
                 </a:path>
               </a:pathLst>
@@ -4379,27 +4414,27 @@
         </p:sp>
         <p:sp>
           <p:nvSpPr>
-            <p:cNvPr id="24" name="pl24"/>
+            <p:cNvPr id="25" name="pl25"/>
             <p:cNvSpPr/>
             <p:nvPr/>
           </p:nvSpPr>
           <p:spPr>
             <a:xfrm>
-              <a:off x="817517" y="4727786"/>
-              <a:ext cx="7799693" cy="0"/>
+              <a:off x="887106" y="3100960"/>
+              <a:ext cx="7660515" cy="0"/>
             </a:xfrm>
             <a:custGeom>
               <a:avLst/>
               <a:pathLst>
-                <a:path w="7799693" h="0">
+                <a:path w="7660515" h="0">
                   <a:moveTo>
                     <a:pt x="0" y="0"/>
                   </a:moveTo>
                   <a:lnTo>
-                    <a:pt x="7799693" y="0"/>
-                  </a:lnTo>
-                  <a:lnTo>
-                    <a:pt x="7799693" y="0"/>
+                    <a:pt x="7660515" y="0"/>
+                  </a:lnTo>
+                  <a:lnTo>
+                    <a:pt x="7660515" y="0"/>
                   </a:lnTo>
                 </a:path>
               </a:pathLst>
@@ -4422,21 +4457,21 @@
         </p:sp>
         <p:sp>
           <p:nvSpPr>
-            <p:cNvPr id="25" name="pl25"/>
+            <p:cNvPr id="26" name="pl26"/>
             <p:cNvSpPr/>
             <p:nvPr/>
           </p:nvSpPr>
           <p:spPr>
             <a:xfrm>
-              <a:off x="4468386" y="2073503"/>
-              <a:ext cx="0" cy="3649639"/>
+              <a:off x="4472829" y="2143092"/>
+              <a:ext cx="0" cy="1317069"/>
             </a:xfrm>
             <a:custGeom>
               <a:avLst/>
               <a:pathLst>
-                <a:path w="0" h="3649639">
+                <a:path w="0" h="1317069">
                   <a:moveTo>
-                    <a:pt x="0" y="3649639"/>
+                    <a:pt x="0" y="1317069"/>
                   </a:moveTo>
                   <a:lnTo>
                     <a:pt x="0" y="0"/>
@@ -4465,13 +4500,13 @@
         </p:sp>
         <p:sp>
           <p:nvSpPr>
-            <p:cNvPr id="26" name="tx26"/>
+            <p:cNvPr id="27" name="tx27"/>
             <p:cNvSpPr/>
             <p:nvPr/>
           </p:nvSpPr>
           <p:spPr>
             <a:xfrm>
-              <a:off x="692708" y="5517199"/>
+              <a:off x="762297" y="3360243"/>
               <a:ext cx="62179" cy="80101"/>
             </a:xfrm>
             <a:prstGeom prst="rect">
@@ -4511,13 +4546,13 @@
         </p:sp>
         <p:sp>
           <p:nvSpPr>
-            <p:cNvPr id="27" name="tx27"/>
+            <p:cNvPr id="28" name="tx28"/>
             <p:cNvSpPr/>
             <p:nvPr/>
           </p:nvSpPr>
           <p:spPr>
             <a:xfrm>
-              <a:off x="692708" y="4687735"/>
+              <a:off x="762297" y="3060909"/>
               <a:ext cx="62179" cy="80101"/>
             </a:xfrm>
             <a:prstGeom prst="rect">
@@ -4557,13 +4592,13 @@
         </p:sp>
         <p:sp>
           <p:nvSpPr>
-            <p:cNvPr id="28" name="tx28"/>
+            <p:cNvPr id="29" name="tx29"/>
             <p:cNvSpPr/>
             <p:nvPr/>
           </p:nvSpPr>
           <p:spPr>
             <a:xfrm>
-              <a:off x="692708" y="3858272"/>
+              <a:off x="762297" y="2761575"/>
               <a:ext cx="62179" cy="80101"/>
             </a:xfrm>
             <a:prstGeom prst="rect">
@@ -4603,13 +4638,13 @@
         </p:sp>
         <p:sp>
           <p:nvSpPr>
-            <p:cNvPr id="29" name="tx29"/>
+            <p:cNvPr id="30" name="tx30"/>
             <p:cNvSpPr/>
             <p:nvPr/>
           </p:nvSpPr>
           <p:spPr>
             <a:xfrm>
-              <a:off x="692708" y="3028808"/>
+              <a:off x="762297" y="2462242"/>
               <a:ext cx="62179" cy="80101"/>
             </a:xfrm>
             <a:prstGeom prst="rect">
@@ -4649,13 +4684,13 @@
         </p:sp>
         <p:sp>
           <p:nvSpPr>
-            <p:cNvPr id="30" name="tx30"/>
+            <p:cNvPr id="31" name="tx31"/>
             <p:cNvSpPr/>
             <p:nvPr/>
           </p:nvSpPr>
           <p:spPr>
             <a:xfrm>
-              <a:off x="692708" y="2199345"/>
+              <a:off x="762297" y="2162908"/>
               <a:ext cx="62179" cy="80101"/>
             </a:xfrm>
             <a:prstGeom prst="rect">
@@ -4695,13 +4730,13 @@
         </p:sp>
         <p:sp>
           <p:nvSpPr>
-            <p:cNvPr id="31" name="tx31"/>
+            <p:cNvPr id="32" name="tx32"/>
             <p:cNvSpPr/>
             <p:nvPr/>
           </p:nvSpPr>
           <p:spPr>
             <a:xfrm>
-              <a:off x="2478335" y="5785772"/>
+              <a:off x="2516846" y="3522791"/>
               <a:ext cx="161574" cy="80101"/>
             </a:xfrm>
             <a:prstGeom prst="rect">
@@ -4741,13 +4776,13 @@
         </p:sp>
         <p:sp>
           <p:nvSpPr>
-            <p:cNvPr id="32" name="tx32"/>
+            <p:cNvPr id="33" name="tx33"/>
             <p:cNvSpPr/>
             <p:nvPr/>
           </p:nvSpPr>
           <p:spPr>
             <a:xfrm>
-              <a:off x="4582608" y="5785772"/>
+              <a:off x="4584458" y="3522791"/>
               <a:ext cx="62179" cy="80101"/>
             </a:xfrm>
             <a:prstGeom prst="rect">
@@ -4787,13 +4822,13 @@
         </p:sp>
         <p:sp>
           <p:nvSpPr>
-            <p:cNvPr id="33" name="tx33"/>
+            <p:cNvPr id="34" name="tx34"/>
             <p:cNvSpPr/>
             <p:nvPr/>
           </p:nvSpPr>
           <p:spPr>
             <a:xfrm>
-              <a:off x="6606094" y="5785772"/>
+              <a:off x="6571282" y="3522791"/>
               <a:ext cx="124358" cy="80101"/>
             </a:xfrm>
             <a:prstGeom prst="rect">
@@ -4833,13 +4868,13 @@
         </p:sp>
         <p:sp>
           <p:nvSpPr>
-            <p:cNvPr id="34" name="tx34"/>
+            <p:cNvPr id="35" name="tx35"/>
             <p:cNvSpPr/>
             <p:nvPr/>
           </p:nvSpPr>
           <p:spPr>
             <a:xfrm>
-              <a:off x="2928340" y="5925448"/>
+              <a:off x="2928340" y="3662467"/>
               <a:ext cx="3578047" cy="100218"/>
             </a:xfrm>
             <a:prstGeom prst="rect">
@@ -4879,13 +4914,13 @@
         </p:sp>
         <p:sp>
           <p:nvSpPr>
-            <p:cNvPr id="35" name="tx35"/>
+            <p:cNvPr id="36" name="tx36"/>
             <p:cNvSpPr/>
             <p:nvPr/>
           </p:nvSpPr>
           <p:spPr>
             <a:xfrm rot="-5400000">
-              <a:off x="68446" y="3848213"/>
+              <a:off x="138035" y="2751517"/>
               <a:ext cx="1016904" cy="100218"/>
             </a:xfrm>
             <a:prstGeom prst="rect">
@@ -4925,13 +4960,13 @@
         </p:sp>
         <p:sp>
           <p:nvSpPr>
-            <p:cNvPr id="36" name="tx36"/>
+            <p:cNvPr id="37" name="tx37"/>
             <p:cNvSpPr/>
             <p:nvPr/>
           </p:nvSpPr>
           <p:spPr>
             <a:xfrm>
-              <a:off x="817517" y="1896563"/>
+              <a:off x="887106" y="1966152"/>
               <a:ext cx="7052127" cy="82021"/>
             </a:xfrm>
             <a:prstGeom prst="rect">
@@ -4971,13 +5006,3557 @@
         </p:sp>
         <p:sp>
           <p:nvSpPr>
-            <p:cNvPr id="37" name="tx37"/>
+            <p:cNvPr id="38" name="tx38"/>
             <p:cNvSpPr/>
             <p:nvPr/>
           </p:nvSpPr>
           <p:spPr>
             <a:xfrm>
-              <a:off x="817517" y="1669789"/>
+              <a:off x="887106" y="1739378"/>
+              <a:ext cx="3499683" cy="120152"/>
+            </a:xfrm>
+            <a:prstGeom prst="rect">
+              <a:avLst/>
+            </a:prstGeom>
+            <a:noFill/>
+          </p:spPr>
+          <p:txBody>
+            <a:bodyPr lIns="0" rIns="0" tIns="0" bIns="0" anchorCtr="1" anchor="ctr" wrap="none"/>
+            <a:lstStyle/>
+            <a:p>
+              <a:pPr algn="l" marL="0" marR="0" indent="0">
+                <a:lnSpc>
+                  <a:spcPts val="1320"/>
+                </a:lnSpc>
+                <a:spcBef>
+                  <a:spcPts val="0"/>
+                </a:spcBef>
+                <a:spcAft>
+                  <a:spcPts val="0"/>
+                </a:spcAft>
+              </a:pPr>
+              <a:r>
+                <a:rPr sz="1320">
+                  <a:solidFill>
+                    <a:srgbClr val="000000">
+                      <a:alpha val="100000"/>
+                    </a:srgbClr>
+                  </a:solidFill>
+                  <a:latin typeface="Helvetica"/>
+                  <a:cs typeface="Helvetica"/>
+                </a:rPr>
+                <a:t>Composite Grade 3 AEs (Carboplatin AUC ≥ 3)</a:t>
+              </a:r>
+            </a:p>
+          </p:txBody>
+        </p:sp>
+        <p:sp>
+          <p:nvSpPr>
+            <p:cNvPr id="39" name="pl39"/>
+            <p:cNvSpPr/>
+            <p:nvPr/>
+          </p:nvSpPr>
+          <p:spPr>
+            <a:xfrm>
+              <a:off x="887106" y="5444019"/>
+              <a:ext cx="7660515" cy="0"/>
+            </a:xfrm>
+            <a:custGeom>
+              <a:avLst/>
+              <a:pathLst>
+                <a:path w="7660515" h="0">
+                  <a:moveTo>
+                    <a:pt x="0" y="0"/>
+                  </a:moveTo>
+                  <a:lnTo>
+                    <a:pt x="7660515" y="0"/>
+                  </a:lnTo>
+                  <a:lnTo>
+                    <a:pt x="7660515" y="0"/>
+                  </a:lnTo>
+                </a:path>
+              </a:pathLst>
+            </a:custGeom>
+            <a:ln w="6775" cap="flat">
+              <a:solidFill>
+                <a:srgbClr val="EBEBEB">
+                  <a:alpha val="100000"/>
+                </a:srgbClr>
+              </a:solidFill>
+              <a:prstDash val="solid"/>
+              <a:round/>
+            </a:ln>
+          </p:spPr>
+          <p:txBody>
+            <a:bodyPr/>
+            <a:lstStyle/>
+            <a:p/>
+          </p:txBody>
+        </p:sp>
+        <p:sp>
+          <p:nvSpPr>
+            <p:cNvPr id="40" name="pl40"/>
+            <p:cNvSpPr/>
+            <p:nvPr/>
+          </p:nvSpPr>
+          <p:spPr>
+            <a:xfrm>
+              <a:off x="887106" y="5144686"/>
+              <a:ext cx="7660515" cy="0"/>
+            </a:xfrm>
+            <a:custGeom>
+              <a:avLst/>
+              <a:pathLst>
+                <a:path w="7660515" h="0">
+                  <a:moveTo>
+                    <a:pt x="0" y="0"/>
+                  </a:moveTo>
+                  <a:lnTo>
+                    <a:pt x="7660515" y="0"/>
+                  </a:lnTo>
+                  <a:lnTo>
+                    <a:pt x="7660515" y="0"/>
+                  </a:lnTo>
+                </a:path>
+              </a:pathLst>
+            </a:custGeom>
+            <a:ln w="6775" cap="flat">
+              <a:solidFill>
+                <a:srgbClr val="EBEBEB">
+                  <a:alpha val="100000"/>
+                </a:srgbClr>
+              </a:solidFill>
+              <a:prstDash val="solid"/>
+              <a:round/>
+            </a:ln>
+          </p:spPr>
+          <p:txBody>
+            <a:bodyPr/>
+            <a:lstStyle/>
+            <a:p/>
+          </p:txBody>
+        </p:sp>
+        <p:sp>
+          <p:nvSpPr>
+            <p:cNvPr id="41" name="pl41"/>
+            <p:cNvSpPr/>
+            <p:nvPr/>
+          </p:nvSpPr>
+          <p:spPr>
+            <a:xfrm>
+              <a:off x="887106" y="4845352"/>
+              <a:ext cx="7660515" cy="0"/>
+            </a:xfrm>
+            <a:custGeom>
+              <a:avLst/>
+              <a:pathLst>
+                <a:path w="7660515" h="0">
+                  <a:moveTo>
+                    <a:pt x="0" y="0"/>
+                  </a:moveTo>
+                  <a:lnTo>
+                    <a:pt x="7660515" y="0"/>
+                  </a:lnTo>
+                  <a:lnTo>
+                    <a:pt x="7660515" y="0"/>
+                  </a:lnTo>
+                </a:path>
+              </a:pathLst>
+            </a:custGeom>
+            <a:ln w="6775" cap="flat">
+              <a:solidFill>
+                <a:srgbClr val="EBEBEB">
+                  <a:alpha val="100000"/>
+                </a:srgbClr>
+              </a:solidFill>
+              <a:prstDash val="solid"/>
+              <a:round/>
+            </a:ln>
+          </p:spPr>
+          <p:txBody>
+            <a:bodyPr/>
+            <a:lstStyle/>
+            <a:p/>
+          </p:txBody>
+        </p:sp>
+        <p:sp>
+          <p:nvSpPr>
+            <p:cNvPr id="42" name="pl42"/>
+            <p:cNvSpPr/>
+            <p:nvPr/>
+          </p:nvSpPr>
+          <p:spPr>
+            <a:xfrm>
+              <a:off x="887106" y="4546018"/>
+              <a:ext cx="7660515" cy="0"/>
+            </a:xfrm>
+            <a:custGeom>
+              <a:avLst/>
+              <a:pathLst>
+                <a:path w="7660515" h="0">
+                  <a:moveTo>
+                    <a:pt x="0" y="0"/>
+                  </a:moveTo>
+                  <a:lnTo>
+                    <a:pt x="7660515" y="0"/>
+                  </a:lnTo>
+                  <a:lnTo>
+                    <a:pt x="7660515" y="0"/>
+                  </a:lnTo>
+                </a:path>
+              </a:pathLst>
+            </a:custGeom>
+            <a:ln w="6775" cap="flat">
+              <a:solidFill>
+                <a:srgbClr val="EBEBEB">
+                  <a:alpha val="100000"/>
+                </a:srgbClr>
+              </a:solidFill>
+              <a:prstDash val="solid"/>
+              <a:round/>
+            </a:ln>
+          </p:spPr>
+          <p:txBody>
+            <a:bodyPr/>
+            <a:lstStyle/>
+            <a:p/>
+          </p:txBody>
+        </p:sp>
+        <p:sp>
+          <p:nvSpPr>
+            <p:cNvPr id="43" name="pl43"/>
+            <p:cNvSpPr/>
+            <p:nvPr/>
+          </p:nvSpPr>
+          <p:spPr>
+            <a:xfrm>
+              <a:off x="983303" y="4336484"/>
+              <a:ext cx="0" cy="1317069"/>
+            </a:xfrm>
+            <a:custGeom>
+              <a:avLst/>
+              <a:pathLst>
+                <a:path w="0" h="1317069">
+                  <a:moveTo>
+                    <a:pt x="0" y="1317069"/>
+                  </a:moveTo>
+                  <a:lnTo>
+                    <a:pt x="0" y="0"/>
+                  </a:lnTo>
+                  <a:lnTo>
+                    <a:pt x="0" y="0"/>
+                  </a:lnTo>
+                </a:path>
+              </a:pathLst>
+            </a:custGeom>
+            <a:ln w="6775" cap="flat">
+              <a:solidFill>
+                <a:srgbClr val="EBEBEB">
+                  <a:alpha val="100000"/>
+                </a:srgbClr>
+              </a:solidFill>
+              <a:prstDash val="solid"/>
+              <a:round/>
+            </a:ln>
+          </p:spPr>
+          <p:txBody>
+            <a:bodyPr/>
+            <a:lstStyle/>
+            <a:p/>
+          </p:txBody>
+        </p:sp>
+        <p:sp>
+          <p:nvSpPr>
+            <p:cNvPr id="44" name="pl44"/>
+            <p:cNvSpPr/>
+            <p:nvPr/>
+          </p:nvSpPr>
+          <p:spPr>
+            <a:xfrm>
+              <a:off x="1790468" y="4336484"/>
+              <a:ext cx="0" cy="1317069"/>
+            </a:xfrm>
+            <a:custGeom>
+              <a:avLst/>
+              <a:pathLst>
+                <a:path w="0" h="1317069">
+                  <a:moveTo>
+                    <a:pt x="0" y="1317069"/>
+                  </a:moveTo>
+                  <a:lnTo>
+                    <a:pt x="0" y="0"/>
+                  </a:lnTo>
+                  <a:lnTo>
+                    <a:pt x="0" y="0"/>
+                  </a:lnTo>
+                </a:path>
+              </a:pathLst>
+            </a:custGeom>
+            <a:ln w="6775" cap="flat">
+              <a:solidFill>
+                <a:srgbClr val="EBEBEB">
+                  <a:alpha val="100000"/>
+                </a:srgbClr>
+              </a:solidFill>
+              <a:prstDash val="solid"/>
+              <a:round/>
+            </a:ln>
+          </p:spPr>
+          <p:txBody>
+            <a:bodyPr/>
+            <a:lstStyle/>
+            <a:p/>
+          </p:txBody>
+        </p:sp>
+        <p:sp>
+          <p:nvSpPr>
+            <p:cNvPr id="45" name="pl45"/>
+            <p:cNvSpPr/>
+            <p:nvPr/>
+          </p:nvSpPr>
+          <p:spPr>
+            <a:xfrm>
+              <a:off x="2597634" y="4336484"/>
+              <a:ext cx="0" cy="1317069"/>
+            </a:xfrm>
+            <a:custGeom>
+              <a:avLst/>
+              <a:pathLst>
+                <a:path w="0" h="1317069">
+                  <a:moveTo>
+                    <a:pt x="0" y="1317069"/>
+                  </a:moveTo>
+                  <a:lnTo>
+                    <a:pt x="0" y="0"/>
+                  </a:lnTo>
+                  <a:lnTo>
+                    <a:pt x="0" y="0"/>
+                  </a:lnTo>
+                </a:path>
+              </a:pathLst>
+            </a:custGeom>
+            <a:ln w="6775" cap="flat">
+              <a:solidFill>
+                <a:srgbClr val="EBEBEB">
+                  <a:alpha val="100000"/>
+                </a:srgbClr>
+              </a:solidFill>
+              <a:prstDash val="solid"/>
+              <a:round/>
+            </a:ln>
+          </p:spPr>
+          <p:txBody>
+            <a:bodyPr/>
+            <a:lstStyle/>
+            <a:p/>
+          </p:txBody>
+        </p:sp>
+        <p:sp>
+          <p:nvSpPr>
+            <p:cNvPr id="46" name="pl46"/>
+            <p:cNvSpPr/>
+            <p:nvPr/>
+          </p:nvSpPr>
+          <p:spPr>
+            <a:xfrm>
+              <a:off x="3404799" y="4336484"/>
+              <a:ext cx="0" cy="1317069"/>
+            </a:xfrm>
+            <a:custGeom>
+              <a:avLst/>
+              <a:pathLst>
+                <a:path w="0" h="1317069">
+                  <a:moveTo>
+                    <a:pt x="0" y="1317069"/>
+                  </a:moveTo>
+                  <a:lnTo>
+                    <a:pt x="0" y="0"/>
+                  </a:lnTo>
+                  <a:lnTo>
+                    <a:pt x="0" y="0"/>
+                  </a:lnTo>
+                </a:path>
+              </a:pathLst>
+            </a:custGeom>
+            <a:ln w="6775" cap="flat">
+              <a:solidFill>
+                <a:srgbClr val="EBEBEB">
+                  <a:alpha val="100000"/>
+                </a:srgbClr>
+              </a:solidFill>
+              <a:prstDash val="solid"/>
+              <a:round/>
+            </a:ln>
+          </p:spPr>
+          <p:txBody>
+            <a:bodyPr/>
+            <a:lstStyle/>
+            <a:p/>
+          </p:txBody>
+        </p:sp>
+        <p:sp>
+          <p:nvSpPr>
+            <p:cNvPr id="47" name="pl47"/>
+            <p:cNvSpPr/>
+            <p:nvPr/>
+          </p:nvSpPr>
+          <p:spPr>
+            <a:xfrm>
+              <a:off x="4211965" y="4336484"/>
+              <a:ext cx="0" cy="1317069"/>
+            </a:xfrm>
+            <a:custGeom>
+              <a:avLst/>
+              <a:pathLst>
+                <a:path w="0" h="1317069">
+                  <a:moveTo>
+                    <a:pt x="0" y="1317069"/>
+                  </a:moveTo>
+                  <a:lnTo>
+                    <a:pt x="0" y="0"/>
+                  </a:lnTo>
+                  <a:lnTo>
+                    <a:pt x="0" y="0"/>
+                  </a:lnTo>
+                </a:path>
+              </a:pathLst>
+            </a:custGeom>
+            <a:ln w="6775" cap="flat">
+              <a:solidFill>
+                <a:srgbClr val="EBEBEB">
+                  <a:alpha val="100000"/>
+                </a:srgbClr>
+              </a:solidFill>
+              <a:prstDash val="solid"/>
+              <a:round/>
+            </a:ln>
+          </p:spPr>
+          <p:txBody>
+            <a:bodyPr/>
+            <a:lstStyle/>
+            <a:p/>
+          </p:txBody>
+        </p:sp>
+        <p:sp>
+          <p:nvSpPr>
+            <p:cNvPr id="48" name="pl48"/>
+            <p:cNvSpPr/>
+            <p:nvPr/>
+          </p:nvSpPr>
+          <p:spPr>
+            <a:xfrm>
+              <a:off x="5019130" y="4336484"/>
+              <a:ext cx="0" cy="1317069"/>
+            </a:xfrm>
+            <a:custGeom>
+              <a:avLst/>
+              <a:pathLst>
+                <a:path w="0" h="1317069">
+                  <a:moveTo>
+                    <a:pt x="0" y="1317069"/>
+                  </a:moveTo>
+                  <a:lnTo>
+                    <a:pt x="0" y="0"/>
+                  </a:lnTo>
+                  <a:lnTo>
+                    <a:pt x="0" y="0"/>
+                  </a:lnTo>
+                </a:path>
+              </a:pathLst>
+            </a:custGeom>
+            <a:ln w="6775" cap="flat">
+              <a:solidFill>
+                <a:srgbClr val="EBEBEB">
+                  <a:alpha val="100000"/>
+                </a:srgbClr>
+              </a:solidFill>
+              <a:prstDash val="solid"/>
+              <a:round/>
+            </a:ln>
+          </p:spPr>
+          <p:txBody>
+            <a:bodyPr/>
+            <a:lstStyle/>
+            <a:p/>
+          </p:txBody>
+        </p:sp>
+        <p:sp>
+          <p:nvSpPr>
+            <p:cNvPr id="49" name="pl49"/>
+            <p:cNvSpPr/>
+            <p:nvPr/>
+          </p:nvSpPr>
+          <p:spPr>
+            <a:xfrm>
+              <a:off x="5826296" y="4336484"/>
+              <a:ext cx="0" cy="1317069"/>
+            </a:xfrm>
+            <a:custGeom>
+              <a:avLst/>
+              <a:pathLst>
+                <a:path w="0" h="1317069">
+                  <a:moveTo>
+                    <a:pt x="0" y="1317069"/>
+                  </a:moveTo>
+                  <a:lnTo>
+                    <a:pt x="0" y="0"/>
+                  </a:lnTo>
+                  <a:lnTo>
+                    <a:pt x="0" y="0"/>
+                  </a:lnTo>
+                </a:path>
+              </a:pathLst>
+            </a:custGeom>
+            <a:ln w="6775" cap="flat">
+              <a:solidFill>
+                <a:srgbClr val="EBEBEB">
+                  <a:alpha val="100000"/>
+                </a:srgbClr>
+              </a:solidFill>
+              <a:prstDash val="solid"/>
+              <a:round/>
+            </a:ln>
+          </p:spPr>
+          <p:txBody>
+            <a:bodyPr/>
+            <a:lstStyle/>
+            <a:p/>
+          </p:txBody>
+        </p:sp>
+        <p:sp>
+          <p:nvSpPr>
+            <p:cNvPr id="50" name="pl50"/>
+            <p:cNvSpPr/>
+            <p:nvPr/>
+          </p:nvSpPr>
+          <p:spPr>
+            <a:xfrm>
+              <a:off x="6633461" y="4336484"/>
+              <a:ext cx="0" cy="1317069"/>
+            </a:xfrm>
+            <a:custGeom>
+              <a:avLst/>
+              <a:pathLst>
+                <a:path w="0" h="1317069">
+                  <a:moveTo>
+                    <a:pt x="0" y="1317069"/>
+                  </a:moveTo>
+                  <a:lnTo>
+                    <a:pt x="0" y="0"/>
+                  </a:lnTo>
+                  <a:lnTo>
+                    <a:pt x="0" y="0"/>
+                  </a:lnTo>
+                </a:path>
+              </a:pathLst>
+            </a:custGeom>
+            <a:ln w="6775" cap="flat">
+              <a:solidFill>
+                <a:srgbClr val="EBEBEB">
+                  <a:alpha val="100000"/>
+                </a:srgbClr>
+              </a:solidFill>
+              <a:prstDash val="solid"/>
+              <a:round/>
+            </a:ln>
+          </p:spPr>
+          <p:txBody>
+            <a:bodyPr/>
+            <a:lstStyle/>
+            <a:p/>
+          </p:txBody>
+        </p:sp>
+        <p:sp>
+          <p:nvSpPr>
+            <p:cNvPr id="51" name="pl51"/>
+            <p:cNvSpPr/>
+            <p:nvPr/>
+          </p:nvSpPr>
+          <p:spPr>
+            <a:xfrm>
+              <a:off x="7440627" y="4336484"/>
+              <a:ext cx="0" cy="1317069"/>
+            </a:xfrm>
+            <a:custGeom>
+              <a:avLst/>
+              <a:pathLst>
+                <a:path w="0" h="1317069">
+                  <a:moveTo>
+                    <a:pt x="0" y="1317069"/>
+                  </a:moveTo>
+                  <a:lnTo>
+                    <a:pt x="0" y="0"/>
+                  </a:lnTo>
+                  <a:lnTo>
+                    <a:pt x="0" y="0"/>
+                  </a:lnTo>
+                </a:path>
+              </a:pathLst>
+            </a:custGeom>
+            <a:ln w="6775" cap="flat">
+              <a:solidFill>
+                <a:srgbClr val="EBEBEB">
+                  <a:alpha val="100000"/>
+                </a:srgbClr>
+              </a:solidFill>
+              <a:prstDash val="solid"/>
+              <a:round/>
+            </a:ln>
+          </p:spPr>
+          <p:txBody>
+            <a:bodyPr/>
+            <a:lstStyle/>
+            <a:p/>
+          </p:txBody>
+        </p:sp>
+        <p:sp>
+          <p:nvSpPr>
+            <p:cNvPr id="52" name="pl52"/>
+            <p:cNvSpPr/>
+            <p:nvPr/>
+          </p:nvSpPr>
+          <p:spPr>
+            <a:xfrm>
+              <a:off x="8247792" y="4336484"/>
+              <a:ext cx="0" cy="1317069"/>
+            </a:xfrm>
+            <a:custGeom>
+              <a:avLst/>
+              <a:pathLst>
+                <a:path w="0" h="1317069">
+                  <a:moveTo>
+                    <a:pt x="0" y="1317069"/>
+                  </a:moveTo>
+                  <a:lnTo>
+                    <a:pt x="0" y="0"/>
+                  </a:lnTo>
+                  <a:lnTo>
+                    <a:pt x="0" y="0"/>
+                  </a:lnTo>
+                </a:path>
+              </a:pathLst>
+            </a:custGeom>
+            <a:ln w="6775" cap="flat">
+              <a:solidFill>
+                <a:srgbClr val="EBEBEB">
+                  <a:alpha val="100000"/>
+                </a:srgbClr>
+              </a:solidFill>
+              <a:prstDash val="solid"/>
+              <a:round/>
+            </a:ln>
+          </p:spPr>
+          <p:txBody>
+            <a:bodyPr/>
+            <a:lstStyle/>
+            <a:p/>
+          </p:txBody>
+        </p:sp>
+        <p:sp>
+          <p:nvSpPr>
+            <p:cNvPr id="53" name="pl53"/>
+            <p:cNvSpPr/>
+            <p:nvPr/>
+          </p:nvSpPr>
+          <p:spPr>
+            <a:xfrm>
+              <a:off x="887106" y="5593686"/>
+              <a:ext cx="7660515" cy="0"/>
+            </a:xfrm>
+            <a:custGeom>
+              <a:avLst/>
+              <a:pathLst>
+                <a:path w="7660515" h="0">
+                  <a:moveTo>
+                    <a:pt x="0" y="0"/>
+                  </a:moveTo>
+                  <a:lnTo>
+                    <a:pt x="7660515" y="0"/>
+                  </a:lnTo>
+                  <a:lnTo>
+                    <a:pt x="7660515" y="0"/>
+                  </a:lnTo>
+                </a:path>
+              </a:pathLst>
+            </a:custGeom>
+            <a:ln w="13550" cap="flat">
+              <a:solidFill>
+                <a:srgbClr val="EBEBEB">
+                  <a:alpha val="100000"/>
+                </a:srgbClr>
+              </a:solidFill>
+              <a:prstDash val="solid"/>
+              <a:round/>
+            </a:ln>
+          </p:spPr>
+          <p:txBody>
+            <a:bodyPr/>
+            <a:lstStyle/>
+            <a:p/>
+          </p:txBody>
+        </p:sp>
+        <p:sp>
+          <p:nvSpPr>
+            <p:cNvPr id="54" name="pl54"/>
+            <p:cNvSpPr/>
+            <p:nvPr/>
+          </p:nvSpPr>
+          <p:spPr>
+            <a:xfrm>
+              <a:off x="887106" y="5294352"/>
+              <a:ext cx="7660515" cy="0"/>
+            </a:xfrm>
+            <a:custGeom>
+              <a:avLst/>
+              <a:pathLst>
+                <a:path w="7660515" h="0">
+                  <a:moveTo>
+                    <a:pt x="0" y="0"/>
+                  </a:moveTo>
+                  <a:lnTo>
+                    <a:pt x="7660515" y="0"/>
+                  </a:lnTo>
+                  <a:lnTo>
+                    <a:pt x="7660515" y="0"/>
+                  </a:lnTo>
+                </a:path>
+              </a:pathLst>
+            </a:custGeom>
+            <a:ln w="13550" cap="flat">
+              <a:solidFill>
+                <a:srgbClr val="EBEBEB">
+                  <a:alpha val="100000"/>
+                </a:srgbClr>
+              </a:solidFill>
+              <a:prstDash val="solid"/>
+              <a:round/>
+            </a:ln>
+          </p:spPr>
+          <p:txBody>
+            <a:bodyPr/>
+            <a:lstStyle/>
+            <a:p/>
+          </p:txBody>
+        </p:sp>
+        <p:sp>
+          <p:nvSpPr>
+            <p:cNvPr id="55" name="pl55"/>
+            <p:cNvSpPr/>
+            <p:nvPr/>
+          </p:nvSpPr>
+          <p:spPr>
+            <a:xfrm>
+              <a:off x="887106" y="4995019"/>
+              <a:ext cx="7660515" cy="0"/>
+            </a:xfrm>
+            <a:custGeom>
+              <a:avLst/>
+              <a:pathLst>
+                <a:path w="7660515" h="0">
+                  <a:moveTo>
+                    <a:pt x="0" y="0"/>
+                  </a:moveTo>
+                  <a:lnTo>
+                    <a:pt x="7660515" y="0"/>
+                  </a:lnTo>
+                  <a:lnTo>
+                    <a:pt x="7660515" y="0"/>
+                  </a:lnTo>
+                </a:path>
+              </a:pathLst>
+            </a:custGeom>
+            <a:ln w="13550" cap="flat">
+              <a:solidFill>
+                <a:srgbClr val="EBEBEB">
+                  <a:alpha val="100000"/>
+                </a:srgbClr>
+              </a:solidFill>
+              <a:prstDash val="solid"/>
+              <a:round/>
+            </a:ln>
+          </p:spPr>
+          <p:txBody>
+            <a:bodyPr/>
+            <a:lstStyle/>
+            <a:p/>
+          </p:txBody>
+        </p:sp>
+        <p:sp>
+          <p:nvSpPr>
+            <p:cNvPr id="56" name="pl56"/>
+            <p:cNvSpPr/>
+            <p:nvPr/>
+          </p:nvSpPr>
+          <p:spPr>
+            <a:xfrm>
+              <a:off x="887106" y="4695685"/>
+              <a:ext cx="7660515" cy="0"/>
+            </a:xfrm>
+            <a:custGeom>
+              <a:avLst/>
+              <a:pathLst>
+                <a:path w="7660515" h="0">
+                  <a:moveTo>
+                    <a:pt x="0" y="0"/>
+                  </a:moveTo>
+                  <a:lnTo>
+                    <a:pt x="7660515" y="0"/>
+                  </a:lnTo>
+                  <a:lnTo>
+                    <a:pt x="7660515" y="0"/>
+                  </a:lnTo>
+                </a:path>
+              </a:pathLst>
+            </a:custGeom>
+            <a:ln w="13550" cap="flat">
+              <a:solidFill>
+                <a:srgbClr val="EBEBEB">
+                  <a:alpha val="100000"/>
+                </a:srgbClr>
+              </a:solidFill>
+              <a:prstDash val="solid"/>
+              <a:round/>
+            </a:ln>
+          </p:spPr>
+          <p:txBody>
+            <a:bodyPr/>
+            <a:lstStyle/>
+            <a:p/>
+          </p:txBody>
+        </p:sp>
+        <p:sp>
+          <p:nvSpPr>
+            <p:cNvPr id="57" name="pl57"/>
+            <p:cNvSpPr/>
+            <p:nvPr/>
+          </p:nvSpPr>
+          <p:spPr>
+            <a:xfrm>
+              <a:off x="887106" y="4396351"/>
+              <a:ext cx="7660515" cy="0"/>
+            </a:xfrm>
+            <a:custGeom>
+              <a:avLst/>
+              <a:pathLst>
+                <a:path w="7660515" h="0">
+                  <a:moveTo>
+                    <a:pt x="0" y="0"/>
+                  </a:moveTo>
+                  <a:lnTo>
+                    <a:pt x="7660515" y="0"/>
+                  </a:lnTo>
+                  <a:lnTo>
+                    <a:pt x="7660515" y="0"/>
+                  </a:lnTo>
+                </a:path>
+              </a:pathLst>
+            </a:custGeom>
+            <a:ln w="13550" cap="flat">
+              <a:solidFill>
+                <a:srgbClr val="EBEBEB">
+                  <a:alpha val="100000"/>
+                </a:srgbClr>
+              </a:solidFill>
+              <a:prstDash val="solid"/>
+              <a:round/>
+            </a:ln>
+          </p:spPr>
+          <p:txBody>
+            <a:bodyPr/>
+            <a:lstStyle/>
+            <a:p/>
+          </p:txBody>
+        </p:sp>
+        <p:sp>
+          <p:nvSpPr>
+            <p:cNvPr id="58" name="pl58"/>
+            <p:cNvSpPr/>
+            <p:nvPr/>
+          </p:nvSpPr>
+          <p:spPr>
+            <a:xfrm>
+              <a:off x="1386885" y="4336484"/>
+              <a:ext cx="0" cy="1317069"/>
+            </a:xfrm>
+            <a:custGeom>
+              <a:avLst/>
+              <a:pathLst>
+                <a:path w="0" h="1317069">
+                  <a:moveTo>
+                    <a:pt x="0" y="1317069"/>
+                  </a:moveTo>
+                  <a:lnTo>
+                    <a:pt x="0" y="0"/>
+                  </a:lnTo>
+                  <a:lnTo>
+                    <a:pt x="0" y="0"/>
+                  </a:lnTo>
+                </a:path>
+              </a:pathLst>
+            </a:custGeom>
+            <a:ln w="13550" cap="flat">
+              <a:solidFill>
+                <a:srgbClr val="EBEBEB">
+                  <a:alpha val="100000"/>
+                </a:srgbClr>
+              </a:solidFill>
+              <a:prstDash val="solid"/>
+              <a:round/>
+            </a:ln>
+          </p:spPr>
+          <p:txBody>
+            <a:bodyPr/>
+            <a:lstStyle/>
+            <a:p/>
+          </p:txBody>
+        </p:sp>
+        <p:sp>
+          <p:nvSpPr>
+            <p:cNvPr id="59" name="pl59"/>
+            <p:cNvSpPr/>
+            <p:nvPr/>
+          </p:nvSpPr>
+          <p:spPr>
+            <a:xfrm>
+              <a:off x="2194051" y="4336484"/>
+              <a:ext cx="0" cy="1317069"/>
+            </a:xfrm>
+            <a:custGeom>
+              <a:avLst/>
+              <a:pathLst>
+                <a:path w="0" h="1317069">
+                  <a:moveTo>
+                    <a:pt x="0" y="1317069"/>
+                  </a:moveTo>
+                  <a:lnTo>
+                    <a:pt x="0" y="0"/>
+                  </a:lnTo>
+                  <a:lnTo>
+                    <a:pt x="0" y="0"/>
+                  </a:lnTo>
+                </a:path>
+              </a:pathLst>
+            </a:custGeom>
+            <a:ln w="13550" cap="flat">
+              <a:solidFill>
+                <a:srgbClr val="EBEBEB">
+                  <a:alpha val="100000"/>
+                </a:srgbClr>
+              </a:solidFill>
+              <a:prstDash val="solid"/>
+              <a:round/>
+            </a:ln>
+          </p:spPr>
+          <p:txBody>
+            <a:bodyPr/>
+            <a:lstStyle/>
+            <a:p/>
+          </p:txBody>
+        </p:sp>
+        <p:sp>
+          <p:nvSpPr>
+            <p:cNvPr id="60" name="pl60"/>
+            <p:cNvSpPr/>
+            <p:nvPr/>
+          </p:nvSpPr>
+          <p:spPr>
+            <a:xfrm>
+              <a:off x="3001216" y="4336484"/>
+              <a:ext cx="0" cy="1317069"/>
+            </a:xfrm>
+            <a:custGeom>
+              <a:avLst/>
+              <a:pathLst>
+                <a:path w="0" h="1317069">
+                  <a:moveTo>
+                    <a:pt x="0" y="1317069"/>
+                  </a:moveTo>
+                  <a:lnTo>
+                    <a:pt x="0" y="0"/>
+                  </a:lnTo>
+                  <a:lnTo>
+                    <a:pt x="0" y="0"/>
+                  </a:lnTo>
+                </a:path>
+              </a:pathLst>
+            </a:custGeom>
+            <a:ln w="13550" cap="flat">
+              <a:solidFill>
+                <a:srgbClr val="EBEBEB">
+                  <a:alpha val="100000"/>
+                </a:srgbClr>
+              </a:solidFill>
+              <a:prstDash val="solid"/>
+              <a:round/>
+            </a:ln>
+          </p:spPr>
+          <p:txBody>
+            <a:bodyPr/>
+            <a:lstStyle/>
+            <a:p/>
+          </p:txBody>
+        </p:sp>
+        <p:sp>
+          <p:nvSpPr>
+            <p:cNvPr id="61" name="pl61"/>
+            <p:cNvSpPr/>
+            <p:nvPr/>
+          </p:nvSpPr>
+          <p:spPr>
+            <a:xfrm>
+              <a:off x="3808382" y="4336484"/>
+              <a:ext cx="0" cy="1317069"/>
+            </a:xfrm>
+            <a:custGeom>
+              <a:avLst/>
+              <a:pathLst>
+                <a:path w="0" h="1317069">
+                  <a:moveTo>
+                    <a:pt x="0" y="1317069"/>
+                  </a:moveTo>
+                  <a:lnTo>
+                    <a:pt x="0" y="0"/>
+                  </a:lnTo>
+                  <a:lnTo>
+                    <a:pt x="0" y="0"/>
+                  </a:lnTo>
+                </a:path>
+              </a:pathLst>
+            </a:custGeom>
+            <a:ln w="13550" cap="flat">
+              <a:solidFill>
+                <a:srgbClr val="EBEBEB">
+                  <a:alpha val="100000"/>
+                </a:srgbClr>
+              </a:solidFill>
+              <a:prstDash val="solid"/>
+              <a:round/>
+            </a:ln>
+          </p:spPr>
+          <p:txBody>
+            <a:bodyPr/>
+            <a:lstStyle/>
+            <a:p/>
+          </p:txBody>
+        </p:sp>
+        <p:sp>
+          <p:nvSpPr>
+            <p:cNvPr id="62" name="pl62"/>
+            <p:cNvSpPr/>
+            <p:nvPr/>
+          </p:nvSpPr>
+          <p:spPr>
+            <a:xfrm>
+              <a:off x="4615547" y="4336484"/>
+              <a:ext cx="0" cy="1317069"/>
+            </a:xfrm>
+            <a:custGeom>
+              <a:avLst/>
+              <a:pathLst>
+                <a:path w="0" h="1317069">
+                  <a:moveTo>
+                    <a:pt x="0" y="1317069"/>
+                  </a:moveTo>
+                  <a:lnTo>
+                    <a:pt x="0" y="0"/>
+                  </a:lnTo>
+                  <a:lnTo>
+                    <a:pt x="0" y="0"/>
+                  </a:lnTo>
+                </a:path>
+              </a:pathLst>
+            </a:custGeom>
+            <a:ln w="13550" cap="flat">
+              <a:solidFill>
+                <a:srgbClr val="EBEBEB">
+                  <a:alpha val="100000"/>
+                </a:srgbClr>
+              </a:solidFill>
+              <a:prstDash val="solid"/>
+              <a:round/>
+            </a:ln>
+          </p:spPr>
+          <p:txBody>
+            <a:bodyPr/>
+            <a:lstStyle/>
+            <a:p/>
+          </p:txBody>
+        </p:sp>
+        <p:sp>
+          <p:nvSpPr>
+            <p:cNvPr id="63" name="pl63"/>
+            <p:cNvSpPr/>
+            <p:nvPr/>
+          </p:nvSpPr>
+          <p:spPr>
+            <a:xfrm>
+              <a:off x="5422713" y="4336484"/>
+              <a:ext cx="0" cy="1317069"/>
+            </a:xfrm>
+            <a:custGeom>
+              <a:avLst/>
+              <a:pathLst>
+                <a:path w="0" h="1317069">
+                  <a:moveTo>
+                    <a:pt x="0" y="1317069"/>
+                  </a:moveTo>
+                  <a:lnTo>
+                    <a:pt x="0" y="0"/>
+                  </a:lnTo>
+                  <a:lnTo>
+                    <a:pt x="0" y="0"/>
+                  </a:lnTo>
+                </a:path>
+              </a:pathLst>
+            </a:custGeom>
+            <a:ln w="13550" cap="flat">
+              <a:solidFill>
+                <a:srgbClr val="EBEBEB">
+                  <a:alpha val="100000"/>
+                </a:srgbClr>
+              </a:solidFill>
+              <a:prstDash val="solid"/>
+              <a:round/>
+            </a:ln>
+          </p:spPr>
+          <p:txBody>
+            <a:bodyPr/>
+            <a:lstStyle/>
+            <a:p/>
+          </p:txBody>
+        </p:sp>
+        <p:sp>
+          <p:nvSpPr>
+            <p:cNvPr id="64" name="pl64"/>
+            <p:cNvSpPr/>
+            <p:nvPr/>
+          </p:nvSpPr>
+          <p:spPr>
+            <a:xfrm>
+              <a:off x="6229878" y="4336484"/>
+              <a:ext cx="0" cy="1317069"/>
+            </a:xfrm>
+            <a:custGeom>
+              <a:avLst/>
+              <a:pathLst>
+                <a:path w="0" h="1317069">
+                  <a:moveTo>
+                    <a:pt x="0" y="1317069"/>
+                  </a:moveTo>
+                  <a:lnTo>
+                    <a:pt x="0" y="0"/>
+                  </a:lnTo>
+                  <a:lnTo>
+                    <a:pt x="0" y="0"/>
+                  </a:lnTo>
+                </a:path>
+              </a:pathLst>
+            </a:custGeom>
+            <a:ln w="13550" cap="flat">
+              <a:solidFill>
+                <a:srgbClr val="EBEBEB">
+                  <a:alpha val="100000"/>
+                </a:srgbClr>
+              </a:solidFill>
+              <a:prstDash val="solid"/>
+              <a:round/>
+            </a:ln>
+          </p:spPr>
+          <p:txBody>
+            <a:bodyPr/>
+            <a:lstStyle/>
+            <a:p/>
+          </p:txBody>
+        </p:sp>
+        <p:sp>
+          <p:nvSpPr>
+            <p:cNvPr id="65" name="pl65"/>
+            <p:cNvSpPr/>
+            <p:nvPr/>
+          </p:nvSpPr>
+          <p:spPr>
+            <a:xfrm>
+              <a:off x="7037044" y="4336484"/>
+              <a:ext cx="0" cy="1317069"/>
+            </a:xfrm>
+            <a:custGeom>
+              <a:avLst/>
+              <a:pathLst>
+                <a:path w="0" h="1317069">
+                  <a:moveTo>
+                    <a:pt x="0" y="1317069"/>
+                  </a:moveTo>
+                  <a:lnTo>
+                    <a:pt x="0" y="0"/>
+                  </a:lnTo>
+                  <a:lnTo>
+                    <a:pt x="0" y="0"/>
+                  </a:lnTo>
+                </a:path>
+              </a:pathLst>
+            </a:custGeom>
+            <a:ln w="13550" cap="flat">
+              <a:solidFill>
+                <a:srgbClr val="EBEBEB">
+                  <a:alpha val="100000"/>
+                </a:srgbClr>
+              </a:solidFill>
+              <a:prstDash val="solid"/>
+              <a:round/>
+            </a:ln>
+          </p:spPr>
+          <p:txBody>
+            <a:bodyPr/>
+            <a:lstStyle/>
+            <a:p/>
+          </p:txBody>
+        </p:sp>
+        <p:sp>
+          <p:nvSpPr>
+            <p:cNvPr id="66" name="pl66"/>
+            <p:cNvSpPr/>
+            <p:nvPr/>
+          </p:nvSpPr>
+          <p:spPr>
+            <a:xfrm>
+              <a:off x="7844209" y="4336484"/>
+              <a:ext cx="0" cy="1317069"/>
+            </a:xfrm>
+            <a:custGeom>
+              <a:avLst/>
+              <a:pathLst>
+                <a:path w="0" h="1317069">
+                  <a:moveTo>
+                    <a:pt x="0" y="1317069"/>
+                  </a:moveTo>
+                  <a:lnTo>
+                    <a:pt x="0" y="0"/>
+                  </a:lnTo>
+                  <a:lnTo>
+                    <a:pt x="0" y="0"/>
+                  </a:lnTo>
+                </a:path>
+              </a:pathLst>
+            </a:custGeom>
+            <a:ln w="13550" cap="flat">
+              <a:solidFill>
+                <a:srgbClr val="EBEBEB">
+                  <a:alpha val="100000"/>
+                </a:srgbClr>
+              </a:solidFill>
+              <a:prstDash val="solid"/>
+              <a:round/>
+            </a:ln>
+          </p:spPr>
+          <p:txBody>
+            <a:bodyPr/>
+            <a:lstStyle/>
+            <a:p/>
+          </p:txBody>
+        </p:sp>
+        <p:sp>
+          <p:nvSpPr>
+            <p:cNvPr id="67" name="pg67"/>
+            <p:cNvSpPr/>
+            <p:nvPr/>
+          </p:nvSpPr>
+          <p:spPr>
+            <a:xfrm>
+              <a:off x="1235312" y="4336484"/>
+              <a:ext cx="6964104" cy="1248623"/>
+            </a:xfrm>
+            <a:custGeom>
+              <a:avLst/>
+              <a:pathLst>
+                <a:path w="6964104" h="1248623">
+                  <a:moveTo>
+                    <a:pt x="1732570" y="0"/>
+                  </a:moveTo>
+                  <a:lnTo>
+                    <a:pt x="1758612" y="31471"/>
+                  </a:lnTo>
+                  <a:lnTo>
+                    <a:pt x="1828956" y="110966"/>
+                  </a:lnTo>
+                  <a:lnTo>
+                    <a:pt x="1899301" y="185306"/>
+                  </a:lnTo>
+                  <a:lnTo>
+                    <a:pt x="1969645" y="254824"/>
+                  </a:lnTo>
+                  <a:lnTo>
+                    <a:pt x="2039990" y="319834"/>
+                  </a:lnTo>
+                  <a:lnTo>
+                    <a:pt x="2110334" y="380628"/>
+                  </a:lnTo>
+                  <a:lnTo>
+                    <a:pt x="2180679" y="437478"/>
+                  </a:lnTo>
+                  <a:lnTo>
+                    <a:pt x="2251023" y="490642"/>
+                  </a:lnTo>
+                  <a:lnTo>
+                    <a:pt x="2321368" y="540358"/>
+                  </a:lnTo>
+                  <a:lnTo>
+                    <a:pt x="2391712" y="586849"/>
+                  </a:lnTo>
+                  <a:lnTo>
+                    <a:pt x="2462057" y="630325"/>
+                  </a:lnTo>
+                  <a:lnTo>
+                    <a:pt x="2532401" y="670982"/>
+                  </a:lnTo>
+                  <a:lnTo>
+                    <a:pt x="2602746" y="709001"/>
+                  </a:lnTo>
+                  <a:lnTo>
+                    <a:pt x="2673090" y="744555"/>
+                  </a:lnTo>
+                  <a:lnTo>
+                    <a:pt x="2743435" y="777803"/>
+                  </a:lnTo>
+                  <a:lnTo>
+                    <a:pt x="2813779" y="808895"/>
+                  </a:lnTo>
+                  <a:lnTo>
+                    <a:pt x="2884124" y="837970"/>
+                  </a:lnTo>
+                  <a:lnTo>
+                    <a:pt x="2954468" y="865160"/>
+                  </a:lnTo>
+                  <a:lnTo>
+                    <a:pt x="3024813" y="890586"/>
+                  </a:lnTo>
+                  <a:lnTo>
+                    <a:pt x="3095157" y="914363"/>
+                  </a:lnTo>
+                  <a:lnTo>
+                    <a:pt x="3165502" y="936598"/>
+                  </a:lnTo>
+                  <a:lnTo>
+                    <a:pt x="3235846" y="957391"/>
+                  </a:lnTo>
+                  <a:lnTo>
+                    <a:pt x="3306191" y="965751"/>
+                  </a:lnTo>
+                  <a:lnTo>
+                    <a:pt x="3376535" y="973610"/>
+                  </a:lnTo>
+                  <a:lnTo>
+                    <a:pt x="3446880" y="981257"/>
+                  </a:lnTo>
+                  <a:lnTo>
+                    <a:pt x="3517224" y="988699"/>
+                  </a:lnTo>
+                  <a:lnTo>
+                    <a:pt x="3587569" y="995939"/>
+                  </a:lnTo>
+                  <a:lnTo>
+                    <a:pt x="3657913" y="1002984"/>
+                  </a:lnTo>
+                  <a:lnTo>
+                    <a:pt x="3728257" y="1009840"/>
+                  </a:lnTo>
+                  <a:lnTo>
+                    <a:pt x="3798602" y="1016510"/>
+                  </a:lnTo>
+                  <a:lnTo>
+                    <a:pt x="3868946" y="1023001"/>
+                  </a:lnTo>
+                  <a:lnTo>
+                    <a:pt x="3939291" y="1029316"/>
+                  </a:lnTo>
+                  <a:lnTo>
+                    <a:pt x="4009635" y="1035462"/>
+                  </a:lnTo>
+                  <a:lnTo>
+                    <a:pt x="4079980" y="1041441"/>
+                  </a:lnTo>
+                  <a:lnTo>
+                    <a:pt x="4150324" y="1047259"/>
+                  </a:lnTo>
+                  <a:lnTo>
+                    <a:pt x="4220669" y="1052921"/>
+                  </a:lnTo>
+                  <a:lnTo>
+                    <a:pt x="4291013" y="1058429"/>
+                  </a:lnTo>
+                  <a:lnTo>
+                    <a:pt x="4361358" y="1063790"/>
+                  </a:lnTo>
+                  <a:lnTo>
+                    <a:pt x="4431702" y="1069005"/>
+                  </a:lnTo>
+                  <a:lnTo>
+                    <a:pt x="4502047" y="1074080"/>
+                  </a:lnTo>
+                  <a:lnTo>
+                    <a:pt x="4572391" y="1079018"/>
+                  </a:lnTo>
+                  <a:lnTo>
+                    <a:pt x="4642736" y="1083823"/>
+                  </a:lnTo>
+                  <a:lnTo>
+                    <a:pt x="4713080" y="1088499"/>
+                  </a:lnTo>
+                  <a:lnTo>
+                    <a:pt x="4783425" y="1093048"/>
+                  </a:lnTo>
+                  <a:lnTo>
+                    <a:pt x="4853769" y="1097475"/>
+                  </a:lnTo>
+                  <a:lnTo>
+                    <a:pt x="4924114" y="1101782"/>
+                  </a:lnTo>
+                  <a:lnTo>
+                    <a:pt x="4994458" y="1105973"/>
+                  </a:lnTo>
+                  <a:lnTo>
+                    <a:pt x="5064803" y="1110051"/>
+                  </a:lnTo>
+                  <a:lnTo>
+                    <a:pt x="5135147" y="1114019"/>
+                  </a:lnTo>
+                  <a:lnTo>
+                    <a:pt x="5205492" y="1117880"/>
+                  </a:lnTo>
+                  <a:lnTo>
+                    <a:pt x="5275836" y="1121637"/>
+                  </a:lnTo>
+                  <a:lnTo>
+                    <a:pt x="5346181" y="1125293"/>
+                  </a:lnTo>
+                  <a:lnTo>
+                    <a:pt x="5416525" y="1128850"/>
+                  </a:lnTo>
+                  <a:lnTo>
+                    <a:pt x="5486870" y="1132311"/>
+                  </a:lnTo>
+                  <a:lnTo>
+                    <a:pt x="5557214" y="1135679"/>
+                  </a:lnTo>
+                  <a:lnTo>
+                    <a:pt x="5627559" y="1138956"/>
+                  </a:lnTo>
+                  <a:lnTo>
+                    <a:pt x="5697903" y="1142145"/>
+                  </a:lnTo>
+                  <a:lnTo>
+                    <a:pt x="5768248" y="1145247"/>
+                  </a:lnTo>
+                  <a:lnTo>
+                    <a:pt x="5838592" y="1148266"/>
+                  </a:lnTo>
+                  <a:lnTo>
+                    <a:pt x="5908937" y="1151204"/>
+                  </a:lnTo>
+                  <a:lnTo>
+                    <a:pt x="5979281" y="1154062"/>
+                  </a:lnTo>
+                  <a:lnTo>
+                    <a:pt x="6049626" y="1156844"/>
+                  </a:lnTo>
+                  <a:lnTo>
+                    <a:pt x="6119970" y="1159550"/>
+                  </a:lnTo>
+                  <a:lnTo>
+                    <a:pt x="6190315" y="1162183"/>
+                  </a:lnTo>
+                  <a:lnTo>
+                    <a:pt x="6260659" y="1164746"/>
+                  </a:lnTo>
+                  <a:lnTo>
+                    <a:pt x="6331004" y="1167239"/>
+                  </a:lnTo>
+                  <a:lnTo>
+                    <a:pt x="6401348" y="1169665"/>
+                  </a:lnTo>
+                  <a:lnTo>
+                    <a:pt x="6471693" y="1172025"/>
+                  </a:lnTo>
+                  <a:lnTo>
+                    <a:pt x="6542037" y="1174322"/>
+                  </a:lnTo>
+                  <a:lnTo>
+                    <a:pt x="6612382" y="1176557"/>
+                  </a:lnTo>
+                  <a:lnTo>
+                    <a:pt x="6682726" y="1178732"/>
+                  </a:lnTo>
+                  <a:lnTo>
+                    <a:pt x="6753071" y="1180848"/>
+                  </a:lnTo>
+                  <a:lnTo>
+                    <a:pt x="6823415" y="1182907"/>
+                  </a:lnTo>
+                  <a:lnTo>
+                    <a:pt x="6893760" y="1184910"/>
+                  </a:lnTo>
+                  <a:lnTo>
+                    <a:pt x="6964104" y="1186860"/>
+                  </a:lnTo>
+                  <a:lnTo>
+                    <a:pt x="6964104" y="1248623"/>
+                  </a:lnTo>
+                  <a:lnTo>
+                    <a:pt x="6893760" y="1248028"/>
+                  </a:lnTo>
+                  <a:lnTo>
+                    <a:pt x="6823415" y="1247392"/>
+                  </a:lnTo>
+                  <a:lnTo>
+                    <a:pt x="6753071" y="1246712"/>
+                  </a:lnTo>
+                  <a:lnTo>
+                    <a:pt x="6682726" y="1245984"/>
+                  </a:lnTo>
+                  <a:lnTo>
+                    <a:pt x="6612382" y="1245206"/>
+                  </a:lnTo>
+                  <a:lnTo>
+                    <a:pt x="6542037" y="1244374"/>
+                  </a:lnTo>
+                  <a:lnTo>
+                    <a:pt x="6471693" y="1243485"/>
+                  </a:lnTo>
+                  <a:lnTo>
+                    <a:pt x="6401348" y="1242533"/>
+                  </a:lnTo>
+                  <a:lnTo>
+                    <a:pt x="6331004" y="1241516"/>
+                  </a:lnTo>
+                  <a:lnTo>
+                    <a:pt x="6260659" y="1240428"/>
+                  </a:lnTo>
+                  <a:lnTo>
+                    <a:pt x="6190315" y="1239265"/>
+                  </a:lnTo>
+                  <a:lnTo>
+                    <a:pt x="6119970" y="1238021"/>
+                  </a:lnTo>
+                  <a:lnTo>
+                    <a:pt x="6049626" y="1236690"/>
+                  </a:lnTo>
+                  <a:lnTo>
+                    <a:pt x="5979281" y="1235268"/>
+                  </a:lnTo>
+                  <a:lnTo>
+                    <a:pt x="5908937" y="1233747"/>
+                  </a:lnTo>
+                  <a:lnTo>
+                    <a:pt x="5838592" y="1232120"/>
+                  </a:lnTo>
+                  <a:lnTo>
+                    <a:pt x="5768248" y="1230380"/>
+                  </a:lnTo>
+                  <a:lnTo>
+                    <a:pt x="5697903" y="1228520"/>
+                  </a:lnTo>
+                  <a:lnTo>
+                    <a:pt x="5627559" y="1226531"/>
+                  </a:lnTo>
+                  <a:lnTo>
+                    <a:pt x="5557214" y="1224404"/>
+                  </a:lnTo>
+                  <a:lnTo>
+                    <a:pt x="5486870" y="1222129"/>
+                  </a:lnTo>
+                  <a:lnTo>
+                    <a:pt x="5416525" y="1219697"/>
+                  </a:lnTo>
+                  <a:lnTo>
+                    <a:pt x="5346181" y="1217096"/>
+                  </a:lnTo>
+                  <a:lnTo>
+                    <a:pt x="5275836" y="1214314"/>
+                  </a:lnTo>
+                  <a:lnTo>
+                    <a:pt x="5205492" y="1211340"/>
+                  </a:lnTo>
+                  <a:lnTo>
+                    <a:pt x="5135147" y="1208159"/>
+                  </a:lnTo>
+                  <a:lnTo>
+                    <a:pt x="5064803" y="1204758"/>
+                  </a:lnTo>
+                  <a:lnTo>
+                    <a:pt x="4994458" y="1201121"/>
+                  </a:lnTo>
+                  <a:lnTo>
+                    <a:pt x="4924114" y="1197232"/>
+                  </a:lnTo>
+                  <a:lnTo>
+                    <a:pt x="4853769" y="1193072"/>
+                  </a:lnTo>
+                  <a:lnTo>
+                    <a:pt x="4783425" y="1188625"/>
+                  </a:lnTo>
+                  <a:lnTo>
+                    <a:pt x="4713080" y="1183869"/>
+                  </a:lnTo>
+                  <a:lnTo>
+                    <a:pt x="4642736" y="1178783"/>
+                  </a:lnTo>
+                  <a:lnTo>
+                    <a:pt x="4572391" y="1173344"/>
+                  </a:lnTo>
+                  <a:lnTo>
+                    <a:pt x="4502047" y="1167528"/>
+                  </a:lnTo>
+                  <a:lnTo>
+                    <a:pt x="4431702" y="1161309"/>
+                  </a:lnTo>
+                  <a:lnTo>
+                    <a:pt x="4361358" y="1154659"/>
+                  </a:lnTo>
+                  <a:lnTo>
+                    <a:pt x="4291013" y="1147547"/>
+                  </a:lnTo>
+                  <a:lnTo>
+                    <a:pt x="4220669" y="1139942"/>
+                  </a:lnTo>
+                  <a:lnTo>
+                    <a:pt x="4150324" y="1131810"/>
+                  </a:lnTo>
+                  <a:lnTo>
+                    <a:pt x="4079980" y="1123113"/>
+                  </a:lnTo>
+                  <a:lnTo>
+                    <a:pt x="4009635" y="1113814"/>
+                  </a:lnTo>
+                  <a:lnTo>
+                    <a:pt x="3939291" y="1103869"/>
+                  </a:lnTo>
+                  <a:lnTo>
+                    <a:pt x="3868946" y="1093235"/>
+                  </a:lnTo>
+                  <a:lnTo>
+                    <a:pt x="3798602" y="1081863"/>
+                  </a:lnTo>
+                  <a:lnTo>
+                    <a:pt x="3728257" y="1069703"/>
+                  </a:lnTo>
+                  <a:lnTo>
+                    <a:pt x="3657913" y="1056699"/>
+                  </a:lnTo>
+                  <a:lnTo>
+                    <a:pt x="3587569" y="1042794"/>
+                  </a:lnTo>
+                  <a:lnTo>
+                    <a:pt x="3517224" y="1027924"/>
+                  </a:lnTo>
+                  <a:lnTo>
+                    <a:pt x="3446880" y="1012023"/>
+                  </a:lnTo>
+                  <a:lnTo>
+                    <a:pt x="3376535" y="995019"/>
+                  </a:lnTo>
+                  <a:lnTo>
+                    <a:pt x="3306191" y="976835"/>
+                  </a:lnTo>
+                  <a:lnTo>
+                    <a:pt x="3235846" y="957673"/>
+                  </a:lnTo>
+                  <a:lnTo>
+                    <a:pt x="3165502" y="949372"/>
+                  </a:lnTo>
+                  <a:lnTo>
+                    <a:pt x="3095157" y="940841"/>
+                  </a:lnTo>
+                  <a:lnTo>
+                    <a:pt x="3024813" y="932074"/>
+                  </a:lnTo>
+                  <a:lnTo>
+                    <a:pt x="2954468" y="923063"/>
+                  </a:lnTo>
+                  <a:lnTo>
+                    <a:pt x="2884124" y="913803"/>
+                  </a:lnTo>
+                  <a:lnTo>
+                    <a:pt x="2813779" y="904286"/>
+                  </a:lnTo>
+                  <a:lnTo>
+                    <a:pt x="2743435" y="894506"/>
+                  </a:lnTo>
+                  <a:lnTo>
+                    <a:pt x="2673090" y="884454"/>
+                  </a:lnTo>
+                  <a:lnTo>
+                    <a:pt x="2602746" y="874124"/>
+                  </a:lnTo>
+                  <a:lnTo>
+                    <a:pt x="2532401" y="863507"/>
+                  </a:lnTo>
+                  <a:lnTo>
+                    <a:pt x="2462057" y="852597"/>
+                  </a:lnTo>
+                  <a:lnTo>
+                    <a:pt x="2391712" y="841384"/>
+                  </a:lnTo>
+                  <a:lnTo>
+                    <a:pt x="2321368" y="829860"/>
+                  </a:lnTo>
+                  <a:lnTo>
+                    <a:pt x="2251023" y="818017"/>
+                  </a:lnTo>
+                  <a:lnTo>
+                    <a:pt x="2180679" y="805845"/>
+                  </a:lnTo>
+                  <a:lnTo>
+                    <a:pt x="2110334" y="793336"/>
+                  </a:lnTo>
+                  <a:lnTo>
+                    <a:pt x="2039990" y="780481"/>
+                  </a:lnTo>
+                  <a:lnTo>
+                    <a:pt x="1969645" y="767269"/>
+                  </a:lnTo>
+                  <a:lnTo>
+                    <a:pt x="1899301" y="753692"/>
+                  </a:lnTo>
+                  <a:lnTo>
+                    <a:pt x="1828956" y="739737"/>
+                  </a:lnTo>
+                  <a:lnTo>
+                    <a:pt x="1758612" y="725397"/>
+                  </a:lnTo>
+                  <a:lnTo>
+                    <a:pt x="1688267" y="710658"/>
+                  </a:lnTo>
+                  <a:lnTo>
+                    <a:pt x="1617923" y="695512"/>
+                  </a:lnTo>
+                  <a:lnTo>
+                    <a:pt x="1547578" y="679945"/>
+                  </a:lnTo>
+                  <a:lnTo>
+                    <a:pt x="1477234" y="663947"/>
+                  </a:lnTo>
+                  <a:lnTo>
+                    <a:pt x="1406889" y="647506"/>
+                  </a:lnTo>
+                  <a:lnTo>
+                    <a:pt x="1336545" y="630609"/>
+                  </a:lnTo>
+                  <a:lnTo>
+                    <a:pt x="1266200" y="613244"/>
+                  </a:lnTo>
+                  <a:lnTo>
+                    <a:pt x="1195856" y="595398"/>
+                  </a:lnTo>
+                  <a:lnTo>
+                    <a:pt x="1125511" y="577057"/>
+                  </a:lnTo>
+                  <a:lnTo>
+                    <a:pt x="1055167" y="558207"/>
+                  </a:lnTo>
+                  <a:lnTo>
+                    <a:pt x="984822" y="538836"/>
+                  </a:lnTo>
+                  <a:lnTo>
+                    <a:pt x="914478" y="518927"/>
+                  </a:lnTo>
+                  <a:lnTo>
+                    <a:pt x="844133" y="498467"/>
+                  </a:lnTo>
+                  <a:lnTo>
+                    <a:pt x="773789" y="477439"/>
+                  </a:lnTo>
+                  <a:lnTo>
+                    <a:pt x="703444" y="455829"/>
+                  </a:lnTo>
+                  <a:lnTo>
+                    <a:pt x="633100" y="433620"/>
+                  </a:lnTo>
+                  <a:lnTo>
+                    <a:pt x="562755" y="410796"/>
+                  </a:lnTo>
+                  <a:lnTo>
+                    <a:pt x="492411" y="387339"/>
+                  </a:lnTo>
+                  <a:lnTo>
+                    <a:pt x="422066" y="363232"/>
+                  </a:lnTo>
+                  <a:lnTo>
+                    <a:pt x="351722" y="338457"/>
+                  </a:lnTo>
+                  <a:lnTo>
+                    <a:pt x="281377" y="312995"/>
+                  </a:lnTo>
+                  <a:lnTo>
+                    <a:pt x="211033" y="286827"/>
+                  </a:lnTo>
+                  <a:lnTo>
+                    <a:pt x="140688" y="259935"/>
+                  </a:lnTo>
+                  <a:lnTo>
+                    <a:pt x="70344" y="232297"/>
+                  </a:lnTo>
+                  <a:lnTo>
+                    <a:pt x="0" y="203893"/>
+                  </a:lnTo>
+                  <a:close/>
+                </a:path>
+              </a:pathLst>
+            </a:custGeom>
+            <a:solidFill>
+              <a:srgbClr val="FF8C00">
+                <a:alpha val="20000"/>
+              </a:srgbClr>
+            </a:solidFill>
+          </p:spPr>
+          <p:txBody>
+            <a:bodyPr/>
+            <a:lstStyle/>
+            <a:p/>
+          </p:txBody>
+        </p:sp>
+        <p:sp>
+          <p:nvSpPr>
+            <p:cNvPr id="68" name="pl68"/>
+            <p:cNvSpPr/>
+            <p:nvPr/>
+          </p:nvSpPr>
+          <p:spPr>
+            <a:xfrm>
+              <a:off x="2967882" y="4336484"/>
+              <a:ext cx="5231534" cy="1186860"/>
+            </a:xfrm>
+            <a:custGeom>
+              <a:avLst/>
+              <a:pathLst>
+                <a:path w="5231534" h="1186860">
+                  <a:moveTo>
+                    <a:pt x="0" y="0"/>
+                  </a:moveTo>
+                  <a:lnTo>
+                    <a:pt x="26042" y="31471"/>
+                  </a:lnTo>
+                  <a:lnTo>
+                    <a:pt x="96386" y="110966"/>
+                  </a:lnTo>
+                  <a:lnTo>
+                    <a:pt x="166731" y="185306"/>
+                  </a:lnTo>
+                  <a:lnTo>
+                    <a:pt x="237075" y="254824"/>
+                  </a:lnTo>
+                  <a:lnTo>
+                    <a:pt x="307420" y="319834"/>
+                  </a:lnTo>
+                  <a:lnTo>
+                    <a:pt x="377764" y="380628"/>
+                  </a:lnTo>
+                  <a:lnTo>
+                    <a:pt x="448109" y="437478"/>
+                  </a:lnTo>
+                  <a:lnTo>
+                    <a:pt x="518453" y="490642"/>
+                  </a:lnTo>
+                  <a:lnTo>
+                    <a:pt x="588798" y="540358"/>
+                  </a:lnTo>
+                  <a:lnTo>
+                    <a:pt x="659142" y="586849"/>
+                  </a:lnTo>
+                  <a:lnTo>
+                    <a:pt x="729487" y="630325"/>
+                  </a:lnTo>
+                  <a:lnTo>
+                    <a:pt x="799831" y="670982"/>
+                  </a:lnTo>
+                  <a:lnTo>
+                    <a:pt x="870176" y="709001"/>
+                  </a:lnTo>
+                  <a:lnTo>
+                    <a:pt x="940520" y="744555"/>
+                  </a:lnTo>
+                  <a:lnTo>
+                    <a:pt x="1010865" y="777803"/>
+                  </a:lnTo>
+                  <a:lnTo>
+                    <a:pt x="1081209" y="808895"/>
+                  </a:lnTo>
+                  <a:lnTo>
+                    <a:pt x="1151554" y="837970"/>
+                  </a:lnTo>
+                  <a:lnTo>
+                    <a:pt x="1221898" y="865160"/>
+                  </a:lnTo>
+                  <a:lnTo>
+                    <a:pt x="1292242" y="890586"/>
+                  </a:lnTo>
+                  <a:lnTo>
+                    <a:pt x="1362587" y="914363"/>
+                  </a:lnTo>
+                  <a:lnTo>
+                    <a:pt x="1432931" y="936598"/>
+                  </a:lnTo>
+                  <a:lnTo>
+                    <a:pt x="1503276" y="957391"/>
+                  </a:lnTo>
+                  <a:lnTo>
+                    <a:pt x="1573620" y="965751"/>
+                  </a:lnTo>
+                  <a:lnTo>
+                    <a:pt x="1643965" y="973610"/>
+                  </a:lnTo>
+                  <a:lnTo>
+                    <a:pt x="1714309" y="981257"/>
+                  </a:lnTo>
+                  <a:lnTo>
+                    <a:pt x="1784654" y="988699"/>
+                  </a:lnTo>
+                  <a:lnTo>
+                    <a:pt x="1854998" y="995939"/>
+                  </a:lnTo>
+                  <a:lnTo>
+                    <a:pt x="1925343" y="1002984"/>
+                  </a:lnTo>
+                  <a:lnTo>
+                    <a:pt x="1995687" y="1009840"/>
+                  </a:lnTo>
+                  <a:lnTo>
+                    <a:pt x="2066032" y="1016510"/>
+                  </a:lnTo>
+                  <a:lnTo>
+                    <a:pt x="2136376" y="1023001"/>
+                  </a:lnTo>
+                  <a:lnTo>
+                    <a:pt x="2206721" y="1029316"/>
+                  </a:lnTo>
+                  <a:lnTo>
+                    <a:pt x="2277065" y="1035462"/>
+                  </a:lnTo>
+                  <a:lnTo>
+                    <a:pt x="2347410" y="1041441"/>
+                  </a:lnTo>
+                  <a:lnTo>
+                    <a:pt x="2417754" y="1047259"/>
+                  </a:lnTo>
+                  <a:lnTo>
+                    <a:pt x="2488099" y="1052921"/>
+                  </a:lnTo>
+                  <a:lnTo>
+                    <a:pt x="2558443" y="1058429"/>
+                  </a:lnTo>
+                  <a:lnTo>
+                    <a:pt x="2628788" y="1063790"/>
+                  </a:lnTo>
+                  <a:lnTo>
+                    <a:pt x="2699132" y="1069005"/>
+                  </a:lnTo>
+                  <a:lnTo>
+                    <a:pt x="2769477" y="1074080"/>
+                  </a:lnTo>
+                  <a:lnTo>
+                    <a:pt x="2839821" y="1079018"/>
+                  </a:lnTo>
+                  <a:lnTo>
+                    <a:pt x="2910166" y="1083823"/>
+                  </a:lnTo>
+                  <a:lnTo>
+                    <a:pt x="2980510" y="1088499"/>
+                  </a:lnTo>
+                  <a:lnTo>
+                    <a:pt x="3050855" y="1093048"/>
+                  </a:lnTo>
+                  <a:lnTo>
+                    <a:pt x="3121199" y="1097475"/>
+                  </a:lnTo>
+                  <a:lnTo>
+                    <a:pt x="3191544" y="1101782"/>
+                  </a:lnTo>
+                  <a:lnTo>
+                    <a:pt x="3261888" y="1105973"/>
+                  </a:lnTo>
+                  <a:lnTo>
+                    <a:pt x="3332233" y="1110051"/>
+                  </a:lnTo>
+                  <a:lnTo>
+                    <a:pt x="3402577" y="1114019"/>
+                  </a:lnTo>
+                  <a:lnTo>
+                    <a:pt x="3472922" y="1117880"/>
+                  </a:lnTo>
+                  <a:lnTo>
+                    <a:pt x="3543266" y="1121637"/>
+                  </a:lnTo>
+                  <a:lnTo>
+                    <a:pt x="3613611" y="1125293"/>
+                  </a:lnTo>
+                  <a:lnTo>
+                    <a:pt x="3683955" y="1128850"/>
+                  </a:lnTo>
+                  <a:lnTo>
+                    <a:pt x="3754300" y="1132311"/>
+                  </a:lnTo>
+                  <a:lnTo>
+                    <a:pt x="3824644" y="1135679"/>
+                  </a:lnTo>
+                  <a:lnTo>
+                    <a:pt x="3894989" y="1138956"/>
+                  </a:lnTo>
+                  <a:lnTo>
+                    <a:pt x="3965333" y="1142145"/>
+                  </a:lnTo>
+                  <a:lnTo>
+                    <a:pt x="4035678" y="1145247"/>
+                  </a:lnTo>
+                  <a:lnTo>
+                    <a:pt x="4106022" y="1148266"/>
+                  </a:lnTo>
+                  <a:lnTo>
+                    <a:pt x="4176367" y="1151204"/>
+                  </a:lnTo>
+                  <a:lnTo>
+                    <a:pt x="4246711" y="1154062"/>
+                  </a:lnTo>
+                  <a:lnTo>
+                    <a:pt x="4317056" y="1156844"/>
+                  </a:lnTo>
+                  <a:lnTo>
+                    <a:pt x="4387400" y="1159550"/>
+                  </a:lnTo>
+                  <a:lnTo>
+                    <a:pt x="4457745" y="1162183"/>
+                  </a:lnTo>
+                  <a:lnTo>
+                    <a:pt x="4528089" y="1164746"/>
+                  </a:lnTo>
+                  <a:lnTo>
+                    <a:pt x="4598434" y="1167239"/>
+                  </a:lnTo>
+                  <a:lnTo>
+                    <a:pt x="4668778" y="1169665"/>
+                  </a:lnTo>
+                  <a:lnTo>
+                    <a:pt x="4739123" y="1172025"/>
+                  </a:lnTo>
+                  <a:lnTo>
+                    <a:pt x="4809467" y="1174322"/>
+                  </a:lnTo>
+                  <a:lnTo>
+                    <a:pt x="4879812" y="1176557"/>
+                  </a:lnTo>
+                  <a:lnTo>
+                    <a:pt x="4950156" y="1178732"/>
+                  </a:lnTo>
+                  <a:lnTo>
+                    <a:pt x="5020500" y="1180848"/>
+                  </a:lnTo>
+                  <a:lnTo>
+                    <a:pt x="5090845" y="1182907"/>
+                  </a:lnTo>
+                  <a:lnTo>
+                    <a:pt x="5161189" y="1184910"/>
+                  </a:lnTo>
+                  <a:lnTo>
+                    <a:pt x="5231534" y="1186860"/>
+                  </a:lnTo>
+                </a:path>
+              </a:pathLst>
+            </a:custGeom>
+          </p:spPr>
+          <p:txBody>
+            <a:bodyPr/>
+            <a:lstStyle/>
+            <a:p/>
+          </p:txBody>
+        </p:sp>
+        <p:sp>
+          <p:nvSpPr>
+            <p:cNvPr id="69" name="pl69"/>
+            <p:cNvSpPr/>
+            <p:nvPr/>
+          </p:nvSpPr>
+          <p:spPr>
+            <a:xfrm>
+              <a:off x="1235312" y="4540378"/>
+              <a:ext cx="6964104" cy="1044730"/>
+            </a:xfrm>
+            <a:custGeom>
+              <a:avLst/>
+              <a:pathLst>
+                <a:path w="6964104" h="1044730">
+                  <a:moveTo>
+                    <a:pt x="6964104" y="1044730"/>
+                  </a:moveTo>
+                  <a:lnTo>
+                    <a:pt x="6893760" y="1044135"/>
+                  </a:lnTo>
+                  <a:lnTo>
+                    <a:pt x="6823415" y="1043498"/>
+                  </a:lnTo>
+                  <a:lnTo>
+                    <a:pt x="6753071" y="1042818"/>
+                  </a:lnTo>
+                  <a:lnTo>
+                    <a:pt x="6682726" y="1042091"/>
+                  </a:lnTo>
+                  <a:lnTo>
+                    <a:pt x="6612382" y="1041313"/>
+                  </a:lnTo>
+                  <a:lnTo>
+                    <a:pt x="6542037" y="1040481"/>
+                  </a:lnTo>
+                  <a:lnTo>
+                    <a:pt x="6471693" y="1039591"/>
+                  </a:lnTo>
+                  <a:lnTo>
+                    <a:pt x="6401348" y="1038640"/>
+                  </a:lnTo>
+                  <a:lnTo>
+                    <a:pt x="6331004" y="1037622"/>
+                  </a:lnTo>
+                  <a:lnTo>
+                    <a:pt x="6260659" y="1036535"/>
+                  </a:lnTo>
+                  <a:lnTo>
+                    <a:pt x="6190315" y="1035371"/>
+                  </a:lnTo>
+                  <a:lnTo>
+                    <a:pt x="6119970" y="1034127"/>
+                  </a:lnTo>
+                  <a:lnTo>
+                    <a:pt x="6049626" y="1032797"/>
+                  </a:lnTo>
+                  <a:lnTo>
+                    <a:pt x="5979281" y="1031374"/>
+                  </a:lnTo>
+                  <a:lnTo>
+                    <a:pt x="5908937" y="1029853"/>
+                  </a:lnTo>
+                  <a:lnTo>
+                    <a:pt x="5838592" y="1028226"/>
+                  </a:lnTo>
+                  <a:lnTo>
+                    <a:pt x="5768248" y="1026487"/>
+                  </a:lnTo>
+                  <a:lnTo>
+                    <a:pt x="5697903" y="1024627"/>
+                  </a:lnTo>
+                  <a:lnTo>
+                    <a:pt x="5627559" y="1022638"/>
+                  </a:lnTo>
+                  <a:lnTo>
+                    <a:pt x="5557214" y="1020511"/>
+                  </a:lnTo>
+                  <a:lnTo>
+                    <a:pt x="5486870" y="1018236"/>
+                  </a:lnTo>
+                  <a:lnTo>
+                    <a:pt x="5416525" y="1015804"/>
+                  </a:lnTo>
+                  <a:lnTo>
+                    <a:pt x="5346181" y="1013202"/>
+                  </a:lnTo>
+                  <a:lnTo>
+                    <a:pt x="5275836" y="1010421"/>
+                  </a:lnTo>
+                  <a:lnTo>
+                    <a:pt x="5205492" y="1007447"/>
+                  </a:lnTo>
+                  <a:lnTo>
+                    <a:pt x="5135147" y="1004266"/>
+                  </a:lnTo>
+                  <a:lnTo>
+                    <a:pt x="5064803" y="1000865"/>
+                  </a:lnTo>
+                  <a:lnTo>
+                    <a:pt x="4994458" y="997227"/>
+                  </a:lnTo>
+                  <a:lnTo>
+                    <a:pt x="4924114" y="993338"/>
+                  </a:lnTo>
+                  <a:lnTo>
+                    <a:pt x="4853769" y="989179"/>
+                  </a:lnTo>
+                  <a:lnTo>
+                    <a:pt x="4783425" y="984731"/>
+                  </a:lnTo>
+                  <a:lnTo>
+                    <a:pt x="4713080" y="979975"/>
+                  </a:lnTo>
+                  <a:lnTo>
+                    <a:pt x="4642736" y="974889"/>
+                  </a:lnTo>
+                  <a:lnTo>
+                    <a:pt x="4572391" y="969451"/>
+                  </a:lnTo>
+                  <a:lnTo>
+                    <a:pt x="4502047" y="963635"/>
+                  </a:lnTo>
+                  <a:lnTo>
+                    <a:pt x="4431702" y="957416"/>
+                  </a:lnTo>
+                  <a:lnTo>
+                    <a:pt x="4361358" y="950765"/>
+                  </a:lnTo>
+                  <a:lnTo>
+                    <a:pt x="4291013" y="943653"/>
+                  </a:lnTo>
+                  <a:lnTo>
+                    <a:pt x="4220669" y="936049"/>
+                  </a:lnTo>
+                  <a:lnTo>
+                    <a:pt x="4150324" y="927916"/>
+                  </a:lnTo>
+                  <a:lnTo>
+                    <a:pt x="4079980" y="919220"/>
+                  </a:lnTo>
+                  <a:lnTo>
+                    <a:pt x="4009635" y="909920"/>
+                  </a:lnTo>
+                  <a:lnTo>
+                    <a:pt x="3939291" y="899976"/>
+                  </a:lnTo>
+                  <a:lnTo>
+                    <a:pt x="3868946" y="889342"/>
+                  </a:lnTo>
+                  <a:lnTo>
+                    <a:pt x="3798602" y="877970"/>
+                  </a:lnTo>
+                  <a:lnTo>
+                    <a:pt x="3728257" y="865810"/>
+                  </a:lnTo>
+                  <a:lnTo>
+                    <a:pt x="3657913" y="852806"/>
+                  </a:lnTo>
+                  <a:lnTo>
+                    <a:pt x="3587569" y="838900"/>
+                  </a:lnTo>
+                  <a:lnTo>
+                    <a:pt x="3517224" y="824030"/>
+                  </a:lnTo>
+                  <a:lnTo>
+                    <a:pt x="3446880" y="808129"/>
+                  </a:lnTo>
+                  <a:lnTo>
+                    <a:pt x="3376535" y="791125"/>
+                  </a:lnTo>
+                  <a:lnTo>
+                    <a:pt x="3306191" y="772942"/>
+                  </a:lnTo>
+                  <a:lnTo>
+                    <a:pt x="3235846" y="753780"/>
+                  </a:lnTo>
+                  <a:lnTo>
+                    <a:pt x="3165502" y="745479"/>
+                  </a:lnTo>
+                  <a:lnTo>
+                    <a:pt x="3095157" y="736948"/>
+                  </a:lnTo>
+                  <a:lnTo>
+                    <a:pt x="3024813" y="728180"/>
+                  </a:lnTo>
+                  <a:lnTo>
+                    <a:pt x="2954468" y="719170"/>
+                  </a:lnTo>
+                  <a:lnTo>
+                    <a:pt x="2884124" y="709910"/>
+                  </a:lnTo>
+                  <a:lnTo>
+                    <a:pt x="2813779" y="700393"/>
+                  </a:lnTo>
+                  <a:lnTo>
+                    <a:pt x="2743435" y="690612"/>
+                  </a:lnTo>
+                  <a:lnTo>
+                    <a:pt x="2673090" y="680561"/>
+                  </a:lnTo>
+                  <a:lnTo>
+                    <a:pt x="2602746" y="670230"/>
+                  </a:lnTo>
+                  <a:lnTo>
+                    <a:pt x="2532401" y="659614"/>
+                  </a:lnTo>
+                  <a:lnTo>
+                    <a:pt x="2462057" y="648703"/>
+                  </a:lnTo>
+                  <a:lnTo>
+                    <a:pt x="2391712" y="637490"/>
+                  </a:lnTo>
+                  <a:lnTo>
+                    <a:pt x="2321368" y="625966"/>
+                  </a:lnTo>
+                  <a:lnTo>
+                    <a:pt x="2251023" y="614123"/>
+                  </a:lnTo>
+                  <a:lnTo>
+                    <a:pt x="2180679" y="601952"/>
+                  </a:lnTo>
+                  <a:lnTo>
+                    <a:pt x="2110334" y="589443"/>
+                  </a:lnTo>
+                  <a:lnTo>
+                    <a:pt x="2039990" y="576588"/>
+                  </a:lnTo>
+                  <a:lnTo>
+                    <a:pt x="1969645" y="563376"/>
+                  </a:lnTo>
+                  <a:lnTo>
+                    <a:pt x="1899301" y="549798"/>
+                  </a:lnTo>
+                  <a:lnTo>
+                    <a:pt x="1828956" y="535844"/>
+                  </a:lnTo>
+                  <a:lnTo>
+                    <a:pt x="1758612" y="521503"/>
+                  </a:lnTo>
+                  <a:lnTo>
+                    <a:pt x="1688267" y="506765"/>
+                  </a:lnTo>
+                  <a:lnTo>
+                    <a:pt x="1617923" y="491618"/>
+                  </a:lnTo>
+                  <a:lnTo>
+                    <a:pt x="1547578" y="476052"/>
+                  </a:lnTo>
+                  <a:lnTo>
+                    <a:pt x="1477234" y="460054"/>
+                  </a:lnTo>
+                  <a:lnTo>
+                    <a:pt x="1406889" y="443613"/>
+                  </a:lnTo>
+                  <a:lnTo>
+                    <a:pt x="1336545" y="426716"/>
+                  </a:lnTo>
+                  <a:lnTo>
+                    <a:pt x="1266200" y="409350"/>
+                  </a:lnTo>
+                  <a:lnTo>
+                    <a:pt x="1195856" y="391504"/>
+                  </a:lnTo>
+                  <a:lnTo>
+                    <a:pt x="1125511" y="373163"/>
+                  </a:lnTo>
+                  <a:lnTo>
+                    <a:pt x="1055167" y="354314"/>
+                  </a:lnTo>
+                  <a:lnTo>
+                    <a:pt x="984822" y="334942"/>
+                  </a:lnTo>
+                  <a:lnTo>
+                    <a:pt x="914478" y="315033"/>
+                  </a:lnTo>
+                  <a:lnTo>
+                    <a:pt x="844133" y="294573"/>
+                  </a:lnTo>
+                  <a:lnTo>
+                    <a:pt x="773789" y="273546"/>
+                  </a:lnTo>
+                  <a:lnTo>
+                    <a:pt x="703444" y="251936"/>
+                  </a:lnTo>
+                  <a:lnTo>
+                    <a:pt x="633100" y="229727"/>
+                  </a:lnTo>
+                  <a:lnTo>
+                    <a:pt x="562755" y="206902"/>
+                  </a:lnTo>
+                  <a:lnTo>
+                    <a:pt x="492411" y="183445"/>
+                  </a:lnTo>
+                  <a:lnTo>
+                    <a:pt x="422066" y="159338"/>
+                  </a:lnTo>
+                  <a:lnTo>
+                    <a:pt x="351722" y="134563"/>
+                  </a:lnTo>
+                  <a:lnTo>
+                    <a:pt x="281377" y="109101"/>
+                  </a:lnTo>
+                  <a:lnTo>
+                    <a:pt x="211033" y="82934"/>
+                  </a:lnTo>
+                  <a:lnTo>
+                    <a:pt x="140688" y="56041"/>
+                  </a:lnTo>
+                  <a:lnTo>
+                    <a:pt x="70344" y="28403"/>
+                  </a:lnTo>
+                  <a:lnTo>
+                    <a:pt x="0" y="0"/>
+                  </a:lnTo>
+                </a:path>
+              </a:pathLst>
+            </a:custGeom>
+          </p:spPr>
+          <p:txBody>
+            <a:bodyPr/>
+            <a:lstStyle/>
+            <a:p/>
+          </p:txBody>
+        </p:sp>
+        <p:sp>
+          <p:nvSpPr>
+            <p:cNvPr id="70" name="pl70"/>
+            <p:cNvSpPr/>
+            <p:nvPr/>
+          </p:nvSpPr>
+          <p:spPr>
+            <a:xfrm>
+              <a:off x="2334237" y="4336484"/>
+              <a:ext cx="5865179" cy="1232637"/>
+            </a:xfrm>
+            <a:custGeom>
+              <a:avLst/>
+              <a:pathLst>
+                <a:path w="5865179" h="1232637">
+                  <a:moveTo>
+                    <a:pt x="0" y="0"/>
+                  </a:moveTo>
+                  <a:lnTo>
+                    <a:pt x="26586" y="22550"/>
+                  </a:lnTo>
+                  <a:lnTo>
+                    <a:pt x="96930" y="79467"/>
+                  </a:lnTo>
+                  <a:lnTo>
+                    <a:pt x="167275" y="133759"/>
+                  </a:lnTo>
+                  <a:lnTo>
+                    <a:pt x="237619" y="185549"/>
+                  </a:lnTo>
+                  <a:lnTo>
+                    <a:pt x="307964" y="234951"/>
+                  </a:lnTo>
+                  <a:lnTo>
+                    <a:pt x="378308" y="282076"/>
+                  </a:lnTo>
+                  <a:lnTo>
+                    <a:pt x="448653" y="327028"/>
+                  </a:lnTo>
+                  <a:lnTo>
+                    <a:pt x="518997" y="369908"/>
+                  </a:lnTo>
+                  <a:lnTo>
+                    <a:pt x="589342" y="410812"/>
+                  </a:lnTo>
+                  <a:lnTo>
+                    <a:pt x="659686" y="449829"/>
+                  </a:lnTo>
+                  <a:lnTo>
+                    <a:pt x="730031" y="487049"/>
+                  </a:lnTo>
+                  <a:lnTo>
+                    <a:pt x="800375" y="522552"/>
+                  </a:lnTo>
+                  <a:lnTo>
+                    <a:pt x="870720" y="556419"/>
+                  </a:lnTo>
+                  <a:lnTo>
+                    <a:pt x="941064" y="588724"/>
+                  </a:lnTo>
+                  <a:lnTo>
+                    <a:pt x="1011409" y="619540"/>
+                  </a:lnTo>
+                  <a:lnTo>
+                    <a:pt x="1081753" y="648936"/>
+                  </a:lnTo>
+                  <a:lnTo>
+                    <a:pt x="1152098" y="676976"/>
+                  </a:lnTo>
+                  <a:lnTo>
+                    <a:pt x="1222442" y="703724"/>
+                  </a:lnTo>
+                  <a:lnTo>
+                    <a:pt x="1292787" y="729239"/>
+                  </a:lnTo>
+                  <a:lnTo>
+                    <a:pt x="1363131" y="753578"/>
+                  </a:lnTo>
+                  <a:lnTo>
+                    <a:pt x="1433476" y="776794"/>
+                  </a:lnTo>
+                  <a:lnTo>
+                    <a:pt x="1503820" y="798940"/>
+                  </a:lnTo>
+                  <a:lnTo>
+                    <a:pt x="1574165" y="820066"/>
+                  </a:lnTo>
+                  <a:lnTo>
+                    <a:pt x="1644509" y="840217"/>
+                  </a:lnTo>
+                  <a:lnTo>
+                    <a:pt x="1714854" y="859440"/>
+                  </a:lnTo>
+                  <a:lnTo>
+                    <a:pt x="1785198" y="877776"/>
+                  </a:lnTo>
+                  <a:lnTo>
+                    <a:pt x="1855543" y="895268"/>
+                  </a:lnTo>
+                  <a:lnTo>
+                    <a:pt x="1925887" y="911952"/>
+                  </a:lnTo>
+                  <a:lnTo>
+                    <a:pt x="1996232" y="927868"/>
+                  </a:lnTo>
+                  <a:lnTo>
+                    <a:pt x="2066576" y="943050"/>
+                  </a:lnTo>
+                  <a:lnTo>
+                    <a:pt x="2136921" y="957532"/>
+                  </a:lnTo>
+                  <a:lnTo>
+                    <a:pt x="2207265" y="971347"/>
+                  </a:lnTo>
+                  <a:lnTo>
+                    <a:pt x="2277609" y="984524"/>
+                  </a:lnTo>
+                  <a:lnTo>
+                    <a:pt x="2347954" y="997094"/>
+                  </a:lnTo>
+                  <a:lnTo>
+                    <a:pt x="2418298" y="1009085"/>
+                  </a:lnTo>
+                  <a:lnTo>
+                    <a:pt x="2488643" y="1020523"/>
+                  </a:lnTo>
+                  <a:lnTo>
+                    <a:pt x="2558987" y="1031434"/>
+                  </a:lnTo>
+                  <a:lnTo>
+                    <a:pt x="2629332" y="1041841"/>
+                  </a:lnTo>
+                  <a:lnTo>
+                    <a:pt x="2699676" y="1051769"/>
+                  </a:lnTo>
+                  <a:lnTo>
+                    <a:pt x="2770021" y="1061240"/>
+                  </a:lnTo>
+                  <a:lnTo>
+                    <a:pt x="2840365" y="1070273"/>
+                  </a:lnTo>
+                  <a:lnTo>
+                    <a:pt x="2910710" y="1078891"/>
+                  </a:lnTo>
+                  <a:lnTo>
+                    <a:pt x="2981054" y="1087111"/>
+                  </a:lnTo>
+                  <a:lnTo>
+                    <a:pt x="3051399" y="1094952"/>
+                  </a:lnTo>
+                  <a:lnTo>
+                    <a:pt x="3121743" y="1102431"/>
+                  </a:lnTo>
+                  <a:lnTo>
+                    <a:pt x="3192088" y="1109566"/>
+                  </a:lnTo>
+                  <a:lnTo>
+                    <a:pt x="3262432" y="1116372"/>
+                  </a:lnTo>
+                  <a:lnTo>
+                    <a:pt x="3332777" y="1122864"/>
+                  </a:lnTo>
+                  <a:lnTo>
+                    <a:pt x="3403121" y="1129057"/>
+                  </a:lnTo>
+                  <a:lnTo>
+                    <a:pt x="3473466" y="1134964"/>
+                  </a:lnTo>
+                  <a:lnTo>
+                    <a:pt x="3543810" y="1140599"/>
+                  </a:lnTo>
+                  <a:lnTo>
+                    <a:pt x="3614155" y="1145974"/>
+                  </a:lnTo>
+                  <a:lnTo>
+                    <a:pt x="3684499" y="1151102"/>
+                  </a:lnTo>
+                  <a:lnTo>
+                    <a:pt x="3754844" y="1155993"/>
+                  </a:lnTo>
+                  <a:lnTo>
+                    <a:pt x="3825188" y="1160659"/>
+                  </a:lnTo>
+                  <a:lnTo>
+                    <a:pt x="3895533" y="1165109"/>
+                  </a:lnTo>
+                  <a:lnTo>
+                    <a:pt x="3965877" y="1169355"/>
+                  </a:lnTo>
+                  <a:lnTo>
+                    <a:pt x="4036222" y="1173404"/>
+                  </a:lnTo>
+                  <a:lnTo>
+                    <a:pt x="4106566" y="1177267"/>
+                  </a:lnTo>
+                  <a:lnTo>
+                    <a:pt x="4176911" y="1180952"/>
+                  </a:lnTo>
+                  <a:lnTo>
+                    <a:pt x="4247255" y="1184467"/>
+                  </a:lnTo>
+                  <a:lnTo>
+                    <a:pt x="4317600" y="1187820"/>
+                  </a:lnTo>
+                  <a:lnTo>
+                    <a:pt x="4387944" y="1191019"/>
+                  </a:lnTo>
+                  <a:lnTo>
+                    <a:pt x="4458289" y="1194070"/>
+                  </a:lnTo>
+                  <a:lnTo>
+                    <a:pt x="4528633" y="1196980"/>
+                  </a:lnTo>
+                  <a:lnTo>
+                    <a:pt x="4598978" y="1199756"/>
+                  </a:lnTo>
+                  <a:lnTo>
+                    <a:pt x="4669322" y="1202404"/>
+                  </a:lnTo>
+                  <a:lnTo>
+                    <a:pt x="4739667" y="1204930"/>
+                  </a:lnTo>
+                  <a:lnTo>
+                    <a:pt x="4810011" y="1207340"/>
+                  </a:lnTo>
+                  <a:lnTo>
+                    <a:pt x="4880356" y="1209639"/>
+                  </a:lnTo>
+                  <a:lnTo>
+                    <a:pt x="4950700" y="1211831"/>
+                  </a:lnTo>
+                  <a:lnTo>
+                    <a:pt x="5021045" y="1213923"/>
+                  </a:lnTo>
+                  <a:lnTo>
+                    <a:pt x="5091389" y="1215918"/>
+                  </a:lnTo>
+                  <a:lnTo>
+                    <a:pt x="5161734" y="1217821"/>
+                  </a:lnTo>
+                  <a:lnTo>
+                    <a:pt x="5232078" y="1219636"/>
+                  </a:lnTo>
+                  <a:lnTo>
+                    <a:pt x="5302423" y="1221368"/>
+                  </a:lnTo>
+                  <a:lnTo>
+                    <a:pt x="5372767" y="1223020"/>
+                  </a:lnTo>
+                  <a:lnTo>
+                    <a:pt x="5443112" y="1224596"/>
+                  </a:lnTo>
+                  <a:lnTo>
+                    <a:pt x="5513456" y="1226099"/>
+                  </a:lnTo>
+                  <a:lnTo>
+                    <a:pt x="5583801" y="1227533"/>
+                  </a:lnTo>
+                  <a:lnTo>
+                    <a:pt x="5654145" y="1228900"/>
+                  </a:lnTo>
+                  <a:lnTo>
+                    <a:pt x="5724490" y="1230205"/>
+                  </a:lnTo>
+                  <a:lnTo>
+                    <a:pt x="5794834" y="1231450"/>
+                  </a:lnTo>
+                  <a:lnTo>
+                    <a:pt x="5865179" y="1232637"/>
+                  </a:lnTo>
+                </a:path>
+              </a:pathLst>
+            </a:custGeom>
+            <a:ln w="27101" cap="flat">
+              <a:solidFill>
+                <a:srgbClr val="FF8C00">
+                  <a:alpha val="100000"/>
+                </a:srgbClr>
+              </a:solidFill>
+              <a:prstDash val="solid"/>
+              <a:round/>
+            </a:ln>
+          </p:spPr>
+          <p:txBody>
+            <a:bodyPr/>
+            <a:lstStyle/>
+            <a:p/>
+          </p:txBody>
+        </p:sp>
+        <p:sp>
+          <p:nvSpPr>
+            <p:cNvPr id="71" name="pl71"/>
+            <p:cNvSpPr/>
+            <p:nvPr/>
+          </p:nvSpPr>
+          <p:spPr>
+            <a:xfrm>
+              <a:off x="887106" y="5294352"/>
+              <a:ext cx="7660515" cy="0"/>
+            </a:xfrm>
+            <a:custGeom>
+              <a:avLst/>
+              <a:pathLst>
+                <a:path w="7660515" h="0">
+                  <a:moveTo>
+                    <a:pt x="0" y="0"/>
+                  </a:moveTo>
+                  <a:lnTo>
+                    <a:pt x="7660515" y="0"/>
+                  </a:lnTo>
+                  <a:lnTo>
+                    <a:pt x="7660515" y="0"/>
+                  </a:lnTo>
+                </a:path>
+              </a:pathLst>
+            </a:custGeom>
+            <a:ln w="13550" cap="flat">
+              <a:solidFill>
+                <a:srgbClr val="7F7F7F">
+                  <a:alpha val="100000"/>
+                </a:srgbClr>
+              </a:solidFill>
+              <a:prstDash val="dash"/>
+              <a:round/>
+            </a:ln>
+          </p:spPr>
+          <p:txBody>
+            <a:bodyPr/>
+            <a:lstStyle/>
+            <a:p/>
+          </p:txBody>
+        </p:sp>
+        <p:sp>
+          <p:nvSpPr>
+            <p:cNvPr id="72" name="pl72"/>
+            <p:cNvSpPr/>
+            <p:nvPr/>
+          </p:nvSpPr>
+          <p:spPr>
+            <a:xfrm>
+              <a:off x="4472829" y="4336484"/>
+              <a:ext cx="0" cy="1317069"/>
+            </a:xfrm>
+            <a:custGeom>
+              <a:avLst/>
+              <a:pathLst>
+                <a:path w="0" h="1317069">
+                  <a:moveTo>
+                    <a:pt x="0" y="1317069"/>
+                  </a:moveTo>
+                  <a:lnTo>
+                    <a:pt x="0" y="0"/>
+                  </a:lnTo>
+                  <a:lnTo>
+                    <a:pt x="0" y="0"/>
+                  </a:lnTo>
+                </a:path>
+              </a:pathLst>
+            </a:custGeom>
+            <a:ln w="13550" cap="flat">
+              <a:solidFill>
+                <a:srgbClr val="666666">
+                  <a:alpha val="100000"/>
+                </a:srgbClr>
+              </a:solidFill>
+              <a:prstDash val="dot"/>
+              <a:round/>
+            </a:ln>
+          </p:spPr>
+          <p:txBody>
+            <a:bodyPr/>
+            <a:lstStyle/>
+            <a:p/>
+          </p:txBody>
+        </p:sp>
+        <p:sp>
+          <p:nvSpPr>
+            <p:cNvPr id="73" name="tx73"/>
+            <p:cNvSpPr/>
+            <p:nvPr/>
+          </p:nvSpPr>
+          <p:spPr>
+            <a:xfrm>
+              <a:off x="762297" y="5553636"/>
+              <a:ext cx="62179" cy="80101"/>
+            </a:xfrm>
+            <a:prstGeom prst="rect">
+              <a:avLst/>
+            </a:prstGeom>
+            <a:noFill/>
+          </p:spPr>
+          <p:txBody>
+            <a:bodyPr lIns="0" rIns="0" tIns="0" bIns="0" anchorCtr="1" anchor="ctr" wrap="none"/>
+            <a:lstStyle/>
+            <a:p>
+              <a:pPr algn="l" marL="0" marR="0" indent="0">
+                <a:lnSpc>
+                  <a:spcPts val="880"/>
+                </a:lnSpc>
+                <a:spcBef>
+                  <a:spcPts val="0"/>
+                </a:spcBef>
+                <a:spcAft>
+                  <a:spcPts val="0"/>
+                </a:spcAft>
+              </a:pPr>
+              <a:r>
+                <a:rPr sz="880">
+                  <a:solidFill>
+                    <a:srgbClr val="4D4D4D">
+                      <a:alpha val="100000"/>
+                    </a:srgbClr>
+                  </a:solidFill>
+                  <a:latin typeface="Helvetica"/>
+                  <a:cs typeface="Helvetica"/>
+                </a:rPr>
+                <a:t>0</a:t>
+              </a:r>
+            </a:p>
+          </p:txBody>
+        </p:sp>
+        <p:sp>
+          <p:nvSpPr>
+            <p:cNvPr id="74" name="tx74"/>
+            <p:cNvSpPr/>
+            <p:nvPr/>
+          </p:nvSpPr>
+          <p:spPr>
+            <a:xfrm>
+              <a:off x="762297" y="5254302"/>
+              <a:ext cx="62179" cy="80101"/>
+            </a:xfrm>
+            <a:prstGeom prst="rect">
+              <a:avLst/>
+            </a:prstGeom>
+            <a:noFill/>
+          </p:spPr>
+          <p:txBody>
+            <a:bodyPr lIns="0" rIns="0" tIns="0" bIns="0" anchorCtr="1" anchor="ctr" wrap="none"/>
+            <a:lstStyle/>
+            <a:p>
+              <a:pPr algn="l" marL="0" marR="0" indent="0">
+                <a:lnSpc>
+                  <a:spcPts val="880"/>
+                </a:lnSpc>
+                <a:spcBef>
+                  <a:spcPts val="0"/>
+                </a:spcBef>
+                <a:spcAft>
+                  <a:spcPts val="0"/>
+                </a:spcAft>
+              </a:pPr>
+              <a:r>
+                <a:rPr sz="880">
+                  <a:solidFill>
+                    <a:srgbClr val="4D4D4D">
+                      <a:alpha val="100000"/>
+                    </a:srgbClr>
+                  </a:solidFill>
+                  <a:latin typeface="Helvetica"/>
+                  <a:cs typeface="Helvetica"/>
+                </a:rPr>
+                <a:t>1</a:t>
+              </a:r>
+            </a:p>
+          </p:txBody>
+        </p:sp>
+        <p:sp>
+          <p:nvSpPr>
+            <p:cNvPr id="75" name="tx75"/>
+            <p:cNvSpPr/>
+            <p:nvPr/>
+          </p:nvSpPr>
+          <p:spPr>
+            <a:xfrm>
+              <a:off x="762297" y="4954968"/>
+              <a:ext cx="62179" cy="80101"/>
+            </a:xfrm>
+            <a:prstGeom prst="rect">
+              <a:avLst/>
+            </a:prstGeom>
+            <a:noFill/>
+          </p:spPr>
+          <p:txBody>
+            <a:bodyPr lIns="0" rIns="0" tIns="0" bIns="0" anchorCtr="1" anchor="ctr" wrap="none"/>
+            <a:lstStyle/>
+            <a:p>
+              <a:pPr algn="l" marL="0" marR="0" indent="0">
+                <a:lnSpc>
+                  <a:spcPts val="880"/>
+                </a:lnSpc>
+                <a:spcBef>
+                  <a:spcPts val="0"/>
+                </a:spcBef>
+                <a:spcAft>
+                  <a:spcPts val="0"/>
+                </a:spcAft>
+              </a:pPr>
+              <a:r>
+                <a:rPr sz="880">
+                  <a:solidFill>
+                    <a:srgbClr val="4D4D4D">
+                      <a:alpha val="100000"/>
+                    </a:srgbClr>
+                  </a:solidFill>
+                  <a:latin typeface="Helvetica"/>
+                  <a:cs typeface="Helvetica"/>
+                </a:rPr>
+                <a:t>2</a:t>
+              </a:r>
+            </a:p>
+          </p:txBody>
+        </p:sp>
+        <p:sp>
+          <p:nvSpPr>
+            <p:cNvPr id="76" name="tx76"/>
+            <p:cNvSpPr/>
+            <p:nvPr/>
+          </p:nvSpPr>
+          <p:spPr>
+            <a:xfrm>
+              <a:off x="762297" y="4655634"/>
+              <a:ext cx="62179" cy="80101"/>
+            </a:xfrm>
+            <a:prstGeom prst="rect">
+              <a:avLst/>
+            </a:prstGeom>
+            <a:noFill/>
+          </p:spPr>
+          <p:txBody>
+            <a:bodyPr lIns="0" rIns="0" tIns="0" bIns="0" anchorCtr="1" anchor="ctr" wrap="none"/>
+            <a:lstStyle/>
+            <a:p>
+              <a:pPr algn="l" marL="0" marR="0" indent="0">
+                <a:lnSpc>
+                  <a:spcPts val="880"/>
+                </a:lnSpc>
+                <a:spcBef>
+                  <a:spcPts val="0"/>
+                </a:spcBef>
+                <a:spcAft>
+                  <a:spcPts val="0"/>
+                </a:spcAft>
+              </a:pPr>
+              <a:r>
+                <a:rPr sz="880">
+                  <a:solidFill>
+                    <a:srgbClr val="4D4D4D">
+                      <a:alpha val="100000"/>
+                    </a:srgbClr>
+                  </a:solidFill>
+                  <a:latin typeface="Helvetica"/>
+                  <a:cs typeface="Helvetica"/>
+                </a:rPr>
+                <a:t>3</a:t>
+              </a:r>
+            </a:p>
+          </p:txBody>
+        </p:sp>
+        <p:sp>
+          <p:nvSpPr>
+            <p:cNvPr id="77" name="tx77"/>
+            <p:cNvSpPr/>
+            <p:nvPr/>
+          </p:nvSpPr>
+          <p:spPr>
+            <a:xfrm>
+              <a:off x="762297" y="4356300"/>
+              <a:ext cx="62179" cy="80101"/>
+            </a:xfrm>
+            <a:prstGeom prst="rect">
+              <a:avLst/>
+            </a:prstGeom>
+            <a:noFill/>
+          </p:spPr>
+          <p:txBody>
+            <a:bodyPr lIns="0" rIns="0" tIns="0" bIns="0" anchorCtr="1" anchor="ctr" wrap="none"/>
+            <a:lstStyle/>
+            <a:p>
+              <a:pPr algn="l" marL="0" marR="0" indent="0">
+                <a:lnSpc>
+                  <a:spcPts val="880"/>
+                </a:lnSpc>
+                <a:spcBef>
+                  <a:spcPts val="0"/>
+                </a:spcBef>
+                <a:spcAft>
+                  <a:spcPts val="0"/>
+                </a:spcAft>
+              </a:pPr>
+              <a:r>
+                <a:rPr sz="880">
+                  <a:solidFill>
+                    <a:srgbClr val="4D4D4D">
+                      <a:alpha val="100000"/>
+                    </a:srgbClr>
+                  </a:solidFill>
+                  <a:latin typeface="Helvetica"/>
+                  <a:cs typeface="Helvetica"/>
+                </a:rPr>
+                <a:t>4</a:t>
+              </a:r>
+            </a:p>
+          </p:txBody>
+        </p:sp>
+        <p:sp>
+          <p:nvSpPr>
+            <p:cNvPr id="78" name="tx78"/>
+            <p:cNvSpPr/>
+            <p:nvPr/>
+          </p:nvSpPr>
+          <p:spPr>
+            <a:xfrm>
+              <a:off x="1306098" y="5716183"/>
+              <a:ext cx="161574" cy="80101"/>
+            </a:xfrm>
+            <a:prstGeom prst="rect">
+              <a:avLst/>
+            </a:prstGeom>
+            <a:noFill/>
+          </p:spPr>
+          <p:txBody>
+            <a:bodyPr lIns="0" rIns="0" tIns="0" bIns="0" anchorCtr="1" anchor="ctr" wrap="none"/>
+            <a:lstStyle/>
+            <a:p>
+              <a:pPr algn="l" marL="0" marR="0" indent="0">
+                <a:lnSpc>
+                  <a:spcPts val="880"/>
+                </a:lnSpc>
+                <a:spcBef>
+                  <a:spcPts val="0"/>
+                </a:spcBef>
+                <a:spcAft>
+                  <a:spcPts val="0"/>
+                </a:spcAft>
+              </a:pPr>
+              <a:r>
+                <a:rPr sz="880">
+                  <a:solidFill>
+                    <a:srgbClr val="4D4D4D">
+                      <a:alpha val="100000"/>
+                    </a:srgbClr>
+                  </a:solidFill>
+                  <a:latin typeface="Helvetica"/>
+                  <a:cs typeface="Helvetica"/>
+                </a:rPr>
+                <a:t>-40</a:t>
+              </a:r>
+            </a:p>
+          </p:txBody>
+        </p:sp>
+        <p:sp>
+          <p:nvSpPr>
+            <p:cNvPr id="79" name="tx79"/>
+            <p:cNvSpPr/>
+            <p:nvPr/>
+          </p:nvSpPr>
+          <p:spPr>
+            <a:xfrm>
+              <a:off x="2113264" y="5716183"/>
+              <a:ext cx="161574" cy="80101"/>
+            </a:xfrm>
+            <a:prstGeom prst="rect">
+              <a:avLst/>
+            </a:prstGeom>
+            <a:noFill/>
+          </p:spPr>
+          <p:txBody>
+            <a:bodyPr lIns="0" rIns="0" tIns="0" bIns="0" anchorCtr="1" anchor="ctr" wrap="none"/>
+            <a:lstStyle/>
+            <a:p>
+              <a:pPr algn="l" marL="0" marR="0" indent="0">
+                <a:lnSpc>
+                  <a:spcPts val="880"/>
+                </a:lnSpc>
+                <a:spcBef>
+                  <a:spcPts val="0"/>
+                </a:spcBef>
+                <a:spcAft>
+                  <a:spcPts val="0"/>
+                </a:spcAft>
+              </a:pPr>
+              <a:r>
+                <a:rPr sz="880">
+                  <a:solidFill>
+                    <a:srgbClr val="4D4D4D">
+                      <a:alpha val="100000"/>
+                    </a:srgbClr>
+                  </a:solidFill>
+                  <a:latin typeface="Helvetica"/>
+                  <a:cs typeface="Helvetica"/>
+                </a:rPr>
+                <a:t>-30</a:t>
+              </a:r>
+            </a:p>
+          </p:txBody>
+        </p:sp>
+        <p:sp>
+          <p:nvSpPr>
+            <p:cNvPr id="80" name="tx80"/>
+            <p:cNvSpPr/>
+            <p:nvPr/>
+          </p:nvSpPr>
+          <p:spPr>
+            <a:xfrm>
+              <a:off x="2920429" y="5716183"/>
+              <a:ext cx="161574" cy="80101"/>
+            </a:xfrm>
+            <a:prstGeom prst="rect">
+              <a:avLst/>
+            </a:prstGeom>
+            <a:noFill/>
+          </p:spPr>
+          <p:txBody>
+            <a:bodyPr lIns="0" rIns="0" tIns="0" bIns="0" anchorCtr="1" anchor="ctr" wrap="none"/>
+            <a:lstStyle/>
+            <a:p>
+              <a:pPr algn="l" marL="0" marR="0" indent="0">
+                <a:lnSpc>
+                  <a:spcPts val="880"/>
+                </a:lnSpc>
+                <a:spcBef>
+                  <a:spcPts val="0"/>
+                </a:spcBef>
+                <a:spcAft>
+                  <a:spcPts val="0"/>
+                </a:spcAft>
+              </a:pPr>
+              <a:r>
+                <a:rPr sz="880">
+                  <a:solidFill>
+                    <a:srgbClr val="4D4D4D">
+                      <a:alpha val="100000"/>
+                    </a:srgbClr>
+                  </a:solidFill>
+                  <a:latin typeface="Helvetica"/>
+                  <a:cs typeface="Helvetica"/>
+                </a:rPr>
+                <a:t>-20</a:t>
+              </a:r>
+            </a:p>
+          </p:txBody>
+        </p:sp>
+        <p:sp>
+          <p:nvSpPr>
+            <p:cNvPr id="81" name="tx81"/>
+            <p:cNvSpPr/>
+            <p:nvPr/>
+          </p:nvSpPr>
+          <p:spPr>
+            <a:xfrm>
+              <a:off x="3727595" y="5716183"/>
+              <a:ext cx="161574" cy="80101"/>
+            </a:xfrm>
+            <a:prstGeom prst="rect">
+              <a:avLst/>
+            </a:prstGeom>
+            <a:noFill/>
+          </p:spPr>
+          <p:txBody>
+            <a:bodyPr lIns="0" rIns="0" tIns="0" bIns="0" anchorCtr="1" anchor="ctr" wrap="none"/>
+            <a:lstStyle/>
+            <a:p>
+              <a:pPr algn="l" marL="0" marR="0" indent="0">
+                <a:lnSpc>
+                  <a:spcPts val="880"/>
+                </a:lnSpc>
+                <a:spcBef>
+                  <a:spcPts val="0"/>
+                </a:spcBef>
+                <a:spcAft>
+                  <a:spcPts val="0"/>
+                </a:spcAft>
+              </a:pPr>
+              <a:r>
+                <a:rPr sz="880">
+                  <a:solidFill>
+                    <a:srgbClr val="4D4D4D">
+                      <a:alpha val="100000"/>
+                    </a:srgbClr>
+                  </a:solidFill>
+                  <a:latin typeface="Helvetica"/>
+                  <a:cs typeface="Helvetica"/>
+                </a:rPr>
+                <a:t>-10</a:t>
+              </a:r>
+            </a:p>
+          </p:txBody>
+        </p:sp>
+        <p:sp>
+          <p:nvSpPr>
+            <p:cNvPr id="82" name="tx82"/>
+            <p:cNvSpPr/>
+            <p:nvPr/>
+          </p:nvSpPr>
+          <p:spPr>
+            <a:xfrm>
+              <a:off x="4584458" y="5716183"/>
+              <a:ext cx="62179" cy="80101"/>
+            </a:xfrm>
+            <a:prstGeom prst="rect">
+              <a:avLst/>
+            </a:prstGeom>
+            <a:noFill/>
+          </p:spPr>
+          <p:txBody>
+            <a:bodyPr lIns="0" rIns="0" tIns="0" bIns="0" anchorCtr="1" anchor="ctr" wrap="none"/>
+            <a:lstStyle/>
+            <a:p>
+              <a:pPr algn="l" marL="0" marR="0" indent="0">
+                <a:lnSpc>
+                  <a:spcPts val="880"/>
+                </a:lnSpc>
+                <a:spcBef>
+                  <a:spcPts val="0"/>
+                </a:spcBef>
+                <a:spcAft>
+                  <a:spcPts val="0"/>
+                </a:spcAft>
+              </a:pPr>
+              <a:r>
+                <a:rPr sz="880">
+                  <a:solidFill>
+                    <a:srgbClr val="4D4D4D">
+                      <a:alpha val="100000"/>
+                    </a:srgbClr>
+                  </a:solidFill>
+                  <a:latin typeface="Helvetica"/>
+                  <a:cs typeface="Helvetica"/>
+                </a:rPr>
+                <a:t>0</a:t>
+              </a:r>
+            </a:p>
+          </p:txBody>
+        </p:sp>
+        <p:sp>
+          <p:nvSpPr>
+            <p:cNvPr id="83" name="tx83"/>
+            <p:cNvSpPr/>
+            <p:nvPr/>
+          </p:nvSpPr>
+          <p:spPr>
+            <a:xfrm>
+              <a:off x="5360534" y="5716183"/>
+              <a:ext cx="124358" cy="80101"/>
+            </a:xfrm>
+            <a:prstGeom prst="rect">
+              <a:avLst/>
+            </a:prstGeom>
+            <a:noFill/>
+          </p:spPr>
+          <p:txBody>
+            <a:bodyPr lIns="0" rIns="0" tIns="0" bIns="0" anchorCtr="1" anchor="ctr" wrap="none"/>
+            <a:lstStyle/>
+            <a:p>
+              <a:pPr algn="l" marL="0" marR="0" indent="0">
+                <a:lnSpc>
+                  <a:spcPts val="880"/>
+                </a:lnSpc>
+                <a:spcBef>
+                  <a:spcPts val="0"/>
+                </a:spcBef>
+                <a:spcAft>
+                  <a:spcPts val="0"/>
+                </a:spcAft>
+              </a:pPr>
+              <a:r>
+                <a:rPr sz="880">
+                  <a:solidFill>
+                    <a:srgbClr val="4D4D4D">
+                      <a:alpha val="100000"/>
+                    </a:srgbClr>
+                  </a:solidFill>
+                  <a:latin typeface="Helvetica"/>
+                  <a:cs typeface="Helvetica"/>
+                </a:rPr>
+                <a:t>10</a:t>
+              </a:r>
+            </a:p>
+          </p:txBody>
+        </p:sp>
+        <p:sp>
+          <p:nvSpPr>
+            <p:cNvPr id="84" name="tx84"/>
+            <p:cNvSpPr/>
+            <p:nvPr/>
+          </p:nvSpPr>
+          <p:spPr>
+            <a:xfrm>
+              <a:off x="6167699" y="5716183"/>
+              <a:ext cx="124358" cy="80101"/>
+            </a:xfrm>
+            <a:prstGeom prst="rect">
+              <a:avLst/>
+            </a:prstGeom>
+            <a:noFill/>
+          </p:spPr>
+          <p:txBody>
+            <a:bodyPr lIns="0" rIns="0" tIns="0" bIns="0" anchorCtr="1" anchor="ctr" wrap="none"/>
+            <a:lstStyle/>
+            <a:p>
+              <a:pPr algn="l" marL="0" marR="0" indent="0">
+                <a:lnSpc>
+                  <a:spcPts val="880"/>
+                </a:lnSpc>
+                <a:spcBef>
+                  <a:spcPts val="0"/>
+                </a:spcBef>
+                <a:spcAft>
+                  <a:spcPts val="0"/>
+                </a:spcAft>
+              </a:pPr>
+              <a:r>
+                <a:rPr sz="880">
+                  <a:solidFill>
+                    <a:srgbClr val="4D4D4D">
+                      <a:alpha val="100000"/>
+                    </a:srgbClr>
+                  </a:solidFill>
+                  <a:latin typeface="Helvetica"/>
+                  <a:cs typeface="Helvetica"/>
+                </a:rPr>
+                <a:t>20</a:t>
+              </a:r>
+            </a:p>
+          </p:txBody>
+        </p:sp>
+        <p:sp>
+          <p:nvSpPr>
+            <p:cNvPr id="85" name="tx85"/>
+            <p:cNvSpPr/>
+            <p:nvPr/>
+          </p:nvSpPr>
+          <p:spPr>
+            <a:xfrm>
+              <a:off x="6974865" y="5716183"/>
+              <a:ext cx="124358" cy="80101"/>
+            </a:xfrm>
+            <a:prstGeom prst="rect">
+              <a:avLst/>
+            </a:prstGeom>
+            <a:noFill/>
+          </p:spPr>
+          <p:txBody>
+            <a:bodyPr lIns="0" rIns="0" tIns="0" bIns="0" anchorCtr="1" anchor="ctr" wrap="none"/>
+            <a:lstStyle/>
+            <a:p>
+              <a:pPr algn="l" marL="0" marR="0" indent="0">
+                <a:lnSpc>
+                  <a:spcPts val="880"/>
+                </a:lnSpc>
+                <a:spcBef>
+                  <a:spcPts val="0"/>
+                </a:spcBef>
+                <a:spcAft>
+                  <a:spcPts val="0"/>
+                </a:spcAft>
+              </a:pPr>
+              <a:r>
+                <a:rPr sz="880">
+                  <a:solidFill>
+                    <a:srgbClr val="4D4D4D">
+                      <a:alpha val="100000"/>
+                    </a:srgbClr>
+                  </a:solidFill>
+                  <a:latin typeface="Helvetica"/>
+                  <a:cs typeface="Helvetica"/>
+                </a:rPr>
+                <a:t>30</a:t>
+              </a:r>
+            </a:p>
+          </p:txBody>
+        </p:sp>
+        <p:sp>
+          <p:nvSpPr>
+            <p:cNvPr id="86" name="tx86"/>
+            <p:cNvSpPr/>
+            <p:nvPr/>
+          </p:nvSpPr>
+          <p:spPr>
+            <a:xfrm>
+              <a:off x="7782030" y="5716183"/>
+              <a:ext cx="124358" cy="80101"/>
+            </a:xfrm>
+            <a:prstGeom prst="rect">
+              <a:avLst/>
+            </a:prstGeom>
+            <a:noFill/>
+          </p:spPr>
+          <p:txBody>
+            <a:bodyPr lIns="0" rIns="0" tIns="0" bIns="0" anchorCtr="1" anchor="ctr" wrap="none"/>
+            <a:lstStyle/>
+            <a:p>
+              <a:pPr algn="l" marL="0" marR="0" indent="0">
+                <a:lnSpc>
+                  <a:spcPts val="880"/>
+                </a:lnSpc>
+                <a:spcBef>
+                  <a:spcPts val="0"/>
+                </a:spcBef>
+                <a:spcAft>
+                  <a:spcPts val="0"/>
+                </a:spcAft>
+              </a:pPr>
+              <a:r>
+                <a:rPr sz="880">
+                  <a:solidFill>
+                    <a:srgbClr val="4D4D4D">
+                      <a:alpha val="100000"/>
+                    </a:srgbClr>
+                  </a:solidFill>
+                  <a:latin typeface="Helvetica"/>
+                  <a:cs typeface="Helvetica"/>
+                </a:rPr>
+                <a:t>40</a:t>
+              </a:r>
+            </a:p>
+          </p:txBody>
+        </p:sp>
+        <p:sp>
+          <p:nvSpPr>
+            <p:cNvPr id="87" name="tx87"/>
+            <p:cNvSpPr/>
+            <p:nvPr/>
+          </p:nvSpPr>
+          <p:spPr>
+            <a:xfrm>
+              <a:off x="2928340" y="5855859"/>
+              <a:ext cx="3578047" cy="100218"/>
+            </a:xfrm>
+            <a:prstGeom prst="rect">
+              <a:avLst/>
+            </a:prstGeom>
+            <a:noFill/>
+          </p:spPr>
+          <p:txBody>
+            <a:bodyPr lIns="0" rIns="0" tIns="0" bIns="0" anchorCtr="1" anchor="ctr" wrap="none"/>
+            <a:lstStyle/>
+            <a:p>
+              <a:pPr algn="l" marL="0" marR="0" indent="0">
+                <a:lnSpc>
+                  <a:spcPts val="1100"/>
+                </a:lnSpc>
+                <a:spcBef>
+                  <a:spcPts val="0"/>
+                </a:spcBef>
+                <a:spcAft>
+                  <a:spcPts val="0"/>
+                </a:spcAft>
+              </a:pPr>
+              <a:r>
+                <a:rPr sz="1100">
+                  <a:solidFill>
+                    <a:srgbClr val="000000">
+                      <a:alpha val="100000"/>
+                    </a:srgbClr>
+                  </a:solidFill>
+                  <a:latin typeface="Helvetica"/>
+                  <a:cs typeface="Helvetica"/>
+                </a:rPr>
+                <a:t>eGFR difference (%): 100 × (CKD-EPI Cr-Cys − CG) / CG</a:t>
+              </a:r>
+            </a:p>
+          </p:txBody>
+        </p:sp>
+        <p:sp>
+          <p:nvSpPr>
+            <p:cNvPr id="88" name="tx88"/>
+            <p:cNvSpPr/>
+            <p:nvPr/>
+          </p:nvSpPr>
+          <p:spPr>
+            <a:xfrm rot="-5400000">
+              <a:off x="138035" y="4944909"/>
+              <a:ext cx="1016904" cy="100218"/>
+            </a:xfrm>
+            <a:prstGeom prst="rect">
+              <a:avLst/>
+            </a:prstGeom>
+            <a:noFill/>
+          </p:spPr>
+          <p:txBody>
+            <a:bodyPr lIns="0" rIns="0" tIns="0" bIns="0" anchorCtr="1" anchor="ctr" wrap="none"/>
+            <a:lstStyle/>
+            <a:p>
+              <a:pPr algn="l" marL="0" marR="0" indent="0">
+                <a:lnSpc>
+                  <a:spcPts val="1100"/>
+                </a:lnSpc>
+                <a:spcBef>
+                  <a:spcPts val="0"/>
+                </a:spcBef>
+                <a:spcAft>
+                  <a:spcPts val="0"/>
+                </a:spcAft>
+              </a:pPr>
+              <a:r>
+                <a:rPr sz="1100">
+                  <a:solidFill>
+                    <a:srgbClr val="000000">
+                      <a:alpha val="100000"/>
+                    </a:srgbClr>
+                  </a:solidFill>
+                  <a:latin typeface="Helvetica"/>
+                  <a:cs typeface="Helvetica"/>
+                </a:rPr>
+                <a:t>subHR (95% CI)</a:t>
+              </a:r>
+            </a:p>
+          </p:txBody>
+        </p:sp>
+        <p:sp>
+          <p:nvSpPr>
+            <p:cNvPr id="89" name="tx89"/>
+            <p:cNvSpPr/>
+            <p:nvPr/>
+          </p:nvSpPr>
+          <p:spPr>
+            <a:xfrm>
+              <a:off x="887106" y="4159544"/>
+              <a:ext cx="7052127" cy="82021"/>
+            </a:xfrm>
+            <a:prstGeom prst="rect">
+              <a:avLst/>
+            </a:prstGeom>
+            <a:noFill/>
+          </p:spPr>
+          <p:txBody>
+            <a:bodyPr lIns="0" rIns="0" tIns="0" bIns="0" anchorCtr="1" anchor="ctr" wrap="none"/>
+            <a:lstStyle/>
+            <a:p>
+              <a:pPr algn="l" marL="0" marR="0" indent="0">
+                <a:lnSpc>
+                  <a:spcPts val="900"/>
+                </a:lnSpc>
+                <a:spcBef>
+                  <a:spcPts val="0"/>
+                </a:spcBef>
+                <a:spcAft>
+                  <a:spcPts val="0"/>
+                </a:spcAft>
+              </a:pPr>
+              <a:r>
+                <a:rPr sz="900">
+                  <a:solidFill>
+                    <a:srgbClr val="404040">
+                      <a:alpha val="100000"/>
+                    </a:srgbClr>
+                  </a:solidFill>
+                  <a:latin typeface="Helvetica"/>
+                  <a:cs typeface="Helvetica"/>
+                </a:rPr>
+                <a:t>subHR per 10 % decline: 1.72 (1.37-2.16), p_Bonf = &lt;0.001 (n = 6)  |  per IQR decline (Δ = 29.5 %): 4.95 (2.53-9.70)  |  IQR: [-15.6, 13.9] %</a:t>
+              </a:r>
+            </a:p>
+          </p:txBody>
+        </p:sp>
+        <p:sp>
+          <p:nvSpPr>
+            <p:cNvPr id="90" name="tx90"/>
+            <p:cNvSpPr/>
+            <p:nvPr/>
+          </p:nvSpPr>
+          <p:spPr>
+            <a:xfrm>
+              <a:off x="887106" y="3932770"/>
               <a:ext cx="3499683" cy="120152"/>
             </a:xfrm>
             <a:prstGeom prst="rect">
